--- a/drawings.pptx
+++ b/drawings.pptx
@@ -5,14 +5,15 @@
     <p:sldMasterId id="2147483648" r:id="rId1"/>
   </p:sldMasterIdLst>
   <p:notesMasterIdLst>
-    <p:notesMasterId r:id="rId7"/>
+    <p:notesMasterId r:id="rId8"/>
   </p:notesMasterIdLst>
   <p:sldIdLst>
     <p:sldId id="256" r:id="rId2"/>
     <p:sldId id="258" r:id="rId3"/>
     <p:sldId id="259" r:id="rId4"/>
-    <p:sldId id="260" r:id="rId5"/>
-    <p:sldId id="257" r:id="rId6"/>
+    <p:sldId id="261" r:id="rId5"/>
+    <p:sldId id="260" r:id="rId6"/>
+    <p:sldId id="257" r:id="rId7"/>
   </p:sldIdLst>
   <p:sldSz cx="12192000" cy="6858000"/>
   <p:notesSz cx="6858000" cy="9144000"/>
@@ -201,7 +202,7 @@
           <a:p>
             <a:fld id="{7700C406-2328-4788-AE79-437B6607AD22}" type="datetimeFigureOut">
               <a:rPr lang="en-US" smtClean="0"/>
-              <a:t>1/15/2022</a:t>
+              <a:t>1/17/2022</a:t>
             </a:fld>
             <a:endParaRPr lang="en-US"/>
           </a:p>
@@ -699,7 +700,7 @@
           <a:p>
             <a:fld id="{9EC8CD53-0620-48F2-A3BB-2B10BDA60E52}" type="datetimeFigureOut">
               <a:rPr lang="en-US" smtClean="0"/>
-              <a:t>1/15/2022</a:t>
+              <a:t>1/17/2022</a:t>
             </a:fld>
             <a:endParaRPr lang="en-US"/>
           </a:p>
@@ -897,7 +898,7 @@
           <a:p>
             <a:fld id="{9EC8CD53-0620-48F2-A3BB-2B10BDA60E52}" type="datetimeFigureOut">
               <a:rPr lang="en-US" smtClean="0"/>
-              <a:t>1/15/2022</a:t>
+              <a:t>1/17/2022</a:t>
             </a:fld>
             <a:endParaRPr lang="en-US"/>
           </a:p>
@@ -1105,7 +1106,7 @@
           <a:p>
             <a:fld id="{9EC8CD53-0620-48F2-A3BB-2B10BDA60E52}" type="datetimeFigureOut">
               <a:rPr lang="en-US" smtClean="0"/>
-              <a:t>1/15/2022</a:t>
+              <a:t>1/17/2022</a:t>
             </a:fld>
             <a:endParaRPr lang="en-US"/>
           </a:p>
@@ -1303,7 +1304,7 @@
           <a:p>
             <a:fld id="{9EC8CD53-0620-48F2-A3BB-2B10BDA60E52}" type="datetimeFigureOut">
               <a:rPr lang="en-US" smtClean="0"/>
-              <a:t>1/15/2022</a:t>
+              <a:t>1/17/2022</a:t>
             </a:fld>
             <a:endParaRPr lang="en-US"/>
           </a:p>
@@ -1578,7 +1579,7 @@
           <a:p>
             <a:fld id="{9EC8CD53-0620-48F2-A3BB-2B10BDA60E52}" type="datetimeFigureOut">
               <a:rPr lang="en-US" smtClean="0"/>
-              <a:t>1/15/2022</a:t>
+              <a:t>1/17/2022</a:t>
             </a:fld>
             <a:endParaRPr lang="en-US"/>
           </a:p>
@@ -1843,7 +1844,7 @@
           <a:p>
             <a:fld id="{9EC8CD53-0620-48F2-A3BB-2B10BDA60E52}" type="datetimeFigureOut">
               <a:rPr lang="en-US" smtClean="0"/>
-              <a:t>1/15/2022</a:t>
+              <a:t>1/17/2022</a:t>
             </a:fld>
             <a:endParaRPr lang="en-US"/>
           </a:p>
@@ -2255,7 +2256,7 @@
           <a:p>
             <a:fld id="{9EC8CD53-0620-48F2-A3BB-2B10BDA60E52}" type="datetimeFigureOut">
               <a:rPr lang="en-US" smtClean="0"/>
-              <a:t>1/15/2022</a:t>
+              <a:t>1/17/2022</a:t>
             </a:fld>
             <a:endParaRPr lang="en-US"/>
           </a:p>
@@ -2396,7 +2397,7 @@
           <a:p>
             <a:fld id="{9EC8CD53-0620-48F2-A3BB-2B10BDA60E52}" type="datetimeFigureOut">
               <a:rPr lang="en-US" smtClean="0"/>
-              <a:t>1/15/2022</a:t>
+              <a:t>1/17/2022</a:t>
             </a:fld>
             <a:endParaRPr lang="en-US"/>
           </a:p>
@@ -2509,7 +2510,7 @@
           <a:p>
             <a:fld id="{9EC8CD53-0620-48F2-A3BB-2B10BDA60E52}" type="datetimeFigureOut">
               <a:rPr lang="en-US" smtClean="0"/>
-              <a:t>1/15/2022</a:t>
+              <a:t>1/17/2022</a:t>
             </a:fld>
             <a:endParaRPr lang="en-US"/>
           </a:p>
@@ -2820,7 +2821,7 @@
           <a:p>
             <a:fld id="{9EC8CD53-0620-48F2-A3BB-2B10BDA60E52}" type="datetimeFigureOut">
               <a:rPr lang="en-US" smtClean="0"/>
-              <a:t>1/15/2022</a:t>
+              <a:t>1/17/2022</a:t>
             </a:fld>
             <a:endParaRPr lang="en-US"/>
           </a:p>
@@ -3108,7 +3109,7 @@
           <a:p>
             <a:fld id="{9EC8CD53-0620-48F2-A3BB-2B10BDA60E52}" type="datetimeFigureOut">
               <a:rPr lang="en-US" smtClean="0"/>
-              <a:t>1/15/2022</a:t>
+              <a:t>1/17/2022</a:t>
             </a:fld>
             <a:endParaRPr lang="en-US"/>
           </a:p>
@@ -3349,7 +3350,7 @@
           <a:p>
             <a:fld id="{9EC8CD53-0620-48F2-A3BB-2B10BDA60E52}" type="datetimeFigureOut">
               <a:rPr lang="en-US" smtClean="0"/>
-              <a:t>1/15/2022</a:t>
+              <a:t>1/17/2022</a:t>
             </a:fld>
             <a:endParaRPr lang="en-US"/>
           </a:p>
@@ -25314,6 +25315,4896 @@
           <a:chExt cx="0" cy="0"/>
         </a:xfrm>
       </p:grpSpPr>
+      <p:sp>
+        <p:nvSpPr>
+          <p:cNvPr id="4" name="TextBox 3">
+            <a:extLst>
+              <a:ext uri="{FF2B5EF4-FFF2-40B4-BE49-F238E27FC236}">
+                <a16:creationId xmlns:a16="http://schemas.microsoft.com/office/drawing/2014/main" id="{84AFFDFD-B81A-4A64-BF7E-F77A9915329A}"/>
+              </a:ext>
+            </a:extLst>
+          </p:cNvPr>
+          <p:cNvSpPr txBox="1"/>
+          <p:nvPr/>
+        </p:nvSpPr>
+        <p:spPr>
+          <a:xfrm>
+            <a:off x="188462" y="114301"/>
+            <a:ext cx="1245149" cy="369332"/>
+          </a:xfrm>
+          <a:prstGeom prst="rect">
+            <a:avLst/>
+          </a:prstGeom>
+          <a:noFill/>
+        </p:spPr>
+        <p:txBody>
+          <a:bodyPr wrap="none" rtlCol="0">
+            <a:spAutoFit/>
+          </a:bodyPr>
+          <a:lstStyle/>
+          <a:p>
+            <a:r>
+              <a:rPr lang="en-US" altLang="zh-CN" dirty="0" err="1"/>
+              <a:t>Polluteland</a:t>
+            </a:r>
+            <a:endParaRPr lang="en-US" dirty="0"/>
+          </a:p>
+        </p:txBody>
+      </p:sp>
+      <p:grpSp>
+        <p:nvGrpSpPr>
+          <p:cNvPr id="12" name="Group 11">
+            <a:extLst>
+              <a:ext uri="{FF2B5EF4-FFF2-40B4-BE49-F238E27FC236}">
+                <a16:creationId xmlns:a16="http://schemas.microsoft.com/office/drawing/2014/main" id="{8888C757-5097-43B5-8B5A-2A2EBC0ABA34}"/>
+              </a:ext>
+            </a:extLst>
+          </p:cNvPr>
+          <p:cNvGrpSpPr/>
+          <p:nvPr/>
+        </p:nvGrpSpPr>
+        <p:grpSpPr>
+          <a:xfrm>
+            <a:off x="475862" y="905612"/>
+            <a:ext cx="1530220" cy="1504560"/>
+            <a:chOff x="475862" y="905612"/>
+            <a:chExt cx="1530220" cy="1504560"/>
+          </a:xfrm>
+        </p:grpSpPr>
+        <p:sp>
+          <p:nvSpPr>
+            <p:cNvPr id="7" name="Rectangle 6">
+              <a:extLst>
+                <a:ext uri="{FF2B5EF4-FFF2-40B4-BE49-F238E27FC236}">
+                  <a16:creationId xmlns:a16="http://schemas.microsoft.com/office/drawing/2014/main" id="{94BD17C1-BB47-4FBB-BC88-30DCDE0EE363}"/>
+                </a:ext>
+              </a:extLst>
+            </p:cNvPr>
+            <p:cNvSpPr/>
+            <p:nvPr/>
+          </p:nvSpPr>
+          <p:spPr>
+            <a:xfrm>
+              <a:off x="475862" y="905612"/>
+              <a:ext cx="1530220" cy="1504560"/>
+            </a:xfrm>
+            <a:prstGeom prst="rect">
+              <a:avLst/>
+            </a:prstGeom>
+            <a:noFill/>
+            <a:ln w="76200">
+              <a:solidFill>
+                <a:schemeClr val="tx1"/>
+              </a:solidFill>
+            </a:ln>
+          </p:spPr>
+          <p:style>
+            <a:lnRef idx="2">
+              <a:schemeClr val="accent1">
+                <a:shade val="50000"/>
+              </a:schemeClr>
+            </a:lnRef>
+            <a:fillRef idx="1">
+              <a:schemeClr val="accent1"/>
+            </a:fillRef>
+            <a:effectRef idx="0">
+              <a:schemeClr val="accent1"/>
+            </a:effectRef>
+            <a:fontRef idx="minor">
+              <a:schemeClr val="lt1"/>
+            </a:fontRef>
+          </p:style>
+          <p:txBody>
+            <a:bodyPr rtlCol="0" anchor="ctr"/>
+            <a:lstStyle/>
+            <a:p>
+              <a:pPr algn="ctr"/>
+              <a:endParaRPr lang="en-US"/>
+            </a:p>
+          </p:txBody>
+        </p:sp>
+        <p:sp>
+          <p:nvSpPr>
+            <p:cNvPr id="8" name="Flowchart: Display 7">
+              <a:extLst>
+                <a:ext uri="{FF2B5EF4-FFF2-40B4-BE49-F238E27FC236}">
+                  <a16:creationId xmlns:a16="http://schemas.microsoft.com/office/drawing/2014/main" id="{0D65B3AF-33D7-4D31-8B9F-C5718CCEC354}"/>
+                </a:ext>
+              </a:extLst>
+            </p:cNvPr>
+            <p:cNvSpPr/>
+            <p:nvPr/>
+          </p:nvSpPr>
+          <p:spPr>
+            <a:xfrm rot="5400000">
+              <a:off x="633902" y="1214921"/>
+              <a:ext cx="1214139" cy="1106027"/>
+            </a:xfrm>
+            <a:prstGeom prst="flowChartDisplay">
+              <a:avLst/>
+            </a:prstGeom>
+            <a:noFill/>
+            <a:ln w="38100" cap="flat" cmpd="sng" algn="ctr">
+              <a:solidFill>
+                <a:schemeClr val="dk1"/>
+              </a:solidFill>
+              <a:prstDash val="solid"/>
+              <a:round/>
+              <a:headEnd type="none" w="med" len="med"/>
+              <a:tailEnd type="none" w="med" len="med"/>
+            </a:ln>
+          </p:spPr>
+          <p:style>
+            <a:lnRef idx="0">
+              <a:scrgbClr r="0" g="0" b="0"/>
+            </a:lnRef>
+            <a:fillRef idx="0">
+              <a:scrgbClr r="0" g="0" b="0"/>
+            </a:fillRef>
+            <a:effectRef idx="0">
+              <a:scrgbClr r="0" g="0" b="0"/>
+            </a:effectRef>
+            <a:fontRef idx="minor">
+              <a:schemeClr val="dk1"/>
+            </a:fontRef>
+          </p:style>
+          <p:txBody>
+            <a:bodyPr rtlCol="0" anchor="ctr"/>
+            <a:lstStyle/>
+            <a:p>
+              <a:pPr algn="ctr"/>
+              <a:endParaRPr lang="en-US"/>
+            </a:p>
+          </p:txBody>
+        </p:sp>
+      </p:grpSp>
+      <p:grpSp>
+        <p:nvGrpSpPr>
+          <p:cNvPr id="49" name="Group 48">
+            <a:extLst>
+              <a:ext uri="{FF2B5EF4-FFF2-40B4-BE49-F238E27FC236}">
+                <a16:creationId xmlns:a16="http://schemas.microsoft.com/office/drawing/2014/main" id="{7C94837D-A746-485A-A305-E0205E9925CD}"/>
+              </a:ext>
+            </a:extLst>
+          </p:cNvPr>
+          <p:cNvGrpSpPr/>
+          <p:nvPr/>
+        </p:nvGrpSpPr>
+        <p:grpSpPr>
+          <a:xfrm>
+            <a:off x="2369139" y="905612"/>
+            <a:ext cx="1530220" cy="1504560"/>
+            <a:chOff x="2369139" y="905612"/>
+            <a:chExt cx="1530220" cy="1504560"/>
+          </a:xfrm>
+        </p:grpSpPr>
+        <p:grpSp>
+          <p:nvGrpSpPr>
+            <p:cNvPr id="46" name="Group 45">
+              <a:extLst>
+                <a:ext uri="{FF2B5EF4-FFF2-40B4-BE49-F238E27FC236}">
+                  <a16:creationId xmlns:a16="http://schemas.microsoft.com/office/drawing/2014/main" id="{ED6CF01E-7BD5-4188-B8CF-63BCFC48AF8C}"/>
+                </a:ext>
+              </a:extLst>
+            </p:cNvPr>
+            <p:cNvGrpSpPr/>
+            <p:nvPr/>
+          </p:nvGrpSpPr>
+          <p:grpSpPr>
+            <a:xfrm>
+              <a:off x="2720167" y="1289600"/>
+              <a:ext cx="828162" cy="956668"/>
+              <a:chOff x="1353377" y="2714855"/>
+              <a:chExt cx="719018" cy="877203"/>
+            </a:xfrm>
+          </p:grpSpPr>
+          <p:pic>
+            <p:nvPicPr>
+              <p:cNvPr id="47" name="Picture 46" descr="Machete Silhouette Stock Illustrations – 384 Machete Silhouette Stock  Illustrations, Vectors &amp;amp; Clipart - Dreamstime">
+                <a:extLst>
+                  <a:ext uri="{FF2B5EF4-FFF2-40B4-BE49-F238E27FC236}">
+                    <a16:creationId xmlns:a16="http://schemas.microsoft.com/office/drawing/2014/main" id="{BD9946D5-5445-4DB2-9A66-FBD59921E2EB}"/>
+                  </a:ext>
+                </a:extLst>
+              </p:cNvPr>
+              <p:cNvPicPr>
+                <a:picLocks noChangeAspect="1" noChangeArrowheads="1"/>
+              </p:cNvPicPr>
+              <p:nvPr/>
+            </p:nvPicPr>
+            <p:blipFill rotWithShape="1">
+              <a:blip r:embed="rId2">
+                <a:extLst>
+                  <a:ext uri="{28A0092B-C50C-407E-A947-70E740481C1C}">
+                    <a14:useLocalDpi xmlns:a14="http://schemas.microsoft.com/office/drawing/2010/main" val="0"/>
+                  </a:ext>
+                </a:extLst>
+              </a:blip>
+              <a:srcRect l="20477" t="6978" r="21310" b="6197"/>
+              <a:stretch/>
+            </p:blipFill>
+            <p:spPr bwMode="auto">
+              <a:xfrm rot="20477473">
+                <a:off x="1353377" y="2714855"/>
+                <a:ext cx="376503" cy="857049"/>
+              </a:xfrm>
+              <a:prstGeom prst="rect">
+                <a:avLst/>
+              </a:prstGeom>
+              <a:noFill/>
+              <a:extLst>
+                <a:ext uri="{909E8E84-426E-40DD-AFC4-6F175D3DCCD1}">
+                  <a14:hiddenFill xmlns:a14="http://schemas.microsoft.com/office/drawing/2010/main">
+                    <a:solidFill>
+                      <a:srgbClr val="FFFFFF"/>
+                    </a:solidFill>
+                  </a14:hiddenFill>
+                </a:ext>
+              </a:extLst>
+            </p:spPr>
+          </p:pic>
+          <p:pic>
+            <p:nvPicPr>
+              <p:cNvPr id="48" name="Picture 47">
+                <a:extLst>
+                  <a:ext uri="{FF2B5EF4-FFF2-40B4-BE49-F238E27FC236}">
+                    <a16:creationId xmlns:a16="http://schemas.microsoft.com/office/drawing/2014/main" id="{DE8918B9-B98C-4F60-A681-2D6F8F4711BC}"/>
+                  </a:ext>
+                </a:extLst>
+              </p:cNvPr>
+              <p:cNvPicPr>
+                <a:picLocks noChangeAspect="1"/>
+              </p:cNvPicPr>
+              <p:nvPr/>
+            </p:nvPicPr>
+            <p:blipFill>
+              <a:blip r:embed="rId3"/>
+              <a:stretch>
+                <a:fillRect/>
+              </a:stretch>
+            </p:blipFill>
+            <p:spPr>
+              <a:xfrm>
+                <a:off x="1631260" y="3007967"/>
+                <a:ext cx="441135" cy="584091"/>
+              </a:xfrm>
+              <a:prstGeom prst="rect">
+                <a:avLst/>
+              </a:prstGeom>
+            </p:spPr>
+          </p:pic>
+        </p:grpSp>
+        <p:grpSp>
+          <p:nvGrpSpPr>
+            <p:cNvPr id="13" name="Group 12">
+              <a:extLst>
+                <a:ext uri="{FF2B5EF4-FFF2-40B4-BE49-F238E27FC236}">
+                  <a16:creationId xmlns:a16="http://schemas.microsoft.com/office/drawing/2014/main" id="{8F9F9CD0-878D-4D77-BFF8-05EC6736E319}"/>
+                </a:ext>
+              </a:extLst>
+            </p:cNvPr>
+            <p:cNvGrpSpPr/>
+            <p:nvPr/>
+          </p:nvGrpSpPr>
+          <p:grpSpPr>
+            <a:xfrm>
+              <a:off x="2369139" y="905612"/>
+              <a:ext cx="1530220" cy="1504560"/>
+              <a:chOff x="475862" y="905612"/>
+              <a:chExt cx="1530220" cy="1504560"/>
+            </a:xfrm>
+          </p:grpSpPr>
+          <p:sp>
+            <p:nvSpPr>
+              <p:cNvPr id="14" name="Rectangle 13">
+                <a:extLst>
+                  <a:ext uri="{FF2B5EF4-FFF2-40B4-BE49-F238E27FC236}">
+                    <a16:creationId xmlns:a16="http://schemas.microsoft.com/office/drawing/2014/main" id="{47C49BFD-973A-4A74-A429-F898814E6175}"/>
+                  </a:ext>
+                </a:extLst>
+              </p:cNvPr>
+              <p:cNvSpPr/>
+              <p:nvPr/>
+            </p:nvSpPr>
+            <p:spPr>
+              <a:xfrm>
+                <a:off x="475862" y="905612"/>
+                <a:ext cx="1530220" cy="1504560"/>
+              </a:xfrm>
+              <a:prstGeom prst="rect">
+                <a:avLst/>
+              </a:prstGeom>
+              <a:noFill/>
+              <a:ln w="76200">
+                <a:solidFill>
+                  <a:schemeClr val="tx1"/>
+                </a:solidFill>
+              </a:ln>
+            </p:spPr>
+            <p:style>
+              <a:lnRef idx="2">
+                <a:schemeClr val="accent1">
+                  <a:shade val="50000"/>
+                </a:schemeClr>
+              </a:lnRef>
+              <a:fillRef idx="1">
+                <a:schemeClr val="accent1"/>
+              </a:fillRef>
+              <a:effectRef idx="0">
+                <a:schemeClr val="accent1"/>
+              </a:effectRef>
+              <a:fontRef idx="minor">
+                <a:schemeClr val="lt1"/>
+              </a:fontRef>
+            </p:style>
+            <p:txBody>
+              <a:bodyPr rtlCol="0" anchor="ctr"/>
+              <a:lstStyle/>
+              <a:p>
+                <a:pPr algn="ctr"/>
+                <a:endParaRPr lang="en-US"/>
+              </a:p>
+            </p:txBody>
+          </p:sp>
+          <p:sp>
+            <p:nvSpPr>
+              <p:cNvPr id="15" name="Flowchart: Display 14">
+                <a:extLst>
+                  <a:ext uri="{FF2B5EF4-FFF2-40B4-BE49-F238E27FC236}">
+                    <a16:creationId xmlns:a16="http://schemas.microsoft.com/office/drawing/2014/main" id="{C5422270-B3D2-4F69-B610-983DC289CA28}"/>
+                  </a:ext>
+                </a:extLst>
+              </p:cNvPr>
+              <p:cNvSpPr/>
+              <p:nvPr/>
+            </p:nvSpPr>
+            <p:spPr>
+              <a:xfrm rot="5400000">
+                <a:off x="633902" y="1214921"/>
+                <a:ext cx="1214139" cy="1106027"/>
+              </a:xfrm>
+              <a:prstGeom prst="flowChartDisplay">
+                <a:avLst/>
+              </a:prstGeom>
+              <a:noFill/>
+              <a:ln w="38100" cap="flat" cmpd="sng" algn="ctr">
+                <a:solidFill>
+                  <a:schemeClr val="dk1"/>
+                </a:solidFill>
+                <a:prstDash val="solid"/>
+                <a:round/>
+                <a:headEnd type="none" w="med" len="med"/>
+                <a:tailEnd type="none" w="med" len="med"/>
+              </a:ln>
+            </p:spPr>
+            <p:style>
+              <a:lnRef idx="0">
+                <a:scrgbClr r="0" g="0" b="0"/>
+              </a:lnRef>
+              <a:fillRef idx="0">
+                <a:scrgbClr r="0" g="0" b="0"/>
+              </a:fillRef>
+              <a:effectRef idx="0">
+                <a:scrgbClr r="0" g="0" b="0"/>
+              </a:effectRef>
+              <a:fontRef idx="minor">
+                <a:schemeClr val="dk1"/>
+              </a:fontRef>
+            </p:style>
+            <p:txBody>
+              <a:bodyPr rtlCol="0" anchor="ctr"/>
+              <a:lstStyle/>
+              <a:p>
+                <a:pPr algn="ctr"/>
+                <a:endParaRPr lang="en-US"/>
+              </a:p>
+            </p:txBody>
+          </p:sp>
+        </p:grpSp>
+      </p:grpSp>
+      <p:grpSp>
+        <p:nvGrpSpPr>
+          <p:cNvPr id="91" name="Group 90">
+            <a:extLst>
+              <a:ext uri="{FF2B5EF4-FFF2-40B4-BE49-F238E27FC236}">
+                <a16:creationId xmlns:a16="http://schemas.microsoft.com/office/drawing/2014/main" id="{C5733DAB-D636-416B-BABC-BFAB09724249}"/>
+              </a:ext>
+            </a:extLst>
+          </p:cNvPr>
+          <p:cNvGrpSpPr/>
+          <p:nvPr/>
+        </p:nvGrpSpPr>
+        <p:grpSpPr>
+          <a:xfrm>
+            <a:off x="9942247" y="905612"/>
+            <a:ext cx="1530220" cy="1504560"/>
+            <a:chOff x="9942247" y="905612"/>
+            <a:chExt cx="1530220" cy="1504560"/>
+          </a:xfrm>
+        </p:grpSpPr>
+        <p:grpSp>
+          <p:nvGrpSpPr>
+            <p:cNvPr id="86" name="Group 85">
+              <a:extLst>
+                <a:ext uri="{FF2B5EF4-FFF2-40B4-BE49-F238E27FC236}">
+                  <a16:creationId xmlns:a16="http://schemas.microsoft.com/office/drawing/2014/main" id="{1B3CDB11-77DD-4F62-91B1-D1F6BFE959E6}"/>
+                </a:ext>
+              </a:extLst>
+            </p:cNvPr>
+            <p:cNvGrpSpPr/>
+            <p:nvPr/>
+          </p:nvGrpSpPr>
+          <p:grpSpPr>
+            <a:xfrm>
+              <a:off x="10201412" y="1430802"/>
+              <a:ext cx="1011888" cy="701352"/>
+              <a:chOff x="2649677" y="2639366"/>
+              <a:chExt cx="1576764" cy="778626"/>
+            </a:xfrm>
+          </p:grpSpPr>
+          <p:pic>
+            <p:nvPicPr>
+              <p:cNvPr id="87" name="Picture 6" descr="Musket silhouette flintlock old pistol symbol Vector Image">
+                <a:extLst>
+                  <a:ext uri="{FF2B5EF4-FFF2-40B4-BE49-F238E27FC236}">
+                    <a16:creationId xmlns:a16="http://schemas.microsoft.com/office/drawing/2014/main" id="{F7F5F780-A932-4DFE-8353-00ACCE6893BA}"/>
+                  </a:ext>
+                </a:extLst>
+              </p:cNvPr>
+              <p:cNvPicPr>
+                <a:picLocks noChangeAspect="1" noChangeArrowheads="1"/>
+              </p:cNvPicPr>
+              <p:nvPr/>
+            </p:nvPicPr>
+            <p:blipFill rotWithShape="1">
+              <a:blip r:embed="rId4">
+                <a:extLst>
+                  <a:ext uri="{28A0092B-C50C-407E-A947-70E740481C1C}">
+                    <a14:useLocalDpi xmlns:a14="http://schemas.microsoft.com/office/drawing/2010/main" val="0"/>
+                  </a:ext>
+                </a:extLst>
+              </a:blip>
+              <a:srcRect l="8963" t="30698" r="9130" b="37600"/>
+              <a:stretch/>
+            </p:blipFill>
+            <p:spPr bwMode="auto">
+              <a:xfrm rot="19739162">
+                <a:off x="2649677" y="2639366"/>
+                <a:ext cx="1289455" cy="389313"/>
+              </a:xfrm>
+              <a:prstGeom prst="rect">
+                <a:avLst/>
+              </a:prstGeom>
+              <a:noFill/>
+              <a:extLst>
+                <a:ext uri="{909E8E84-426E-40DD-AFC4-6F175D3DCCD1}">
+                  <a14:hiddenFill xmlns:a14="http://schemas.microsoft.com/office/drawing/2010/main">
+                    <a:solidFill>
+                      <a:srgbClr val="FFFFFF"/>
+                    </a:solidFill>
+                  </a14:hiddenFill>
+                </a:ext>
+              </a:extLst>
+            </p:spPr>
+          </p:pic>
+          <p:pic>
+            <p:nvPicPr>
+              <p:cNvPr id="88" name="Picture 6" descr="Musket silhouette flintlock old pistol symbol Vector Image">
+                <a:extLst>
+                  <a:ext uri="{FF2B5EF4-FFF2-40B4-BE49-F238E27FC236}">
+                    <a16:creationId xmlns:a16="http://schemas.microsoft.com/office/drawing/2014/main" id="{F9108242-84A9-4C90-9761-7C83B3827D46}"/>
+                  </a:ext>
+                </a:extLst>
+              </p:cNvPr>
+              <p:cNvPicPr>
+                <a:picLocks noChangeAspect="1" noChangeArrowheads="1"/>
+              </p:cNvPicPr>
+              <p:nvPr/>
+            </p:nvPicPr>
+            <p:blipFill rotWithShape="1">
+              <a:blip r:embed="rId4">
+                <a:extLst>
+                  <a:ext uri="{28A0092B-C50C-407E-A947-70E740481C1C}">
+                    <a14:useLocalDpi xmlns:a14="http://schemas.microsoft.com/office/drawing/2010/main" val="0"/>
+                  </a:ext>
+                </a:extLst>
+              </a:blip>
+              <a:srcRect l="8963" t="30698" r="9130" b="37600"/>
+              <a:stretch/>
+            </p:blipFill>
+            <p:spPr bwMode="auto">
+              <a:xfrm rot="19739162">
+                <a:off x="2936986" y="3028679"/>
+                <a:ext cx="1289455" cy="389313"/>
+              </a:xfrm>
+              <a:prstGeom prst="rect">
+                <a:avLst/>
+              </a:prstGeom>
+              <a:noFill/>
+              <a:extLst>
+                <a:ext uri="{909E8E84-426E-40DD-AFC4-6F175D3DCCD1}">
+                  <a14:hiddenFill xmlns:a14="http://schemas.microsoft.com/office/drawing/2010/main">
+                    <a:solidFill>
+                      <a:srgbClr val="FFFFFF"/>
+                    </a:solidFill>
+                  </a14:hiddenFill>
+                </a:ext>
+              </a:extLst>
+            </p:spPr>
+          </p:pic>
+        </p:grpSp>
+        <p:grpSp>
+          <p:nvGrpSpPr>
+            <p:cNvPr id="25" name="Group 24">
+              <a:extLst>
+                <a:ext uri="{FF2B5EF4-FFF2-40B4-BE49-F238E27FC236}">
+                  <a16:creationId xmlns:a16="http://schemas.microsoft.com/office/drawing/2014/main" id="{7D212C9C-F784-4089-BB82-979B57E10A7C}"/>
+                </a:ext>
+              </a:extLst>
+            </p:cNvPr>
+            <p:cNvGrpSpPr/>
+            <p:nvPr/>
+          </p:nvGrpSpPr>
+          <p:grpSpPr>
+            <a:xfrm>
+              <a:off x="9942247" y="905612"/>
+              <a:ext cx="1530220" cy="1504560"/>
+              <a:chOff x="475862" y="905612"/>
+              <a:chExt cx="1530220" cy="1504560"/>
+            </a:xfrm>
+          </p:grpSpPr>
+          <p:sp>
+            <p:nvSpPr>
+              <p:cNvPr id="26" name="Rectangle 25">
+                <a:extLst>
+                  <a:ext uri="{FF2B5EF4-FFF2-40B4-BE49-F238E27FC236}">
+                    <a16:creationId xmlns:a16="http://schemas.microsoft.com/office/drawing/2014/main" id="{FEA95F49-067F-4AF5-8D48-F09A62AF8610}"/>
+                  </a:ext>
+                </a:extLst>
+              </p:cNvPr>
+              <p:cNvSpPr/>
+              <p:nvPr/>
+            </p:nvSpPr>
+            <p:spPr>
+              <a:xfrm>
+                <a:off x="475862" y="905612"/>
+                <a:ext cx="1530220" cy="1504560"/>
+              </a:xfrm>
+              <a:prstGeom prst="rect">
+                <a:avLst/>
+              </a:prstGeom>
+              <a:noFill/>
+              <a:ln w="76200">
+                <a:solidFill>
+                  <a:schemeClr val="tx1"/>
+                </a:solidFill>
+              </a:ln>
+            </p:spPr>
+            <p:style>
+              <a:lnRef idx="2">
+                <a:schemeClr val="accent1">
+                  <a:shade val="50000"/>
+                </a:schemeClr>
+              </a:lnRef>
+              <a:fillRef idx="1">
+                <a:schemeClr val="accent1"/>
+              </a:fillRef>
+              <a:effectRef idx="0">
+                <a:schemeClr val="accent1"/>
+              </a:effectRef>
+              <a:fontRef idx="minor">
+                <a:schemeClr val="lt1"/>
+              </a:fontRef>
+            </p:style>
+            <p:txBody>
+              <a:bodyPr rtlCol="0" anchor="ctr"/>
+              <a:lstStyle/>
+              <a:p>
+                <a:pPr algn="ctr"/>
+                <a:endParaRPr lang="en-US"/>
+              </a:p>
+            </p:txBody>
+          </p:sp>
+          <p:sp>
+            <p:nvSpPr>
+              <p:cNvPr id="27" name="Flowchart: Display 26">
+                <a:extLst>
+                  <a:ext uri="{FF2B5EF4-FFF2-40B4-BE49-F238E27FC236}">
+                    <a16:creationId xmlns:a16="http://schemas.microsoft.com/office/drawing/2014/main" id="{B6810463-59F9-4F67-9936-AA95DF538F99}"/>
+                  </a:ext>
+                </a:extLst>
+              </p:cNvPr>
+              <p:cNvSpPr/>
+              <p:nvPr/>
+            </p:nvSpPr>
+            <p:spPr>
+              <a:xfrm rot="5400000">
+                <a:off x="633902" y="1214921"/>
+                <a:ext cx="1214139" cy="1106027"/>
+              </a:xfrm>
+              <a:prstGeom prst="flowChartDisplay">
+                <a:avLst/>
+              </a:prstGeom>
+              <a:noFill/>
+              <a:ln w="38100" cap="flat" cmpd="sng" algn="ctr">
+                <a:solidFill>
+                  <a:schemeClr val="dk1"/>
+                </a:solidFill>
+                <a:prstDash val="solid"/>
+                <a:round/>
+                <a:headEnd type="none" w="med" len="med"/>
+                <a:tailEnd type="none" w="med" len="med"/>
+              </a:ln>
+            </p:spPr>
+            <p:style>
+              <a:lnRef idx="0">
+                <a:scrgbClr r="0" g="0" b="0"/>
+              </a:lnRef>
+              <a:fillRef idx="0">
+                <a:scrgbClr r="0" g="0" b="0"/>
+              </a:fillRef>
+              <a:effectRef idx="0">
+                <a:scrgbClr r="0" g="0" b="0"/>
+              </a:effectRef>
+              <a:fontRef idx="minor">
+                <a:schemeClr val="dk1"/>
+              </a:fontRef>
+            </p:style>
+            <p:txBody>
+              <a:bodyPr rtlCol="0" anchor="ctr"/>
+              <a:lstStyle/>
+              <a:p>
+                <a:pPr algn="ctr"/>
+                <a:endParaRPr lang="en-US"/>
+              </a:p>
+            </p:txBody>
+          </p:sp>
+        </p:grpSp>
+      </p:grpSp>
+      <p:grpSp>
+        <p:nvGrpSpPr>
+          <p:cNvPr id="99" name="Group 98">
+            <a:extLst>
+              <a:ext uri="{FF2B5EF4-FFF2-40B4-BE49-F238E27FC236}">
+                <a16:creationId xmlns:a16="http://schemas.microsoft.com/office/drawing/2014/main" id="{CACC5072-67D9-4D15-9274-7D2B955F8E9B}"/>
+              </a:ext>
+            </a:extLst>
+          </p:cNvPr>
+          <p:cNvGrpSpPr/>
+          <p:nvPr/>
+        </p:nvGrpSpPr>
+        <p:grpSpPr>
+          <a:xfrm>
+            <a:off x="475862" y="2832151"/>
+            <a:ext cx="1530220" cy="1504560"/>
+            <a:chOff x="475862" y="2832151"/>
+            <a:chExt cx="1530220" cy="1504560"/>
+          </a:xfrm>
+        </p:grpSpPr>
+        <p:grpSp>
+          <p:nvGrpSpPr>
+            <p:cNvPr id="92" name="Group 91">
+              <a:extLst>
+                <a:ext uri="{FF2B5EF4-FFF2-40B4-BE49-F238E27FC236}">
+                  <a16:creationId xmlns:a16="http://schemas.microsoft.com/office/drawing/2014/main" id="{5589D2BB-5268-4950-8991-6747057DFFB9}"/>
+                </a:ext>
+              </a:extLst>
+            </p:cNvPr>
+            <p:cNvGrpSpPr/>
+            <p:nvPr/>
+          </p:nvGrpSpPr>
+          <p:grpSpPr>
+            <a:xfrm rot="1828857">
+              <a:off x="762197" y="3275675"/>
+              <a:ext cx="957549" cy="789974"/>
+              <a:chOff x="2196207" y="2863637"/>
+              <a:chExt cx="2757986" cy="2275327"/>
+            </a:xfrm>
+          </p:grpSpPr>
+          <p:pic>
+            <p:nvPicPr>
+              <p:cNvPr id="93" name="Picture 8" descr="Line icon for gatling 3237222 Vector Art at Vecteezy">
+                <a:extLst>
+                  <a:ext uri="{FF2B5EF4-FFF2-40B4-BE49-F238E27FC236}">
+                    <a16:creationId xmlns:a16="http://schemas.microsoft.com/office/drawing/2014/main" id="{F5CBC43B-6A9A-4C78-92CF-035330248E20}"/>
+                  </a:ext>
+                </a:extLst>
+              </p:cNvPr>
+              <p:cNvPicPr>
+                <a:picLocks noChangeAspect="1" noChangeArrowheads="1"/>
+              </p:cNvPicPr>
+              <p:nvPr/>
+            </p:nvPicPr>
+            <p:blipFill>
+              <a:blip r:embed="rId5">
+                <a:extLst>
+                  <a:ext uri="{28A0092B-C50C-407E-A947-70E740481C1C}">
+                    <a14:useLocalDpi xmlns:a14="http://schemas.microsoft.com/office/drawing/2010/main" val="0"/>
+                  </a:ext>
+                </a:extLst>
+              </a:blip>
+              <a:srcRect/>
+              <a:stretch>
+                <a:fillRect/>
+              </a:stretch>
+            </p:blipFill>
+            <p:spPr bwMode="auto">
+              <a:xfrm>
+                <a:off x="2196207" y="2925471"/>
+                <a:ext cx="2623399" cy="2213493"/>
+              </a:xfrm>
+              <a:prstGeom prst="rect">
+                <a:avLst/>
+              </a:prstGeom>
+              <a:noFill/>
+              <a:extLst>
+                <a:ext uri="{909E8E84-426E-40DD-AFC4-6F175D3DCCD1}">
+                  <a14:hiddenFill xmlns:a14="http://schemas.microsoft.com/office/drawing/2010/main">
+                    <a:solidFill>
+                      <a:srgbClr val="FFFFFF"/>
+                    </a:solidFill>
+                  </a14:hiddenFill>
+                </a:ext>
+              </a:extLst>
+            </p:spPr>
+          </p:pic>
+          <p:sp>
+            <p:nvSpPr>
+              <p:cNvPr id="94" name="Rectangle 93">
+                <a:extLst>
+                  <a:ext uri="{FF2B5EF4-FFF2-40B4-BE49-F238E27FC236}">
+                    <a16:creationId xmlns:a16="http://schemas.microsoft.com/office/drawing/2014/main" id="{4FC02C03-F823-4FF0-A69A-1BBA17E990C9}"/>
+                  </a:ext>
+                </a:extLst>
+              </p:cNvPr>
+              <p:cNvSpPr/>
+              <p:nvPr/>
+            </p:nvSpPr>
+            <p:spPr>
+              <a:xfrm rot="19527126">
+                <a:off x="3163796" y="2863637"/>
+                <a:ext cx="1019561" cy="501162"/>
+              </a:xfrm>
+              <a:prstGeom prst="rect">
+                <a:avLst/>
+              </a:prstGeom>
+              <a:ln>
+                <a:noFill/>
+              </a:ln>
+            </p:spPr>
+            <p:style>
+              <a:lnRef idx="2">
+                <a:schemeClr val="dk1"/>
+              </a:lnRef>
+              <a:fillRef idx="1">
+                <a:schemeClr val="lt1"/>
+              </a:fillRef>
+              <a:effectRef idx="0">
+                <a:schemeClr val="dk1"/>
+              </a:effectRef>
+              <a:fontRef idx="minor">
+                <a:schemeClr val="dk1"/>
+              </a:fontRef>
+            </p:style>
+            <p:txBody>
+              <a:bodyPr rtlCol="0" anchor="ctr"/>
+              <a:lstStyle/>
+              <a:p>
+                <a:pPr algn="ctr"/>
+                <a:endParaRPr lang="en-US"/>
+              </a:p>
+            </p:txBody>
+          </p:sp>
+          <p:sp>
+            <p:nvSpPr>
+              <p:cNvPr id="95" name="Rectangle 94">
+                <a:extLst>
+                  <a:ext uri="{FF2B5EF4-FFF2-40B4-BE49-F238E27FC236}">
+                    <a16:creationId xmlns:a16="http://schemas.microsoft.com/office/drawing/2014/main" id="{8DF877FA-6F09-4008-8C56-48C307E83552}"/>
+                  </a:ext>
+                </a:extLst>
+              </p:cNvPr>
+              <p:cNvSpPr/>
+              <p:nvPr/>
+            </p:nvSpPr>
+            <p:spPr>
+              <a:xfrm rot="19081648">
+                <a:off x="4013700" y="3428531"/>
+                <a:ext cx="157110" cy="413238"/>
+              </a:xfrm>
+              <a:prstGeom prst="rect">
+                <a:avLst/>
+              </a:prstGeom>
+            </p:spPr>
+            <p:style>
+              <a:lnRef idx="2">
+                <a:schemeClr val="dk1">
+                  <a:shade val="50000"/>
+                </a:schemeClr>
+              </a:lnRef>
+              <a:fillRef idx="1">
+                <a:schemeClr val="dk1"/>
+              </a:fillRef>
+              <a:effectRef idx="0">
+                <a:schemeClr val="dk1"/>
+              </a:effectRef>
+              <a:fontRef idx="minor">
+                <a:schemeClr val="lt1"/>
+              </a:fontRef>
+            </p:style>
+            <p:txBody>
+              <a:bodyPr rtlCol="0" anchor="ctr"/>
+              <a:lstStyle/>
+              <a:p>
+                <a:pPr algn="ctr"/>
+                <a:endParaRPr lang="en-US"/>
+              </a:p>
+            </p:txBody>
+          </p:sp>
+          <p:sp>
+            <p:nvSpPr>
+              <p:cNvPr id="96" name="Rectangle 95">
+                <a:extLst>
+                  <a:ext uri="{FF2B5EF4-FFF2-40B4-BE49-F238E27FC236}">
+                    <a16:creationId xmlns:a16="http://schemas.microsoft.com/office/drawing/2014/main" id="{EF22754A-8C0A-41C1-91DF-9890ECBA36BF}"/>
+                  </a:ext>
+                </a:extLst>
+              </p:cNvPr>
+              <p:cNvSpPr/>
+              <p:nvPr/>
+            </p:nvSpPr>
+            <p:spPr>
+              <a:xfrm rot="13584833">
+                <a:off x="2830186" y="4013063"/>
+                <a:ext cx="137209" cy="604380"/>
+              </a:xfrm>
+              <a:prstGeom prst="rect">
+                <a:avLst/>
+              </a:prstGeom>
+            </p:spPr>
+            <p:style>
+              <a:lnRef idx="2">
+                <a:schemeClr val="dk1">
+                  <a:shade val="50000"/>
+                </a:schemeClr>
+              </a:lnRef>
+              <a:fillRef idx="1">
+                <a:schemeClr val="dk1"/>
+              </a:fillRef>
+              <a:effectRef idx="0">
+                <a:schemeClr val="dk1"/>
+              </a:effectRef>
+              <a:fontRef idx="minor">
+                <a:schemeClr val="lt1"/>
+              </a:fontRef>
+            </p:style>
+            <p:txBody>
+              <a:bodyPr rtlCol="0" anchor="ctr"/>
+              <a:lstStyle/>
+              <a:p>
+                <a:pPr algn="ctr"/>
+                <a:endParaRPr lang="en-US"/>
+              </a:p>
+            </p:txBody>
+          </p:sp>
+          <p:sp>
+            <p:nvSpPr>
+              <p:cNvPr id="97" name="Rectangle 96">
+                <a:extLst>
+                  <a:ext uri="{FF2B5EF4-FFF2-40B4-BE49-F238E27FC236}">
+                    <a16:creationId xmlns:a16="http://schemas.microsoft.com/office/drawing/2014/main" id="{D1104159-1C9C-44C6-A9B7-4DFCDA53ED06}"/>
+                  </a:ext>
+                </a:extLst>
+              </p:cNvPr>
+              <p:cNvSpPr/>
+              <p:nvPr/>
+            </p:nvSpPr>
+            <p:spPr>
+              <a:xfrm rot="13584833">
+                <a:off x="3103724" y="4494607"/>
+                <a:ext cx="231175" cy="604380"/>
+              </a:xfrm>
+              <a:prstGeom prst="rect">
+                <a:avLst/>
+              </a:prstGeom>
+            </p:spPr>
+            <p:style>
+              <a:lnRef idx="2">
+                <a:schemeClr val="dk1">
+                  <a:shade val="50000"/>
+                </a:schemeClr>
+              </a:lnRef>
+              <a:fillRef idx="1">
+                <a:schemeClr val="dk1"/>
+              </a:fillRef>
+              <a:effectRef idx="0">
+                <a:schemeClr val="dk1"/>
+              </a:effectRef>
+              <a:fontRef idx="minor">
+                <a:schemeClr val="lt1"/>
+              </a:fontRef>
+            </p:style>
+            <p:txBody>
+              <a:bodyPr rtlCol="0" anchor="ctr"/>
+              <a:lstStyle/>
+              <a:p>
+                <a:pPr algn="ctr"/>
+                <a:endParaRPr lang="en-US"/>
+              </a:p>
+            </p:txBody>
+          </p:sp>
+          <p:sp>
+            <p:nvSpPr>
+              <p:cNvPr id="98" name="Rectangle 97">
+                <a:extLst>
+                  <a:ext uri="{FF2B5EF4-FFF2-40B4-BE49-F238E27FC236}">
+                    <a16:creationId xmlns:a16="http://schemas.microsoft.com/office/drawing/2014/main" id="{A28CECFF-D1AC-4F26-BB8D-77860F872A29}"/>
+                  </a:ext>
+                </a:extLst>
+              </p:cNvPr>
+              <p:cNvSpPr/>
+              <p:nvPr/>
+            </p:nvSpPr>
+            <p:spPr>
+              <a:xfrm rot="19044101">
+                <a:off x="3850222" y="3905329"/>
+                <a:ext cx="1103971" cy="501162"/>
+              </a:xfrm>
+              <a:prstGeom prst="rect">
+                <a:avLst/>
+              </a:prstGeom>
+              <a:ln>
+                <a:noFill/>
+              </a:ln>
+            </p:spPr>
+            <p:style>
+              <a:lnRef idx="2">
+                <a:schemeClr val="dk1"/>
+              </a:lnRef>
+              <a:fillRef idx="1">
+                <a:schemeClr val="lt1"/>
+              </a:fillRef>
+              <a:effectRef idx="0">
+                <a:schemeClr val="dk1"/>
+              </a:effectRef>
+              <a:fontRef idx="minor">
+                <a:schemeClr val="dk1"/>
+              </a:fontRef>
+            </p:style>
+            <p:txBody>
+              <a:bodyPr rtlCol="0" anchor="ctr"/>
+              <a:lstStyle/>
+              <a:p>
+                <a:pPr algn="ctr"/>
+                <a:endParaRPr lang="en-US"/>
+              </a:p>
+            </p:txBody>
+          </p:sp>
+        </p:grpSp>
+        <p:grpSp>
+          <p:nvGrpSpPr>
+            <p:cNvPr id="28" name="Group 27">
+              <a:extLst>
+                <a:ext uri="{FF2B5EF4-FFF2-40B4-BE49-F238E27FC236}">
+                  <a16:creationId xmlns:a16="http://schemas.microsoft.com/office/drawing/2014/main" id="{4CA8C07A-3DBE-4A83-8A63-F1F50C57274F}"/>
+                </a:ext>
+              </a:extLst>
+            </p:cNvPr>
+            <p:cNvGrpSpPr/>
+            <p:nvPr/>
+          </p:nvGrpSpPr>
+          <p:grpSpPr>
+            <a:xfrm>
+              <a:off x="475862" y="2832151"/>
+              <a:ext cx="1530220" cy="1504560"/>
+              <a:chOff x="475862" y="905612"/>
+              <a:chExt cx="1530220" cy="1504560"/>
+            </a:xfrm>
+          </p:grpSpPr>
+          <p:sp>
+            <p:nvSpPr>
+              <p:cNvPr id="29" name="Rectangle 28">
+                <a:extLst>
+                  <a:ext uri="{FF2B5EF4-FFF2-40B4-BE49-F238E27FC236}">
+                    <a16:creationId xmlns:a16="http://schemas.microsoft.com/office/drawing/2014/main" id="{071EFED6-C847-4E96-9FC7-6A39B425327F}"/>
+                  </a:ext>
+                </a:extLst>
+              </p:cNvPr>
+              <p:cNvSpPr/>
+              <p:nvPr/>
+            </p:nvSpPr>
+            <p:spPr>
+              <a:xfrm>
+                <a:off x="475862" y="905612"/>
+                <a:ext cx="1530220" cy="1504560"/>
+              </a:xfrm>
+              <a:prstGeom prst="rect">
+                <a:avLst/>
+              </a:prstGeom>
+              <a:noFill/>
+              <a:ln w="76200">
+                <a:solidFill>
+                  <a:schemeClr val="tx1"/>
+                </a:solidFill>
+              </a:ln>
+            </p:spPr>
+            <p:style>
+              <a:lnRef idx="2">
+                <a:schemeClr val="accent1">
+                  <a:shade val="50000"/>
+                </a:schemeClr>
+              </a:lnRef>
+              <a:fillRef idx="1">
+                <a:schemeClr val="accent1"/>
+              </a:fillRef>
+              <a:effectRef idx="0">
+                <a:schemeClr val="accent1"/>
+              </a:effectRef>
+              <a:fontRef idx="minor">
+                <a:schemeClr val="lt1"/>
+              </a:fontRef>
+            </p:style>
+            <p:txBody>
+              <a:bodyPr rtlCol="0" anchor="ctr"/>
+              <a:lstStyle/>
+              <a:p>
+                <a:pPr algn="ctr"/>
+                <a:endParaRPr lang="en-US"/>
+              </a:p>
+            </p:txBody>
+          </p:sp>
+          <p:sp>
+            <p:nvSpPr>
+              <p:cNvPr id="30" name="Flowchart: Display 29">
+                <a:extLst>
+                  <a:ext uri="{FF2B5EF4-FFF2-40B4-BE49-F238E27FC236}">
+                    <a16:creationId xmlns:a16="http://schemas.microsoft.com/office/drawing/2014/main" id="{44ADA008-7A09-47DE-8DB7-0DBC2819A861}"/>
+                  </a:ext>
+                </a:extLst>
+              </p:cNvPr>
+              <p:cNvSpPr/>
+              <p:nvPr/>
+            </p:nvSpPr>
+            <p:spPr>
+              <a:xfrm rot="5400000">
+                <a:off x="633902" y="1214921"/>
+                <a:ext cx="1214139" cy="1106027"/>
+              </a:xfrm>
+              <a:prstGeom prst="flowChartDisplay">
+                <a:avLst/>
+              </a:prstGeom>
+              <a:noFill/>
+              <a:ln w="38100" cap="flat" cmpd="sng" algn="ctr">
+                <a:solidFill>
+                  <a:schemeClr val="dk1"/>
+                </a:solidFill>
+                <a:prstDash val="solid"/>
+                <a:round/>
+                <a:headEnd type="none" w="med" len="med"/>
+                <a:tailEnd type="none" w="med" len="med"/>
+              </a:ln>
+            </p:spPr>
+            <p:style>
+              <a:lnRef idx="0">
+                <a:scrgbClr r="0" g="0" b="0"/>
+              </a:lnRef>
+              <a:fillRef idx="0">
+                <a:scrgbClr r="0" g="0" b="0"/>
+              </a:fillRef>
+              <a:effectRef idx="0">
+                <a:scrgbClr r="0" g="0" b="0"/>
+              </a:effectRef>
+              <a:fontRef idx="minor">
+                <a:schemeClr val="dk1"/>
+              </a:fontRef>
+            </p:style>
+            <p:txBody>
+              <a:bodyPr rtlCol="0" anchor="ctr"/>
+              <a:lstStyle/>
+              <a:p>
+                <a:pPr algn="ctr"/>
+                <a:endParaRPr lang="en-US"/>
+              </a:p>
+            </p:txBody>
+          </p:sp>
+        </p:grpSp>
+      </p:grpSp>
+      <p:grpSp>
+        <p:nvGrpSpPr>
+          <p:cNvPr id="110" name="Group 109">
+            <a:extLst>
+              <a:ext uri="{FF2B5EF4-FFF2-40B4-BE49-F238E27FC236}">
+                <a16:creationId xmlns:a16="http://schemas.microsoft.com/office/drawing/2014/main" id="{338F0217-FCBF-45B6-81A1-5568F421EAA0}"/>
+              </a:ext>
+            </a:extLst>
+          </p:cNvPr>
+          <p:cNvGrpSpPr/>
+          <p:nvPr/>
+        </p:nvGrpSpPr>
+        <p:grpSpPr>
+          <a:xfrm>
+            <a:off x="6155693" y="2832151"/>
+            <a:ext cx="1530220" cy="1504560"/>
+            <a:chOff x="6155693" y="2832151"/>
+            <a:chExt cx="1530220" cy="1504560"/>
+          </a:xfrm>
+        </p:grpSpPr>
+        <p:grpSp>
+          <p:nvGrpSpPr>
+            <p:cNvPr id="107" name="Group 106">
+              <a:extLst>
+                <a:ext uri="{FF2B5EF4-FFF2-40B4-BE49-F238E27FC236}">
+                  <a16:creationId xmlns:a16="http://schemas.microsoft.com/office/drawing/2014/main" id="{444CEB06-0A1C-4E47-B4AE-FF60B460C333}"/>
+                </a:ext>
+              </a:extLst>
+            </p:cNvPr>
+            <p:cNvGrpSpPr/>
+            <p:nvPr/>
+          </p:nvGrpSpPr>
+          <p:grpSpPr>
+            <a:xfrm>
+              <a:off x="6417939" y="3420208"/>
+              <a:ext cx="1006500" cy="701805"/>
+              <a:chOff x="2272059" y="3781225"/>
+              <a:chExt cx="1441455" cy="1005088"/>
+            </a:xfrm>
+          </p:grpSpPr>
+          <p:pic>
+            <p:nvPicPr>
+              <p:cNvPr id="108" name="Picture 14" descr="Cannon Gun Stock Illustrations – 10,392 Cannon Gun Stock Illustrations,  Vectors &amp;amp; Clipart - Dreamstime">
+                <a:extLst>
+                  <a:ext uri="{FF2B5EF4-FFF2-40B4-BE49-F238E27FC236}">
+                    <a16:creationId xmlns:a16="http://schemas.microsoft.com/office/drawing/2014/main" id="{F4F4A6FD-08F2-453A-B492-644B5C381C1E}"/>
+                  </a:ext>
+                </a:extLst>
+              </p:cNvPr>
+              <p:cNvPicPr>
+                <a:picLocks noChangeAspect="1" noChangeArrowheads="1"/>
+              </p:cNvPicPr>
+              <p:nvPr/>
+            </p:nvPicPr>
+            <p:blipFill>
+              <a:blip r:embed="rId6">
+                <a:extLst>
+                  <a:ext uri="{28A0092B-C50C-407E-A947-70E740481C1C}">
+                    <a14:useLocalDpi xmlns:a14="http://schemas.microsoft.com/office/drawing/2010/main" val="0"/>
+                  </a:ext>
+                </a:extLst>
+              </a:blip>
+              <a:srcRect/>
+              <a:stretch>
+                <a:fillRect/>
+              </a:stretch>
+            </p:blipFill>
+            <p:spPr bwMode="auto">
+              <a:xfrm>
+                <a:off x="2655277" y="4123592"/>
+                <a:ext cx="1058237" cy="662721"/>
+              </a:xfrm>
+              <a:prstGeom prst="rect">
+                <a:avLst/>
+              </a:prstGeom>
+              <a:noFill/>
+              <a:extLst>
+                <a:ext uri="{909E8E84-426E-40DD-AFC4-6F175D3DCCD1}">
+                  <a14:hiddenFill xmlns:a14="http://schemas.microsoft.com/office/drawing/2010/main">
+                    <a:solidFill>
+                      <a:srgbClr val="FFFFFF"/>
+                    </a:solidFill>
+                  </a14:hiddenFill>
+                </a:ext>
+              </a:extLst>
+            </p:spPr>
+          </p:pic>
+          <p:pic>
+            <p:nvPicPr>
+              <p:cNvPr id="109" name="Picture 108">
+                <a:extLst>
+                  <a:ext uri="{FF2B5EF4-FFF2-40B4-BE49-F238E27FC236}">
+                    <a16:creationId xmlns:a16="http://schemas.microsoft.com/office/drawing/2014/main" id="{C41C7FEC-3543-4F66-AF6D-DFB931A28ACB}"/>
+                  </a:ext>
+                </a:extLst>
+              </p:cNvPr>
+              <p:cNvPicPr>
+                <a:picLocks noChangeAspect="1"/>
+              </p:cNvPicPr>
+              <p:nvPr/>
+            </p:nvPicPr>
+            <p:blipFill>
+              <a:blip r:embed="rId7"/>
+              <a:stretch>
+                <a:fillRect/>
+              </a:stretch>
+            </p:blipFill>
+            <p:spPr>
+              <a:xfrm>
+                <a:off x="2272059" y="3781225"/>
+                <a:ext cx="432328" cy="544589"/>
+              </a:xfrm>
+              <a:prstGeom prst="rect">
+                <a:avLst/>
+              </a:prstGeom>
+            </p:spPr>
+          </p:pic>
+        </p:grpSp>
+        <p:grpSp>
+          <p:nvGrpSpPr>
+            <p:cNvPr id="37" name="Group 36">
+              <a:extLst>
+                <a:ext uri="{FF2B5EF4-FFF2-40B4-BE49-F238E27FC236}">
+                  <a16:creationId xmlns:a16="http://schemas.microsoft.com/office/drawing/2014/main" id="{9F84C2C6-AA62-4007-ABA3-4C71E6F4159C}"/>
+                </a:ext>
+              </a:extLst>
+            </p:cNvPr>
+            <p:cNvGrpSpPr/>
+            <p:nvPr/>
+          </p:nvGrpSpPr>
+          <p:grpSpPr>
+            <a:xfrm>
+              <a:off x="6155693" y="2832151"/>
+              <a:ext cx="1530220" cy="1504560"/>
+              <a:chOff x="475862" y="905612"/>
+              <a:chExt cx="1530220" cy="1504560"/>
+            </a:xfrm>
+          </p:grpSpPr>
+          <p:sp>
+            <p:nvSpPr>
+              <p:cNvPr id="38" name="Rectangle 37">
+                <a:extLst>
+                  <a:ext uri="{FF2B5EF4-FFF2-40B4-BE49-F238E27FC236}">
+                    <a16:creationId xmlns:a16="http://schemas.microsoft.com/office/drawing/2014/main" id="{3400985C-9E41-412D-A168-82F811EFD9CE}"/>
+                  </a:ext>
+                </a:extLst>
+              </p:cNvPr>
+              <p:cNvSpPr/>
+              <p:nvPr/>
+            </p:nvSpPr>
+            <p:spPr>
+              <a:xfrm>
+                <a:off x="475862" y="905612"/>
+                <a:ext cx="1530220" cy="1504560"/>
+              </a:xfrm>
+              <a:prstGeom prst="rect">
+                <a:avLst/>
+              </a:prstGeom>
+              <a:noFill/>
+              <a:ln w="76200">
+                <a:solidFill>
+                  <a:schemeClr val="tx1"/>
+                </a:solidFill>
+              </a:ln>
+            </p:spPr>
+            <p:style>
+              <a:lnRef idx="2">
+                <a:schemeClr val="accent1">
+                  <a:shade val="50000"/>
+                </a:schemeClr>
+              </a:lnRef>
+              <a:fillRef idx="1">
+                <a:schemeClr val="accent1"/>
+              </a:fillRef>
+              <a:effectRef idx="0">
+                <a:schemeClr val="accent1"/>
+              </a:effectRef>
+              <a:fontRef idx="minor">
+                <a:schemeClr val="lt1"/>
+              </a:fontRef>
+            </p:style>
+            <p:txBody>
+              <a:bodyPr rtlCol="0" anchor="ctr"/>
+              <a:lstStyle/>
+              <a:p>
+                <a:pPr algn="ctr"/>
+                <a:endParaRPr lang="en-US"/>
+              </a:p>
+            </p:txBody>
+          </p:sp>
+          <p:sp>
+            <p:nvSpPr>
+              <p:cNvPr id="39" name="Flowchart: Display 38">
+                <a:extLst>
+                  <a:ext uri="{FF2B5EF4-FFF2-40B4-BE49-F238E27FC236}">
+                    <a16:creationId xmlns:a16="http://schemas.microsoft.com/office/drawing/2014/main" id="{9CC6BC5C-C54B-4A61-9A35-970133237D16}"/>
+                  </a:ext>
+                </a:extLst>
+              </p:cNvPr>
+              <p:cNvSpPr/>
+              <p:nvPr/>
+            </p:nvSpPr>
+            <p:spPr>
+              <a:xfrm rot="5400000">
+                <a:off x="633902" y="1214921"/>
+                <a:ext cx="1214139" cy="1106027"/>
+              </a:xfrm>
+              <a:prstGeom prst="flowChartDisplay">
+                <a:avLst/>
+              </a:prstGeom>
+              <a:noFill/>
+              <a:ln w="38100" cap="flat" cmpd="sng" algn="ctr">
+                <a:solidFill>
+                  <a:schemeClr val="dk1"/>
+                </a:solidFill>
+                <a:prstDash val="solid"/>
+                <a:round/>
+                <a:headEnd type="none" w="med" len="med"/>
+                <a:tailEnd type="none" w="med" len="med"/>
+              </a:ln>
+            </p:spPr>
+            <p:style>
+              <a:lnRef idx="0">
+                <a:scrgbClr r="0" g="0" b="0"/>
+              </a:lnRef>
+              <a:fillRef idx="0">
+                <a:scrgbClr r="0" g="0" b="0"/>
+              </a:fillRef>
+              <a:effectRef idx="0">
+                <a:scrgbClr r="0" g="0" b="0"/>
+              </a:effectRef>
+              <a:fontRef idx="minor">
+                <a:schemeClr val="dk1"/>
+              </a:fontRef>
+            </p:style>
+            <p:txBody>
+              <a:bodyPr rtlCol="0" anchor="ctr"/>
+              <a:lstStyle/>
+              <a:p>
+                <a:pPr algn="ctr"/>
+                <a:endParaRPr lang="en-US"/>
+              </a:p>
+            </p:txBody>
+          </p:sp>
+        </p:grpSp>
+      </p:grpSp>
+      <p:grpSp>
+        <p:nvGrpSpPr>
+          <p:cNvPr id="40" name="Group 39">
+            <a:extLst>
+              <a:ext uri="{FF2B5EF4-FFF2-40B4-BE49-F238E27FC236}">
+                <a16:creationId xmlns:a16="http://schemas.microsoft.com/office/drawing/2014/main" id="{9E0E6789-8912-43FC-9CDE-860152B71925}"/>
+              </a:ext>
+            </a:extLst>
+          </p:cNvPr>
+          <p:cNvGrpSpPr/>
+          <p:nvPr/>
+        </p:nvGrpSpPr>
+        <p:grpSpPr>
+          <a:xfrm>
+            <a:off x="8048970" y="2832151"/>
+            <a:ext cx="1530220" cy="1504560"/>
+            <a:chOff x="475862" y="905612"/>
+            <a:chExt cx="1530220" cy="1504560"/>
+          </a:xfrm>
+        </p:grpSpPr>
+        <p:sp>
+          <p:nvSpPr>
+            <p:cNvPr id="41" name="Rectangle 40">
+              <a:extLst>
+                <a:ext uri="{FF2B5EF4-FFF2-40B4-BE49-F238E27FC236}">
+                  <a16:creationId xmlns:a16="http://schemas.microsoft.com/office/drawing/2014/main" id="{D17D737D-331C-4C04-97E8-B910A13DAB2E}"/>
+                </a:ext>
+              </a:extLst>
+            </p:cNvPr>
+            <p:cNvSpPr/>
+            <p:nvPr/>
+          </p:nvSpPr>
+          <p:spPr>
+            <a:xfrm>
+              <a:off x="475862" y="905612"/>
+              <a:ext cx="1530220" cy="1504560"/>
+            </a:xfrm>
+            <a:prstGeom prst="rect">
+              <a:avLst/>
+            </a:prstGeom>
+            <a:noFill/>
+            <a:ln w="76200">
+              <a:solidFill>
+                <a:schemeClr val="tx1"/>
+              </a:solidFill>
+            </a:ln>
+          </p:spPr>
+          <p:style>
+            <a:lnRef idx="2">
+              <a:schemeClr val="accent1">
+                <a:shade val="50000"/>
+              </a:schemeClr>
+            </a:lnRef>
+            <a:fillRef idx="1">
+              <a:schemeClr val="accent1"/>
+            </a:fillRef>
+            <a:effectRef idx="0">
+              <a:schemeClr val="accent1"/>
+            </a:effectRef>
+            <a:fontRef idx="minor">
+              <a:schemeClr val="lt1"/>
+            </a:fontRef>
+          </p:style>
+          <p:txBody>
+            <a:bodyPr rtlCol="0" anchor="ctr"/>
+            <a:lstStyle/>
+            <a:p>
+              <a:pPr algn="ctr"/>
+              <a:endParaRPr lang="en-US"/>
+            </a:p>
+          </p:txBody>
+        </p:sp>
+        <p:sp>
+          <p:nvSpPr>
+            <p:cNvPr id="42" name="Flowchart: Display 41">
+              <a:extLst>
+                <a:ext uri="{FF2B5EF4-FFF2-40B4-BE49-F238E27FC236}">
+                  <a16:creationId xmlns:a16="http://schemas.microsoft.com/office/drawing/2014/main" id="{02546407-0209-4C07-8CD3-CCD4DE1EA514}"/>
+                </a:ext>
+              </a:extLst>
+            </p:cNvPr>
+            <p:cNvSpPr/>
+            <p:nvPr/>
+          </p:nvSpPr>
+          <p:spPr>
+            <a:xfrm rot="5400000">
+              <a:off x="633902" y="1214921"/>
+              <a:ext cx="1214139" cy="1106027"/>
+            </a:xfrm>
+            <a:prstGeom prst="flowChartDisplay">
+              <a:avLst/>
+            </a:prstGeom>
+            <a:noFill/>
+            <a:ln w="38100" cap="flat" cmpd="sng" algn="ctr">
+              <a:solidFill>
+                <a:schemeClr val="dk1"/>
+              </a:solidFill>
+              <a:prstDash val="solid"/>
+              <a:round/>
+              <a:headEnd type="none" w="med" len="med"/>
+              <a:tailEnd type="none" w="med" len="med"/>
+            </a:ln>
+          </p:spPr>
+          <p:style>
+            <a:lnRef idx="0">
+              <a:scrgbClr r="0" g="0" b="0"/>
+            </a:lnRef>
+            <a:fillRef idx="0">
+              <a:scrgbClr r="0" g="0" b="0"/>
+            </a:fillRef>
+            <a:effectRef idx="0">
+              <a:scrgbClr r="0" g="0" b="0"/>
+            </a:effectRef>
+            <a:fontRef idx="minor">
+              <a:schemeClr val="dk1"/>
+            </a:fontRef>
+          </p:style>
+          <p:txBody>
+            <a:bodyPr rtlCol="0" anchor="ctr"/>
+            <a:lstStyle/>
+            <a:p>
+              <a:pPr algn="ctr"/>
+              <a:endParaRPr lang="en-US"/>
+            </a:p>
+          </p:txBody>
+        </p:sp>
+      </p:grpSp>
+      <p:grpSp>
+        <p:nvGrpSpPr>
+          <p:cNvPr id="43" name="Group 42">
+            <a:extLst>
+              <a:ext uri="{FF2B5EF4-FFF2-40B4-BE49-F238E27FC236}">
+                <a16:creationId xmlns:a16="http://schemas.microsoft.com/office/drawing/2014/main" id="{3819D254-AD91-4719-A489-813A757E9EE9}"/>
+              </a:ext>
+            </a:extLst>
+          </p:cNvPr>
+          <p:cNvGrpSpPr/>
+          <p:nvPr/>
+        </p:nvGrpSpPr>
+        <p:grpSpPr>
+          <a:xfrm>
+            <a:off x="9942247" y="2832151"/>
+            <a:ext cx="1530220" cy="1504560"/>
+            <a:chOff x="475862" y="905612"/>
+            <a:chExt cx="1530220" cy="1504560"/>
+          </a:xfrm>
+        </p:grpSpPr>
+        <p:sp>
+          <p:nvSpPr>
+            <p:cNvPr id="44" name="Rectangle 43">
+              <a:extLst>
+                <a:ext uri="{FF2B5EF4-FFF2-40B4-BE49-F238E27FC236}">
+                  <a16:creationId xmlns:a16="http://schemas.microsoft.com/office/drawing/2014/main" id="{B177DF15-DC35-4934-8498-6391A30BFE8C}"/>
+                </a:ext>
+              </a:extLst>
+            </p:cNvPr>
+            <p:cNvSpPr/>
+            <p:nvPr/>
+          </p:nvSpPr>
+          <p:spPr>
+            <a:xfrm>
+              <a:off x="475862" y="905612"/>
+              <a:ext cx="1530220" cy="1504560"/>
+            </a:xfrm>
+            <a:prstGeom prst="rect">
+              <a:avLst/>
+            </a:prstGeom>
+            <a:noFill/>
+            <a:ln w="76200">
+              <a:solidFill>
+                <a:schemeClr val="tx1"/>
+              </a:solidFill>
+            </a:ln>
+          </p:spPr>
+          <p:style>
+            <a:lnRef idx="2">
+              <a:schemeClr val="accent1">
+                <a:shade val="50000"/>
+              </a:schemeClr>
+            </a:lnRef>
+            <a:fillRef idx="1">
+              <a:schemeClr val="accent1"/>
+            </a:fillRef>
+            <a:effectRef idx="0">
+              <a:schemeClr val="accent1"/>
+            </a:effectRef>
+            <a:fontRef idx="minor">
+              <a:schemeClr val="lt1"/>
+            </a:fontRef>
+          </p:style>
+          <p:txBody>
+            <a:bodyPr rtlCol="0" anchor="ctr"/>
+            <a:lstStyle/>
+            <a:p>
+              <a:pPr algn="ctr"/>
+              <a:endParaRPr lang="en-US"/>
+            </a:p>
+          </p:txBody>
+        </p:sp>
+        <p:sp>
+          <p:nvSpPr>
+            <p:cNvPr id="45" name="Flowchart: Display 44">
+              <a:extLst>
+                <a:ext uri="{FF2B5EF4-FFF2-40B4-BE49-F238E27FC236}">
+                  <a16:creationId xmlns:a16="http://schemas.microsoft.com/office/drawing/2014/main" id="{E5AFF66E-1CB8-4752-A099-B72F558CD19C}"/>
+                </a:ext>
+              </a:extLst>
+            </p:cNvPr>
+            <p:cNvSpPr/>
+            <p:nvPr/>
+          </p:nvSpPr>
+          <p:spPr>
+            <a:xfrm rot="5400000">
+              <a:off x="633902" y="1214921"/>
+              <a:ext cx="1214139" cy="1106027"/>
+            </a:xfrm>
+            <a:prstGeom prst="flowChartDisplay">
+              <a:avLst/>
+            </a:prstGeom>
+            <a:noFill/>
+            <a:ln w="38100" cap="flat" cmpd="sng" algn="ctr">
+              <a:solidFill>
+                <a:schemeClr val="dk1"/>
+              </a:solidFill>
+              <a:prstDash val="solid"/>
+              <a:round/>
+              <a:headEnd type="none" w="med" len="med"/>
+              <a:tailEnd type="none" w="med" len="med"/>
+            </a:ln>
+          </p:spPr>
+          <p:style>
+            <a:lnRef idx="0">
+              <a:scrgbClr r="0" g="0" b="0"/>
+            </a:lnRef>
+            <a:fillRef idx="0">
+              <a:scrgbClr r="0" g="0" b="0"/>
+            </a:fillRef>
+            <a:effectRef idx="0">
+              <a:scrgbClr r="0" g="0" b="0"/>
+            </a:effectRef>
+            <a:fontRef idx="minor">
+              <a:schemeClr val="dk1"/>
+            </a:fontRef>
+          </p:style>
+          <p:txBody>
+            <a:bodyPr rtlCol="0" anchor="ctr"/>
+            <a:lstStyle/>
+            <a:p>
+              <a:pPr algn="ctr"/>
+              <a:endParaRPr lang="en-US"/>
+            </a:p>
+          </p:txBody>
+        </p:sp>
+      </p:grpSp>
+      <p:grpSp>
+        <p:nvGrpSpPr>
+          <p:cNvPr id="70" name="Group 69">
+            <a:extLst>
+              <a:ext uri="{FF2B5EF4-FFF2-40B4-BE49-F238E27FC236}">
+                <a16:creationId xmlns:a16="http://schemas.microsoft.com/office/drawing/2014/main" id="{E8FB1239-0460-4246-A413-A598C0051C2A}"/>
+              </a:ext>
+            </a:extLst>
+          </p:cNvPr>
+          <p:cNvGrpSpPr/>
+          <p:nvPr/>
+        </p:nvGrpSpPr>
+        <p:grpSpPr>
+          <a:xfrm>
+            <a:off x="4262416" y="905612"/>
+            <a:ext cx="1530220" cy="1504560"/>
+            <a:chOff x="4262416" y="905612"/>
+            <a:chExt cx="1530220" cy="1504560"/>
+          </a:xfrm>
+        </p:grpSpPr>
+        <p:grpSp>
+          <p:nvGrpSpPr>
+            <p:cNvPr id="16" name="Group 15">
+              <a:extLst>
+                <a:ext uri="{FF2B5EF4-FFF2-40B4-BE49-F238E27FC236}">
+                  <a16:creationId xmlns:a16="http://schemas.microsoft.com/office/drawing/2014/main" id="{1165699F-662F-486A-8520-C3A2C4123981}"/>
+                </a:ext>
+              </a:extLst>
+            </p:cNvPr>
+            <p:cNvGrpSpPr/>
+            <p:nvPr/>
+          </p:nvGrpSpPr>
+          <p:grpSpPr>
+            <a:xfrm>
+              <a:off x="4262416" y="905612"/>
+              <a:ext cx="1530220" cy="1504560"/>
+              <a:chOff x="475862" y="905612"/>
+              <a:chExt cx="1530220" cy="1504560"/>
+            </a:xfrm>
+          </p:grpSpPr>
+          <p:sp>
+            <p:nvSpPr>
+              <p:cNvPr id="17" name="Rectangle 16">
+                <a:extLst>
+                  <a:ext uri="{FF2B5EF4-FFF2-40B4-BE49-F238E27FC236}">
+                    <a16:creationId xmlns:a16="http://schemas.microsoft.com/office/drawing/2014/main" id="{7C43CD82-B852-4091-9B51-530FC6DBF4CA}"/>
+                  </a:ext>
+                </a:extLst>
+              </p:cNvPr>
+              <p:cNvSpPr/>
+              <p:nvPr/>
+            </p:nvSpPr>
+            <p:spPr>
+              <a:xfrm>
+                <a:off x="475862" y="905612"/>
+                <a:ext cx="1530220" cy="1504560"/>
+              </a:xfrm>
+              <a:prstGeom prst="rect">
+                <a:avLst/>
+              </a:prstGeom>
+              <a:noFill/>
+              <a:ln w="76200">
+                <a:solidFill>
+                  <a:schemeClr val="tx1"/>
+                </a:solidFill>
+              </a:ln>
+            </p:spPr>
+            <p:style>
+              <a:lnRef idx="2">
+                <a:schemeClr val="accent1">
+                  <a:shade val="50000"/>
+                </a:schemeClr>
+              </a:lnRef>
+              <a:fillRef idx="1">
+                <a:schemeClr val="accent1"/>
+              </a:fillRef>
+              <a:effectRef idx="0">
+                <a:schemeClr val="accent1"/>
+              </a:effectRef>
+              <a:fontRef idx="minor">
+                <a:schemeClr val="lt1"/>
+              </a:fontRef>
+            </p:style>
+            <p:txBody>
+              <a:bodyPr rtlCol="0" anchor="ctr"/>
+              <a:lstStyle/>
+              <a:p>
+                <a:pPr algn="ctr"/>
+                <a:endParaRPr lang="en-US"/>
+              </a:p>
+            </p:txBody>
+          </p:sp>
+          <p:sp>
+            <p:nvSpPr>
+              <p:cNvPr id="18" name="Flowchart: Display 17">
+                <a:extLst>
+                  <a:ext uri="{FF2B5EF4-FFF2-40B4-BE49-F238E27FC236}">
+                    <a16:creationId xmlns:a16="http://schemas.microsoft.com/office/drawing/2014/main" id="{0C4EE198-DAF1-4758-9F55-370D2B5C7402}"/>
+                  </a:ext>
+                </a:extLst>
+              </p:cNvPr>
+              <p:cNvSpPr/>
+              <p:nvPr/>
+            </p:nvSpPr>
+            <p:spPr>
+              <a:xfrm rot="5400000">
+                <a:off x="633902" y="1214921"/>
+                <a:ext cx="1214139" cy="1106027"/>
+              </a:xfrm>
+              <a:prstGeom prst="flowChartDisplay">
+                <a:avLst/>
+              </a:prstGeom>
+              <a:noFill/>
+              <a:ln w="38100" cap="flat" cmpd="sng" algn="ctr">
+                <a:solidFill>
+                  <a:schemeClr val="dk1"/>
+                </a:solidFill>
+                <a:prstDash val="solid"/>
+                <a:round/>
+                <a:headEnd type="none" w="med" len="med"/>
+                <a:tailEnd type="none" w="med" len="med"/>
+              </a:ln>
+            </p:spPr>
+            <p:style>
+              <a:lnRef idx="0">
+                <a:scrgbClr r="0" g="0" b="0"/>
+              </a:lnRef>
+              <a:fillRef idx="0">
+                <a:scrgbClr r="0" g="0" b="0"/>
+              </a:fillRef>
+              <a:effectRef idx="0">
+                <a:scrgbClr r="0" g="0" b="0"/>
+              </a:effectRef>
+              <a:fontRef idx="minor">
+                <a:schemeClr val="dk1"/>
+              </a:fontRef>
+            </p:style>
+            <p:txBody>
+              <a:bodyPr rtlCol="0" anchor="ctr"/>
+              <a:lstStyle/>
+              <a:p>
+                <a:pPr algn="ctr"/>
+                <a:endParaRPr lang="en-US"/>
+              </a:p>
+            </p:txBody>
+          </p:sp>
+        </p:grpSp>
+        <p:grpSp>
+          <p:nvGrpSpPr>
+            <p:cNvPr id="54" name="Group 53">
+              <a:extLst>
+                <a:ext uri="{FF2B5EF4-FFF2-40B4-BE49-F238E27FC236}">
+                  <a16:creationId xmlns:a16="http://schemas.microsoft.com/office/drawing/2014/main" id="{F800FB7F-B5B3-43FE-B6C3-C03AF3CCD0C5}"/>
+                </a:ext>
+              </a:extLst>
+            </p:cNvPr>
+            <p:cNvGrpSpPr/>
+            <p:nvPr/>
+          </p:nvGrpSpPr>
+          <p:grpSpPr>
+            <a:xfrm>
+              <a:off x="4610762" y="1367447"/>
+              <a:ext cx="833525" cy="859878"/>
+              <a:chOff x="1892090" y="3349869"/>
+              <a:chExt cx="1345405" cy="1387941"/>
+            </a:xfrm>
+          </p:grpSpPr>
+          <p:grpSp>
+            <p:nvGrpSpPr>
+              <p:cNvPr id="55" name="Group 54">
+                <a:extLst>
+                  <a:ext uri="{FF2B5EF4-FFF2-40B4-BE49-F238E27FC236}">
+                    <a16:creationId xmlns:a16="http://schemas.microsoft.com/office/drawing/2014/main" id="{035D3090-406B-4FF7-9650-27BC6DEC9698}"/>
+                  </a:ext>
+                </a:extLst>
+              </p:cNvPr>
+              <p:cNvGrpSpPr/>
+              <p:nvPr/>
+            </p:nvGrpSpPr>
+            <p:grpSpPr>
+              <a:xfrm>
+                <a:off x="2259623" y="3349869"/>
+                <a:ext cx="713540" cy="685799"/>
+                <a:chOff x="2259623" y="3349869"/>
+                <a:chExt cx="713540" cy="685799"/>
+              </a:xfrm>
+            </p:grpSpPr>
+            <p:cxnSp>
+              <p:nvCxnSpPr>
+                <p:cNvPr id="66" name="Straight Connector 65">
+                  <a:extLst>
+                    <a:ext uri="{FF2B5EF4-FFF2-40B4-BE49-F238E27FC236}">
+                      <a16:creationId xmlns:a16="http://schemas.microsoft.com/office/drawing/2014/main" id="{CB567B5A-71FE-4D58-95EF-DEDDA785F032}"/>
+                    </a:ext>
+                  </a:extLst>
+                </p:cNvPr>
+                <p:cNvCxnSpPr/>
+                <p:nvPr/>
+              </p:nvCxnSpPr>
+              <p:spPr>
+                <a:xfrm>
+                  <a:off x="2409091" y="3543300"/>
+                  <a:ext cx="105508" cy="457200"/>
+                </a:xfrm>
+                <a:prstGeom prst="line">
+                  <a:avLst/>
+                </a:prstGeom>
+                <a:ln w="28575"/>
+              </p:spPr>
+              <p:style>
+                <a:lnRef idx="1">
+                  <a:schemeClr val="dk1"/>
+                </a:lnRef>
+                <a:fillRef idx="0">
+                  <a:schemeClr val="dk1"/>
+                </a:fillRef>
+                <a:effectRef idx="0">
+                  <a:schemeClr val="dk1"/>
+                </a:effectRef>
+                <a:fontRef idx="minor">
+                  <a:schemeClr val="tx1"/>
+                </a:fontRef>
+              </p:style>
+            </p:cxnSp>
+            <p:cxnSp>
+              <p:nvCxnSpPr>
+                <p:cNvPr id="67" name="Straight Connector 66">
+                  <a:extLst>
+                    <a:ext uri="{FF2B5EF4-FFF2-40B4-BE49-F238E27FC236}">
+                      <a16:creationId xmlns:a16="http://schemas.microsoft.com/office/drawing/2014/main" id="{3F542B08-1EEF-49DA-A0A6-341D28785590}"/>
+                    </a:ext>
+                  </a:extLst>
+                </p:cNvPr>
+                <p:cNvCxnSpPr>
+                  <a:cxnSpLocks/>
+                </p:cNvCxnSpPr>
+                <p:nvPr/>
+              </p:nvCxnSpPr>
+              <p:spPr>
+                <a:xfrm>
+                  <a:off x="2593731" y="3534508"/>
+                  <a:ext cx="0" cy="457200"/>
+                </a:xfrm>
+                <a:prstGeom prst="line">
+                  <a:avLst/>
+                </a:prstGeom>
+                <a:ln w="28575"/>
+              </p:spPr>
+              <p:style>
+                <a:lnRef idx="1">
+                  <a:schemeClr val="dk1"/>
+                </a:lnRef>
+                <a:fillRef idx="0">
+                  <a:schemeClr val="dk1"/>
+                </a:fillRef>
+                <a:effectRef idx="0">
+                  <a:schemeClr val="dk1"/>
+                </a:effectRef>
+                <a:fontRef idx="minor">
+                  <a:schemeClr val="tx1"/>
+                </a:fontRef>
+              </p:style>
+            </p:cxnSp>
+            <p:cxnSp>
+              <p:nvCxnSpPr>
+                <p:cNvPr id="68" name="Straight Connector 67">
+                  <a:extLst>
+                    <a:ext uri="{FF2B5EF4-FFF2-40B4-BE49-F238E27FC236}">
+                      <a16:creationId xmlns:a16="http://schemas.microsoft.com/office/drawing/2014/main" id="{F709D8E5-7AA0-47E5-9550-E267AF671000}"/>
+                    </a:ext>
+                  </a:extLst>
+                </p:cNvPr>
+                <p:cNvCxnSpPr>
+                  <a:cxnSpLocks/>
+                </p:cNvCxnSpPr>
+                <p:nvPr/>
+              </p:nvCxnSpPr>
+              <p:spPr>
+                <a:xfrm flipH="1">
+                  <a:off x="2646488" y="3578468"/>
+                  <a:ext cx="137874" cy="457200"/>
+                </a:xfrm>
+                <a:prstGeom prst="line">
+                  <a:avLst/>
+                </a:prstGeom>
+                <a:ln w="28575"/>
+              </p:spPr>
+              <p:style>
+                <a:lnRef idx="1">
+                  <a:schemeClr val="dk1"/>
+                </a:lnRef>
+                <a:fillRef idx="0">
+                  <a:schemeClr val="dk1"/>
+                </a:fillRef>
+                <a:effectRef idx="0">
+                  <a:schemeClr val="dk1"/>
+                </a:effectRef>
+                <a:fontRef idx="minor">
+                  <a:schemeClr val="tx1"/>
+                </a:fontRef>
+              </p:style>
+            </p:cxnSp>
+            <p:sp>
+              <p:nvSpPr>
+                <p:cNvPr id="69" name="Freeform: Shape 68">
+                  <a:extLst>
+                    <a:ext uri="{FF2B5EF4-FFF2-40B4-BE49-F238E27FC236}">
+                      <a16:creationId xmlns:a16="http://schemas.microsoft.com/office/drawing/2014/main" id="{CDE50F5D-B160-495D-90ED-C42E92A804F0}"/>
+                    </a:ext>
+                  </a:extLst>
+                </p:cNvPr>
+                <p:cNvSpPr/>
+                <p:nvPr/>
+              </p:nvSpPr>
+              <p:spPr>
+                <a:xfrm>
+                  <a:off x="2259623" y="3349869"/>
+                  <a:ext cx="713540" cy="457256"/>
+                </a:xfrm>
+                <a:custGeom>
+                  <a:avLst/>
+                  <a:gdLst>
+                    <a:gd name="connsiteX0" fmla="*/ 96715 w 713540"/>
+                    <a:gd name="connsiteY0" fmla="*/ 334108 h 457256"/>
+                    <a:gd name="connsiteX1" fmla="*/ 17585 w 713540"/>
+                    <a:gd name="connsiteY1" fmla="*/ 316523 h 457256"/>
+                    <a:gd name="connsiteX2" fmla="*/ 0 w 713540"/>
+                    <a:gd name="connsiteY2" fmla="*/ 290146 h 457256"/>
+                    <a:gd name="connsiteX3" fmla="*/ 52754 w 713540"/>
+                    <a:gd name="connsiteY3" fmla="*/ 131885 h 457256"/>
+                    <a:gd name="connsiteX4" fmla="*/ 79131 w 713540"/>
+                    <a:gd name="connsiteY4" fmla="*/ 123093 h 457256"/>
+                    <a:gd name="connsiteX5" fmla="*/ 131885 w 713540"/>
+                    <a:gd name="connsiteY5" fmla="*/ 131885 h 457256"/>
+                    <a:gd name="connsiteX6" fmla="*/ 167054 w 713540"/>
+                    <a:gd name="connsiteY6" fmla="*/ 149469 h 457256"/>
+                    <a:gd name="connsiteX7" fmla="*/ 184639 w 713540"/>
+                    <a:gd name="connsiteY7" fmla="*/ 123093 h 457256"/>
+                    <a:gd name="connsiteX8" fmla="*/ 193431 w 713540"/>
+                    <a:gd name="connsiteY8" fmla="*/ 35169 h 457256"/>
+                    <a:gd name="connsiteX9" fmla="*/ 237392 w 713540"/>
+                    <a:gd name="connsiteY9" fmla="*/ 17585 h 457256"/>
+                    <a:gd name="connsiteX10" fmla="*/ 342900 w 713540"/>
+                    <a:gd name="connsiteY10" fmla="*/ 0 h 457256"/>
+                    <a:gd name="connsiteX11" fmla="*/ 378069 w 713540"/>
+                    <a:gd name="connsiteY11" fmla="*/ 8793 h 457256"/>
+                    <a:gd name="connsiteX12" fmla="*/ 413239 w 713540"/>
+                    <a:gd name="connsiteY12" fmla="*/ 61546 h 457256"/>
+                    <a:gd name="connsiteX13" fmla="*/ 439615 w 713540"/>
+                    <a:gd name="connsiteY13" fmla="*/ 114300 h 457256"/>
+                    <a:gd name="connsiteX14" fmla="*/ 501162 w 713540"/>
+                    <a:gd name="connsiteY14" fmla="*/ 79131 h 457256"/>
+                    <a:gd name="connsiteX15" fmla="*/ 553915 w 713540"/>
+                    <a:gd name="connsiteY15" fmla="*/ 70339 h 457256"/>
+                    <a:gd name="connsiteX16" fmla="*/ 589085 w 713540"/>
+                    <a:gd name="connsiteY16" fmla="*/ 61546 h 457256"/>
+                    <a:gd name="connsiteX17" fmla="*/ 633046 w 713540"/>
+                    <a:gd name="connsiteY17" fmla="*/ 70339 h 457256"/>
+                    <a:gd name="connsiteX18" fmla="*/ 659423 w 713540"/>
+                    <a:gd name="connsiteY18" fmla="*/ 149469 h 457256"/>
+                    <a:gd name="connsiteX19" fmla="*/ 650631 w 713540"/>
+                    <a:gd name="connsiteY19" fmla="*/ 219808 h 457256"/>
+                    <a:gd name="connsiteX20" fmla="*/ 633046 w 713540"/>
+                    <a:gd name="connsiteY20" fmla="*/ 246185 h 457256"/>
+                    <a:gd name="connsiteX21" fmla="*/ 685800 w 713540"/>
+                    <a:gd name="connsiteY21" fmla="*/ 298939 h 457256"/>
+                    <a:gd name="connsiteX22" fmla="*/ 703385 w 713540"/>
+                    <a:gd name="connsiteY22" fmla="*/ 342900 h 457256"/>
+                    <a:gd name="connsiteX23" fmla="*/ 694592 w 713540"/>
+                    <a:gd name="connsiteY23" fmla="*/ 422031 h 457256"/>
+                    <a:gd name="connsiteX24" fmla="*/ 659423 w 713540"/>
+                    <a:gd name="connsiteY24" fmla="*/ 430823 h 457256"/>
+                    <a:gd name="connsiteX25" fmla="*/ 597877 w 713540"/>
+                    <a:gd name="connsiteY25" fmla="*/ 457200 h 457256"/>
+                    <a:gd name="connsiteX26" fmla="*/ 562708 w 713540"/>
+                    <a:gd name="connsiteY26" fmla="*/ 439616 h 457256"/>
+                    <a:gd name="connsiteX27" fmla="*/ 536331 w 713540"/>
+                    <a:gd name="connsiteY27" fmla="*/ 422031 h 457256"/>
+                  </a:gdLst>
+                  <a:ahLst/>
+                  <a:cxnLst>
+                    <a:cxn ang="0">
+                      <a:pos x="connsiteX0" y="connsiteY0"/>
+                    </a:cxn>
+                    <a:cxn ang="0">
+                      <a:pos x="connsiteX1" y="connsiteY1"/>
+                    </a:cxn>
+                    <a:cxn ang="0">
+                      <a:pos x="connsiteX2" y="connsiteY2"/>
+                    </a:cxn>
+                    <a:cxn ang="0">
+                      <a:pos x="connsiteX3" y="connsiteY3"/>
+                    </a:cxn>
+                    <a:cxn ang="0">
+                      <a:pos x="connsiteX4" y="connsiteY4"/>
+                    </a:cxn>
+                    <a:cxn ang="0">
+                      <a:pos x="connsiteX5" y="connsiteY5"/>
+                    </a:cxn>
+                    <a:cxn ang="0">
+                      <a:pos x="connsiteX6" y="connsiteY6"/>
+                    </a:cxn>
+                    <a:cxn ang="0">
+                      <a:pos x="connsiteX7" y="connsiteY7"/>
+                    </a:cxn>
+                    <a:cxn ang="0">
+                      <a:pos x="connsiteX8" y="connsiteY8"/>
+                    </a:cxn>
+                    <a:cxn ang="0">
+                      <a:pos x="connsiteX9" y="connsiteY9"/>
+                    </a:cxn>
+                    <a:cxn ang="0">
+                      <a:pos x="connsiteX10" y="connsiteY10"/>
+                    </a:cxn>
+                    <a:cxn ang="0">
+                      <a:pos x="connsiteX11" y="connsiteY11"/>
+                    </a:cxn>
+                    <a:cxn ang="0">
+                      <a:pos x="connsiteX12" y="connsiteY12"/>
+                    </a:cxn>
+                    <a:cxn ang="0">
+                      <a:pos x="connsiteX13" y="connsiteY13"/>
+                    </a:cxn>
+                    <a:cxn ang="0">
+                      <a:pos x="connsiteX14" y="connsiteY14"/>
+                    </a:cxn>
+                    <a:cxn ang="0">
+                      <a:pos x="connsiteX15" y="connsiteY15"/>
+                    </a:cxn>
+                    <a:cxn ang="0">
+                      <a:pos x="connsiteX16" y="connsiteY16"/>
+                    </a:cxn>
+                    <a:cxn ang="0">
+                      <a:pos x="connsiteX17" y="connsiteY17"/>
+                    </a:cxn>
+                    <a:cxn ang="0">
+                      <a:pos x="connsiteX18" y="connsiteY18"/>
+                    </a:cxn>
+                    <a:cxn ang="0">
+                      <a:pos x="connsiteX19" y="connsiteY19"/>
+                    </a:cxn>
+                    <a:cxn ang="0">
+                      <a:pos x="connsiteX20" y="connsiteY20"/>
+                    </a:cxn>
+                    <a:cxn ang="0">
+                      <a:pos x="connsiteX21" y="connsiteY21"/>
+                    </a:cxn>
+                    <a:cxn ang="0">
+                      <a:pos x="connsiteX22" y="connsiteY22"/>
+                    </a:cxn>
+                    <a:cxn ang="0">
+                      <a:pos x="connsiteX23" y="connsiteY23"/>
+                    </a:cxn>
+                    <a:cxn ang="0">
+                      <a:pos x="connsiteX24" y="connsiteY24"/>
+                    </a:cxn>
+                    <a:cxn ang="0">
+                      <a:pos x="connsiteX25" y="connsiteY25"/>
+                    </a:cxn>
+                    <a:cxn ang="0">
+                      <a:pos x="connsiteX26" y="connsiteY26"/>
+                    </a:cxn>
+                    <a:cxn ang="0">
+                      <a:pos x="connsiteX27" y="connsiteY27"/>
+                    </a:cxn>
+                  </a:cxnLst>
+                  <a:rect l="l" t="t" r="r" b="b"/>
+                  <a:pathLst>
+                    <a:path w="713540" h="457256">
+                      <a:moveTo>
+                        <a:pt x="96715" y="334108"/>
+                      </a:moveTo>
+                      <a:cubicBezTo>
+                        <a:pt x="70338" y="328246"/>
+                        <a:pt x="42183" y="327704"/>
+                        <a:pt x="17585" y="316523"/>
+                      </a:cubicBezTo>
+                      <a:cubicBezTo>
+                        <a:pt x="7965" y="312150"/>
+                        <a:pt x="0" y="300713"/>
+                        <a:pt x="0" y="290146"/>
+                      </a:cubicBezTo>
+                      <a:cubicBezTo>
+                        <a:pt x="0" y="222632"/>
+                        <a:pt x="3454" y="174142"/>
+                        <a:pt x="52754" y="131885"/>
+                      </a:cubicBezTo>
+                      <a:cubicBezTo>
+                        <a:pt x="59791" y="125854"/>
+                        <a:pt x="70339" y="126024"/>
+                        <a:pt x="79131" y="123093"/>
+                      </a:cubicBezTo>
+                      <a:cubicBezTo>
+                        <a:pt x="96716" y="126024"/>
+                        <a:pt x="114810" y="126763"/>
+                        <a:pt x="131885" y="131885"/>
+                      </a:cubicBezTo>
+                      <a:cubicBezTo>
+                        <a:pt x="144439" y="135651"/>
+                        <a:pt x="154126" y="151624"/>
+                        <a:pt x="167054" y="149469"/>
+                      </a:cubicBezTo>
+                      <a:cubicBezTo>
+                        <a:pt x="177477" y="147732"/>
+                        <a:pt x="178777" y="131885"/>
+                        <a:pt x="184639" y="123093"/>
+                      </a:cubicBezTo>
+                      <a:cubicBezTo>
+                        <a:pt x="187570" y="93785"/>
+                        <a:pt x="180259" y="61514"/>
+                        <a:pt x="193431" y="35169"/>
+                      </a:cubicBezTo>
+                      <a:cubicBezTo>
+                        <a:pt x="200489" y="21053"/>
+                        <a:pt x="222614" y="23126"/>
+                        <a:pt x="237392" y="17585"/>
+                      </a:cubicBezTo>
+                      <a:cubicBezTo>
+                        <a:pt x="280805" y="1305"/>
+                        <a:pt x="277871" y="7226"/>
+                        <a:pt x="342900" y="0"/>
+                      </a:cubicBezTo>
+                      <a:cubicBezTo>
+                        <a:pt x="354623" y="2931"/>
+                        <a:pt x="367577" y="2798"/>
+                        <a:pt x="378069" y="8793"/>
+                      </a:cubicBezTo>
+                      <a:cubicBezTo>
+                        <a:pt x="413069" y="28793"/>
+                        <a:pt x="398971" y="33010"/>
+                        <a:pt x="413239" y="61546"/>
+                      </a:cubicBezTo>
+                      <a:cubicBezTo>
+                        <a:pt x="447324" y="129715"/>
+                        <a:pt x="417518" y="48007"/>
+                        <a:pt x="439615" y="114300"/>
+                      </a:cubicBezTo>
+                      <a:cubicBezTo>
+                        <a:pt x="457275" y="102527"/>
+                        <a:pt x="480881" y="85215"/>
+                        <a:pt x="501162" y="79131"/>
+                      </a:cubicBezTo>
+                      <a:cubicBezTo>
+                        <a:pt x="518237" y="74008"/>
+                        <a:pt x="536434" y="73835"/>
+                        <a:pt x="553915" y="70339"/>
+                      </a:cubicBezTo>
+                      <a:cubicBezTo>
+                        <a:pt x="565764" y="67969"/>
+                        <a:pt x="577362" y="64477"/>
+                        <a:pt x="589085" y="61546"/>
+                      </a:cubicBezTo>
+                      <a:cubicBezTo>
+                        <a:pt x="603739" y="64477"/>
+                        <a:pt x="620886" y="61653"/>
+                        <a:pt x="633046" y="70339"/>
+                      </a:cubicBezTo>
+                      <a:cubicBezTo>
+                        <a:pt x="650034" y="82474"/>
+                        <a:pt x="656361" y="134158"/>
+                        <a:pt x="659423" y="149469"/>
+                      </a:cubicBezTo>
+                      <a:cubicBezTo>
+                        <a:pt x="656492" y="172915"/>
+                        <a:pt x="656848" y="197012"/>
+                        <a:pt x="650631" y="219808"/>
+                      </a:cubicBezTo>
+                      <a:cubicBezTo>
+                        <a:pt x="647851" y="230003"/>
+                        <a:pt x="633046" y="235618"/>
+                        <a:pt x="633046" y="246185"/>
+                      </a:cubicBezTo>
+                      <a:cubicBezTo>
+                        <a:pt x="633046" y="265469"/>
+                        <a:pt x="677835" y="292965"/>
+                        <a:pt x="685800" y="298939"/>
+                      </a:cubicBezTo>
+                      <a:cubicBezTo>
+                        <a:pt x="691662" y="313593"/>
+                        <a:pt x="697843" y="328122"/>
+                        <a:pt x="703385" y="342900"/>
+                      </a:cubicBezTo>
+                      <a:cubicBezTo>
+                        <a:pt x="714407" y="372292"/>
+                        <a:pt x="722370" y="389623"/>
+                        <a:pt x="694592" y="422031"/>
+                      </a:cubicBezTo>
+                      <a:cubicBezTo>
+                        <a:pt x="686728" y="431206"/>
+                        <a:pt x="671146" y="427892"/>
+                        <a:pt x="659423" y="430823"/>
+                      </a:cubicBezTo>
+                      <a:cubicBezTo>
+                        <a:pt x="656620" y="432225"/>
+                        <a:pt x="607941" y="458638"/>
+                        <a:pt x="597877" y="457200"/>
+                      </a:cubicBezTo>
+                      <a:cubicBezTo>
+                        <a:pt x="584902" y="455347"/>
+                        <a:pt x="574755" y="444779"/>
+                        <a:pt x="562708" y="439616"/>
+                      </a:cubicBezTo>
+                      <a:cubicBezTo>
+                        <a:pt x="533551" y="427120"/>
+                        <a:pt x="536331" y="440969"/>
+                        <a:pt x="536331" y="422031"/>
+                      </a:cubicBezTo>
+                    </a:path>
+                  </a:pathLst>
+                </a:custGeom>
+                <a:ln w="28575"/>
+              </p:spPr>
+              <p:style>
+                <a:lnRef idx="1">
+                  <a:schemeClr val="dk1"/>
+                </a:lnRef>
+                <a:fillRef idx="0">
+                  <a:schemeClr val="dk1"/>
+                </a:fillRef>
+                <a:effectRef idx="0">
+                  <a:schemeClr val="dk1"/>
+                </a:effectRef>
+                <a:fontRef idx="minor">
+                  <a:schemeClr val="tx1"/>
+                </a:fontRef>
+              </p:style>
+              <p:txBody>
+                <a:bodyPr rtlCol="0" anchor="ctr"/>
+                <a:lstStyle/>
+                <a:p>
+                  <a:pPr algn="ctr"/>
+                  <a:endParaRPr lang="en-US"/>
+                </a:p>
+              </p:txBody>
+            </p:sp>
+          </p:grpSp>
+          <p:grpSp>
+            <p:nvGrpSpPr>
+              <p:cNvPr id="56" name="Group 55">
+                <a:extLst>
+                  <a:ext uri="{FF2B5EF4-FFF2-40B4-BE49-F238E27FC236}">
+                    <a16:creationId xmlns:a16="http://schemas.microsoft.com/office/drawing/2014/main" id="{60B84070-B777-46A9-8BCC-2FD13593388E}"/>
+                  </a:ext>
+                </a:extLst>
+              </p:cNvPr>
+              <p:cNvGrpSpPr/>
+              <p:nvPr/>
+            </p:nvGrpSpPr>
+            <p:grpSpPr>
+              <a:xfrm rot="7499415">
+                <a:off x="2537826" y="4038140"/>
+                <a:ext cx="713540" cy="685799"/>
+                <a:chOff x="2259623" y="3349869"/>
+                <a:chExt cx="713540" cy="685799"/>
+              </a:xfrm>
+            </p:grpSpPr>
+            <p:cxnSp>
+              <p:nvCxnSpPr>
+                <p:cNvPr id="62" name="Straight Connector 61">
+                  <a:extLst>
+                    <a:ext uri="{FF2B5EF4-FFF2-40B4-BE49-F238E27FC236}">
+                      <a16:creationId xmlns:a16="http://schemas.microsoft.com/office/drawing/2014/main" id="{BFB49B75-F3B9-478C-B1F7-BFEA37130810}"/>
+                    </a:ext>
+                  </a:extLst>
+                </p:cNvPr>
+                <p:cNvCxnSpPr/>
+                <p:nvPr/>
+              </p:nvCxnSpPr>
+              <p:spPr>
+                <a:xfrm>
+                  <a:off x="2409091" y="3543300"/>
+                  <a:ext cx="105508" cy="457200"/>
+                </a:xfrm>
+                <a:prstGeom prst="line">
+                  <a:avLst/>
+                </a:prstGeom>
+                <a:ln w="28575"/>
+              </p:spPr>
+              <p:style>
+                <a:lnRef idx="1">
+                  <a:schemeClr val="dk1"/>
+                </a:lnRef>
+                <a:fillRef idx="0">
+                  <a:schemeClr val="dk1"/>
+                </a:fillRef>
+                <a:effectRef idx="0">
+                  <a:schemeClr val="dk1"/>
+                </a:effectRef>
+                <a:fontRef idx="minor">
+                  <a:schemeClr val="tx1"/>
+                </a:fontRef>
+              </p:style>
+            </p:cxnSp>
+            <p:cxnSp>
+              <p:nvCxnSpPr>
+                <p:cNvPr id="63" name="Straight Connector 62">
+                  <a:extLst>
+                    <a:ext uri="{FF2B5EF4-FFF2-40B4-BE49-F238E27FC236}">
+                      <a16:creationId xmlns:a16="http://schemas.microsoft.com/office/drawing/2014/main" id="{384BF47F-E888-435B-9EDD-0D89F31B79C5}"/>
+                    </a:ext>
+                  </a:extLst>
+                </p:cNvPr>
+                <p:cNvCxnSpPr>
+                  <a:cxnSpLocks/>
+                </p:cNvCxnSpPr>
+                <p:nvPr/>
+              </p:nvCxnSpPr>
+              <p:spPr>
+                <a:xfrm>
+                  <a:off x="2593731" y="3534508"/>
+                  <a:ext cx="0" cy="457200"/>
+                </a:xfrm>
+                <a:prstGeom prst="line">
+                  <a:avLst/>
+                </a:prstGeom>
+                <a:ln w="28575"/>
+              </p:spPr>
+              <p:style>
+                <a:lnRef idx="1">
+                  <a:schemeClr val="dk1"/>
+                </a:lnRef>
+                <a:fillRef idx="0">
+                  <a:schemeClr val="dk1"/>
+                </a:fillRef>
+                <a:effectRef idx="0">
+                  <a:schemeClr val="dk1"/>
+                </a:effectRef>
+                <a:fontRef idx="minor">
+                  <a:schemeClr val="tx1"/>
+                </a:fontRef>
+              </p:style>
+            </p:cxnSp>
+            <p:cxnSp>
+              <p:nvCxnSpPr>
+                <p:cNvPr id="64" name="Straight Connector 63">
+                  <a:extLst>
+                    <a:ext uri="{FF2B5EF4-FFF2-40B4-BE49-F238E27FC236}">
+                      <a16:creationId xmlns:a16="http://schemas.microsoft.com/office/drawing/2014/main" id="{110333CA-4402-40F6-BA1D-1D702F9FD11F}"/>
+                    </a:ext>
+                  </a:extLst>
+                </p:cNvPr>
+                <p:cNvCxnSpPr>
+                  <a:cxnSpLocks/>
+                </p:cNvCxnSpPr>
+                <p:nvPr/>
+              </p:nvCxnSpPr>
+              <p:spPr>
+                <a:xfrm flipH="1">
+                  <a:off x="2646488" y="3578468"/>
+                  <a:ext cx="137874" cy="457200"/>
+                </a:xfrm>
+                <a:prstGeom prst="line">
+                  <a:avLst/>
+                </a:prstGeom>
+                <a:ln w="28575"/>
+              </p:spPr>
+              <p:style>
+                <a:lnRef idx="1">
+                  <a:schemeClr val="dk1"/>
+                </a:lnRef>
+                <a:fillRef idx="0">
+                  <a:schemeClr val="dk1"/>
+                </a:fillRef>
+                <a:effectRef idx="0">
+                  <a:schemeClr val="dk1"/>
+                </a:effectRef>
+                <a:fontRef idx="minor">
+                  <a:schemeClr val="tx1"/>
+                </a:fontRef>
+              </p:style>
+            </p:cxnSp>
+            <p:sp>
+              <p:nvSpPr>
+                <p:cNvPr id="65" name="Freeform: Shape 64">
+                  <a:extLst>
+                    <a:ext uri="{FF2B5EF4-FFF2-40B4-BE49-F238E27FC236}">
+                      <a16:creationId xmlns:a16="http://schemas.microsoft.com/office/drawing/2014/main" id="{C9F92600-3059-4410-B909-7234835E2D49}"/>
+                    </a:ext>
+                  </a:extLst>
+                </p:cNvPr>
+                <p:cNvSpPr/>
+                <p:nvPr/>
+              </p:nvSpPr>
+              <p:spPr>
+                <a:xfrm>
+                  <a:off x="2259623" y="3349869"/>
+                  <a:ext cx="713540" cy="457256"/>
+                </a:xfrm>
+                <a:custGeom>
+                  <a:avLst/>
+                  <a:gdLst>
+                    <a:gd name="connsiteX0" fmla="*/ 96715 w 713540"/>
+                    <a:gd name="connsiteY0" fmla="*/ 334108 h 457256"/>
+                    <a:gd name="connsiteX1" fmla="*/ 17585 w 713540"/>
+                    <a:gd name="connsiteY1" fmla="*/ 316523 h 457256"/>
+                    <a:gd name="connsiteX2" fmla="*/ 0 w 713540"/>
+                    <a:gd name="connsiteY2" fmla="*/ 290146 h 457256"/>
+                    <a:gd name="connsiteX3" fmla="*/ 52754 w 713540"/>
+                    <a:gd name="connsiteY3" fmla="*/ 131885 h 457256"/>
+                    <a:gd name="connsiteX4" fmla="*/ 79131 w 713540"/>
+                    <a:gd name="connsiteY4" fmla="*/ 123093 h 457256"/>
+                    <a:gd name="connsiteX5" fmla="*/ 131885 w 713540"/>
+                    <a:gd name="connsiteY5" fmla="*/ 131885 h 457256"/>
+                    <a:gd name="connsiteX6" fmla="*/ 167054 w 713540"/>
+                    <a:gd name="connsiteY6" fmla="*/ 149469 h 457256"/>
+                    <a:gd name="connsiteX7" fmla="*/ 184639 w 713540"/>
+                    <a:gd name="connsiteY7" fmla="*/ 123093 h 457256"/>
+                    <a:gd name="connsiteX8" fmla="*/ 193431 w 713540"/>
+                    <a:gd name="connsiteY8" fmla="*/ 35169 h 457256"/>
+                    <a:gd name="connsiteX9" fmla="*/ 237392 w 713540"/>
+                    <a:gd name="connsiteY9" fmla="*/ 17585 h 457256"/>
+                    <a:gd name="connsiteX10" fmla="*/ 342900 w 713540"/>
+                    <a:gd name="connsiteY10" fmla="*/ 0 h 457256"/>
+                    <a:gd name="connsiteX11" fmla="*/ 378069 w 713540"/>
+                    <a:gd name="connsiteY11" fmla="*/ 8793 h 457256"/>
+                    <a:gd name="connsiteX12" fmla="*/ 413239 w 713540"/>
+                    <a:gd name="connsiteY12" fmla="*/ 61546 h 457256"/>
+                    <a:gd name="connsiteX13" fmla="*/ 439615 w 713540"/>
+                    <a:gd name="connsiteY13" fmla="*/ 114300 h 457256"/>
+                    <a:gd name="connsiteX14" fmla="*/ 501162 w 713540"/>
+                    <a:gd name="connsiteY14" fmla="*/ 79131 h 457256"/>
+                    <a:gd name="connsiteX15" fmla="*/ 553915 w 713540"/>
+                    <a:gd name="connsiteY15" fmla="*/ 70339 h 457256"/>
+                    <a:gd name="connsiteX16" fmla="*/ 589085 w 713540"/>
+                    <a:gd name="connsiteY16" fmla="*/ 61546 h 457256"/>
+                    <a:gd name="connsiteX17" fmla="*/ 633046 w 713540"/>
+                    <a:gd name="connsiteY17" fmla="*/ 70339 h 457256"/>
+                    <a:gd name="connsiteX18" fmla="*/ 659423 w 713540"/>
+                    <a:gd name="connsiteY18" fmla="*/ 149469 h 457256"/>
+                    <a:gd name="connsiteX19" fmla="*/ 650631 w 713540"/>
+                    <a:gd name="connsiteY19" fmla="*/ 219808 h 457256"/>
+                    <a:gd name="connsiteX20" fmla="*/ 633046 w 713540"/>
+                    <a:gd name="connsiteY20" fmla="*/ 246185 h 457256"/>
+                    <a:gd name="connsiteX21" fmla="*/ 685800 w 713540"/>
+                    <a:gd name="connsiteY21" fmla="*/ 298939 h 457256"/>
+                    <a:gd name="connsiteX22" fmla="*/ 703385 w 713540"/>
+                    <a:gd name="connsiteY22" fmla="*/ 342900 h 457256"/>
+                    <a:gd name="connsiteX23" fmla="*/ 694592 w 713540"/>
+                    <a:gd name="connsiteY23" fmla="*/ 422031 h 457256"/>
+                    <a:gd name="connsiteX24" fmla="*/ 659423 w 713540"/>
+                    <a:gd name="connsiteY24" fmla="*/ 430823 h 457256"/>
+                    <a:gd name="connsiteX25" fmla="*/ 597877 w 713540"/>
+                    <a:gd name="connsiteY25" fmla="*/ 457200 h 457256"/>
+                    <a:gd name="connsiteX26" fmla="*/ 562708 w 713540"/>
+                    <a:gd name="connsiteY26" fmla="*/ 439616 h 457256"/>
+                    <a:gd name="connsiteX27" fmla="*/ 536331 w 713540"/>
+                    <a:gd name="connsiteY27" fmla="*/ 422031 h 457256"/>
+                  </a:gdLst>
+                  <a:ahLst/>
+                  <a:cxnLst>
+                    <a:cxn ang="0">
+                      <a:pos x="connsiteX0" y="connsiteY0"/>
+                    </a:cxn>
+                    <a:cxn ang="0">
+                      <a:pos x="connsiteX1" y="connsiteY1"/>
+                    </a:cxn>
+                    <a:cxn ang="0">
+                      <a:pos x="connsiteX2" y="connsiteY2"/>
+                    </a:cxn>
+                    <a:cxn ang="0">
+                      <a:pos x="connsiteX3" y="connsiteY3"/>
+                    </a:cxn>
+                    <a:cxn ang="0">
+                      <a:pos x="connsiteX4" y="connsiteY4"/>
+                    </a:cxn>
+                    <a:cxn ang="0">
+                      <a:pos x="connsiteX5" y="connsiteY5"/>
+                    </a:cxn>
+                    <a:cxn ang="0">
+                      <a:pos x="connsiteX6" y="connsiteY6"/>
+                    </a:cxn>
+                    <a:cxn ang="0">
+                      <a:pos x="connsiteX7" y="connsiteY7"/>
+                    </a:cxn>
+                    <a:cxn ang="0">
+                      <a:pos x="connsiteX8" y="connsiteY8"/>
+                    </a:cxn>
+                    <a:cxn ang="0">
+                      <a:pos x="connsiteX9" y="connsiteY9"/>
+                    </a:cxn>
+                    <a:cxn ang="0">
+                      <a:pos x="connsiteX10" y="connsiteY10"/>
+                    </a:cxn>
+                    <a:cxn ang="0">
+                      <a:pos x="connsiteX11" y="connsiteY11"/>
+                    </a:cxn>
+                    <a:cxn ang="0">
+                      <a:pos x="connsiteX12" y="connsiteY12"/>
+                    </a:cxn>
+                    <a:cxn ang="0">
+                      <a:pos x="connsiteX13" y="connsiteY13"/>
+                    </a:cxn>
+                    <a:cxn ang="0">
+                      <a:pos x="connsiteX14" y="connsiteY14"/>
+                    </a:cxn>
+                    <a:cxn ang="0">
+                      <a:pos x="connsiteX15" y="connsiteY15"/>
+                    </a:cxn>
+                    <a:cxn ang="0">
+                      <a:pos x="connsiteX16" y="connsiteY16"/>
+                    </a:cxn>
+                    <a:cxn ang="0">
+                      <a:pos x="connsiteX17" y="connsiteY17"/>
+                    </a:cxn>
+                    <a:cxn ang="0">
+                      <a:pos x="connsiteX18" y="connsiteY18"/>
+                    </a:cxn>
+                    <a:cxn ang="0">
+                      <a:pos x="connsiteX19" y="connsiteY19"/>
+                    </a:cxn>
+                    <a:cxn ang="0">
+                      <a:pos x="connsiteX20" y="connsiteY20"/>
+                    </a:cxn>
+                    <a:cxn ang="0">
+                      <a:pos x="connsiteX21" y="connsiteY21"/>
+                    </a:cxn>
+                    <a:cxn ang="0">
+                      <a:pos x="connsiteX22" y="connsiteY22"/>
+                    </a:cxn>
+                    <a:cxn ang="0">
+                      <a:pos x="connsiteX23" y="connsiteY23"/>
+                    </a:cxn>
+                    <a:cxn ang="0">
+                      <a:pos x="connsiteX24" y="connsiteY24"/>
+                    </a:cxn>
+                    <a:cxn ang="0">
+                      <a:pos x="connsiteX25" y="connsiteY25"/>
+                    </a:cxn>
+                    <a:cxn ang="0">
+                      <a:pos x="connsiteX26" y="connsiteY26"/>
+                    </a:cxn>
+                    <a:cxn ang="0">
+                      <a:pos x="connsiteX27" y="connsiteY27"/>
+                    </a:cxn>
+                  </a:cxnLst>
+                  <a:rect l="l" t="t" r="r" b="b"/>
+                  <a:pathLst>
+                    <a:path w="713540" h="457256">
+                      <a:moveTo>
+                        <a:pt x="96715" y="334108"/>
+                      </a:moveTo>
+                      <a:cubicBezTo>
+                        <a:pt x="70338" y="328246"/>
+                        <a:pt x="42183" y="327704"/>
+                        <a:pt x="17585" y="316523"/>
+                      </a:cubicBezTo>
+                      <a:cubicBezTo>
+                        <a:pt x="7965" y="312150"/>
+                        <a:pt x="0" y="300713"/>
+                        <a:pt x="0" y="290146"/>
+                      </a:cubicBezTo>
+                      <a:cubicBezTo>
+                        <a:pt x="0" y="222632"/>
+                        <a:pt x="3454" y="174142"/>
+                        <a:pt x="52754" y="131885"/>
+                      </a:cubicBezTo>
+                      <a:cubicBezTo>
+                        <a:pt x="59791" y="125854"/>
+                        <a:pt x="70339" y="126024"/>
+                        <a:pt x="79131" y="123093"/>
+                      </a:cubicBezTo>
+                      <a:cubicBezTo>
+                        <a:pt x="96716" y="126024"/>
+                        <a:pt x="114810" y="126763"/>
+                        <a:pt x="131885" y="131885"/>
+                      </a:cubicBezTo>
+                      <a:cubicBezTo>
+                        <a:pt x="144439" y="135651"/>
+                        <a:pt x="154126" y="151624"/>
+                        <a:pt x="167054" y="149469"/>
+                      </a:cubicBezTo>
+                      <a:cubicBezTo>
+                        <a:pt x="177477" y="147732"/>
+                        <a:pt x="178777" y="131885"/>
+                        <a:pt x="184639" y="123093"/>
+                      </a:cubicBezTo>
+                      <a:cubicBezTo>
+                        <a:pt x="187570" y="93785"/>
+                        <a:pt x="180259" y="61514"/>
+                        <a:pt x="193431" y="35169"/>
+                      </a:cubicBezTo>
+                      <a:cubicBezTo>
+                        <a:pt x="200489" y="21053"/>
+                        <a:pt x="222614" y="23126"/>
+                        <a:pt x="237392" y="17585"/>
+                      </a:cubicBezTo>
+                      <a:cubicBezTo>
+                        <a:pt x="280805" y="1305"/>
+                        <a:pt x="277871" y="7226"/>
+                        <a:pt x="342900" y="0"/>
+                      </a:cubicBezTo>
+                      <a:cubicBezTo>
+                        <a:pt x="354623" y="2931"/>
+                        <a:pt x="367577" y="2798"/>
+                        <a:pt x="378069" y="8793"/>
+                      </a:cubicBezTo>
+                      <a:cubicBezTo>
+                        <a:pt x="413069" y="28793"/>
+                        <a:pt x="398971" y="33010"/>
+                        <a:pt x="413239" y="61546"/>
+                      </a:cubicBezTo>
+                      <a:cubicBezTo>
+                        <a:pt x="447324" y="129715"/>
+                        <a:pt x="417518" y="48007"/>
+                        <a:pt x="439615" y="114300"/>
+                      </a:cubicBezTo>
+                      <a:cubicBezTo>
+                        <a:pt x="457275" y="102527"/>
+                        <a:pt x="480881" y="85215"/>
+                        <a:pt x="501162" y="79131"/>
+                      </a:cubicBezTo>
+                      <a:cubicBezTo>
+                        <a:pt x="518237" y="74008"/>
+                        <a:pt x="536434" y="73835"/>
+                        <a:pt x="553915" y="70339"/>
+                      </a:cubicBezTo>
+                      <a:cubicBezTo>
+                        <a:pt x="565764" y="67969"/>
+                        <a:pt x="577362" y="64477"/>
+                        <a:pt x="589085" y="61546"/>
+                      </a:cubicBezTo>
+                      <a:cubicBezTo>
+                        <a:pt x="603739" y="64477"/>
+                        <a:pt x="620886" y="61653"/>
+                        <a:pt x="633046" y="70339"/>
+                      </a:cubicBezTo>
+                      <a:cubicBezTo>
+                        <a:pt x="650034" y="82474"/>
+                        <a:pt x="656361" y="134158"/>
+                        <a:pt x="659423" y="149469"/>
+                      </a:cubicBezTo>
+                      <a:cubicBezTo>
+                        <a:pt x="656492" y="172915"/>
+                        <a:pt x="656848" y="197012"/>
+                        <a:pt x="650631" y="219808"/>
+                      </a:cubicBezTo>
+                      <a:cubicBezTo>
+                        <a:pt x="647851" y="230003"/>
+                        <a:pt x="633046" y="235618"/>
+                        <a:pt x="633046" y="246185"/>
+                      </a:cubicBezTo>
+                      <a:cubicBezTo>
+                        <a:pt x="633046" y="265469"/>
+                        <a:pt x="677835" y="292965"/>
+                        <a:pt x="685800" y="298939"/>
+                      </a:cubicBezTo>
+                      <a:cubicBezTo>
+                        <a:pt x="691662" y="313593"/>
+                        <a:pt x="697843" y="328122"/>
+                        <a:pt x="703385" y="342900"/>
+                      </a:cubicBezTo>
+                      <a:cubicBezTo>
+                        <a:pt x="714407" y="372292"/>
+                        <a:pt x="722370" y="389623"/>
+                        <a:pt x="694592" y="422031"/>
+                      </a:cubicBezTo>
+                      <a:cubicBezTo>
+                        <a:pt x="686728" y="431206"/>
+                        <a:pt x="671146" y="427892"/>
+                        <a:pt x="659423" y="430823"/>
+                      </a:cubicBezTo>
+                      <a:cubicBezTo>
+                        <a:pt x="656620" y="432225"/>
+                        <a:pt x="607941" y="458638"/>
+                        <a:pt x="597877" y="457200"/>
+                      </a:cubicBezTo>
+                      <a:cubicBezTo>
+                        <a:pt x="584902" y="455347"/>
+                        <a:pt x="574755" y="444779"/>
+                        <a:pt x="562708" y="439616"/>
+                      </a:cubicBezTo>
+                      <a:cubicBezTo>
+                        <a:pt x="533551" y="427120"/>
+                        <a:pt x="536331" y="440969"/>
+                        <a:pt x="536331" y="422031"/>
+                      </a:cubicBezTo>
+                    </a:path>
+                  </a:pathLst>
+                </a:custGeom>
+                <a:ln w="28575"/>
+              </p:spPr>
+              <p:style>
+                <a:lnRef idx="1">
+                  <a:schemeClr val="dk1"/>
+                </a:lnRef>
+                <a:fillRef idx="0">
+                  <a:schemeClr val="dk1"/>
+                </a:fillRef>
+                <a:effectRef idx="0">
+                  <a:schemeClr val="dk1"/>
+                </a:effectRef>
+                <a:fontRef idx="minor">
+                  <a:schemeClr val="tx1"/>
+                </a:fontRef>
+              </p:style>
+              <p:txBody>
+                <a:bodyPr rtlCol="0" anchor="ctr"/>
+                <a:lstStyle/>
+                <a:p>
+                  <a:pPr algn="ctr"/>
+                  <a:endParaRPr lang="en-US"/>
+                </a:p>
+              </p:txBody>
+            </p:sp>
+          </p:grpSp>
+          <p:grpSp>
+            <p:nvGrpSpPr>
+              <p:cNvPr id="57" name="Group 56">
+                <a:extLst>
+                  <a:ext uri="{FF2B5EF4-FFF2-40B4-BE49-F238E27FC236}">
+                    <a16:creationId xmlns:a16="http://schemas.microsoft.com/office/drawing/2014/main" id="{B3C8C141-50FC-4AED-8A17-0DB1495935CA}"/>
+                  </a:ext>
+                </a:extLst>
+              </p:cNvPr>
+              <p:cNvGrpSpPr/>
+              <p:nvPr/>
+            </p:nvGrpSpPr>
+            <p:grpSpPr>
+              <a:xfrm rot="14084301">
+                <a:off x="1878220" y="3928883"/>
+                <a:ext cx="713540" cy="685799"/>
+                <a:chOff x="2259623" y="3349869"/>
+                <a:chExt cx="713540" cy="685799"/>
+              </a:xfrm>
+            </p:grpSpPr>
+            <p:cxnSp>
+              <p:nvCxnSpPr>
+                <p:cNvPr id="58" name="Straight Connector 57">
+                  <a:extLst>
+                    <a:ext uri="{FF2B5EF4-FFF2-40B4-BE49-F238E27FC236}">
+                      <a16:creationId xmlns:a16="http://schemas.microsoft.com/office/drawing/2014/main" id="{2068B9A8-5513-4938-B0F2-EA2C819F6D4A}"/>
+                    </a:ext>
+                  </a:extLst>
+                </p:cNvPr>
+                <p:cNvCxnSpPr/>
+                <p:nvPr/>
+              </p:nvCxnSpPr>
+              <p:spPr>
+                <a:xfrm>
+                  <a:off x="2409091" y="3543300"/>
+                  <a:ext cx="105508" cy="457200"/>
+                </a:xfrm>
+                <a:prstGeom prst="line">
+                  <a:avLst/>
+                </a:prstGeom>
+                <a:ln w="28575"/>
+              </p:spPr>
+              <p:style>
+                <a:lnRef idx="1">
+                  <a:schemeClr val="dk1"/>
+                </a:lnRef>
+                <a:fillRef idx="0">
+                  <a:schemeClr val="dk1"/>
+                </a:fillRef>
+                <a:effectRef idx="0">
+                  <a:schemeClr val="dk1"/>
+                </a:effectRef>
+                <a:fontRef idx="minor">
+                  <a:schemeClr val="tx1"/>
+                </a:fontRef>
+              </p:style>
+            </p:cxnSp>
+            <p:cxnSp>
+              <p:nvCxnSpPr>
+                <p:cNvPr id="59" name="Straight Connector 58">
+                  <a:extLst>
+                    <a:ext uri="{FF2B5EF4-FFF2-40B4-BE49-F238E27FC236}">
+                      <a16:creationId xmlns:a16="http://schemas.microsoft.com/office/drawing/2014/main" id="{B6B339E7-7038-40A3-80C6-5A4AD538127D}"/>
+                    </a:ext>
+                  </a:extLst>
+                </p:cNvPr>
+                <p:cNvCxnSpPr>
+                  <a:cxnSpLocks/>
+                </p:cNvCxnSpPr>
+                <p:nvPr/>
+              </p:nvCxnSpPr>
+              <p:spPr>
+                <a:xfrm>
+                  <a:off x="2593731" y="3534508"/>
+                  <a:ext cx="0" cy="457200"/>
+                </a:xfrm>
+                <a:prstGeom prst="line">
+                  <a:avLst/>
+                </a:prstGeom>
+                <a:ln w="28575"/>
+              </p:spPr>
+              <p:style>
+                <a:lnRef idx="1">
+                  <a:schemeClr val="dk1"/>
+                </a:lnRef>
+                <a:fillRef idx="0">
+                  <a:schemeClr val="dk1"/>
+                </a:fillRef>
+                <a:effectRef idx="0">
+                  <a:schemeClr val="dk1"/>
+                </a:effectRef>
+                <a:fontRef idx="minor">
+                  <a:schemeClr val="tx1"/>
+                </a:fontRef>
+              </p:style>
+            </p:cxnSp>
+            <p:cxnSp>
+              <p:nvCxnSpPr>
+                <p:cNvPr id="60" name="Straight Connector 59">
+                  <a:extLst>
+                    <a:ext uri="{FF2B5EF4-FFF2-40B4-BE49-F238E27FC236}">
+                      <a16:creationId xmlns:a16="http://schemas.microsoft.com/office/drawing/2014/main" id="{E0B1CFD4-6684-4DC3-B9E7-B434B5F34024}"/>
+                    </a:ext>
+                  </a:extLst>
+                </p:cNvPr>
+                <p:cNvCxnSpPr>
+                  <a:cxnSpLocks/>
+                </p:cNvCxnSpPr>
+                <p:nvPr/>
+              </p:nvCxnSpPr>
+              <p:spPr>
+                <a:xfrm flipH="1">
+                  <a:off x="2646488" y="3578468"/>
+                  <a:ext cx="137874" cy="457200"/>
+                </a:xfrm>
+                <a:prstGeom prst="line">
+                  <a:avLst/>
+                </a:prstGeom>
+                <a:ln w="28575"/>
+              </p:spPr>
+              <p:style>
+                <a:lnRef idx="1">
+                  <a:schemeClr val="dk1"/>
+                </a:lnRef>
+                <a:fillRef idx="0">
+                  <a:schemeClr val="dk1"/>
+                </a:fillRef>
+                <a:effectRef idx="0">
+                  <a:schemeClr val="dk1"/>
+                </a:effectRef>
+                <a:fontRef idx="minor">
+                  <a:schemeClr val="tx1"/>
+                </a:fontRef>
+              </p:style>
+            </p:cxnSp>
+            <p:sp>
+              <p:nvSpPr>
+                <p:cNvPr id="61" name="Freeform: Shape 60">
+                  <a:extLst>
+                    <a:ext uri="{FF2B5EF4-FFF2-40B4-BE49-F238E27FC236}">
+                      <a16:creationId xmlns:a16="http://schemas.microsoft.com/office/drawing/2014/main" id="{EB5C9FC0-6686-4B2E-A661-D8525D2A9383}"/>
+                    </a:ext>
+                  </a:extLst>
+                </p:cNvPr>
+                <p:cNvSpPr/>
+                <p:nvPr/>
+              </p:nvSpPr>
+              <p:spPr>
+                <a:xfrm>
+                  <a:off x="2259623" y="3349869"/>
+                  <a:ext cx="713540" cy="457256"/>
+                </a:xfrm>
+                <a:custGeom>
+                  <a:avLst/>
+                  <a:gdLst>
+                    <a:gd name="connsiteX0" fmla="*/ 96715 w 713540"/>
+                    <a:gd name="connsiteY0" fmla="*/ 334108 h 457256"/>
+                    <a:gd name="connsiteX1" fmla="*/ 17585 w 713540"/>
+                    <a:gd name="connsiteY1" fmla="*/ 316523 h 457256"/>
+                    <a:gd name="connsiteX2" fmla="*/ 0 w 713540"/>
+                    <a:gd name="connsiteY2" fmla="*/ 290146 h 457256"/>
+                    <a:gd name="connsiteX3" fmla="*/ 52754 w 713540"/>
+                    <a:gd name="connsiteY3" fmla="*/ 131885 h 457256"/>
+                    <a:gd name="connsiteX4" fmla="*/ 79131 w 713540"/>
+                    <a:gd name="connsiteY4" fmla="*/ 123093 h 457256"/>
+                    <a:gd name="connsiteX5" fmla="*/ 131885 w 713540"/>
+                    <a:gd name="connsiteY5" fmla="*/ 131885 h 457256"/>
+                    <a:gd name="connsiteX6" fmla="*/ 167054 w 713540"/>
+                    <a:gd name="connsiteY6" fmla="*/ 149469 h 457256"/>
+                    <a:gd name="connsiteX7" fmla="*/ 184639 w 713540"/>
+                    <a:gd name="connsiteY7" fmla="*/ 123093 h 457256"/>
+                    <a:gd name="connsiteX8" fmla="*/ 193431 w 713540"/>
+                    <a:gd name="connsiteY8" fmla="*/ 35169 h 457256"/>
+                    <a:gd name="connsiteX9" fmla="*/ 237392 w 713540"/>
+                    <a:gd name="connsiteY9" fmla="*/ 17585 h 457256"/>
+                    <a:gd name="connsiteX10" fmla="*/ 342900 w 713540"/>
+                    <a:gd name="connsiteY10" fmla="*/ 0 h 457256"/>
+                    <a:gd name="connsiteX11" fmla="*/ 378069 w 713540"/>
+                    <a:gd name="connsiteY11" fmla="*/ 8793 h 457256"/>
+                    <a:gd name="connsiteX12" fmla="*/ 413239 w 713540"/>
+                    <a:gd name="connsiteY12" fmla="*/ 61546 h 457256"/>
+                    <a:gd name="connsiteX13" fmla="*/ 439615 w 713540"/>
+                    <a:gd name="connsiteY13" fmla="*/ 114300 h 457256"/>
+                    <a:gd name="connsiteX14" fmla="*/ 501162 w 713540"/>
+                    <a:gd name="connsiteY14" fmla="*/ 79131 h 457256"/>
+                    <a:gd name="connsiteX15" fmla="*/ 553915 w 713540"/>
+                    <a:gd name="connsiteY15" fmla="*/ 70339 h 457256"/>
+                    <a:gd name="connsiteX16" fmla="*/ 589085 w 713540"/>
+                    <a:gd name="connsiteY16" fmla="*/ 61546 h 457256"/>
+                    <a:gd name="connsiteX17" fmla="*/ 633046 w 713540"/>
+                    <a:gd name="connsiteY17" fmla="*/ 70339 h 457256"/>
+                    <a:gd name="connsiteX18" fmla="*/ 659423 w 713540"/>
+                    <a:gd name="connsiteY18" fmla="*/ 149469 h 457256"/>
+                    <a:gd name="connsiteX19" fmla="*/ 650631 w 713540"/>
+                    <a:gd name="connsiteY19" fmla="*/ 219808 h 457256"/>
+                    <a:gd name="connsiteX20" fmla="*/ 633046 w 713540"/>
+                    <a:gd name="connsiteY20" fmla="*/ 246185 h 457256"/>
+                    <a:gd name="connsiteX21" fmla="*/ 685800 w 713540"/>
+                    <a:gd name="connsiteY21" fmla="*/ 298939 h 457256"/>
+                    <a:gd name="connsiteX22" fmla="*/ 703385 w 713540"/>
+                    <a:gd name="connsiteY22" fmla="*/ 342900 h 457256"/>
+                    <a:gd name="connsiteX23" fmla="*/ 694592 w 713540"/>
+                    <a:gd name="connsiteY23" fmla="*/ 422031 h 457256"/>
+                    <a:gd name="connsiteX24" fmla="*/ 659423 w 713540"/>
+                    <a:gd name="connsiteY24" fmla="*/ 430823 h 457256"/>
+                    <a:gd name="connsiteX25" fmla="*/ 597877 w 713540"/>
+                    <a:gd name="connsiteY25" fmla="*/ 457200 h 457256"/>
+                    <a:gd name="connsiteX26" fmla="*/ 562708 w 713540"/>
+                    <a:gd name="connsiteY26" fmla="*/ 439616 h 457256"/>
+                    <a:gd name="connsiteX27" fmla="*/ 536331 w 713540"/>
+                    <a:gd name="connsiteY27" fmla="*/ 422031 h 457256"/>
+                  </a:gdLst>
+                  <a:ahLst/>
+                  <a:cxnLst>
+                    <a:cxn ang="0">
+                      <a:pos x="connsiteX0" y="connsiteY0"/>
+                    </a:cxn>
+                    <a:cxn ang="0">
+                      <a:pos x="connsiteX1" y="connsiteY1"/>
+                    </a:cxn>
+                    <a:cxn ang="0">
+                      <a:pos x="connsiteX2" y="connsiteY2"/>
+                    </a:cxn>
+                    <a:cxn ang="0">
+                      <a:pos x="connsiteX3" y="connsiteY3"/>
+                    </a:cxn>
+                    <a:cxn ang="0">
+                      <a:pos x="connsiteX4" y="connsiteY4"/>
+                    </a:cxn>
+                    <a:cxn ang="0">
+                      <a:pos x="connsiteX5" y="connsiteY5"/>
+                    </a:cxn>
+                    <a:cxn ang="0">
+                      <a:pos x="connsiteX6" y="connsiteY6"/>
+                    </a:cxn>
+                    <a:cxn ang="0">
+                      <a:pos x="connsiteX7" y="connsiteY7"/>
+                    </a:cxn>
+                    <a:cxn ang="0">
+                      <a:pos x="connsiteX8" y="connsiteY8"/>
+                    </a:cxn>
+                    <a:cxn ang="0">
+                      <a:pos x="connsiteX9" y="connsiteY9"/>
+                    </a:cxn>
+                    <a:cxn ang="0">
+                      <a:pos x="connsiteX10" y="connsiteY10"/>
+                    </a:cxn>
+                    <a:cxn ang="0">
+                      <a:pos x="connsiteX11" y="connsiteY11"/>
+                    </a:cxn>
+                    <a:cxn ang="0">
+                      <a:pos x="connsiteX12" y="connsiteY12"/>
+                    </a:cxn>
+                    <a:cxn ang="0">
+                      <a:pos x="connsiteX13" y="connsiteY13"/>
+                    </a:cxn>
+                    <a:cxn ang="0">
+                      <a:pos x="connsiteX14" y="connsiteY14"/>
+                    </a:cxn>
+                    <a:cxn ang="0">
+                      <a:pos x="connsiteX15" y="connsiteY15"/>
+                    </a:cxn>
+                    <a:cxn ang="0">
+                      <a:pos x="connsiteX16" y="connsiteY16"/>
+                    </a:cxn>
+                    <a:cxn ang="0">
+                      <a:pos x="connsiteX17" y="connsiteY17"/>
+                    </a:cxn>
+                    <a:cxn ang="0">
+                      <a:pos x="connsiteX18" y="connsiteY18"/>
+                    </a:cxn>
+                    <a:cxn ang="0">
+                      <a:pos x="connsiteX19" y="connsiteY19"/>
+                    </a:cxn>
+                    <a:cxn ang="0">
+                      <a:pos x="connsiteX20" y="connsiteY20"/>
+                    </a:cxn>
+                    <a:cxn ang="0">
+                      <a:pos x="connsiteX21" y="connsiteY21"/>
+                    </a:cxn>
+                    <a:cxn ang="0">
+                      <a:pos x="connsiteX22" y="connsiteY22"/>
+                    </a:cxn>
+                    <a:cxn ang="0">
+                      <a:pos x="connsiteX23" y="connsiteY23"/>
+                    </a:cxn>
+                    <a:cxn ang="0">
+                      <a:pos x="connsiteX24" y="connsiteY24"/>
+                    </a:cxn>
+                    <a:cxn ang="0">
+                      <a:pos x="connsiteX25" y="connsiteY25"/>
+                    </a:cxn>
+                    <a:cxn ang="0">
+                      <a:pos x="connsiteX26" y="connsiteY26"/>
+                    </a:cxn>
+                    <a:cxn ang="0">
+                      <a:pos x="connsiteX27" y="connsiteY27"/>
+                    </a:cxn>
+                  </a:cxnLst>
+                  <a:rect l="l" t="t" r="r" b="b"/>
+                  <a:pathLst>
+                    <a:path w="713540" h="457256">
+                      <a:moveTo>
+                        <a:pt x="96715" y="334108"/>
+                      </a:moveTo>
+                      <a:cubicBezTo>
+                        <a:pt x="70338" y="328246"/>
+                        <a:pt x="42183" y="327704"/>
+                        <a:pt x="17585" y="316523"/>
+                      </a:cubicBezTo>
+                      <a:cubicBezTo>
+                        <a:pt x="7965" y="312150"/>
+                        <a:pt x="0" y="300713"/>
+                        <a:pt x="0" y="290146"/>
+                      </a:cubicBezTo>
+                      <a:cubicBezTo>
+                        <a:pt x="0" y="222632"/>
+                        <a:pt x="3454" y="174142"/>
+                        <a:pt x="52754" y="131885"/>
+                      </a:cubicBezTo>
+                      <a:cubicBezTo>
+                        <a:pt x="59791" y="125854"/>
+                        <a:pt x="70339" y="126024"/>
+                        <a:pt x="79131" y="123093"/>
+                      </a:cubicBezTo>
+                      <a:cubicBezTo>
+                        <a:pt x="96716" y="126024"/>
+                        <a:pt x="114810" y="126763"/>
+                        <a:pt x="131885" y="131885"/>
+                      </a:cubicBezTo>
+                      <a:cubicBezTo>
+                        <a:pt x="144439" y="135651"/>
+                        <a:pt x="154126" y="151624"/>
+                        <a:pt x="167054" y="149469"/>
+                      </a:cubicBezTo>
+                      <a:cubicBezTo>
+                        <a:pt x="177477" y="147732"/>
+                        <a:pt x="178777" y="131885"/>
+                        <a:pt x="184639" y="123093"/>
+                      </a:cubicBezTo>
+                      <a:cubicBezTo>
+                        <a:pt x="187570" y="93785"/>
+                        <a:pt x="180259" y="61514"/>
+                        <a:pt x="193431" y="35169"/>
+                      </a:cubicBezTo>
+                      <a:cubicBezTo>
+                        <a:pt x="200489" y="21053"/>
+                        <a:pt x="222614" y="23126"/>
+                        <a:pt x="237392" y="17585"/>
+                      </a:cubicBezTo>
+                      <a:cubicBezTo>
+                        <a:pt x="280805" y="1305"/>
+                        <a:pt x="277871" y="7226"/>
+                        <a:pt x="342900" y="0"/>
+                      </a:cubicBezTo>
+                      <a:cubicBezTo>
+                        <a:pt x="354623" y="2931"/>
+                        <a:pt x="367577" y="2798"/>
+                        <a:pt x="378069" y="8793"/>
+                      </a:cubicBezTo>
+                      <a:cubicBezTo>
+                        <a:pt x="413069" y="28793"/>
+                        <a:pt x="398971" y="33010"/>
+                        <a:pt x="413239" y="61546"/>
+                      </a:cubicBezTo>
+                      <a:cubicBezTo>
+                        <a:pt x="447324" y="129715"/>
+                        <a:pt x="417518" y="48007"/>
+                        <a:pt x="439615" y="114300"/>
+                      </a:cubicBezTo>
+                      <a:cubicBezTo>
+                        <a:pt x="457275" y="102527"/>
+                        <a:pt x="480881" y="85215"/>
+                        <a:pt x="501162" y="79131"/>
+                      </a:cubicBezTo>
+                      <a:cubicBezTo>
+                        <a:pt x="518237" y="74008"/>
+                        <a:pt x="536434" y="73835"/>
+                        <a:pt x="553915" y="70339"/>
+                      </a:cubicBezTo>
+                      <a:cubicBezTo>
+                        <a:pt x="565764" y="67969"/>
+                        <a:pt x="577362" y="64477"/>
+                        <a:pt x="589085" y="61546"/>
+                      </a:cubicBezTo>
+                      <a:cubicBezTo>
+                        <a:pt x="603739" y="64477"/>
+                        <a:pt x="620886" y="61653"/>
+                        <a:pt x="633046" y="70339"/>
+                      </a:cubicBezTo>
+                      <a:cubicBezTo>
+                        <a:pt x="650034" y="82474"/>
+                        <a:pt x="656361" y="134158"/>
+                        <a:pt x="659423" y="149469"/>
+                      </a:cubicBezTo>
+                      <a:cubicBezTo>
+                        <a:pt x="656492" y="172915"/>
+                        <a:pt x="656848" y="197012"/>
+                        <a:pt x="650631" y="219808"/>
+                      </a:cubicBezTo>
+                      <a:cubicBezTo>
+                        <a:pt x="647851" y="230003"/>
+                        <a:pt x="633046" y="235618"/>
+                        <a:pt x="633046" y="246185"/>
+                      </a:cubicBezTo>
+                      <a:cubicBezTo>
+                        <a:pt x="633046" y="265469"/>
+                        <a:pt x="677835" y="292965"/>
+                        <a:pt x="685800" y="298939"/>
+                      </a:cubicBezTo>
+                      <a:cubicBezTo>
+                        <a:pt x="691662" y="313593"/>
+                        <a:pt x="697843" y="328122"/>
+                        <a:pt x="703385" y="342900"/>
+                      </a:cubicBezTo>
+                      <a:cubicBezTo>
+                        <a:pt x="714407" y="372292"/>
+                        <a:pt x="722370" y="389623"/>
+                        <a:pt x="694592" y="422031"/>
+                      </a:cubicBezTo>
+                      <a:cubicBezTo>
+                        <a:pt x="686728" y="431206"/>
+                        <a:pt x="671146" y="427892"/>
+                        <a:pt x="659423" y="430823"/>
+                      </a:cubicBezTo>
+                      <a:cubicBezTo>
+                        <a:pt x="656620" y="432225"/>
+                        <a:pt x="607941" y="458638"/>
+                        <a:pt x="597877" y="457200"/>
+                      </a:cubicBezTo>
+                      <a:cubicBezTo>
+                        <a:pt x="584902" y="455347"/>
+                        <a:pt x="574755" y="444779"/>
+                        <a:pt x="562708" y="439616"/>
+                      </a:cubicBezTo>
+                      <a:cubicBezTo>
+                        <a:pt x="533551" y="427120"/>
+                        <a:pt x="536331" y="440969"/>
+                        <a:pt x="536331" y="422031"/>
+                      </a:cubicBezTo>
+                    </a:path>
+                  </a:pathLst>
+                </a:custGeom>
+                <a:ln w="28575"/>
+              </p:spPr>
+              <p:style>
+                <a:lnRef idx="1">
+                  <a:schemeClr val="dk1"/>
+                </a:lnRef>
+                <a:fillRef idx="0">
+                  <a:schemeClr val="dk1"/>
+                </a:fillRef>
+                <a:effectRef idx="0">
+                  <a:schemeClr val="dk1"/>
+                </a:effectRef>
+                <a:fontRef idx="minor">
+                  <a:schemeClr val="tx1"/>
+                </a:fontRef>
+              </p:style>
+              <p:txBody>
+                <a:bodyPr rtlCol="0" anchor="ctr"/>
+                <a:lstStyle/>
+                <a:p>
+                  <a:pPr algn="ctr"/>
+                  <a:endParaRPr lang="en-US"/>
+                </a:p>
+              </p:txBody>
+            </p:sp>
+          </p:grpSp>
+        </p:grpSp>
+      </p:grpSp>
+      <p:grpSp>
+        <p:nvGrpSpPr>
+          <p:cNvPr id="89" name="Group 88">
+            <a:extLst>
+              <a:ext uri="{FF2B5EF4-FFF2-40B4-BE49-F238E27FC236}">
+                <a16:creationId xmlns:a16="http://schemas.microsoft.com/office/drawing/2014/main" id="{264A75B9-3F14-414B-B2A1-2F2C479A45CA}"/>
+              </a:ext>
+            </a:extLst>
+          </p:cNvPr>
+          <p:cNvGrpSpPr/>
+          <p:nvPr/>
+        </p:nvGrpSpPr>
+        <p:grpSpPr>
+          <a:xfrm>
+            <a:off x="8048970" y="905612"/>
+            <a:ext cx="1530220" cy="1504560"/>
+            <a:chOff x="8048970" y="905612"/>
+            <a:chExt cx="1530220" cy="1504560"/>
+          </a:xfrm>
+        </p:grpSpPr>
+        <p:grpSp>
+          <p:nvGrpSpPr>
+            <p:cNvPr id="22" name="Group 21">
+              <a:extLst>
+                <a:ext uri="{FF2B5EF4-FFF2-40B4-BE49-F238E27FC236}">
+                  <a16:creationId xmlns:a16="http://schemas.microsoft.com/office/drawing/2014/main" id="{0149987E-2C53-4696-AAA4-8E7738EA26D5}"/>
+                </a:ext>
+              </a:extLst>
+            </p:cNvPr>
+            <p:cNvGrpSpPr/>
+            <p:nvPr/>
+          </p:nvGrpSpPr>
+          <p:grpSpPr>
+            <a:xfrm>
+              <a:off x="8048970" y="905612"/>
+              <a:ext cx="1530220" cy="1504560"/>
+              <a:chOff x="475862" y="905612"/>
+              <a:chExt cx="1530220" cy="1504560"/>
+            </a:xfrm>
+          </p:grpSpPr>
+          <p:sp>
+            <p:nvSpPr>
+              <p:cNvPr id="23" name="Rectangle 22">
+                <a:extLst>
+                  <a:ext uri="{FF2B5EF4-FFF2-40B4-BE49-F238E27FC236}">
+                    <a16:creationId xmlns:a16="http://schemas.microsoft.com/office/drawing/2014/main" id="{809180DE-F7C3-4E03-80B0-B3DD71A675F8}"/>
+                  </a:ext>
+                </a:extLst>
+              </p:cNvPr>
+              <p:cNvSpPr/>
+              <p:nvPr/>
+            </p:nvSpPr>
+            <p:spPr>
+              <a:xfrm>
+                <a:off x="475862" y="905612"/>
+                <a:ext cx="1530220" cy="1504560"/>
+              </a:xfrm>
+              <a:prstGeom prst="rect">
+                <a:avLst/>
+              </a:prstGeom>
+              <a:noFill/>
+              <a:ln w="76200">
+                <a:solidFill>
+                  <a:schemeClr val="tx1"/>
+                </a:solidFill>
+              </a:ln>
+            </p:spPr>
+            <p:style>
+              <a:lnRef idx="2">
+                <a:schemeClr val="accent1">
+                  <a:shade val="50000"/>
+                </a:schemeClr>
+              </a:lnRef>
+              <a:fillRef idx="1">
+                <a:schemeClr val="accent1"/>
+              </a:fillRef>
+              <a:effectRef idx="0">
+                <a:schemeClr val="accent1"/>
+              </a:effectRef>
+              <a:fontRef idx="minor">
+                <a:schemeClr val="lt1"/>
+              </a:fontRef>
+            </p:style>
+            <p:txBody>
+              <a:bodyPr rtlCol="0" anchor="ctr"/>
+              <a:lstStyle/>
+              <a:p>
+                <a:pPr algn="ctr"/>
+                <a:endParaRPr lang="en-US"/>
+              </a:p>
+            </p:txBody>
+          </p:sp>
+          <p:sp>
+            <p:nvSpPr>
+              <p:cNvPr id="24" name="Flowchart: Display 23">
+                <a:extLst>
+                  <a:ext uri="{FF2B5EF4-FFF2-40B4-BE49-F238E27FC236}">
+                    <a16:creationId xmlns:a16="http://schemas.microsoft.com/office/drawing/2014/main" id="{86A1C4B8-FE43-41F0-AB1C-473C91909237}"/>
+                  </a:ext>
+                </a:extLst>
+              </p:cNvPr>
+              <p:cNvSpPr/>
+              <p:nvPr/>
+            </p:nvSpPr>
+            <p:spPr>
+              <a:xfrm rot="5400000">
+                <a:off x="633902" y="1214921"/>
+                <a:ext cx="1214139" cy="1106027"/>
+              </a:xfrm>
+              <a:prstGeom prst="flowChartDisplay">
+                <a:avLst/>
+              </a:prstGeom>
+              <a:noFill/>
+              <a:ln w="38100" cap="flat" cmpd="sng" algn="ctr">
+                <a:solidFill>
+                  <a:schemeClr val="dk1"/>
+                </a:solidFill>
+                <a:prstDash val="solid"/>
+                <a:round/>
+                <a:headEnd type="none" w="med" len="med"/>
+                <a:tailEnd type="none" w="med" len="med"/>
+              </a:ln>
+            </p:spPr>
+            <p:style>
+              <a:lnRef idx="0">
+                <a:scrgbClr r="0" g="0" b="0"/>
+              </a:lnRef>
+              <a:fillRef idx="0">
+                <a:scrgbClr r="0" g="0" b="0"/>
+              </a:fillRef>
+              <a:effectRef idx="0">
+                <a:scrgbClr r="0" g="0" b="0"/>
+              </a:effectRef>
+              <a:fontRef idx="minor">
+                <a:schemeClr val="dk1"/>
+              </a:fontRef>
+            </p:style>
+            <p:txBody>
+              <a:bodyPr rtlCol="0" anchor="ctr"/>
+              <a:lstStyle/>
+              <a:p>
+                <a:pPr algn="ctr"/>
+                <a:endParaRPr lang="en-US"/>
+              </a:p>
+            </p:txBody>
+          </p:sp>
+        </p:grpSp>
+        <p:pic>
+          <p:nvPicPr>
+            <p:cNvPr id="71" name="Picture 70">
+              <a:extLst>
+                <a:ext uri="{FF2B5EF4-FFF2-40B4-BE49-F238E27FC236}">
+                  <a16:creationId xmlns:a16="http://schemas.microsoft.com/office/drawing/2014/main" id="{B20C9E4B-183E-4E98-B963-33977F98CD3A}"/>
+                </a:ext>
+              </a:extLst>
+            </p:cNvPr>
+            <p:cNvPicPr>
+              <a:picLocks noChangeAspect="1"/>
+            </p:cNvPicPr>
+            <p:nvPr/>
+          </p:nvPicPr>
+          <p:blipFill>
+            <a:blip r:embed="rId8"/>
+            <a:stretch>
+              <a:fillRect/>
+            </a:stretch>
+          </p:blipFill>
+          <p:spPr>
+            <a:xfrm>
+              <a:off x="8395885" y="1401683"/>
+              <a:ext cx="836387" cy="765806"/>
+            </a:xfrm>
+            <a:prstGeom prst="rect">
+              <a:avLst/>
+            </a:prstGeom>
+          </p:spPr>
+        </p:pic>
+      </p:grpSp>
+      <p:grpSp>
+        <p:nvGrpSpPr>
+          <p:cNvPr id="90" name="Group 89">
+            <a:extLst>
+              <a:ext uri="{FF2B5EF4-FFF2-40B4-BE49-F238E27FC236}">
+                <a16:creationId xmlns:a16="http://schemas.microsoft.com/office/drawing/2014/main" id="{9C820E1C-8866-4070-B3EB-C1BB9DFA0349}"/>
+              </a:ext>
+            </a:extLst>
+          </p:cNvPr>
+          <p:cNvGrpSpPr/>
+          <p:nvPr/>
+        </p:nvGrpSpPr>
+        <p:grpSpPr>
+          <a:xfrm>
+            <a:off x="6155693" y="905612"/>
+            <a:ext cx="1530220" cy="1504560"/>
+            <a:chOff x="6155693" y="905612"/>
+            <a:chExt cx="1530220" cy="1504560"/>
+          </a:xfrm>
+        </p:grpSpPr>
+        <p:grpSp>
+          <p:nvGrpSpPr>
+            <p:cNvPr id="19" name="Group 18">
+              <a:extLst>
+                <a:ext uri="{FF2B5EF4-FFF2-40B4-BE49-F238E27FC236}">
+                  <a16:creationId xmlns:a16="http://schemas.microsoft.com/office/drawing/2014/main" id="{24C9D608-DABD-4B60-9D16-A2DDC302761D}"/>
+                </a:ext>
+              </a:extLst>
+            </p:cNvPr>
+            <p:cNvGrpSpPr/>
+            <p:nvPr/>
+          </p:nvGrpSpPr>
+          <p:grpSpPr>
+            <a:xfrm>
+              <a:off x="6155693" y="905612"/>
+              <a:ext cx="1530220" cy="1504560"/>
+              <a:chOff x="475862" y="905612"/>
+              <a:chExt cx="1530220" cy="1504560"/>
+            </a:xfrm>
+          </p:grpSpPr>
+          <p:sp>
+            <p:nvSpPr>
+              <p:cNvPr id="20" name="Rectangle 19">
+                <a:extLst>
+                  <a:ext uri="{FF2B5EF4-FFF2-40B4-BE49-F238E27FC236}">
+                    <a16:creationId xmlns:a16="http://schemas.microsoft.com/office/drawing/2014/main" id="{9BE50B28-0FA2-460A-B3D6-9C4546BD6A9A}"/>
+                  </a:ext>
+                </a:extLst>
+              </p:cNvPr>
+              <p:cNvSpPr/>
+              <p:nvPr/>
+            </p:nvSpPr>
+            <p:spPr>
+              <a:xfrm>
+                <a:off x="475862" y="905612"/>
+                <a:ext cx="1530220" cy="1504560"/>
+              </a:xfrm>
+              <a:prstGeom prst="rect">
+                <a:avLst/>
+              </a:prstGeom>
+              <a:noFill/>
+              <a:ln w="76200">
+                <a:solidFill>
+                  <a:schemeClr val="tx1"/>
+                </a:solidFill>
+              </a:ln>
+            </p:spPr>
+            <p:style>
+              <a:lnRef idx="2">
+                <a:schemeClr val="accent1">
+                  <a:shade val="50000"/>
+                </a:schemeClr>
+              </a:lnRef>
+              <a:fillRef idx="1">
+                <a:schemeClr val="accent1"/>
+              </a:fillRef>
+              <a:effectRef idx="0">
+                <a:schemeClr val="accent1"/>
+              </a:effectRef>
+              <a:fontRef idx="minor">
+                <a:schemeClr val="lt1"/>
+              </a:fontRef>
+            </p:style>
+            <p:txBody>
+              <a:bodyPr rtlCol="0" anchor="ctr"/>
+              <a:lstStyle/>
+              <a:p>
+                <a:pPr algn="ctr"/>
+                <a:endParaRPr lang="en-US"/>
+              </a:p>
+            </p:txBody>
+          </p:sp>
+          <p:sp>
+            <p:nvSpPr>
+              <p:cNvPr id="21" name="Flowchart: Display 20">
+                <a:extLst>
+                  <a:ext uri="{FF2B5EF4-FFF2-40B4-BE49-F238E27FC236}">
+                    <a16:creationId xmlns:a16="http://schemas.microsoft.com/office/drawing/2014/main" id="{8E4C8374-F683-4188-9618-0F5DAC2FA049}"/>
+                  </a:ext>
+                </a:extLst>
+              </p:cNvPr>
+              <p:cNvSpPr/>
+              <p:nvPr/>
+            </p:nvSpPr>
+            <p:spPr>
+              <a:xfrm rot="5400000">
+                <a:off x="633902" y="1214921"/>
+                <a:ext cx="1214139" cy="1106027"/>
+              </a:xfrm>
+              <a:prstGeom prst="flowChartDisplay">
+                <a:avLst/>
+              </a:prstGeom>
+              <a:noFill/>
+              <a:ln w="38100" cap="flat" cmpd="sng" algn="ctr">
+                <a:solidFill>
+                  <a:schemeClr val="dk1"/>
+                </a:solidFill>
+                <a:prstDash val="solid"/>
+                <a:round/>
+                <a:headEnd type="none" w="med" len="med"/>
+                <a:tailEnd type="none" w="med" len="med"/>
+              </a:ln>
+            </p:spPr>
+            <p:style>
+              <a:lnRef idx="0">
+                <a:scrgbClr r="0" g="0" b="0"/>
+              </a:lnRef>
+              <a:fillRef idx="0">
+                <a:scrgbClr r="0" g="0" b="0"/>
+              </a:fillRef>
+              <a:effectRef idx="0">
+                <a:scrgbClr r="0" g="0" b="0"/>
+              </a:effectRef>
+              <a:fontRef idx="minor">
+                <a:schemeClr val="dk1"/>
+              </a:fontRef>
+            </p:style>
+            <p:txBody>
+              <a:bodyPr rtlCol="0" anchor="ctr"/>
+              <a:lstStyle/>
+              <a:p>
+                <a:pPr algn="ctr"/>
+                <a:endParaRPr lang="en-US"/>
+              </a:p>
+            </p:txBody>
+          </p:sp>
+        </p:grpSp>
+        <p:grpSp>
+          <p:nvGrpSpPr>
+            <p:cNvPr id="72" name="Group 71">
+              <a:extLst>
+                <a:ext uri="{FF2B5EF4-FFF2-40B4-BE49-F238E27FC236}">
+                  <a16:creationId xmlns:a16="http://schemas.microsoft.com/office/drawing/2014/main" id="{4686CADA-0488-4D02-96A2-673F5F2E2B76}"/>
+                </a:ext>
+              </a:extLst>
+            </p:cNvPr>
+            <p:cNvGrpSpPr/>
+            <p:nvPr/>
+          </p:nvGrpSpPr>
+          <p:grpSpPr>
+            <a:xfrm>
+              <a:off x="6444315" y="1405261"/>
+              <a:ext cx="908001" cy="795491"/>
+              <a:chOff x="2249647" y="3140207"/>
+              <a:chExt cx="2116017" cy="1853822"/>
+            </a:xfrm>
+          </p:grpSpPr>
+          <p:pic>
+            <p:nvPicPr>
+              <p:cNvPr id="73" name="Picture 72">
+                <a:extLst>
+                  <a:ext uri="{FF2B5EF4-FFF2-40B4-BE49-F238E27FC236}">
+                    <a16:creationId xmlns:a16="http://schemas.microsoft.com/office/drawing/2014/main" id="{D4596BAF-D9C7-4F7C-8B73-E3405B273FFB}"/>
+                  </a:ext>
+                </a:extLst>
+              </p:cNvPr>
+              <p:cNvPicPr>
+                <a:picLocks noChangeAspect="1"/>
+              </p:cNvPicPr>
+              <p:nvPr/>
+            </p:nvPicPr>
+            <p:blipFill>
+              <a:blip r:embed="rId9"/>
+              <a:stretch>
+                <a:fillRect/>
+              </a:stretch>
+            </p:blipFill>
+            <p:spPr>
+              <a:xfrm>
+                <a:off x="2249647" y="3191608"/>
+                <a:ext cx="1992924" cy="1793632"/>
+              </a:xfrm>
+              <a:prstGeom prst="rect">
+                <a:avLst/>
+              </a:prstGeom>
+            </p:spPr>
+          </p:pic>
+          <p:sp>
+            <p:nvSpPr>
+              <p:cNvPr id="74" name="Oval 73">
+                <a:extLst>
+                  <a:ext uri="{FF2B5EF4-FFF2-40B4-BE49-F238E27FC236}">
+                    <a16:creationId xmlns:a16="http://schemas.microsoft.com/office/drawing/2014/main" id="{7ED970D5-4E24-4A59-936A-954A8DCB2454}"/>
+                  </a:ext>
+                </a:extLst>
+              </p:cNvPr>
+              <p:cNvSpPr/>
+              <p:nvPr/>
+            </p:nvSpPr>
+            <p:spPr>
+              <a:xfrm>
+                <a:off x="2438399" y="3560885"/>
+                <a:ext cx="123093" cy="131885"/>
+              </a:xfrm>
+              <a:prstGeom prst="ellipse">
+                <a:avLst/>
+              </a:prstGeom>
+            </p:spPr>
+            <p:style>
+              <a:lnRef idx="2">
+                <a:schemeClr val="dk1">
+                  <a:shade val="50000"/>
+                </a:schemeClr>
+              </a:lnRef>
+              <a:fillRef idx="1">
+                <a:schemeClr val="dk1"/>
+              </a:fillRef>
+              <a:effectRef idx="0">
+                <a:schemeClr val="dk1"/>
+              </a:effectRef>
+              <a:fontRef idx="minor">
+                <a:schemeClr val="lt1"/>
+              </a:fontRef>
+            </p:style>
+            <p:txBody>
+              <a:bodyPr rtlCol="0" anchor="ctr"/>
+              <a:lstStyle/>
+              <a:p>
+                <a:pPr algn="ctr"/>
+                <a:endParaRPr lang="en-US"/>
+              </a:p>
+            </p:txBody>
+          </p:sp>
+          <p:sp>
+            <p:nvSpPr>
+              <p:cNvPr id="75" name="Oval 74">
+                <a:extLst>
+                  <a:ext uri="{FF2B5EF4-FFF2-40B4-BE49-F238E27FC236}">
+                    <a16:creationId xmlns:a16="http://schemas.microsoft.com/office/drawing/2014/main" id="{CA8A056D-8FE3-4277-A7DC-B4D09E23EA36}"/>
+                  </a:ext>
+                </a:extLst>
+              </p:cNvPr>
+              <p:cNvSpPr/>
+              <p:nvPr/>
+            </p:nvSpPr>
+            <p:spPr>
+              <a:xfrm>
+                <a:off x="2583473" y="3191608"/>
+                <a:ext cx="123093" cy="131885"/>
+              </a:xfrm>
+              <a:prstGeom prst="ellipse">
+                <a:avLst/>
+              </a:prstGeom>
+            </p:spPr>
+            <p:style>
+              <a:lnRef idx="2">
+                <a:schemeClr val="dk1">
+                  <a:shade val="50000"/>
+                </a:schemeClr>
+              </a:lnRef>
+              <a:fillRef idx="1">
+                <a:schemeClr val="dk1"/>
+              </a:fillRef>
+              <a:effectRef idx="0">
+                <a:schemeClr val="dk1"/>
+              </a:effectRef>
+              <a:fontRef idx="minor">
+                <a:schemeClr val="lt1"/>
+              </a:fontRef>
+            </p:style>
+            <p:txBody>
+              <a:bodyPr rtlCol="0" anchor="ctr"/>
+              <a:lstStyle/>
+              <a:p>
+                <a:pPr algn="ctr"/>
+                <a:endParaRPr lang="en-US"/>
+              </a:p>
+            </p:txBody>
+          </p:sp>
+          <p:sp>
+            <p:nvSpPr>
+              <p:cNvPr id="76" name="Oval 75">
+                <a:extLst>
+                  <a:ext uri="{FF2B5EF4-FFF2-40B4-BE49-F238E27FC236}">
+                    <a16:creationId xmlns:a16="http://schemas.microsoft.com/office/drawing/2014/main" id="{F9F9FEB0-F22B-4022-94B8-A833714CB57E}"/>
+                  </a:ext>
+                </a:extLst>
+              </p:cNvPr>
+              <p:cNvSpPr/>
+              <p:nvPr/>
+            </p:nvSpPr>
+            <p:spPr>
+              <a:xfrm>
+                <a:off x="3458621" y="3363057"/>
+                <a:ext cx="123093" cy="131885"/>
+              </a:xfrm>
+              <a:prstGeom prst="ellipse">
+                <a:avLst/>
+              </a:prstGeom>
+            </p:spPr>
+            <p:style>
+              <a:lnRef idx="2">
+                <a:schemeClr val="dk1">
+                  <a:shade val="50000"/>
+                </a:schemeClr>
+              </a:lnRef>
+              <a:fillRef idx="1">
+                <a:schemeClr val="dk1"/>
+              </a:fillRef>
+              <a:effectRef idx="0">
+                <a:schemeClr val="dk1"/>
+              </a:effectRef>
+              <a:fontRef idx="minor">
+                <a:schemeClr val="lt1"/>
+              </a:fontRef>
+            </p:style>
+            <p:txBody>
+              <a:bodyPr rtlCol="0" anchor="ctr"/>
+              <a:lstStyle/>
+              <a:p>
+                <a:pPr algn="ctr"/>
+                <a:endParaRPr lang="en-US"/>
+              </a:p>
+            </p:txBody>
+          </p:sp>
+          <p:sp>
+            <p:nvSpPr>
+              <p:cNvPr id="77" name="Oval 76">
+                <a:extLst>
+                  <a:ext uri="{FF2B5EF4-FFF2-40B4-BE49-F238E27FC236}">
+                    <a16:creationId xmlns:a16="http://schemas.microsoft.com/office/drawing/2014/main" id="{77775A08-8F16-497D-98D3-198C71F0A7A8}"/>
+                  </a:ext>
+                </a:extLst>
+              </p:cNvPr>
+              <p:cNvSpPr/>
+              <p:nvPr/>
+            </p:nvSpPr>
+            <p:spPr>
+              <a:xfrm>
+                <a:off x="4242571" y="3560884"/>
+                <a:ext cx="123093" cy="131885"/>
+              </a:xfrm>
+              <a:prstGeom prst="ellipse">
+                <a:avLst/>
+              </a:prstGeom>
+            </p:spPr>
+            <p:style>
+              <a:lnRef idx="2">
+                <a:schemeClr val="dk1">
+                  <a:shade val="50000"/>
+                </a:schemeClr>
+              </a:lnRef>
+              <a:fillRef idx="1">
+                <a:schemeClr val="dk1"/>
+              </a:fillRef>
+              <a:effectRef idx="0">
+                <a:schemeClr val="dk1"/>
+              </a:effectRef>
+              <a:fontRef idx="minor">
+                <a:schemeClr val="lt1"/>
+              </a:fontRef>
+            </p:style>
+            <p:txBody>
+              <a:bodyPr rtlCol="0" anchor="ctr"/>
+              <a:lstStyle/>
+              <a:p>
+                <a:pPr algn="ctr"/>
+                <a:endParaRPr lang="en-US"/>
+              </a:p>
+            </p:txBody>
+          </p:sp>
+          <p:sp>
+            <p:nvSpPr>
+              <p:cNvPr id="78" name="Oval 77">
+                <a:extLst>
+                  <a:ext uri="{FF2B5EF4-FFF2-40B4-BE49-F238E27FC236}">
+                    <a16:creationId xmlns:a16="http://schemas.microsoft.com/office/drawing/2014/main" id="{474921B6-68B5-4E9C-A2A0-A854598C2D59}"/>
+                  </a:ext>
+                </a:extLst>
+              </p:cNvPr>
+              <p:cNvSpPr/>
+              <p:nvPr/>
+            </p:nvSpPr>
+            <p:spPr>
+              <a:xfrm>
+                <a:off x="4165746" y="3930160"/>
+                <a:ext cx="123093" cy="131885"/>
+              </a:xfrm>
+              <a:prstGeom prst="ellipse">
+                <a:avLst/>
+              </a:prstGeom>
+            </p:spPr>
+            <p:style>
+              <a:lnRef idx="2">
+                <a:schemeClr val="dk1">
+                  <a:shade val="50000"/>
+                </a:schemeClr>
+              </a:lnRef>
+              <a:fillRef idx="1">
+                <a:schemeClr val="dk1"/>
+              </a:fillRef>
+              <a:effectRef idx="0">
+                <a:schemeClr val="dk1"/>
+              </a:effectRef>
+              <a:fontRef idx="minor">
+                <a:schemeClr val="lt1"/>
+              </a:fontRef>
+            </p:style>
+            <p:txBody>
+              <a:bodyPr rtlCol="0" anchor="ctr"/>
+              <a:lstStyle/>
+              <a:p>
+                <a:pPr algn="ctr"/>
+                <a:endParaRPr lang="en-US"/>
+              </a:p>
+            </p:txBody>
+          </p:sp>
+          <p:sp>
+            <p:nvSpPr>
+              <p:cNvPr id="79" name="Oval 78">
+                <a:extLst>
+                  <a:ext uri="{FF2B5EF4-FFF2-40B4-BE49-F238E27FC236}">
+                    <a16:creationId xmlns:a16="http://schemas.microsoft.com/office/drawing/2014/main" id="{4E87935A-C168-4AB8-BA87-A5F1628100CE}"/>
+                  </a:ext>
+                </a:extLst>
+              </p:cNvPr>
+              <p:cNvSpPr/>
+              <p:nvPr/>
+            </p:nvSpPr>
+            <p:spPr>
+              <a:xfrm>
+                <a:off x="2365130" y="3930159"/>
+                <a:ext cx="123093" cy="131885"/>
+              </a:xfrm>
+              <a:prstGeom prst="ellipse">
+                <a:avLst/>
+              </a:prstGeom>
+            </p:spPr>
+            <p:style>
+              <a:lnRef idx="2">
+                <a:schemeClr val="dk1">
+                  <a:shade val="50000"/>
+                </a:schemeClr>
+              </a:lnRef>
+              <a:fillRef idx="1">
+                <a:schemeClr val="dk1"/>
+              </a:fillRef>
+              <a:effectRef idx="0">
+                <a:schemeClr val="dk1"/>
+              </a:effectRef>
+              <a:fontRef idx="minor">
+                <a:schemeClr val="lt1"/>
+              </a:fontRef>
+            </p:style>
+            <p:txBody>
+              <a:bodyPr rtlCol="0" anchor="ctr"/>
+              <a:lstStyle/>
+              <a:p>
+                <a:pPr algn="ctr"/>
+                <a:endParaRPr lang="en-US"/>
+              </a:p>
+            </p:txBody>
+          </p:sp>
+          <p:sp>
+            <p:nvSpPr>
+              <p:cNvPr id="80" name="Oval 79">
+                <a:extLst>
+                  <a:ext uri="{FF2B5EF4-FFF2-40B4-BE49-F238E27FC236}">
+                    <a16:creationId xmlns:a16="http://schemas.microsoft.com/office/drawing/2014/main" id="{41B68BFC-B7D8-4B01-A915-7840869137D3}"/>
+                  </a:ext>
+                </a:extLst>
+              </p:cNvPr>
+              <p:cNvSpPr/>
+              <p:nvPr/>
+            </p:nvSpPr>
+            <p:spPr>
+              <a:xfrm>
+                <a:off x="2311192" y="4457699"/>
+                <a:ext cx="123093" cy="131885"/>
+              </a:xfrm>
+              <a:prstGeom prst="ellipse">
+                <a:avLst/>
+              </a:prstGeom>
+            </p:spPr>
+            <p:style>
+              <a:lnRef idx="2">
+                <a:schemeClr val="dk1">
+                  <a:shade val="50000"/>
+                </a:schemeClr>
+              </a:lnRef>
+              <a:fillRef idx="1">
+                <a:schemeClr val="dk1"/>
+              </a:fillRef>
+              <a:effectRef idx="0">
+                <a:schemeClr val="dk1"/>
+              </a:effectRef>
+              <a:fontRef idx="minor">
+                <a:schemeClr val="lt1"/>
+              </a:fontRef>
+            </p:style>
+            <p:txBody>
+              <a:bodyPr rtlCol="0" anchor="ctr"/>
+              <a:lstStyle/>
+              <a:p>
+                <a:pPr algn="ctr"/>
+                <a:endParaRPr lang="en-US"/>
+              </a:p>
+            </p:txBody>
+          </p:sp>
+          <p:sp>
+            <p:nvSpPr>
+              <p:cNvPr id="81" name="Oval 80">
+                <a:extLst>
+                  <a:ext uri="{FF2B5EF4-FFF2-40B4-BE49-F238E27FC236}">
+                    <a16:creationId xmlns:a16="http://schemas.microsoft.com/office/drawing/2014/main" id="{7F871877-F63A-42E4-9A3C-E0BF73576BC6}"/>
+                  </a:ext>
+                </a:extLst>
+              </p:cNvPr>
+              <p:cNvSpPr/>
+              <p:nvPr/>
+            </p:nvSpPr>
+            <p:spPr>
+              <a:xfrm>
+                <a:off x="2706566" y="4589584"/>
+                <a:ext cx="123093" cy="131885"/>
+              </a:xfrm>
+              <a:prstGeom prst="ellipse">
+                <a:avLst/>
+              </a:prstGeom>
+            </p:spPr>
+            <p:style>
+              <a:lnRef idx="2">
+                <a:schemeClr val="dk1">
+                  <a:shade val="50000"/>
+                </a:schemeClr>
+              </a:lnRef>
+              <a:fillRef idx="1">
+                <a:schemeClr val="dk1"/>
+              </a:fillRef>
+              <a:effectRef idx="0">
+                <a:schemeClr val="dk1"/>
+              </a:effectRef>
+              <a:fontRef idx="minor">
+                <a:schemeClr val="lt1"/>
+              </a:fontRef>
+            </p:style>
+            <p:txBody>
+              <a:bodyPr rtlCol="0" anchor="ctr"/>
+              <a:lstStyle/>
+              <a:p>
+                <a:pPr algn="ctr"/>
+                <a:endParaRPr lang="en-US"/>
+              </a:p>
+            </p:txBody>
+          </p:sp>
+          <p:sp>
+            <p:nvSpPr>
+              <p:cNvPr id="82" name="Oval 81">
+                <a:extLst>
+                  <a:ext uri="{FF2B5EF4-FFF2-40B4-BE49-F238E27FC236}">
+                    <a16:creationId xmlns:a16="http://schemas.microsoft.com/office/drawing/2014/main" id="{E08DF8E2-F810-4431-9E45-24DF644D4714}"/>
+                  </a:ext>
+                </a:extLst>
+              </p:cNvPr>
+              <p:cNvSpPr/>
+              <p:nvPr/>
+            </p:nvSpPr>
+            <p:spPr>
+              <a:xfrm>
+                <a:off x="3581714" y="4862144"/>
+                <a:ext cx="123093" cy="131885"/>
+              </a:xfrm>
+              <a:prstGeom prst="ellipse">
+                <a:avLst/>
+              </a:prstGeom>
+            </p:spPr>
+            <p:style>
+              <a:lnRef idx="2">
+                <a:schemeClr val="dk1">
+                  <a:shade val="50000"/>
+                </a:schemeClr>
+              </a:lnRef>
+              <a:fillRef idx="1">
+                <a:schemeClr val="dk1"/>
+              </a:fillRef>
+              <a:effectRef idx="0">
+                <a:schemeClr val="dk1"/>
+              </a:effectRef>
+              <a:fontRef idx="minor">
+                <a:schemeClr val="lt1"/>
+              </a:fontRef>
+            </p:style>
+            <p:txBody>
+              <a:bodyPr rtlCol="0" anchor="ctr"/>
+              <a:lstStyle/>
+              <a:p>
+                <a:pPr algn="ctr"/>
+                <a:endParaRPr lang="en-US"/>
+              </a:p>
+            </p:txBody>
+          </p:sp>
+          <p:sp>
+            <p:nvSpPr>
+              <p:cNvPr id="83" name="Oval 82">
+                <a:extLst>
+                  <a:ext uri="{FF2B5EF4-FFF2-40B4-BE49-F238E27FC236}">
+                    <a16:creationId xmlns:a16="http://schemas.microsoft.com/office/drawing/2014/main" id="{E31BBB3A-A854-4FD5-9329-DDD9FFE69CB3}"/>
+                  </a:ext>
+                </a:extLst>
+              </p:cNvPr>
+              <p:cNvSpPr/>
+              <p:nvPr/>
+            </p:nvSpPr>
+            <p:spPr>
+              <a:xfrm>
+                <a:off x="4142612" y="4391756"/>
+                <a:ext cx="123093" cy="131885"/>
+              </a:xfrm>
+              <a:prstGeom prst="ellipse">
+                <a:avLst/>
+              </a:prstGeom>
+            </p:spPr>
+            <p:style>
+              <a:lnRef idx="2">
+                <a:schemeClr val="dk1">
+                  <a:shade val="50000"/>
+                </a:schemeClr>
+              </a:lnRef>
+              <a:fillRef idx="1">
+                <a:schemeClr val="dk1"/>
+              </a:fillRef>
+              <a:effectRef idx="0">
+                <a:schemeClr val="dk1"/>
+              </a:effectRef>
+              <a:fontRef idx="minor">
+                <a:schemeClr val="lt1"/>
+              </a:fontRef>
+            </p:style>
+            <p:txBody>
+              <a:bodyPr rtlCol="0" anchor="ctr"/>
+              <a:lstStyle/>
+              <a:p>
+                <a:pPr algn="ctr"/>
+                <a:endParaRPr lang="en-US"/>
+              </a:p>
+            </p:txBody>
+          </p:sp>
+          <p:sp>
+            <p:nvSpPr>
+              <p:cNvPr id="84" name="Oval 83">
+                <a:extLst>
+                  <a:ext uri="{FF2B5EF4-FFF2-40B4-BE49-F238E27FC236}">
+                    <a16:creationId xmlns:a16="http://schemas.microsoft.com/office/drawing/2014/main" id="{313298B5-747C-4EC9-ABD1-D726FA2BBE27}"/>
+                  </a:ext>
+                </a:extLst>
+              </p:cNvPr>
+              <p:cNvSpPr/>
+              <p:nvPr/>
+            </p:nvSpPr>
+            <p:spPr>
+              <a:xfrm>
+                <a:off x="3040392" y="3140207"/>
+                <a:ext cx="123093" cy="131885"/>
+              </a:xfrm>
+              <a:prstGeom prst="ellipse">
+                <a:avLst/>
+              </a:prstGeom>
+            </p:spPr>
+            <p:style>
+              <a:lnRef idx="2">
+                <a:schemeClr val="dk1">
+                  <a:shade val="50000"/>
+                </a:schemeClr>
+              </a:lnRef>
+              <a:fillRef idx="1">
+                <a:schemeClr val="dk1"/>
+              </a:fillRef>
+              <a:effectRef idx="0">
+                <a:schemeClr val="dk1"/>
+              </a:effectRef>
+              <a:fontRef idx="minor">
+                <a:schemeClr val="lt1"/>
+              </a:fontRef>
+            </p:style>
+            <p:txBody>
+              <a:bodyPr rtlCol="0" anchor="ctr"/>
+              <a:lstStyle/>
+              <a:p>
+                <a:pPr algn="ctr"/>
+                <a:endParaRPr lang="en-US"/>
+              </a:p>
+            </p:txBody>
+          </p:sp>
+          <p:sp>
+            <p:nvSpPr>
+              <p:cNvPr id="85" name="Oval 84">
+                <a:extLst>
+                  <a:ext uri="{FF2B5EF4-FFF2-40B4-BE49-F238E27FC236}">
+                    <a16:creationId xmlns:a16="http://schemas.microsoft.com/office/drawing/2014/main" id="{A5232832-3708-4DA3-8D91-F1557ED5D1D2}"/>
+                  </a:ext>
+                </a:extLst>
+              </p:cNvPr>
+              <p:cNvSpPr/>
+              <p:nvPr/>
+            </p:nvSpPr>
+            <p:spPr>
+              <a:xfrm>
+                <a:off x="4053504" y="3272089"/>
+                <a:ext cx="123093" cy="131885"/>
+              </a:xfrm>
+              <a:prstGeom prst="ellipse">
+                <a:avLst/>
+              </a:prstGeom>
+            </p:spPr>
+            <p:style>
+              <a:lnRef idx="2">
+                <a:schemeClr val="dk1">
+                  <a:shade val="50000"/>
+                </a:schemeClr>
+              </a:lnRef>
+              <a:fillRef idx="1">
+                <a:schemeClr val="dk1"/>
+              </a:fillRef>
+              <a:effectRef idx="0">
+                <a:schemeClr val="dk1"/>
+              </a:effectRef>
+              <a:fontRef idx="minor">
+                <a:schemeClr val="lt1"/>
+              </a:fontRef>
+            </p:style>
+            <p:txBody>
+              <a:bodyPr rtlCol="0" anchor="ctr"/>
+              <a:lstStyle/>
+              <a:p>
+                <a:pPr algn="ctr"/>
+                <a:endParaRPr lang="en-US"/>
+              </a:p>
+            </p:txBody>
+          </p:sp>
+        </p:grpSp>
+      </p:grpSp>
+      <p:grpSp>
+        <p:nvGrpSpPr>
+          <p:cNvPr id="104" name="Group 103">
+            <a:extLst>
+              <a:ext uri="{FF2B5EF4-FFF2-40B4-BE49-F238E27FC236}">
+                <a16:creationId xmlns:a16="http://schemas.microsoft.com/office/drawing/2014/main" id="{30AA86D0-7D3D-4A2A-8EEE-1000B37E6085}"/>
+              </a:ext>
+            </a:extLst>
+          </p:cNvPr>
+          <p:cNvGrpSpPr/>
+          <p:nvPr/>
+        </p:nvGrpSpPr>
+        <p:grpSpPr>
+          <a:xfrm>
+            <a:off x="2369139" y="2832151"/>
+            <a:ext cx="1530220" cy="1504560"/>
+            <a:chOff x="2369139" y="2832151"/>
+            <a:chExt cx="1530220" cy="1504560"/>
+          </a:xfrm>
+        </p:grpSpPr>
+        <p:grpSp>
+          <p:nvGrpSpPr>
+            <p:cNvPr id="31" name="Group 30">
+              <a:extLst>
+                <a:ext uri="{FF2B5EF4-FFF2-40B4-BE49-F238E27FC236}">
+                  <a16:creationId xmlns:a16="http://schemas.microsoft.com/office/drawing/2014/main" id="{65E95621-2FCF-480C-9CA7-EA7C7371254A}"/>
+                </a:ext>
+              </a:extLst>
+            </p:cNvPr>
+            <p:cNvGrpSpPr/>
+            <p:nvPr/>
+          </p:nvGrpSpPr>
+          <p:grpSpPr>
+            <a:xfrm>
+              <a:off x="2369139" y="2832151"/>
+              <a:ext cx="1530220" cy="1504560"/>
+              <a:chOff x="475862" y="905612"/>
+              <a:chExt cx="1530220" cy="1504560"/>
+            </a:xfrm>
+          </p:grpSpPr>
+          <p:sp>
+            <p:nvSpPr>
+              <p:cNvPr id="32" name="Rectangle 31">
+                <a:extLst>
+                  <a:ext uri="{FF2B5EF4-FFF2-40B4-BE49-F238E27FC236}">
+                    <a16:creationId xmlns:a16="http://schemas.microsoft.com/office/drawing/2014/main" id="{34B9DA91-DA77-49AD-8279-E7DA1F97C081}"/>
+                  </a:ext>
+                </a:extLst>
+              </p:cNvPr>
+              <p:cNvSpPr/>
+              <p:nvPr/>
+            </p:nvSpPr>
+            <p:spPr>
+              <a:xfrm>
+                <a:off x="475862" y="905612"/>
+                <a:ext cx="1530220" cy="1504560"/>
+              </a:xfrm>
+              <a:prstGeom prst="rect">
+                <a:avLst/>
+              </a:prstGeom>
+              <a:noFill/>
+              <a:ln w="76200">
+                <a:solidFill>
+                  <a:schemeClr val="tx1"/>
+                </a:solidFill>
+              </a:ln>
+            </p:spPr>
+            <p:style>
+              <a:lnRef idx="2">
+                <a:schemeClr val="accent1">
+                  <a:shade val="50000"/>
+                </a:schemeClr>
+              </a:lnRef>
+              <a:fillRef idx="1">
+                <a:schemeClr val="accent1"/>
+              </a:fillRef>
+              <a:effectRef idx="0">
+                <a:schemeClr val="accent1"/>
+              </a:effectRef>
+              <a:fontRef idx="minor">
+                <a:schemeClr val="lt1"/>
+              </a:fontRef>
+            </p:style>
+            <p:txBody>
+              <a:bodyPr rtlCol="0" anchor="ctr"/>
+              <a:lstStyle/>
+              <a:p>
+                <a:pPr algn="ctr"/>
+                <a:endParaRPr lang="en-US"/>
+              </a:p>
+            </p:txBody>
+          </p:sp>
+          <p:sp>
+            <p:nvSpPr>
+              <p:cNvPr id="33" name="Flowchart: Display 32">
+                <a:extLst>
+                  <a:ext uri="{FF2B5EF4-FFF2-40B4-BE49-F238E27FC236}">
+                    <a16:creationId xmlns:a16="http://schemas.microsoft.com/office/drawing/2014/main" id="{B9F14131-BB29-4260-B1A1-D12D36923947}"/>
+                  </a:ext>
+                </a:extLst>
+              </p:cNvPr>
+              <p:cNvSpPr/>
+              <p:nvPr/>
+            </p:nvSpPr>
+            <p:spPr>
+              <a:xfrm rot="5400000">
+                <a:off x="633902" y="1214921"/>
+                <a:ext cx="1214139" cy="1106027"/>
+              </a:xfrm>
+              <a:prstGeom prst="flowChartDisplay">
+                <a:avLst/>
+              </a:prstGeom>
+              <a:noFill/>
+              <a:ln w="38100" cap="flat" cmpd="sng" algn="ctr">
+                <a:solidFill>
+                  <a:schemeClr val="dk1"/>
+                </a:solidFill>
+                <a:prstDash val="solid"/>
+                <a:round/>
+                <a:headEnd type="none" w="med" len="med"/>
+                <a:tailEnd type="none" w="med" len="med"/>
+              </a:ln>
+            </p:spPr>
+            <p:style>
+              <a:lnRef idx="0">
+                <a:scrgbClr r="0" g="0" b="0"/>
+              </a:lnRef>
+              <a:fillRef idx="0">
+                <a:scrgbClr r="0" g="0" b="0"/>
+              </a:fillRef>
+              <a:effectRef idx="0">
+                <a:scrgbClr r="0" g="0" b="0"/>
+              </a:effectRef>
+              <a:fontRef idx="minor">
+                <a:schemeClr val="dk1"/>
+              </a:fontRef>
+            </p:style>
+            <p:txBody>
+              <a:bodyPr rtlCol="0" anchor="ctr"/>
+              <a:lstStyle/>
+              <a:p>
+                <a:pPr algn="ctr"/>
+                <a:endParaRPr lang="en-US"/>
+              </a:p>
+            </p:txBody>
+          </p:sp>
+        </p:grpSp>
+        <p:grpSp>
+          <p:nvGrpSpPr>
+            <p:cNvPr id="100" name="Group 99">
+              <a:extLst>
+                <a:ext uri="{FF2B5EF4-FFF2-40B4-BE49-F238E27FC236}">
+                  <a16:creationId xmlns:a16="http://schemas.microsoft.com/office/drawing/2014/main" id="{98AC2EE8-37BB-4453-8FA6-5D535D6BCA6D}"/>
+                </a:ext>
+              </a:extLst>
+            </p:cNvPr>
+            <p:cNvGrpSpPr/>
+            <p:nvPr/>
+          </p:nvGrpSpPr>
+          <p:grpSpPr>
+            <a:xfrm rot="20273403">
+              <a:off x="2680247" y="3438468"/>
+              <a:ext cx="977846" cy="578863"/>
+              <a:chOff x="2784071" y="2614136"/>
+              <a:chExt cx="1814967" cy="1074420"/>
+            </a:xfrm>
+          </p:grpSpPr>
+          <p:pic>
+            <p:nvPicPr>
+              <p:cNvPr id="101" name="Picture 10" descr="✓ flamethrower free vector eps, cdr, ai, svg vector illustration graphic art">
+                <a:extLst>
+                  <a:ext uri="{FF2B5EF4-FFF2-40B4-BE49-F238E27FC236}">
+                    <a16:creationId xmlns:a16="http://schemas.microsoft.com/office/drawing/2014/main" id="{E8F34AD2-D40A-49A9-AF29-14AAFB16AE81}"/>
+                  </a:ext>
+                </a:extLst>
+              </p:cNvPr>
+              <p:cNvPicPr>
+                <a:picLocks noChangeAspect="1" noChangeArrowheads="1"/>
+              </p:cNvPicPr>
+              <p:nvPr/>
+            </p:nvPicPr>
+            <p:blipFill rotWithShape="1">
+              <a:blip r:embed="rId10">
+                <a:extLst>
+                  <a:ext uri="{28A0092B-C50C-407E-A947-70E740481C1C}">
+                    <a14:useLocalDpi xmlns:a14="http://schemas.microsoft.com/office/drawing/2010/main" val="0"/>
+                  </a:ext>
+                </a:extLst>
+              </a:blip>
+              <a:srcRect l="29258" b="25887"/>
+              <a:stretch/>
+            </p:blipFill>
+            <p:spPr bwMode="auto">
+              <a:xfrm>
+                <a:off x="3868733" y="2888016"/>
+                <a:ext cx="730305" cy="373344"/>
+              </a:xfrm>
+              <a:prstGeom prst="rect">
+                <a:avLst/>
+              </a:prstGeom>
+              <a:noFill/>
+              <a:extLst>
+                <a:ext uri="{909E8E84-426E-40DD-AFC4-6F175D3DCCD1}">
+                  <a14:hiddenFill xmlns:a14="http://schemas.microsoft.com/office/drawing/2010/main">
+                    <a:solidFill>
+                      <a:srgbClr val="FFFFFF"/>
+                    </a:solidFill>
+                  </a14:hiddenFill>
+                </a:ext>
+              </a:extLst>
+            </p:spPr>
+          </p:pic>
+          <p:sp>
+            <p:nvSpPr>
+              <p:cNvPr id="102" name="Flowchart: Terminator 101">
+                <a:extLst>
+                  <a:ext uri="{FF2B5EF4-FFF2-40B4-BE49-F238E27FC236}">
+                    <a16:creationId xmlns:a16="http://schemas.microsoft.com/office/drawing/2014/main" id="{7B8E3AEA-F54B-4DB5-83FB-6B84650A2502}"/>
+                  </a:ext>
+                </a:extLst>
+              </p:cNvPr>
+              <p:cNvSpPr/>
+              <p:nvPr/>
+            </p:nvSpPr>
+            <p:spPr>
+              <a:xfrm rot="5400000">
+                <a:off x="2507294" y="2890913"/>
+                <a:ext cx="1074420" cy="520865"/>
+              </a:xfrm>
+              <a:prstGeom prst="flowChartTerminator">
+                <a:avLst/>
+              </a:prstGeom>
+            </p:spPr>
+            <p:style>
+              <a:lnRef idx="2">
+                <a:schemeClr val="dk1">
+                  <a:shade val="50000"/>
+                </a:schemeClr>
+              </a:lnRef>
+              <a:fillRef idx="1">
+                <a:schemeClr val="dk1"/>
+              </a:fillRef>
+              <a:effectRef idx="0">
+                <a:schemeClr val="dk1"/>
+              </a:effectRef>
+              <a:fontRef idx="minor">
+                <a:schemeClr val="lt1"/>
+              </a:fontRef>
+            </p:style>
+            <p:txBody>
+              <a:bodyPr rtlCol="0" anchor="ctr"/>
+              <a:lstStyle/>
+              <a:p>
+                <a:pPr algn="ctr"/>
+                <a:endParaRPr lang="en-US"/>
+              </a:p>
+            </p:txBody>
+          </p:sp>
+          <p:sp>
+            <p:nvSpPr>
+              <p:cNvPr id="103" name="Freeform: Shape 102">
+                <a:extLst>
+                  <a:ext uri="{FF2B5EF4-FFF2-40B4-BE49-F238E27FC236}">
+                    <a16:creationId xmlns:a16="http://schemas.microsoft.com/office/drawing/2014/main" id="{2AC5D566-3A10-4C5D-AF79-7D2C335E6902}"/>
+                  </a:ext>
+                </a:extLst>
+              </p:cNvPr>
+              <p:cNvSpPr/>
+              <p:nvPr/>
+            </p:nvSpPr>
+            <p:spPr>
+              <a:xfrm>
+                <a:off x="3154994" y="3074688"/>
+                <a:ext cx="662626" cy="396240"/>
+              </a:xfrm>
+              <a:custGeom>
+                <a:avLst/>
+                <a:gdLst>
+                  <a:gd name="connsiteX0" fmla="*/ 0 w 853440"/>
+                  <a:gd name="connsiteY0" fmla="*/ 83820 h 396240"/>
+                  <a:gd name="connsiteX1" fmla="*/ 38100 w 853440"/>
+                  <a:gd name="connsiteY1" fmla="*/ 76200 h 396240"/>
+                  <a:gd name="connsiteX2" fmla="*/ 68580 w 853440"/>
+                  <a:gd name="connsiteY2" fmla="*/ 68580 h 396240"/>
+                  <a:gd name="connsiteX3" fmla="*/ 167640 w 853440"/>
+                  <a:gd name="connsiteY3" fmla="*/ 76200 h 396240"/>
+                  <a:gd name="connsiteX4" fmla="*/ 190500 w 853440"/>
+                  <a:gd name="connsiteY4" fmla="*/ 99060 h 396240"/>
+                  <a:gd name="connsiteX5" fmla="*/ 205740 w 853440"/>
+                  <a:gd name="connsiteY5" fmla="*/ 121920 h 396240"/>
+                  <a:gd name="connsiteX6" fmla="*/ 243840 w 853440"/>
+                  <a:gd name="connsiteY6" fmla="*/ 175260 h 396240"/>
+                  <a:gd name="connsiteX7" fmla="*/ 251460 w 853440"/>
+                  <a:gd name="connsiteY7" fmla="*/ 213360 h 396240"/>
+                  <a:gd name="connsiteX8" fmla="*/ 259080 w 853440"/>
+                  <a:gd name="connsiteY8" fmla="*/ 236220 h 396240"/>
+                  <a:gd name="connsiteX9" fmla="*/ 274320 w 853440"/>
+                  <a:gd name="connsiteY9" fmla="*/ 320040 h 396240"/>
+                  <a:gd name="connsiteX10" fmla="*/ 304800 w 853440"/>
+                  <a:gd name="connsiteY10" fmla="*/ 365760 h 396240"/>
+                  <a:gd name="connsiteX11" fmla="*/ 358140 w 853440"/>
+                  <a:gd name="connsiteY11" fmla="*/ 396240 h 396240"/>
+                  <a:gd name="connsiteX12" fmla="*/ 449580 w 853440"/>
+                  <a:gd name="connsiteY12" fmla="*/ 381000 h 396240"/>
+                  <a:gd name="connsiteX13" fmla="*/ 464820 w 853440"/>
+                  <a:gd name="connsiteY13" fmla="*/ 342900 h 396240"/>
+                  <a:gd name="connsiteX14" fmla="*/ 495300 w 853440"/>
+                  <a:gd name="connsiteY14" fmla="*/ 304800 h 396240"/>
+                  <a:gd name="connsiteX15" fmla="*/ 502920 w 853440"/>
+                  <a:gd name="connsiteY15" fmla="*/ 274320 h 396240"/>
+                  <a:gd name="connsiteX16" fmla="*/ 510540 w 853440"/>
+                  <a:gd name="connsiteY16" fmla="*/ 251460 h 396240"/>
+                  <a:gd name="connsiteX17" fmla="*/ 518160 w 853440"/>
+                  <a:gd name="connsiteY17" fmla="*/ 213360 h 396240"/>
+                  <a:gd name="connsiteX18" fmla="*/ 525780 w 853440"/>
+                  <a:gd name="connsiteY18" fmla="*/ 182880 h 396240"/>
+                  <a:gd name="connsiteX19" fmla="*/ 541020 w 853440"/>
+                  <a:gd name="connsiteY19" fmla="*/ 91440 h 396240"/>
+                  <a:gd name="connsiteX20" fmla="*/ 563880 w 853440"/>
+                  <a:gd name="connsiteY20" fmla="*/ 38100 h 396240"/>
+                  <a:gd name="connsiteX21" fmla="*/ 579120 w 853440"/>
+                  <a:gd name="connsiteY21" fmla="*/ 15240 h 396240"/>
+                  <a:gd name="connsiteX22" fmla="*/ 609600 w 853440"/>
+                  <a:gd name="connsiteY22" fmla="*/ 7620 h 396240"/>
+                  <a:gd name="connsiteX23" fmla="*/ 716280 w 853440"/>
+                  <a:gd name="connsiteY23" fmla="*/ 0 h 396240"/>
+                  <a:gd name="connsiteX24" fmla="*/ 853440 w 853440"/>
+                  <a:gd name="connsiteY24" fmla="*/ 7620 h 396240"/>
+                </a:gdLst>
+                <a:ahLst/>
+                <a:cxnLst>
+                  <a:cxn ang="0">
+                    <a:pos x="connsiteX0" y="connsiteY0"/>
+                  </a:cxn>
+                  <a:cxn ang="0">
+                    <a:pos x="connsiteX1" y="connsiteY1"/>
+                  </a:cxn>
+                  <a:cxn ang="0">
+                    <a:pos x="connsiteX2" y="connsiteY2"/>
+                  </a:cxn>
+                  <a:cxn ang="0">
+                    <a:pos x="connsiteX3" y="connsiteY3"/>
+                  </a:cxn>
+                  <a:cxn ang="0">
+                    <a:pos x="connsiteX4" y="connsiteY4"/>
+                  </a:cxn>
+                  <a:cxn ang="0">
+                    <a:pos x="connsiteX5" y="connsiteY5"/>
+                  </a:cxn>
+                  <a:cxn ang="0">
+                    <a:pos x="connsiteX6" y="connsiteY6"/>
+                  </a:cxn>
+                  <a:cxn ang="0">
+                    <a:pos x="connsiteX7" y="connsiteY7"/>
+                  </a:cxn>
+                  <a:cxn ang="0">
+                    <a:pos x="connsiteX8" y="connsiteY8"/>
+                  </a:cxn>
+                  <a:cxn ang="0">
+                    <a:pos x="connsiteX9" y="connsiteY9"/>
+                  </a:cxn>
+                  <a:cxn ang="0">
+                    <a:pos x="connsiteX10" y="connsiteY10"/>
+                  </a:cxn>
+                  <a:cxn ang="0">
+                    <a:pos x="connsiteX11" y="connsiteY11"/>
+                  </a:cxn>
+                  <a:cxn ang="0">
+                    <a:pos x="connsiteX12" y="connsiteY12"/>
+                  </a:cxn>
+                  <a:cxn ang="0">
+                    <a:pos x="connsiteX13" y="connsiteY13"/>
+                  </a:cxn>
+                  <a:cxn ang="0">
+                    <a:pos x="connsiteX14" y="connsiteY14"/>
+                  </a:cxn>
+                  <a:cxn ang="0">
+                    <a:pos x="connsiteX15" y="connsiteY15"/>
+                  </a:cxn>
+                  <a:cxn ang="0">
+                    <a:pos x="connsiteX16" y="connsiteY16"/>
+                  </a:cxn>
+                  <a:cxn ang="0">
+                    <a:pos x="connsiteX17" y="connsiteY17"/>
+                  </a:cxn>
+                  <a:cxn ang="0">
+                    <a:pos x="connsiteX18" y="connsiteY18"/>
+                  </a:cxn>
+                  <a:cxn ang="0">
+                    <a:pos x="connsiteX19" y="connsiteY19"/>
+                  </a:cxn>
+                  <a:cxn ang="0">
+                    <a:pos x="connsiteX20" y="connsiteY20"/>
+                  </a:cxn>
+                  <a:cxn ang="0">
+                    <a:pos x="connsiteX21" y="connsiteY21"/>
+                  </a:cxn>
+                  <a:cxn ang="0">
+                    <a:pos x="connsiteX22" y="connsiteY22"/>
+                  </a:cxn>
+                  <a:cxn ang="0">
+                    <a:pos x="connsiteX23" y="connsiteY23"/>
+                  </a:cxn>
+                  <a:cxn ang="0">
+                    <a:pos x="connsiteX24" y="connsiteY24"/>
+                  </a:cxn>
+                </a:cxnLst>
+                <a:rect l="l" t="t" r="r" b="b"/>
+                <a:pathLst>
+                  <a:path w="853440" h="396240">
+                    <a:moveTo>
+                      <a:pt x="0" y="83820"/>
+                    </a:moveTo>
+                    <a:cubicBezTo>
+                      <a:pt x="12700" y="81280"/>
+                      <a:pt x="25457" y="79010"/>
+                      <a:pt x="38100" y="76200"/>
+                    </a:cubicBezTo>
+                    <a:cubicBezTo>
+                      <a:pt x="48323" y="73928"/>
+                      <a:pt x="58107" y="68580"/>
+                      <a:pt x="68580" y="68580"/>
+                    </a:cubicBezTo>
+                    <a:cubicBezTo>
+                      <a:pt x="101698" y="68580"/>
+                      <a:pt x="134620" y="73660"/>
+                      <a:pt x="167640" y="76200"/>
+                    </a:cubicBezTo>
+                    <a:cubicBezTo>
+                      <a:pt x="175260" y="83820"/>
+                      <a:pt x="183601" y="90781"/>
+                      <a:pt x="190500" y="99060"/>
+                    </a:cubicBezTo>
+                    <a:cubicBezTo>
+                      <a:pt x="196363" y="106095"/>
+                      <a:pt x="200417" y="114468"/>
+                      <a:pt x="205740" y="121920"/>
+                    </a:cubicBezTo>
+                    <a:cubicBezTo>
+                      <a:pt x="252998" y="188081"/>
+                      <a:pt x="207924" y="121386"/>
+                      <a:pt x="243840" y="175260"/>
+                    </a:cubicBezTo>
+                    <a:cubicBezTo>
+                      <a:pt x="246380" y="187960"/>
+                      <a:pt x="248319" y="200795"/>
+                      <a:pt x="251460" y="213360"/>
+                    </a:cubicBezTo>
+                    <a:cubicBezTo>
+                      <a:pt x="253408" y="221152"/>
+                      <a:pt x="257505" y="228344"/>
+                      <a:pt x="259080" y="236220"/>
+                    </a:cubicBezTo>
+                    <a:cubicBezTo>
+                      <a:pt x="260556" y="243600"/>
+                      <a:pt x="266790" y="304980"/>
+                      <a:pt x="274320" y="320040"/>
+                    </a:cubicBezTo>
+                    <a:cubicBezTo>
+                      <a:pt x="282511" y="336423"/>
+                      <a:pt x="289560" y="355600"/>
+                      <a:pt x="304800" y="365760"/>
+                    </a:cubicBezTo>
+                    <a:cubicBezTo>
+                      <a:pt x="337111" y="387301"/>
+                      <a:pt x="319469" y="376904"/>
+                      <a:pt x="358140" y="396240"/>
+                    </a:cubicBezTo>
+                    <a:cubicBezTo>
+                      <a:pt x="388620" y="391160"/>
+                      <a:pt x="421942" y="394819"/>
+                      <a:pt x="449580" y="381000"/>
+                    </a:cubicBezTo>
+                    <a:cubicBezTo>
+                      <a:pt x="461814" y="374883"/>
+                      <a:pt x="457783" y="354629"/>
+                      <a:pt x="464820" y="342900"/>
+                    </a:cubicBezTo>
+                    <a:cubicBezTo>
+                      <a:pt x="473188" y="328954"/>
+                      <a:pt x="485140" y="317500"/>
+                      <a:pt x="495300" y="304800"/>
+                    </a:cubicBezTo>
+                    <a:cubicBezTo>
+                      <a:pt x="497840" y="294640"/>
+                      <a:pt x="500043" y="284390"/>
+                      <a:pt x="502920" y="274320"/>
+                    </a:cubicBezTo>
+                    <a:cubicBezTo>
+                      <a:pt x="505127" y="266597"/>
+                      <a:pt x="508592" y="259252"/>
+                      <a:pt x="510540" y="251460"/>
+                    </a:cubicBezTo>
+                    <a:cubicBezTo>
+                      <a:pt x="513681" y="238895"/>
+                      <a:pt x="515350" y="226003"/>
+                      <a:pt x="518160" y="213360"/>
+                    </a:cubicBezTo>
+                    <a:cubicBezTo>
+                      <a:pt x="520432" y="203137"/>
+                      <a:pt x="524058" y="193210"/>
+                      <a:pt x="525780" y="182880"/>
+                    </a:cubicBezTo>
+                    <a:cubicBezTo>
+                      <a:pt x="536912" y="116089"/>
+                      <a:pt x="527302" y="139454"/>
+                      <a:pt x="541020" y="91440"/>
+                    </a:cubicBezTo>
+                    <a:cubicBezTo>
+                      <a:pt x="547126" y="70068"/>
+                      <a:pt x="552269" y="58420"/>
+                      <a:pt x="563880" y="38100"/>
+                    </a:cubicBezTo>
+                    <a:cubicBezTo>
+                      <a:pt x="568424" y="30149"/>
+                      <a:pt x="571500" y="20320"/>
+                      <a:pt x="579120" y="15240"/>
+                    </a:cubicBezTo>
+                    <a:cubicBezTo>
+                      <a:pt x="587834" y="9431"/>
+                      <a:pt x="599191" y="8777"/>
+                      <a:pt x="609600" y="7620"/>
+                    </a:cubicBezTo>
+                    <a:cubicBezTo>
+                      <a:pt x="645033" y="3683"/>
+                      <a:pt x="680720" y="2540"/>
+                      <a:pt x="716280" y="0"/>
+                    </a:cubicBezTo>
+                    <a:cubicBezTo>
+                      <a:pt x="843270" y="7937"/>
+                      <a:pt x="797481" y="7620"/>
+                      <a:pt x="853440" y="7620"/>
+                    </a:cubicBezTo>
+                  </a:path>
+                </a:pathLst>
+              </a:custGeom>
+              <a:ln w="76200"/>
+            </p:spPr>
+            <p:style>
+              <a:lnRef idx="1">
+                <a:schemeClr val="dk1"/>
+              </a:lnRef>
+              <a:fillRef idx="0">
+                <a:schemeClr val="dk1"/>
+              </a:fillRef>
+              <a:effectRef idx="0">
+                <a:schemeClr val="dk1"/>
+              </a:effectRef>
+              <a:fontRef idx="minor">
+                <a:schemeClr val="tx1"/>
+              </a:fontRef>
+            </p:style>
+            <p:txBody>
+              <a:bodyPr rtlCol="0" anchor="ctr"/>
+              <a:lstStyle/>
+              <a:p>
+                <a:pPr algn="ctr"/>
+                <a:endParaRPr lang="en-US"/>
+              </a:p>
+            </p:txBody>
+          </p:sp>
+        </p:grpSp>
+      </p:grpSp>
+      <p:grpSp>
+        <p:nvGrpSpPr>
+          <p:cNvPr id="106" name="Group 105">
+            <a:extLst>
+              <a:ext uri="{FF2B5EF4-FFF2-40B4-BE49-F238E27FC236}">
+                <a16:creationId xmlns:a16="http://schemas.microsoft.com/office/drawing/2014/main" id="{891C67EF-1C0C-421C-8CFC-817AD627D6F2}"/>
+              </a:ext>
+            </a:extLst>
+          </p:cNvPr>
+          <p:cNvGrpSpPr/>
+          <p:nvPr/>
+        </p:nvGrpSpPr>
+        <p:grpSpPr>
+          <a:xfrm>
+            <a:off x="4262416" y="2832151"/>
+            <a:ext cx="1530220" cy="1504560"/>
+            <a:chOff x="4262416" y="2832151"/>
+            <a:chExt cx="1530220" cy="1504560"/>
+          </a:xfrm>
+        </p:grpSpPr>
+        <p:grpSp>
+          <p:nvGrpSpPr>
+            <p:cNvPr id="34" name="Group 33">
+              <a:extLst>
+                <a:ext uri="{FF2B5EF4-FFF2-40B4-BE49-F238E27FC236}">
+                  <a16:creationId xmlns:a16="http://schemas.microsoft.com/office/drawing/2014/main" id="{CCB6A3C0-8903-492F-97A5-DA51D54FCB35}"/>
+                </a:ext>
+              </a:extLst>
+            </p:cNvPr>
+            <p:cNvGrpSpPr/>
+            <p:nvPr/>
+          </p:nvGrpSpPr>
+          <p:grpSpPr>
+            <a:xfrm>
+              <a:off x="4262416" y="2832151"/>
+              <a:ext cx="1530220" cy="1504560"/>
+              <a:chOff x="475862" y="905612"/>
+              <a:chExt cx="1530220" cy="1504560"/>
+            </a:xfrm>
+          </p:grpSpPr>
+          <p:sp>
+            <p:nvSpPr>
+              <p:cNvPr id="35" name="Rectangle 34">
+                <a:extLst>
+                  <a:ext uri="{FF2B5EF4-FFF2-40B4-BE49-F238E27FC236}">
+                    <a16:creationId xmlns:a16="http://schemas.microsoft.com/office/drawing/2014/main" id="{F0719E14-B129-49BE-8A9D-30CEF1BA7065}"/>
+                  </a:ext>
+                </a:extLst>
+              </p:cNvPr>
+              <p:cNvSpPr/>
+              <p:nvPr/>
+            </p:nvSpPr>
+            <p:spPr>
+              <a:xfrm>
+                <a:off x="475862" y="905612"/>
+                <a:ext cx="1530220" cy="1504560"/>
+              </a:xfrm>
+              <a:prstGeom prst="rect">
+                <a:avLst/>
+              </a:prstGeom>
+              <a:noFill/>
+              <a:ln w="76200">
+                <a:solidFill>
+                  <a:schemeClr val="tx1"/>
+                </a:solidFill>
+              </a:ln>
+            </p:spPr>
+            <p:style>
+              <a:lnRef idx="2">
+                <a:schemeClr val="accent1">
+                  <a:shade val="50000"/>
+                </a:schemeClr>
+              </a:lnRef>
+              <a:fillRef idx="1">
+                <a:schemeClr val="accent1"/>
+              </a:fillRef>
+              <a:effectRef idx="0">
+                <a:schemeClr val="accent1"/>
+              </a:effectRef>
+              <a:fontRef idx="minor">
+                <a:schemeClr val="lt1"/>
+              </a:fontRef>
+            </p:style>
+            <p:txBody>
+              <a:bodyPr rtlCol="0" anchor="ctr"/>
+              <a:lstStyle/>
+              <a:p>
+                <a:pPr algn="ctr"/>
+                <a:endParaRPr lang="en-US"/>
+              </a:p>
+            </p:txBody>
+          </p:sp>
+          <p:sp>
+            <p:nvSpPr>
+              <p:cNvPr id="36" name="Flowchart: Display 35">
+                <a:extLst>
+                  <a:ext uri="{FF2B5EF4-FFF2-40B4-BE49-F238E27FC236}">
+                    <a16:creationId xmlns:a16="http://schemas.microsoft.com/office/drawing/2014/main" id="{C371231B-6AFF-483A-91F2-539283070956}"/>
+                  </a:ext>
+                </a:extLst>
+              </p:cNvPr>
+              <p:cNvSpPr/>
+              <p:nvPr/>
+            </p:nvSpPr>
+            <p:spPr>
+              <a:xfrm rot="5400000">
+                <a:off x="633902" y="1214921"/>
+                <a:ext cx="1214139" cy="1106027"/>
+              </a:xfrm>
+              <a:prstGeom prst="flowChartDisplay">
+                <a:avLst/>
+              </a:prstGeom>
+              <a:noFill/>
+              <a:ln w="38100" cap="flat" cmpd="sng" algn="ctr">
+                <a:solidFill>
+                  <a:schemeClr val="dk1"/>
+                </a:solidFill>
+                <a:prstDash val="solid"/>
+                <a:round/>
+                <a:headEnd type="none" w="med" len="med"/>
+                <a:tailEnd type="none" w="med" len="med"/>
+              </a:ln>
+            </p:spPr>
+            <p:style>
+              <a:lnRef idx="0">
+                <a:scrgbClr r="0" g="0" b="0"/>
+              </a:lnRef>
+              <a:fillRef idx="0">
+                <a:scrgbClr r="0" g="0" b="0"/>
+              </a:fillRef>
+              <a:effectRef idx="0">
+                <a:scrgbClr r="0" g="0" b="0"/>
+              </a:effectRef>
+              <a:fontRef idx="minor">
+                <a:schemeClr val="dk1"/>
+              </a:fontRef>
+            </p:style>
+            <p:txBody>
+              <a:bodyPr rtlCol="0" anchor="ctr"/>
+              <a:lstStyle/>
+              <a:p>
+                <a:pPr algn="ctr"/>
+                <a:endParaRPr lang="en-US"/>
+              </a:p>
+            </p:txBody>
+          </p:sp>
+        </p:grpSp>
+        <p:pic>
+          <p:nvPicPr>
+            <p:cNvPr id="105" name="Picture 104">
+              <a:extLst>
+                <a:ext uri="{FF2B5EF4-FFF2-40B4-BE49-F238E27FC236}">
+                  <a16:creationId xmlns:a16="http://schemas.microsoft.com/office/drawing/2014/main" id="{4292BA36-F6FD-41F6-A82C-FE93C85EEA1E}"/>
+                </a:ext>
+              </a:extLst>
+            </p:cNvPr>
+            <p:cNvPicPr>
+              <a:picLocks noChangeAspect="1"/>
+            </p:cNvPicPr>
+            <p:nvPr/>
+          </p:nvPicPr>
+          <p:blipFill>
+            <a:blip r:embed="rId11"/>
+            <a:stretch>
+              <a:fillRect/>
+            </a:stretch>
+          </p:blipFill>
+          <p:spPr>
+            <a:xfrm>
+              <a:off x="4554578" y="3314998"/>
+              <a:ext cx="952180" cy="865072"/>
+            </a:xfrm>
+            <a:prstGeom prst="rect">
+              <a:avLst/>
+            </a:prstGeom>
+          </p:spPr>
+        </p:pic>
+      </p:grpSp>
+    </p:spTree>
+    <p:extLst>
+      <p:ext uri="{BB962C8B-B14F-4D97-AF65-F5344CB8AC3E}">
+        <p14:creationId xmlns:p14="http://schemas.microsoft.com/office/powerpoint/2010/main" val="854748834"/>
+      </p:ext>
+    </p:extLst>
+  </p:cSld>
+  <p:clrMapOvr>
+    <a:masterClrMapping/>
+  </p:clrMapOvr>
+</p:sld>
+</file>
+
+<file path=ppt/slides/slide5.xml><?xml version="1.0" encoding="utf-8"?>
+<p:sld xmlns:a="http://schemas.openxmlformats.org/drawingml/2006/main" xmlns:r="http://schemas.openxmlformats.org/officeDocument/2006/relationships" xmlns:p="http://schemas.openxmlformats.org/presentationml/2006/main">
+  <p:cSld>
+    <p:spTree>
+      <p:nvGrpSpPr>
+        <p:cNvPr id="1" name=""/>
+        <p:cNvGrpSpPr/>
+        <p:nvPr/>
+      </p:nvGrpSpPr>
+      <p:grpSpPr>
+        <a:xfrm>
+          <a:off x="0" y="0"/>
+          <a:ext cx="0" cy="0"/>
+          <a:chOff x="0" y="0"/>
+          <a:chExt cx="0" cy="0"/>
+        </a:xfrm>
+      </p:grpSpPr>
       <p:grpSp>
         <p:nvGrpSpPr>
           <p:cNvPr id="41" name="Group 40">
@@ -29969,6 +34860,3192 @@
           </a:extLst>
         </p:spPr>
       </p:pic>
+      <p:pic>
+        <p:nvPicPr>
+          <p:cNvPr id="3" name="Picture 2" descr="Machete Silhouette Stock Illustrations – 384 Machete Silhouette Stock  Illustrations, Vectors &amp;amp; Clipart - Dreamstime">
+            <a:extLst>
+              <a:ext uri="{FF2B5EF4-FFF2-40B4-BE49-F238E27FC236}">
+                <a16:creationId xmlns:a16="http://schemas.microsoft.com/office/drawing/2014/main" id="{01A4FCD6-EB42-4E83-BD88-EC54A8A810C2}"/>
+              </a:ext>
+            </a:extLst>
+          </p:cNvPr>
+          <p:cNvPicPr>
+            <a:picLocks noChangeAspect="1" noChangeArrowheads="1"/>
+          </p:cNvPicPr>
+          <p:nvPr/>
+        </p:nvPicPr>
+        <p:blipFill rotWithShape="1">
+          <a:blip r:embed="rId3">
+            <a:extLst>
+              <a:ext uri="{28A0092B-C50C-407E-A947-70E740481C1C}">
+                <a14:useLocalDpi xmlns:a14="http://schemas.microsoft.com/office/drawing/2010/main" val="0"/>
+              </a:ext>
+            </a:extLst>
+          </a:blip>
+          <a:srcRect l="20477" t="6978" r="21310" b="6197"/>
+          <a:stretch/>
+        </p:blipFill>
+        <p:spPr bwMode="auto">
+          <a:xfrm>
+            <a:off x="3007097" y="736224"/>
+            <a:ext cx="574617" cy="857049"/>
+          </a:xfrm>
+          <a:prstGeom prst="rect">
+            <a:avLst/>
+          </a:prstGeom>
+          <a:noFill/>
+          <a:extLst>
+            <a:ext uri="{909E8E84-426E-40DD-AFC4-6F175D3DCCD1}">
+              <a14:hiddenFill xmlns:a14="http://schemas.microsoft.com/office/drawing/2010/main">
+                <a:solidFill>
+                  <a:srgbClr val="FFFFFF"/>
+                </a:solidFill>
+              </a14:hiddenFill>
+            </a:ext>
+          </a:extLst>
+        </p:spPr>
+      </p:pic>
+      <p:grpSp>
+        <p:nvGrpSpPr>
+          <p:cNvPr id="4" name="Group 3">
+            <a:extLst>
+              <a:ext uri="{FF2B5EF4-FFF2-40B4-BE49-F238E27FC236}">
+                <a16:creationId xmlns:a16="http://schemas.microsoft.com/office/drawing/2014/main" id="{2D3905E6-80AA-4135-BE37-956741926631}"/>
+              </a:ext>
+            </a:extLst>
+          </p:cNvPr>
+          <p:cNvGrpSpPr/>
+          <p:nvPr/>
+        </p:nvGrpSpPr>
+        <p:grpSpPr>
+          <a:xfrm>
+            <a:off x="4100588" y="635580"/>
+            <a:ext cx="719018" cy="877203"/>
+            <a:chOff x="1353377" y="2714855"/>
+            <a:chExt cx="719018" cy="877203"/>
+          </a:xfrm>
+        </p:grpSpPr>
+        <p:pic>
+          <p:nvPicPr>
+            <p:cNvPr id="36" name="Picture 35" descr="Machete Silhouette Stock Illustrations – 384 Machete Silhouette Stock  Illustrations, Vectors &amp;amp; Clipart - Dreamstime">
+              <a:extLst>
+                <a:ext uri="{FF2B5EF4-FFF2-40B4-BE49-F238E27FC236}">
+                  <a16:creationId xmlns:a16="http://schemas.microsoft.com/office/drawing/2014/main" id="{2B332C45-17D2-4E26-BC06-1C4F92736CF9}"/>
+                </a:ext>
+              </a:extLst>
+            </p:cNvPr>
+            <p:cNvPicPr>
+              <a:picLocks noChangeAspect="1" noChangeArrowheads="1"/>
+            </p:cNvPicPr>
+            <p:nvPr/>
+          </p:nvPicPr>
+          <p:blipFill rotWithShape="1">
+            <a:blip r:embed="rId3">
+              <a:extLst>
+                <a:ext uri="{28A0092B-C50C-407E-A947-70E740481C1C}">
+                  <a14:useLocalDpi xmlns:a14="http://schemas.microsoft.com/office/drawing/2010/main" val="0"/>
+                </a:ext>
+              </a:extLst>
+            </a:blip>
+            <a:srcRect l="20477" t="6978" r="21310" b="6197"/>
+            <a:stretch/>
+          </p:blipFill>
+          <p:spPr bwMode="auto">
+            <a:xfrm rot="20477473">
+              <a:off x="1353377" y="2714855"/>
+              <a:ext cx="376503" cy="857049"/>
+            </a:xfrm>
+            <a:prstGeom prst="rect">
+              <a:avLst/>
+            </a:prstGeom>
+            <a:noFill/>
+            <a:extLst>
+              <a:ext uri="{909E8E84-426E-40DD-AFC4-6F175D3DCCD1}">
+                <a14:hiddenFill xmlns:a14="http://schemas.microsoft.com/office/drawing/2010/main">
+                  <a:solidFill>
+                    <a:srgbClr val="FFFFFF"/>
+                  </a:solidFill>
+                </a14:hiddenFill>
+              </a:ext>
+            </a:extLst>
+          </p:spPr>
+        </p:pic>
+        <p:pic>
+          <p:nvPicPr>
+            <p:cNvPr id="35" name="Picture 34">
+              <a:extLst>
+                <a:ext uri="{FF2B5EF4-FFF2-40B4-BE49-F238E27FC236}">
+                  <a16:creationId xmlns:a16="http://schemas.microsoft.com/office/drawing/2014/main" id="{0616636D-5D52-47AB-BFC1-30C610DB8013}"/>
+                </a:ext>
+              </a:extLst>
+            </p:cNvPr>
+            <p:cNvPicPr>
+              <a:picLocks noChangeAspect="1"/>
+            </p:cNvPicPr>
+            <p:nvPr/>
+          </p:nvPicPr>
+          <p:blipFill>
+            <a:blip r:embed="rId4"/>
+            <a:stretch>
+              <a:fillRect/>
+            </a:stretch>
+          </p:blipFill>
+          <p:spPr>
+            <a:xfrm>
+              <a:off x="1631260" y="3007967"/>
+              <a:ext cx="441135" cy="584091"/>
+            </a:xfrm>
+            <a:prstGeom prst="rect">
+              <a:avLst/>
+            </a:prstGeom>
+          </p:spPr>
+        </p:pic>
+      </p:grpSp>
+      <p:grpSp>
+        <p:nvGrpSpPr>
+          <p:cNvPr id="49" name="Group 48">
+            <a:extLst>
+              <a:ext uri="{FF2B5EF4-FFF2-40B4-BE49-F238E27FC236}">
+                <a16:creationId xmlns:a16="http://schemas.microsoft.com/office/drawing/2014/main" id="{D137A992-7929-4A5E-A08E-1FBFA973B0D2}"/>
+              </a:ext>
+            </a:extLst>
+          </p:cNvPr>
+          <p:cNvGrpSpPr/>
+          <p:nvPr/>
+        </p:nvGrpSpPr>
+        <p:grpSpPr>
+          <a:xfrm>
+            <a:off x="5250881" y="707921"/>
+            <a:ext cx="833525" cy="859878"/>
+            <a:chOff x="1892090" y="3349869"/>
+            <a:chExt cx="1345405" cy="1387941"/>
+          </a:xfrm>
+        </p:grpSpPr>
+        <p:grpSp>
+          <p:nvGrpSpPr>
+            <p:cNvPr id="48" name="Group 47">
+              <a:extLst>
+                <a:ext uri="{FF2B5EF4-FFF2-40B4-BE49-F238E27FC236}">
+                  <a16:creationId xmlns:a16="http://schemas.microsoft.com/office/drawing/2014/main" id="{CDFE405B-70C6-403C-AF26-09C002766BE8}"/>
+                </a:ext>
+              </a:extLst>
+            </p:cNvPr>
+            <p:cNvGrpSpPr/>
+            <p:nvPr/>
+          </p:nvGrpSpPr>
+          <p:grpSpPr>
+            <a:xfrm>
+              <a:off x="2259623" y="3349869"/>
+              <a:ext cx="713540" cy="685799"/>
+              <a:chOff x="2259623" y="3349869"/>
+              <a:chExt cx="713540" cy="685799"/>
+            </a:xfrm>
+          </p:grpSpPr>
+          <p:cxnSp>
+            <p:nvCxnSpPr>
+              <p:cNvPr id="34" name="Straight Connector 33">
+                <a:extLst>
+                  <a:ext uri="{FF2B5EF4-FFF2-40B4-BE49-F238E27FC236}">
+                    <a16:creationId xmlns:a16="http://schemas.microsoft.com/office/drawing/2014/main" id="{60C41A4F-5819-435C-9152-7FB9A55D05FD}"/>
+                  </a:ext>
+                </a:extLst>
+              </p:cNvPr>
+              <p:cNvCxnSpPr/>
+              <p:nvPr/>
+            </p:nvCxnSpPr>
+            <p:spPr>
+              <a:xfrm>
+                <a:off x="2409091" y="3543300"/>
+                <a:ext cx="105508" cy="457200"/>
+              </a:xfrm>
+              <a:prstGeom prst="line">
+                <a:avLst/>
+              </a:prstGeom>
+              <a:ln w="28575"/>
+            </p:spPr>
+            <p:style>
+              <a:lnRef idx="1">
+                <a:schemeClr val="dk1"/>
+              </a:lnRef>
+              <a:fillRef idx="0">
+                <a:schemeClr val="dk1"/>
+              </a:fillRef>
+              <a:effectRef idx="0">
+                <a:schemeClr val="dk1"/>
+              </a:effectRef>
+              <a:fontRef idx="minor">
+                <a:schemeClr val="tx1"/>
+              </a:fontRef>
+            </p:style>
+          </p:cxnSp>
+          <p:cxnSp>
+            <p:nvCxnSpPr>
+              <p:cNvPr id="44" name="Straight Connector 43">
+                <a:extLst>
+                  <a:ext uri="{FF2B5EF4-FFF2-40B4-BE49-F238E27FC236}">
+                    <a16:creationId xmlns:a16="http://schemas.microsoft.com/office/drawing/2014/main" id="{3C91945E-9801-498A-97C6-5D8A51ED6BDB}"/>
+                  </a:ext>
+                </a:extLst>
+              </p:cNvPr>
+              <p:cNvCxnSpPr>
+                <a:cxnSpLocks/>
+              </p:cNvCxnSpPr>
+              <p:nvPr/>
+            </p:nvCxnSpPr>
+            <p:spPr>
+              <a:xfrm>
+                <a:off x="2593731" y="3534508"/>
+                <a:ext cx="0" cy="457200"/>
+              </a:xfrm>
+              <a:prstGeom prst="line">
+                <a:avLst/>
+              </a:prstGeom>
+              <a:ln w="28575"/>
+            </p:spPr>
+            <p:style>
+              <a:lnRef idx="1">
+                <a:schemeClr val="dk1"/>
+              </a:lnRef>
+              <a:fillRef idx="0">
+                <a:schemeClr val="dk1"/>
+              </a:fillRef>
+              <a:effectRef idx="0">
+                <a:schemeClr val="dk1"/>
+              </a:effectRef>
+              <a:fontRef idx="minor">
+                <a:schemeClr val="tx1"/>
+              </a:fontRef>
+            </p:style>
+          </p:cxnSp>
+          <p:cxnSp>
+            <p:nvCxnSpPr>
+              <p:cNvPr id="46" name="Straight Connector 45">
+                <a:extLst>
+                  <a:ext uri="{FF2B5EF4-FFF2-40B4-BE49-F238E27FC236}">
+                    <a16:creationId xmlns:a16="http://schemas.microsoft.com/office/drawing/2014/main" id="{918389C7-20FC-466E-892A-B558767BC383}"/>
+                  </a:ext>
+                </a:extLst>
+              </p:cNvPr>
+              <p:cNvCxnSpPr>
+                <a:cxnSpLocks/>
+              </p:cNvCxnSpPr>
+              <p:nvPr/>
+            </p:nvCxnSpPr>
+            <p:spPr>
+              <a:xfrm flipH="1">
+                <a:off x="2646488" y="3578468"/>
+                <a:ext cx="137874" cy="457200"/>
+              </a:xfrm>
+              <a:prstGeom prst="line">
+                <a:avLst/>
+              </a:prstGeom>
+              <a:ln w="28575"/>
+            </p:spPr>
+            <p:style>
+              <a:lnRef idx="1">
+                <a:schemeClr val="dk1"/>
+              </a:lnRef>
+              <a:fillRef idx="0">
+                <a:schemeClr val="dk1"/>
+              </a:fillRef>
+              <a:effectRef idx="0">
+                <a:schemeClr val="dk1"/>
+              </a:effectRef>
+              <a:fontRef idx="minor">
+                <a:schemeClr val="tx1"/>
+              </a:fontRef>
+            </p:style>
+          </p:cxnSp>
+          <p:sp>
+            <p:nvSpPr>
+              <p:cNvPr id="47" name="Freeform: Shape 46">
+                <a:extLst>
+                  <a:ext uri="{FF2B5EF4-FFF2-40B4-BE49-F238E27FC236}">
+                    <a16:creationId xmlns:a16="http://schemas.microsoft.com/office/drawing/2014/main" id="{2DEC243B-63AB-43B0-B344-1A03E241B221}"/>
+                  </a:ext>
+                </a:extLst>
+              </p:cNvPr>
+              <p:cNvSpPr/>
+              <p:nvPr/>
+            </p:nvSpPr>
+            <p:spPr>
+              <a:xfrm>
+                <a:off x="2259623" y="3349869"/>
+                <a:ext cx="713540" cy="457256"/>
+              </a:xfrm>
+              <a:custGeom>
+                <a:avLst/>
+                <a:gdLst>
+                  <a:gd name="connsiteX0" fmla="*/ 96715 w 713540"/>
+                  <a:gd name="connsiteY0" fmla="*/ 334108 h 457256"/>
+                  <a:gd name="connsiteX1" fmla="*/ 17585 w 713540"/>
+                  <a:gd name="connsiteY1" fmla="*/ 316523 h 457256"/>
+                  <a:gd name="connsiteX2" fmla="*/ 0 w 713540"/>
+                  <a:gd name="connsiteY2" fmla="*/ 290146 h 457256"/>
+                  <a:gd name="connsiteX3" fmla="*/ 52754 w 713540"/>
+                  <a:gd name="connsiteY3" fmla="*/ 131885 h 457256"/>
+                  <a:gd name="connsiteX4" fmla="*/ 79131 w 713540"/>
+                  <a:gd name="connsiteY4" fmla="*/ 123093 h 457256"/>
+                  <a:gd name="connsiteX5" fmla="*/ 131885 w 713540"/>
+                  <a:gd name="connsiteY5" fmla="*/ 131885 h 457256"/>
+                  <a:gd name="connsiteX6" fmla="*/ 167054 w 713540"/>
+                  <a:gd name="connsiteY6" fmla="*/ 149469 h 457256"/>
+                  <a:gd name="connsiteX7" fmla="*/ 184639 w 713540"/>
+                  <a:gd name="connsiteY7" fmla="*/ 123093 h 457256"/>
+                  <a:gd name="connsiteX8" fmla="*/ 193431 w 713540"/>
+                  <a:gd name="connsiteY8" fmla="*/ 35169 h 457256"/>
+                  <a:gd name="connsiteX9" fmla="*/ 237392 w 713540"/>
+                  <a:gd name="connsiteY9" fmla="*/ 17585 h 457256"/>
+                  <a:gd name="connsiteX10" fmla="*/ 342900 w 713540"/>
+                  <a:gd name="connsiteY10" fmla="*/ 0 h 457256"/>
+                  <a:gd name="connsiteX11" fmla="*/ 378069 w 713540"/>
+                  <a:gd name="connsiteY11" fmla="*/ 8793 h 457256"/>
+                  <a:gd name="connsiteX12" fmla="*/ 413239 w 713540"/>
+                  <a:gd name="connsiteY12" fmla="*/ 61546 h 457256"/>
+                  <a:gd name="connsiteX13" fmla="*/ 439615 w 713540"/>
+                  <a:gd name="connsiteY13" fmla="*/ 114300 h 457256"/>
+                  <a:gd name="connsiteX14" fmla="*/ 501162 w 713540"/>
+                  <a:gd name="connsiteY14" fmla="*/ 79131 h 457256"/>
+                  <a:gd name="connsiteX15" fmla="*/ 553915 w 713540"/>
+                  <a:gd name="connsiteY15" fmla="*/ 70339 h 457256"/>
+                  <a:gd name="connsiteX16" fmla="*/ 589085 w 713540"/>
+                  <a:gd name="connsiteY16" fmla="*/ 61546 h 457256"/>
+                  <a:gd name="connsiteX17" fmla="*/ 633046 w 713540"/>
+                  <a:gd name="connsiteY17" fmla="*/ 70339 h 457256"/>
+                  <a:gd name="connsiteX18" fmla="*/ 659423 w 713540"/>
+                  <a:gd name="connsiteY18" fmla="*/ 149469 h 457256"/>
+                  <a:gd name="connsiteX19" fmla="*/ 650631 w 713540"/>
+                  <a:gd name="connsiteY19" fmla="*/ 219808 h 457256"/>
+                  <a:gd name="connsiteX20" fmla="*/ 633046 w 713540"/>
+                  <a:gd name="connsiteY20" fmla="*/ 246185 h 457256"/>
+                  <a:gd name="connsiteX21" fmla="*/ 685800 w 713540"/>
+                  <a:gd name="connsiteY21" fmla="*/ 298939 h 457256"/>
+                  <a:gd name="connsiteX22" fmla="*/ 703385 w 713540"/>
+                  <a:gd name="connsiteY22" fmla="*/ 342900 h 457256"/>
+                  <a:gd name="connsiteX23" fmla="*/ 694592 w 713540"/>
+                  <a:gd name="connsiteY23" fmla="*/ 422031 h 457256"/>
+                  <a:gd name="connsiteX24" fmla="*/ 659423 w 713540"/>
+                  <a:gd name="connsiteY24" fmla="*/ 430823 h 457256"/>
+                  <a:gd name="connsiteX25" fmla="*/ 597877 w 713540"/>
+                  <a:gd name="connsiteY25" fmla="*/ 457200 h 457256"/>
+                  <a:gd name="connsiteX26" fmla="*/ 562708 w 713540"/>
+                  <a:gd name="connsiteY26" fmla="*/ 439616 h 457256"/>
+                  <a:gd name="connsiteX27" fmla="*/ 536331 w 713540"/>
+                  <a:gd name="connsiteY27" fmla="*/ 422031 h 457256"/>
+                </a:gdLst>
+                <a:ahLst/>
+                <a:cxnLst>
+                  <a:cxn ang="0">
+                    <a:pos x="connsiteX0" y="connsiteY0"/>
+                  </a:cxn>
+                  <a:cxn ang="0">
+                    <a:pos x="connsiteX1" y="connsiteY1"/>
+                  </a:cxn>
+                  <a:cxn ang="0">
+                    <a:pos x="connsiteX2" y="connsiteY2"/>
+                  </a:cxn>
+                  <a:cxn ang="0">
+                    <a:pos x="connsiteX3" y="connsiteY3"/>
+                  </a:cxn>
+                  <a:cxn ang="0">
+                    <a:pos x="connsiteX4" y="connsiteY4"/>
+                  </a:cxn>
+                  <a:cxn ang="0">
+                    <a:pos x="connsiteX5" y="connsiteY5"/>
+                  </a:cxn>
+                  <a:cxn ang="0">
+                    <a:pos x="connsiteX6" y="connsiteY6"/>
+                  </a:cxn>
+                  <a:cxn ang="0">
+                    <a:pos x="connsiteX7" y="connsiteY7"/>
+                  </a:cxn>
+                  <a:cxn ang="0">
+                    <a:pos x="connsiteX8" y="connsiteY8"/>
+                  </a:cxn>
+                  <a:cxn ang="0">
+                    <a:pos x="connsiteX9" y="connsiteY9"/>
+                  </a:cxn>
+                  <a:cxn ang="0">
+                    <a:pos x="connsiteX10" y="connsiteY10"/>
+                  </a:cxn>
+                  <a:cxn ang="0">
+                    <a:pos x="connsiteX11" y="connsiteY11"/>
+                  </a:cxn>
+                  <a:cxn ang="0">
+                    <a:pos x="connsiteX12" y="connsiteY12"/>
+                  </a:cxn>
+                  <a:cxn ang="0">
+                    <a:pos x="connsiteX13" y="connsiteY13"/>
+                  </a:cxn>
+                  <a:cxn ang="0">
+                    <a:pos x="connsiteX14" y="connsiteY14"/>
+                  </a:cxn>
+                  <a:cxn ang="0">
+                    <a:pos x="connsiteX15" y="connsiteY15"/>
+                  </a:cxn>
+                  <a:cxn ang="0">
+                    <a:pos x="connsiteX16" y="connsiteY16"/>
+                  </a:cxn>
+                  <a:cxn ang="0">
+                    <a:pos x="connsiteX17" y="connsiteY17"/>
+                  </a:cxn>
+                  <a:cxn ang="0">
+                    <a:pos x="connsiteX18" y="connsiteY18"/>
+                  </a:cxn>
+                  <a:cxn ang="0">
+                    <a:pos x="connsiteX19" y="connsiteY19"/>
+                  </a:cxn>
+                  <a:cxn ang="0">
+                    <a:pos x="connsiteX20" y="connsiteY20"/>
+                  </a:cxn>
+                  <a:cxn ang="0">
+                    <a:pos x="connsiteX21" y="connsiteY21"/>
+                  </a:cxn>
+                  <a:cxn ang="0">
+                    <a:pos x="connsiteX22" y="connsiteY22"/>
+                  </a:cxn>
+                  <a:cxn ang="0">
+                    <a:pos x="connsiteX23" y="connsiteY23"/>
+                  </a:cxn>
+                  <a:cxn ang="0">
+                    <a:pos x="connsiteX24" y="connsiteY24"/>
+                  </a:cxn>
+                  <a:cxn ang="0">
+                    <a:pos x="connsiteX25" y="connsiteY25"/>
+                  </a:cxn>
+                  <a:cxn ang="0">
+                    <a:pos x="connsiteX26" y="connsiteY26"/>
+                  </a:cxn>
+                  <a:cxn ang="0">
+                    <a:pos x="connsiteX27" y="connsiteY27"/>
+                  </a:cxn>
+                </a:cxnLst>
+                <a:rect l="l" t="t" r="r" b="b"/>
+                <a:pathLst>
+                  <a:path w="713540" h="457256">
+                    <a:moveTo>
+                      <a:pt x="96715" y="334108"/>
+                    </a:moveTo>
+                    <a:cubicBezTo>
+                      <a:pt x="70338" y="328246"/>
+                      <a:pt x="42183" y="327704"/>
+                      <a:pt x="17585" y="316523"/>
+                    </a:cubicBezTo>
+                    <a:cubicBezTo>
+                      <a:pt x="7965" y="312150"/>
+                      <a:pt x="0" y="300713"/>
+                      <a:pt x="0" y="290146"/>
+                    </a:cubicBezTo>
+                    <a:cubicBezTo>
+                      <a:pt x="0" y="222632"/>
+                      <a:pt x="3454" y="174142"/>
+                      <a:pt x="52754" y="131885"/>
+                    </a:cubicBezTo>
+                    <a:cubicBezTo>
+                      <a:pt x="59791" y="125854"/>
+                      <a:pt x="70339" y="126024"/>
+                      <a:pt x="79131" y="123093"/>
+                    </a:cubicBezTo>
+                    <a:cubicBezTo>
+                      <a:pt x="96716" y="126024"/>
+                      <a:pt x="114810" y="126763"/>
+                      <a:pt x="131885" y="131885"/>
+                    </a:cubicBezTo>
+                    <a:cubicBezTo>
+                      <a:pt x="144439" y="135651"/>
+                      <a:pt x="154126" y="151624"/>
+                      <a:pt x="167054" y="149469"/>
+                    </a:cubicBezTo>
+                    <a:cubicBezTo>
+                      <a:pt x="177477" y="147732"/>
+                      <a:pt x="178777" y="131885"/>
+                      <a:pt x="184639" y="123093"/>
+                    </a:cubicBezTo>
+                    <a:cubicBezTo>
+                      <a:pt x="187570" y="93785"/>
+                      <a:pt x="180259" y="61514"/>
+                      <a:pt x="193431" y="35169"/>
+                    </a:cubicBezTo>
+                    <a:cubicBezTo>
+                      <a:pt x="200489" y="21053"/>
+                      <a:pt x="222614" y="23126"/>
+                      <a:pt x="237392" y="17585"/>
+                    </a:cubicBezTo>
+                    <a:cubicBezTo>
+                      <a:pt x="280805" y="1305"/>
+                      <a:pt x="277871" y="7226"/>
+                      <a:pt x="342900" y="0"/>
+                    </a:cubicBezTo>
+                    <a:cubicBezTo>
+                      <a:pt x="354623" y="2931"/>
+                      <a:pt x="367577" y="2798"/>
+                      <a:pt x="378069" y="8793"/>
+                    </a:cubicBezTo>
+                    <a:cubicBezTo>
+                      <a:pt x="413069" y="28793"/>
+                      <a:pt x="398971" y="33010"/>
+                      <a:pt x="413239" y="61546"/>
+                    </a:cubicBezTo>
+                    <a:cubicBezTo>
+                      <a:pt x="447324" y="129715"/>
+                      <a:pt x="417518" y="48007"/>
+                      <a:pt x="439615" y="114300"/>
+                    </a:cubicBezTo>
+                    <a:cubicBezTo>
+                      <a:pt x="457275" y="102527"/>
+                      <a:pt x="480881" y="85215"/>
+                      <a:pt x="501162" y="79131"/>
+                    </a:cubicBezTo>
+                    <a:cubicBezTo>
+                      <a:pt x="518237" y="74008"/>
+                      <a:pt x="536434" y="73835"/>
+                      <a:pt x="553915" y="70339"/>
+                    </a:cubicBezTo>
+                    <a:cubicBezTo>
+                      <a:pt x="565764" y="67969"/>
+                      <a:pt x="577362" y="64477"/>
+                      <a:pt x="589085" y="61546"/>
+                    </a:cubicBezTo>
+                    <a:cubicBezTo>
+                      <a:pt x="603739" y="64477"/>
+                      <a:pt x="620886" y="61653"/>
+                      <a:pt x="633046" y="70339"/>
+                    </a:cubicBezTo>
+                    <a:cubicBezTo>
+                      <a:pt x="650034" y="82474"/>
+                      <a:pt x="656361" y="134158"/>
+                      <a:pt x="659423" y="149469"/>
+                    </a:cubicBezTo>
+                    <a:cubicBezTo>
+                      <a:pt x="656492" y="172915"/>
+                      <a:pt x="656848" y="197012"/>
+                      <a:pt x="650631" y="219808"/>
+                    </a:cubicBezTo>
+                    <a:cubicBezTo>
+                      <a:pt x="647851" y="230003"/>
+                      <a:pt x="633046" y="235618"/>
+                      <a:pt x="633046" y="246185"/>
+                    </a:cubicBezTo>
+                    <a:cubicBezTo>
+                      <a:pt x="633046" y="265469"/>
+                      <a:pt x="677835" y="292965"/>
+                      <a:pt x="685800" y="298939"/>
+                    </a:cubicBezTo>
+                    <a:cubicBezTo>
+                      <a:pt x="691662" y="313593"/>
+                      <a:pt x="697843" y="328122"/>
+                      <a:pt x="703385" y="342900"/>
+                    </a:cubicBezTo>
+                    <a:cubicBezTo>
+                      <a:pt x="714407" y="372292"/>
+                      <a:pt x="722370" y="389623"/>
+                      <a:pt x="694592" y="422031"/>
+                    </a:cubicBezTo>
+                    <a:cubicBezTo>
+                      <a:pt x="686728" y="431206"/>
+                      <a:pt x="671146" y="427892"/>
+                      <a:pt x="659423" y="430823"/>
+                    </a:cubicBezTo>
+                    <a:cubicBezTo>
+                      <a:pt x="656620" y="432225"/>
+                      <a:pt x="607941" y="458638"/>
+                      <a:pt x="597877" y="457200"/>
+                    </a:cubicBezTo>
+                    <a:cubicBezTo>
+                      <a:pt x="584902" y="455347"/>
+                      <a:pt x="574755" y="444779"/>
+                      <a:pt x="562708" y="439616"/>
+                    </a:cubicBezTo>
+                    <a:cubicBezTo>
+                      <a:pt x="533551" y="427120"/>
+                      <a:pt x="536331" y="440969"/>
+                      <a:pt x="536331" y="422031"/>
+                    </a:cubicBezTo>
+                  </a:path>
+                </a:pathLst>
+              </a:custGeom>
+              <a:ln w="28575"/>
+            </p:spPr>
+            <p:style>
+              <a:lnRef idx="1">
+                <a:schemeClr val="dk1"/>
+              </a:lnRef>
+              <a:fillRef idx="0">
+                <a:schemeClr val="dk1"/>
+              </a:fillRef>
+              <a:effectRef idx="0">
+                <a:schemeClr val="dk1"/>
+              </a:effectRef>
+              <a:fontRef idx="minor">
+                <a:schemeClr val="tx1"/>
+              </a:fontRef>
+            </p:style>
+            <p:txBody>
+              <a:bodyPr rtlCol="0" anchor="ctr"/>
+              <a:lstStyle/>
+              <a:p>
+                <a:pPr algn="ctr"/>
+                <a:endParaRPr lang="en-US"/>
+              </a:p>
+            </p:txBody>
+          </p:sp>
+        </p:grpSp>
+        <p:grpSp>
+          <p:nvGrpSpPr>
+            <p:cNvPr id="51" name="Group 50">
+              <a:extLst>
+                <a:ext uri="{FF2B5EF4-FFF2-40B4-BE49-F238E27FC236}">
+                  <a16:creationId xmlns:a16="http://schemas.microsoft.com/office/drawing/2014/main" id="{755E6968-3667-40EF-9086-E409B9CA3998}"/>
+                </a:ext>
+              </a:extLst>
+            </p:cNvPr>
+            <p:cNvGrpSpPr/>
+            <p:nvPr/>
+          </p:nvGrpSpPr>
+          <p:grpSpPr>
+            <a:xfrm rot="7499415">
+              <a:off x="2537826" y="4038140"/>
+              <a:ext cx="713540" cy="685799"/>
+              <a:chOff x="2259623" y="3349869"/>
+              <a:chExt cx="713540" cy="685799"/>
+            </a:xfrm>
+          </p:grpSpPr>
+          <p:cxnSp>
+            <p:nvCxnSpPr>
+              <p:cNvPr id="52" name="Straight Connector 51">
+                <a:extLst>
+                  <a:ext uri="{FF2B5EF4-FFF2-40B4-BE49-F238E27FC236}">
+                    <a16:creationId xmlns:a16="http://schemas.microsoft.com/office/drawing/2014/main" id="{0656714E-BDFD-4BA4-A843-737AA316A943}"/>
+                  </a:ext>
+                </a:extLst>
+              </p:cNvPr>
+              <p:cNvCxnSpPr/>
+              <p:nvPr/>
+            </p:nvCxnSpPr>
+            <p:spPr>
+              <a:xfrm>
+                <a:off x="2409091" y="3543300"/>
+                <a:ext cx="105508" cy="457200"/>
+              </a:xfrm>
+              <a:prstGeom prst="line">
+                <a:avLst/>
+              </a:prstGeom>
+              <a:ln w="28575"/>
+            </p:spPr>
+            <p:style>
+              <a:lnRef idx="1">
+                <a:schemeClr val="dk1"/>
+              </a:lnRef>
+              <a:fillRef idx="0">
+                <a:schemeClr val="dk1"/>
+              </a:fillRef>
+              <a:effectRef idx="0">
+                <a:schemeClr val="dk1"/>
+              </a:effectRef>
+              <a:fontRef idx="minor">
+                <a:schemeClr val="tx1"/>
+              </a:fontRef>
+            </p:style>
+          </p:cxnSp>
+          <p:cxnSp>
+            <p:nvCxnSpPr>
+              <p:cNvPr id="53" name="Straight Connector 52">
+                <a:extLst>
+                  <a:ext uri="{FF2B5EF4-FFF2-40B4-BE49-F238E27FC236}">
+                    <a16:creationId xmlns:a16="http://schemas.microsoft.com/office/drawing/2014/main" id="{E89D219F-E952-42D1-BA15-37489C1317AA}"/>
+                  </a:ext>
+                </a:extLst>
+              </p:cNvPr>
+              <p:cNvCxnSpPr>
+                <a:cxnSpLocks/>
+              </p:cNvCxnSpPr>
+              <p:nvPr/>
+            </p:nvCxnSpPr>
+            <p:spPr>
+              <a:xfrm>
+                <a:off x="2593731" y="3534508"/>
+                <a:ext cx="0" cy="457200"/>
+              </a:xfrm>
+              <a:prstGeom prst="line">
+                <a:avLst/>
+              </a:prstGeom>
+              <a:ln w="28575"/>
+            </p:spPr>
+            <p:style>
+              <a:lnRef idx="1">
+                <a:schemeClr val="dk1"/>
+              </a:lnRef>
+              <a:fillRef idx="0">
+                <a:schemeClr val="dk1"/>
+              </a:fillRef>
+              <a:effectRef idx="0">
+                <a:schemeClr val="dk1"/>
+              </a:effectRef>
+              <a:fontRef idx="minor">
+                <a:schemeClr val="tx1"/>
+              </a:fontRef>
+            </p:style>
+          </p:cxnSp>
+          <p:cxnSp>
+            <p:nvCxnSpPr>
+              <p:cNvPr id="54" name="Straight Connector 53">
+                <a:extLst>
+                  <a:ext uri="{FF2B5EF4-FFF2-40B4-BE49-F238E27FC236}">
+                    <a16:creationId xmlns:a16="http://schemas.microsoft.com/office/drawing/2014/main" id="{0F59440B-687B-46F6-A93C-65932D1BC6BA}"/>
+                  </a:ext>
+                </a:extLst>
+              </p:cNvPr>
+              <p:cNvCxnSpPr>
+                <a:cxnSpLocks/>
+              </p:cNvCxnSpPr>
+              <p:nvPr/>
+            </p:nvCxnSpPr>
+            <p:spPr>
+              <a:xfrm flipH="1">
+                <a:off x="2646488" y="3578468"/>
+                <a:ext cx="137874" cy="457200"/>
+              </a:xfrm>
+              <a:prstGeom prst="line">
+                <a:avLst/>
+              </a:prstGeom>
+              <a:ln w="28575"/>
+            </p:spPr>
+            <p:style>
+              <a:lnRef idx="1">
+                <a:schemeClr val="dk1"/>
+              </a:lnRef>
+              <a:fillRef idx="0">
+                <a:schemeClr val="dk1"/>
+              </a:fillRef>
+              <a:effectRef idx="0">
+                <a:schemeClr val="dk1"/>
+              </a:effectRef>
+              <a:fontRef idx="minor">
+                <a:schemeClr val="tx1"/>
+              </a:fontRef>
+            </p:style>
+          </p:cxnSp>
+          <p:sp>
+            <p:nvSpPr>
+              <p:cNvPr id="55" name="Freeform: Shape 54">
+                <a:extLst>
+                  <a:ext uri="{FF2B5EF4-FFF2-40B4-BE49-F238E27FC236}">
+                    <a16:creationId xmlns:a16="http://schemas.microsoft.com/office/drawing/2014/main" id="{AB0E0393-5270-42DE-92FD-C5CB289664E2}"/>
+                  </a:ext>
+                </a:extLst>
+              </p:cNvPr>
+              <p:cNvSpPr/>
+              <p:nvPr/>
+            </p:nvSpPr>
+            <p:spPr>
+              <a:xfrm>
+                <a:off x="2259623" y="3349869"/>
+                <a:ext cx="713540" cy="457256"/>
+              </a:xfrm>
+              <a:custGeom>
+                <a:avLst/>
+                <a:gdLst>
+                  <a:gd name="connsiteX0" fmla="*/ 96715 w 713540"/>
+                  <a:gd name="connsiteY0" fmla="*/ 334108 h 457256"/>
+                  <a:gd name="connsiteX1" fmla="*/ 17585 w 713540"/>
+                  <a:gd name="connsiteY1" fmla="*/ 316523 h 457256"/>
+                  <a:gd name="connsiteX2" fmla="*/ 0 w 713540"/>
+                  <a:gd name="connsiteY2" fmla="*/ 290146 h 457256"/>
+                  <a:gd name="connsiteX3" fmla="*/ 52754 w 713540"/>
+                  <a:gd name="connsiteY3" fmla="*/ 131885 h 457256"/>
+                  <a:gd name="connsiteX4" fmla="*/ 79131 w 713540"/>
+                  <a:gd name="connsiteY4" fmla="*/ 123093 h 457256"/>
+                  <a:gd name="connsiteX5" fmla="*/ 131885 w 713540"/>
+                  <a:gd name="connsiteY5" fmla="*/ 131885 h 457256"/>
+                  <a:gd name="connsiteX6" fmla="*/ 167054 w 713540"/>
+                  <a:gd name="connsiteY6" fmla="*/ 149469 h 457256"/>
+                  <a:gd name="connsiteX7" fmla="*/ 184639 w 713540"/>
+                  <a:gd name="connsiteY7" fmla="*/ 123093 h 457256"/>
+                  <a:gd name="connsiteX8" fmla="*/ 193431 w 713540"/>
+                  <a:gd name="connsiteY8" fmla="*/ 35169 h 457256"/>
+                  <a:gd name="connsiteX9" fmla="*/ 237392 w 713540"/>
+                  <a:gd name="connsiteY9" fmla="*/ 17585 h 457256"/>
+                  <a:gd name="connsiteX10" fmla="*/ 342900 w 713540"/>
+                  <a:gd name="connsiteY10" fmla="*/ 0 h 457256"/>
+                  <a:gd name="connsiteX11" fmla="*/ 378069 w 713540"/>
+                  <a:gd name="connsiteY11" fmla="*/ 8793 h 457256"/>
+                  <a:gd name="connsiteX12" fmla="*/ 413239 w 713540"/>
+                  <a:gd name="connsiteY12" fmla="*/ 61546 h 457256"/>
+                  <a:gd name="connsiteX13" fmla="*/ 439615 w 713540"/>
+                  <a:gd name="connsiteY13" fmla="*/ 114300 h 457256"/>
+                  <a:gd name="connsiteX14" fmla="*/ 501162 w 713540"/>
+                  <a:gd name="connsiteY14" fmla="*/ 79131 h 457256"/>
+                  <a:gd name="connsiteX15" fmla="*/ 553915 w 713540"/>
+                  <a:gd name="connsiteY15" fmla="*/ 70339 h 457256"/>
+                  <a:gd name="connsiteX16" fmla="*/ 589085 w 713540"/>
+                  <a:gd name="connsiteY16" fmla="*/ 61546 h 457256"/>
+                  <a:gd name="connsiteX17" fmla="*/ 633046 w 713540"/>
+                  <a:gd name="connsiteY17" fmla="*/ 70339 h 457256"/>
+                  <a:gd name="connsiteX18" fmla="*/ 659423 w 713540"/>
+                  <a:gd name="connsiteY18" fmla="*/ 149469 h 457256"/>
+                  <a:gd name="connsiteX19" fmla="*/ 650631 w 713540"/>
+                  <a:gd name="connsiteY19" fmla="*/ 219808 h 457256"/>
+                  <a:gd name="connsiteX20" fmla="*/ 633046 w 713540"/>
+                  <a:gd name="connsiteY20" fmla="*/ 246185 h 457256"/>
+                  <a:gd name="connsiteX21" fmla="*/ 685800 w 713540"/>
+                  <a:gd name="connsiteY21" fmla="*/ 298939 h 457256"/>
+                  <a:gd name="connsiteX22" fmla="*/ 703385 w 713540"/>
+                  <a:gd name="connsiteY22" fmla="*/ 342900 h 457256"/>
+                  <a:gd name="connsiteX23" fmla="*/ 694592 w 713540"/>
+                  <a:gd name="connsiteY23" fmla="*/ 422031 h 457256"/>
+                  <a:gd name="connsiteX24" fmla="*/ 659423 w 713540"/>
+                  <a:gd name="connsiteY24" fmla="*/ 430823 h 457256"/>
+                  <a:gd name="connsiteX25" fmla="*/ 597877 w 713540"/>
+                  <a:gd name="connsiteY25" fmla="*/ 457200 h 457256"/>
+                  <a:gd name="connsiteX26" fmla="*/ 562708 w 713540"/>
+                  <a:gd name="connsiteY26" fmla="*/ 439616 h 457256"/>
+                  <a:gd name="connsiteX27" fmla="*/ 536331 w 713540"/>
+                  <a:gd name="connsiteY27" fmla="*/ 422031 h 457256"/>
+                </a:gdLst>
+                <a:ahLst/>
+                <a:cxnLst>
+                  <a:cxn ang="0">
+                    <a:pos x="connsiteX0" y="connsiteY0"/>
+                  </a:cxn>
+                  <a:cxn ang="0">
+                    <a:pos x="connsiteX1" y="connsiteY1"/>
+                  </a:cxn>
+                  <a:cxn ang="0">
+                    <a:pos x="connsiteX2" y="connsiteY2"/>
+                  </a:cxn>
+                  <a:cxn ang="0">
+                    <a:pos x="connsiteX3" y="connsiteY3"/>
+                  </a:cxn>
+                  <a:cxn ang="0">
+                    <a:pos x="connsiteX4" y="connsiteY4"/>
+                  </a:cxn>
+                  <a:cxn ang="0">
+                    <a:pos x="connsiteX5" y="connsiteY5"/>
+                  </a:cxn>
+                  <a:cxn ang="0">
+                    <a:pos x="connsiteX6" y="connsiteY6"/>
+                  </a:cxn>
+                  <a:cxn ang="0">
+                    <a:pos x="connsiteX7" y="connsiteY7"/>
+                  </a:cxn>
+                  <a:cxn ang="0">
+                    <a:pos x="connsiteX8" y="connsiteY8"/>
+                  </a:cxn>
+                  <a:cxn ang="0">
+                    <a:pos x="connsiteX9" y="connsiteY9"/>
+                  </a:cxn>
+                  <a:cxn ang="0">
+                    <a:pos x="connsiteX10" y="connsiteY10"/>
+                  </a:cxn>
+                  <a:cxn ang="0">
+                    <a:pos x="connsiteX11" y="connsiteY11"/>
+                  </a:cxn>
+                  <a:cxn ang="0">
+                    <a:pos x="connsiteX12" y="connsiteY12"/>
+                  </a:cxn>
+                  <a:cxn ang="0">
+                    <a:pos x="connsiteX13" y="connsiteY13"/>
+                  </a:cxn>
+                  <a:cxn ang="0">
+                    <a:pos x="connsiteX14" y="connsiteY14"/>
+                  </a:cxn>
+                  <a:cxn ang="0">
+                    <a:pos x="connsiteX15" y="connsiteY15"/>
+                  </a:cxn>
+                  <a:cxn ang="0">
+                    <a:pos x="connsiteX16" y="connsiteY16"/>
+                  </a:cxn>
+                  <a:cxn ang="0">
+                    <a:pos x="connsiteX17" y="connsiteY17"/>
+                  </a:cxn>
+                  <a:cxn ang="0">
+                    <a:pos x="connsiteX18" y="connsiteY18"/>
+                  </a:cxn>
+                  <a:cxn ang="0">
+                    <a:pos x="connsiteX19" y="connsiteY19"/>
+                  </a:cxn>
+                  <a:cxn ang="0">
+                    <a:pos x="connsiteX20" y="connsiteY20"/>
+                  </a:cxn>
+                  <a:cxn ang="0">
+                    <a:pos x="connsiteX21" y="connsiteY21"/>
+                  </a:cxn>
+                  <a:cxn ang="0">
+                    <a:pos x="connsiteX22" y="connsiteY22"/>
+                  </a:cxn>
+                  <a:cxn ang="0">
+                    <a:pos x="connsiteX23" y="connsiteY23"/>
+                  </a:cxn>
+                  <a:cxn ang="0">
+                    <a:pos x="connsiteX24" y="connsiteY24"/>
+                  </a:cxn>
+                  <a:cxn ang="0">
+                    <a:pos x="connsiteX25" y="connsiteY25"/>
+                  </a:cxn>
+                  <a:cxn ang="0">
+                    <a:pos x="connsiteX26" y="connsiteY26"/>
+                  </a:cxn>
+                  <a:cxn ang="0">
+                    <a:pos x="connsiteX27" y="connsiteY27"/>
+                  </a:cxn>
+                </a:cxnLst>
+                <a:rect l="l" t="t" r="r" b="b"/>
+                <a:pathLst>
+                  <a:path w="713540" h="457256">
+                    <a:moveTo>
+                      <a:pt x="96715" y="334108"/>
+                    </a:moveTo>
+                    <a:cubicBezTo>
+                      <a:pt x="70338" y="328246"/>
+                      <a:pt x="42183" y="327704"/>
+                      <a:pt x="17585" y="316523"/>
+                    </a:cubicBezTo>
+                    <a:cubicBezTo>
+                      <a:pt x="7965" y="312150"/>
+                      <a:pt x="0" y="300713"/>
+                      <a:pt x="0" y="290146"/>
+                    </a:cubicBezTo>
+                    <a:cubicBezTo>
+                      <a:pt x="0" y="222632"/>
+                      <a:pt x="3454" y="174142"/>
+                      <a:pt x="52754" y="131885"/>
+                    </a:cubicBezTo>
+                    <a:cubicBezTo>
+                      <a:pt x="59791" y="125854"/>
+                      <a:pt x="70339" y="126024"/>
+                      <a:pt x="79131" y="123093"/>
+                    </a:cubicBezTo>
+                    <a:cubicBezTo>
+                      <a:pt x="96716" y="126024"/>
+                      <a:pt x="114810" y="126763"/>
+                      <a:pt x="131885" y="131885"/>
+                    </a:cubicBezTo>
+                    <a:cubicBezTo>
+                      <a:pt x="144439" y="135651"/>
+                      <a:pt x="154126" y="151624"/>
+                      <a:pt x="167054" y="149469"/>
+                    </a:cubicBezTo>
+                    <a:cubicBezTo>
+                      <a:pt x="177477" y="147732"/>
+                      <a:pt x="178777" y="131885"/>
+                      <a:pt x="184639" y="123093"/>
+                    </a:cubicBezTo>
+                    <a:cubicBezTo>
+                      <a:pt x="187570" y="93785"/>
+                      <a:pt x="180259" y="61514"/>
+                      <a:pt x="193431" y="35169"/>
+                    </a:cubicBezTo>
+                    <a:cubicBezTo>
+                      <a:pt x="200489" y="21053"/>
+                      <a:pt x="222614" y="23126"/>
+                      <a:pt x="237392" y="17585"/>
+                    </a:cubicBezTo>
+                    <a:cubicBezTo>
+                      <a:pt x="280805" y="1305"/>
+                      <a:pt x="277871" y="7226"/>
+                      <a:pt x="342900" y="0"/>
+                    </a:cubicBezTo>
+                    <a:cubicBezTo>
+                      <a:pt x="354623" y="2931"/>
+                      <a:pt x="367577" y="2798"/>
+                      <a:pt x="378069" y="8793"/>
+                    </a:cubicBezTo>
+                    <a:cubicBezTo>
+                      <a:pt x="413069" y="28793"/>
+                      <a:pt x="398971" y="33010"/>
+                      <a:pt x="413239" y="61546"/>
+                    </a:cubicBezTo>
+                    <a:cubicBezTo>
+                      <a:pt x="447324" y="129715"/>
+                      <a:pt x="417518" y="48007"/>
+                      <a:pt x="439615" y="114300"/>
+                    </a:cubicBezTo>
+                    <a:cubicBezTo>
+                      <a:pt x="457275" y="102527"/>
+                      <a:pt x="480881" y="85215"/>
+                      <a:pt x="501162" y="79131"/>
+                    </a:cubicBezTo>
+                    <a:cubicBezTo>
+                      <a:pt x="518237" y="74008"/>
+                      <a:pt x="536434" y="73835"/>
+                      <a:pt x="553915" y="70339"/>
+                    </a:cubicBezTo>
+                    <a:cubicBezTo>
+                      <a:pt x="565764" y="67969"/>
+                      <a:pt x="577362" y="64477"/>
+                      <a:pt x="589085" y="61546"/>
+                    </a:cubicBezTo>
+                    <a:cubicBezTo>
+                      <a:pt x="603739" y="64477"/>
+                      <a:pt x="620886" y="61653"/>
+                      <a:pt x="633046" y="70339"/>
+                    </a:cubicBezTo>
+                    <a:cubicBezTo>
+                      <a:pt x="650034" y="82474"/>
+                      <a:pt x="656361" y="134158"/>
+                      <a:pt x="659423" y="149469"/>
+                    </a:cubicBezTo>
+                    <a:cubicBezTo>
+                      <a:pt x="656492" y="172915"/>
+                      <a:pt x="656848" y="197012"/>
+                      <a:pt x="650631" y="219808"/>
+                    </a:cubicBezTo>
+                    <a:cubicBezTo>
+                      <a:pt x="647851" y="230003"/>
+                      <a:pt x="633046" y="235618"/>
+                      <a:pt x="633046" y="246185"/>
+                    </a:cubicBezTo>
+                    <a:cubicBezTo>
+                      <a:pt x="633046" y="265469"/>
+                      <a:pt x="677835" y="292965"/>
+                      <a:pt x="685800" y="298939"/>
+                    </a:cubicBezTo>
+                    <a:cubicBezTo>
+                      <a:pt x="691662" y="313593"/>
+                      <a:pt x="697843" y="328122"/>
+                      <a:pt x="703385" y="342900"/>
+                    </a:cubicBezTo>
+                    <a:cubicBezTo>
+                      <a:pt x="714407" y="372292"/>
+                      <a:pt x="722370" y="389623"/>
+                      <a:pt x="694592" y="422031"/>
+                    </a:cubicBezTo>
+                    <a:cubicBezTo>
+                      <a:pt x="686728" y="431206"/>
+                      <a:pt x="671146" y="427892"/>
+                      <a:pt x="659423" y="430823"/>
+                    </a:cubicBezTo>
+                    <a:cubicBezTo>
+                      <a:pt x="656620" y="432225"/>
+                      <a:pt x="607941" y="458638"/>
+                      <a:pt x="597877" y="457200"/>
+                    </a:cubicBezTo>
+                    <a:cubicBezTo>
+                      <a:pt x="584902" y="455347"/>
+                      <a:pt x="574755" y="444779"/>
+                      <a:pt x="562708" y="439616"/>
+                    </a:cubicBezTo>
+                    <a:cubicBezTo>
+                      <a:pt x="533551" y="427120"/>
+                      <a:pt x="536331" y="440969"/>
+                      <a:pt x="536331" y="422031"/>
+                    </a:cubicBezTo>
+                  </a:path>
+                </a:pathLst>
+              </a:custGeom>
+              <a:ln w="28575"/>
+            </p:spPr>
+            <p:style>
+              <a:lnRef idx="1">
+                <a:schemeClr val="dk1"/>
+              </a:lnRef>
+              <a:fillRef idx="0">
+                <a:schemeClr val="dk1"/>
+              </a:fillRef>
+              <a:effectRef idx="0">
+                <a:schemeClr val="dk1"/>
+              </a:effectRef>
+              <a:fontRef idx="minor">
+                <a:schemeClr val="tx1"/>
+              </a:fontRef>
+            </p:style>
+            <p:txBody>
+              <a:bodyPr rtlCol="0" anchor="ctr"/>
+              <a:lstStyle/>
+              <a:p>
+                <a:pPr algn="ctr"/>
+                <a:endParaRPr lang="en-US"/>
+              </a:p>
+            </p:txBody>
+          </p:sp>
+        </p:grpSp>
+        <p:grpSp>
+          <p:nvGrpSpPr>
+            <p:cNvPr id="56" name="Group 55">
+              <a:extLst>
+                <a:ext uri="{FF2B5EF4-FFF2-40B4-BE49-F238E27FC236}">
+                  <a16:creationId xmlns:a16="http://schemas.microsoft.com/office/drawing/2014/main" id="{C59804DC-B6FC-43F8-8B43-95618EBD66CA}"/>
+                </a:ext>
+              </a:extLst>
+            </p:cNvPr>
+            <p:cNvGrpSpPr/>
+            <p:nvPr/>
+          </p:nvGrpSpPr>
+          <p:grpSpPr>
+            <a:xfrm rot="14084301">
+              <a:off x="1878220" y="3928883"/>
+              <a:ext cx="713540" cy="685799"/>
+              <a:chOff x="2259623" y="3349869"/>
+              <a:chExt cx="713540" cy="685799"/>
+            </a:xfrm>
+          </p:grpSpPr>
+          <p:cxnSp>
+            <p:nvCxnSpPr>
+              <p:cNvPr id="57" name="Straight Connector 56">
+                <a:extLst>
+                  <a:ext uri="{FF2B5EF4-FFF2-40B4-BE49-F238E27FC236}">
+                    <a16:creationId xmlns:a16="http://schemas.microsoft.com/office/drawing/2014/main" id="{B656724B-74EC-4EE9-B7C0-FDA6C7EB42E9}"/>
+                  </a:ext>
+                </a:extLst>
+              </p:cNvPr>
+              <p:cNvCxnSpPr/>
+              <p:nvPr/>
+            </p:nvCxnSpPr>
+            <p:spPr>
+              <a:xfrm>
+                <a:off x="2409091" y="3543300"/>
+                <a:ext cx="105508" cy="457200"/>
+              </a:xfrm>
+              <a:prstGeom prst="line">
+                <a:avLst/>
+              </a:prstGeom>
+              <a:ln w="28575"/>
+            </p:spPr>
+            <p:style>
+              <a:lnRef idx="1">
+                <a:schemeClr val="dk1"/>
+              </a:lnRef>
+              <a:fillRef idx="0">
+                <a:schemeClr val="dk1"/>
+              </a:fillRef>
+              <a:effectRef idx="0">
+                <a:schemeClr val="dk1"/>
+              </a:effectRef>
+              <a:fontRef idx="minor">
+                <a:schemeClr val="tx1"/>
+              </a:fontRef>
+            </p:style>
+          </p:cxnSp>
+          <p:cxnSp>
+            <p:nvCxnSpPr>
+              <p:cNvPr id="58" name="Straight Connector 57">
+                <a:extLst>
+                  <a:ext uri="{FF2B5EF4-FFF2-40B4-BE49-F238E27FC236}">
+                    <a16:creationId xmlns:a16="http://schemas.microsoft.com/office/drawing/2014/main" id="{0BA3A777-80D5-437A-BCA6-4962566CD47E}"/>
+                  </a:ext>
+                </a:extLst>
+              </p:cNvPr>
+              <p:cNvCxnSpPr>
+                <a:cxnSpLocks/>
+              </p:cNvCxnSpPr>
+              <p:nvPr/>
+            </p:nvCxnSpPr>
+            <p:spPr>
+              <a:xfrm>
+                <a:off x="2593731" y="3534508"/>
+                <a:ext cx="0" cy="457200"/>
+              </a:xfrm>
+              <a:prstGeom prst="line">
+                <a:avLst/>
+              </a:prstGeom>
+              <a:ln w="28575"/>
+            </p:spPr>
+            <p:style>
+              <a:lnRef idx="1">
+                <a:schemeClr val="dk1"/>
+              </a:lnRef>
+              <a:fillRef idx="0">
+                <a:schemeClr val="dk1"/>
+              </a:fillRef>
+              <a:effectRef idx="0">
+                <a:schemeClr val="dk1"/>
+              </a:effectRef>
+              <a:fontRef idx="minor">
+                <a:schemeClr val="tx1"/>
+              </a:fontRef>
+            </p:style>
+          </p:cxnSp>
+          <p:cxnSp>
+            <p:nvCxnSpPr>
+              <p:cNvPr id="59" name="Straight Connector 58">
+                <a:extLst>
+                  <a:ext uri="{FF2B5EF4-FFF2-40B4-BE49-F238E27FC236}">
+                    <a16:creationId xmlns:a16="http://schemas.microsoft.com/office/drawing/2014/main" id="{4470A6BF-C84C-40C5-A0F9-19B74A93F664}"/>
+                  </a:ext>
+                </a:extLst>
+              </p:cNvPr>
+              <p:cNvCxnSpPr>
+                <a:cxnSpLocks/>
+              </p:cNvCxnSpPr>
+              <p:nvPr/>
+            </p:nvCxnSpPr>
+            <p:spPr>
+              <a:xfrm flipH="1">
+                <a:off x="2646488" y="3578468"/>
+                <a:ext cx="137874" cy="457200"/>
+              </a:xfrm>
+              <a:prstGeom prst="line">
+                <a:avLst/>
+              </a:prstGeom>
+              <a:ln w="28575"/>
+            </p:spPr>
+            <p:style>
+              <a:lnRef idx="1">
+                <a:schemeClr val="dk1"/>
+              </a:lnRef>
+              <a:fillRef idx="0">
+                <a:schemeClr val="dk1"/>
+              </a:fillRef>
+              <a:effectRef idx="0">
+                <a:schemeClr val="dk1"/>
+              </a:effectRef>
+              <a:fontRef idx="minor">
+                <a:schemeClr val="tx1"/>
+              </a:fontRef>
+            </p:style>
+          </p:cxnSp>
+          <p:sp>
+            <p:nvSpPr>
+              <p:cNvPr id="60" name="Freeform: Shape 59">
+                <a:extLst>
+                  <a:ext uri="{FF2B5EF4-FFF2-40B4-BE49-F238E27FC236}">
+                    <a16:creationId xmlns:a16="http://schemas.microsoft.com/office/drawing/2014/main" id="{0F41FFDE-1A05-4918-985E-C342761184F1}"/>
+                  </a:ext>
+                </a:extLst>
+              </p:cNvPr>
+              <p:cNvSpPr/>
+              <p:nvPr/>
+            </p:nvSpPr>
+            <p:spPr>
+              <a:xfrm>
+                <a:off x="2259623" y="3349869"/>
+                <a:ext cx="713540" cy="457256"/>
+              </a:xfrm>
+              <a:custGeom>
+                <a:avLst/>
+                <a:gdLst>
+                  <a:gd name="connsiteX0" fmla="*/ 96715 w 713540"/>
+                  <a:gd name="connsiteY0" fmla="*/ 334108 h 457256"/>
+                  <a:gd name="connsiteX1" fmla="*/ 17585 w 713540"/>
+                  <a:gd name="connsiteY1" fmla="*/ 316523 h 457256"/>
+                  <a:gd name="connsiteX2" fmla="*/ 0 w 713540"/>
+                  <a:gd name="connsiteY2" fmla="*/ 290146 h 457256"/>
+                  <a:gd name="connsiteX3" fmla="*/ 52754 w 713540"/>
+                  <a:gd name="connsiteY3" fmla="*/ 131885 h 457256"/>
+                  <a:gd name="connsiteX4" fmla="*/ 79131 w 713540"/>
+                  <a:gd name="connsiteY4" fmla="*/ 123093 h 457256"/>
+                  <a:gd name="connsiteX5" fmla="*/ 131885 w 713540"/>
+                  <a:gd name="connsiteY5" fmla="*/ 131885 h 457256"/>
+                  <a:gd name="connsiteX6" fmla="*/ 167054 w 713540"/>
+                  <a:gd name="connsiteY6" fmla="*/ 149469 h 457256"/>
+                  <a:gd name="connsiteX7" fmla="*/ 184639 w 713540"/>
+                  <a:gd name="connsiteY7" fmla="*/ 123093 h 457256"/>
+                  <a:gd name="connsiteX8" fmla="*/ 193431 w 713540"/>
+                  <a:gd name="connsiteY8" fmla="*/ 35169 h 457256"/>
+                  <a:gd name="connsiteX9" fmla="*/ 237392 w 713540"/>
+                  <a:gd name="connsiteY9" fmla="*/ 17585 h 457256"/>
+                  <a:gd name="connsiteX10" fmla="*/ 342900 w 713540"/>
+                  <a:gd name="connsiteY10" fmla="*/ 0 h 457256"/>
+                  <a:gd name="connsiteX11" fmla="*/ 378069 w 713540"/>
+                  <a:gd name="connsiteY11" fmla="*/ 8793 h 457256"/>
+                  <a:gd name="connsiteX12" fmla="*/ 413239 w 713540"/>
+                  <a:gd name="connsiteY12" fmla="*/ 61546 h 457256"/>
+                  <a:gd name="connsiteX13" fmla="*/ 439615 w 713540"/>
+                  <a:gd name="connsiteY13" fmla="*/ 114300 h 457256"/>
+                  <a:gd name="connsiteX14" fmla="*/ 501162 w 713540"/>
+                  <a:gd name="connsiteY14" fmla="*/ 79131 h 457256"/>
+                  <a:gd name="connsiteX15" fmla="*/ 553915 w 713540"/>
+                  <a:gd name="connsiteY15" fmla="*/ 70339 h 457256"/>
+                  <a:gd name="connsiteX16" fmla="*/ 589085 w 713540"/>
+                  <a:gd name="connsiteY16" fmla="*/ 61546 h 457256"/>
+                  <a:gd name="connsiteX17" fmla="*/ 633046 w 713540"/>
+                  <a:gd name="connsiteY17" fmla="*/ 70339 h 457256"/>
+                  <a:gd name="connsiteX18" fmla="*/ 659423 w 713540"/>
+                  <a:gd name="connsiteY18" fmla="*/ 149469 h 457256"/>
+                  <a:gd name="connsiteX19" fmla="*/ 650631 w 713540"/>
+                  <a:gd name="connsiteY19" fmla="*/ 219808 h 457256"/>
+                  <a:gd name="connsiteX20" fmla="*/ 633046 w 713540"/>
+                  <a:gd name="connsiteY20" fmla="*/ 246185 h 457256"/>
+                  <a:gd name="connsiteX21" fmla="*/ 685800 w 713540"/>
+                  <a:gd name="connsiteY21" fmla="*/ 298939 h 457256"/>
+                  <a:gd name="connsiteX22" fmla="*/ 703385 w 713540"/>
+                  <a:gd name="connsiteY22" fmla="*/ 342900 h 457256"/>
+                  <a:gd name="connsiteX23" fmla="*/ 694592 w 713540"/>
+                  <a:gd name="connsiteY23" fmla="*/ 422031 h 457256"/>
+                  <a:gd name="connsiteX24" fmla="*/ 659423 w 713540"/>
+                  <a:gd name="connsiteY24" fmla="*/ 430823 h 457256"/>
+                  <a:gd name="connsiteX25" fmla="*/ 597877 w 713540"/>
+                  <a:gd name="connsiteY25" fmla="*/ 457200 h 457256"/>
+                  <a:gd name="connsiteX26" fmla="*/ 562708 w 713540"/>
+                  <a:gd name="connsiteY26" fmla="*/ 439616 h 457256"/>
+                  <a:gd name="connsiteX27" fmla="*/ 536331 w 713540"/>
+                  <a:gd name="connsiteY27" fmla="*/ 422031 h 457256"/>
+                </a:gdLst>
+                <a:ahLst/>
+                <a:cxnLst>
+                  <a:cxn ang="0">
+                    <a:pos x="connsiteX0" y="connsiteY0"/>
+                  </a:cxn>
+                  <a:cxn ang="0">
+                    <a:pos x="connsiteX1" y="connsiteY1"/>
+                  </a:cxn>
+                  <a:cxn ang="0">
+                    <a:pos x="connsiteX2" y="connsiteY2"/>
+                  </a:cxn>
+                  <a:cxn ang="0">
+                    <a:pos x="connsiteX3" y="connsiteY3"/>
+                  </a:cxn>
+                  <a:cxn ang="0">
+                    <a:pos x="connsiteX4" y="connsiteY4"/>
+                  </a:cxn>
+                  <a:cxn ang="0">
+                    <a:pos x="connsiteX5" y="connsiteY5"/>
+                  </a:cxn>
+                  <a:cxn ang="0">
+                    <a:pos x="connsiteX6" y="connsiteY6"/>
+                  </a:cxn>
+                  <a:cxn ang="0">
+                    <a:pos x="connsiteX7" y="connsiteY7"/>
+                  </a:cxn>
+                  <a:cxn ang="0">
+                    <a:pos x="connsiteX8" y="connsiteY8"/>
+                  </a:cxn>
+                  <a:cxn ang="0">
+                    <a:pos x="connsiteX9" y="connsiteY9"/>
+                  </a:cxn>
+                  <a:cxn ang="0">
+                    <a:pos x="connsiteX10" y="connsiteY10"/>
+                  </a:cxn>
+                  <a:cxn ang="0">
+                    <a:pos x="connsiteX11" y="connsiteY11"/>
+                  </a:cxn>
+                  <a:cxn ang="0">
+                    <a:pos x="connsiteX12" y="connsiteY12"/>
+                  </a:cxn>
+                  <a:cxn ang="0">
+                    <a:pos x="connsiteX13" y="connsiteY13"/>
+                  </a:cxn>
+                  <a:cxn ang="0">
+                    <a:pos x="connsiteX14" y="connsiteY14"/>
+                  </a:cxn>
+                  <a:cxn ang="0">
+                    <a:pos x="connsiteX15" y="connsiteY15"/>
+                  </a:cxn>
+                  <a:cxn ang="0">
+                    <a:pos x="connsiteX16" y="connsiteY16"/>
+                  </a:cxn>
+                  <a:cxn ang="0">
+                    <a:pos x="connsiteX17" y="connsiteY17"/>
+                  </a:cxn>
+                  <a:cxn ang="0">
+                    <a:pos x="connsiteX18" y="connsiteY18"/>
+                  </a:cxn>
+                  <a:cxn ang="0">
+                    <a:pos x="connsiteX19" y="connsiteY19"/>
+                  </a:cxn>
+                  <a:cxn ang="0">
+                    <a:pos x="connsiteX20" y="connsiteY20"/>
+                  </a:cxn>
+                  <a:cxn ang="0">
+                    <a:pos x="connsiteX21" y="connsiteY21"/>
+                  </a:cxn>
+                  <a:cxn ang="0">
+                    <a:pos x="connsiteX22" y="connsiteY22"/>
+                  </a:cxn>
+                  <a:cxn ang="0">
+                    <a:pos x="connsiteX23" y="connsiteY23"/>
+                  </a:cxn>
+                  <a:cxn ang="0">
+                    <a:pos x="connsiteX24" y="connsiteY24"/>
+                  </a:cxn>
+                  <a:cxn ang="0">
+                    <a:pos x="connsiteX25" y="connsiteY25"/>
+                  </a:cxn>
+                  <a:cxn ang="0">
+                    <a:pos x="connsiteX26" y="connsiteY26"/>
+                  </a:cxn>
+                  <a:cxn ang="0">
+                    <a:pos x="connsiteX27" y="connsiteY27"/>
+                  </a:cxn>
+                </a:cxnLst>
+                <a:rect l="l" t="t" r="r" b="b"/>
+                <a:pathLst>
+                  <a:path w="713540" h="457256">
+                    <a:moveTo>
+                      <a:pt x="96715" y="334108"/>
+                    </a:moveTo>
+                    <a:cubicBezTo>
+                      <a:pt x="70338" y="328246"/>
+                      <a:pt x="42183" y="327704"/>
+                      <a:pt x="17585" y="316523"/>
+                    </a:cubicBezTo>
+                    <a:cubicBezTo>
+                      <a:pt x="7965" y="312150"/>
+                      <a:pt x="0" y="300713"/>
+                      <a:pt x="0" y="290146"/>
+                    </a:cubicBezTo>
+                    <a:cubicBezTo>
+                      <a:pt x="0" y="222632"/>
+                      <a:pt x="3454" y="174142"/>
+                      <a:pt x="52754" y="131885"/>
+                    </a:cubicBezTo>
+                    <a:cubicBezTo>
+                      <a:pt x="59791" y="125854"/>
+                      <a:pt x="70339" y="126024"/>
+                      <a:pt x="79131" y="123093"/>
+                    </a:cubicBezTo>
+                    <a:cubicBezTo>
+                      <a:pt x="96716" y="126024"/>
+                      <a:pt x="114810" y="126763"/>
+                      <a:pt x="131885" y="131885"/>
+                    </a:cubicBezTo>
+                    <a:cubicBezTo>
+                      <a:pt x="144439" y="135651"/>
+                      <a:pt x="154126" y="151624"/>
+                      <a:pt x="167054" y="149469"/>
+                    </a:cubicBezTo>
+                    <a:cubicBezTo>
+                      <a:pt x="177477" y="147732"/>
+                      <a:pt x="178777" y="131885"/>
+                      <a:pt x="184639" y="123093"/>
+                    </a:cubicBezTo>
+                    <a:cubicBezTo>
+                      <a:pt x="187570" y="93785"/>
+                      <a:pt x="180259" y="61514"/>
+                      <a:pt x="193431" y="35169"/>
+                    </a:cubicBezTo>
+                    <a:cubicBezTo>
+                      <a:pt x="200489" y="21053"/>
+                      <a:pt x="222614" y="23126"/>
+                      <a:pt x="237392" y="17585"/>
+                    </a:cubicBezTo>
+                    <a:cubicBezTo>
+                      <a:pt x="280805" y="1305"/>
+                      <a:pt x="277871" y="7226"/>
+                      <a:pt x="342900" y="0"/>
+                    </a:cubicBezTo>
+                    <a:cubicBezTo>
+                      <a:pt x="354623" y="2931"/>
+                      <a:pt x="367577" y="2798"/>
+                      <a:pt x="378069" y="8793"/>
+                    </a:cubicBezTo>
+                    <a:cubicBezTo>
+                      <a:pt x="413069" y="28793"/>
+                      <a:pt x="398971" y="33010"/>
+                      <a:pt x="413239" y="61546"/>
+                    </a:cubicBezTo>
+                    <a:cubicBezTo>
+                      <a:pt x="447324" y="129715"/>
+                      <a:pt x="417518" y="48007"/>
+                      <a:pt x="439615" y="114300"/>
+                    </a:cubicBezTo>
+                    <a:cubicBezTo>
+                      <a:pt x="457275" y="102527"/>
+                      <a:pt x="480881" y="85215"/>
+                      <a:pt x="501162" y="79131"/>
+                    </a:cubicBezTo>
+                    <a:cubicBezTo>
+                      <a:pt x="518237" y="74008"/>
+                      <a:pt x="536434" y="73835"/>
+                      <a:pt x="553915" y="70339"/>
+                    </a:cubicBezTo>
+                    <a:cubicBezTo>
+                      <a:pt x="565764" y="67969"/>
+                      <a:pt x="577362" y="64477"/>
+                      <a:pt x="589085" y="61546"/>
+                    </a:cubicBezTo>
+                    <a:cubicBezTo>
+                      <a:pt x="603739" y="64477"/>
+                      <a:pt x="620886" y="61653"/>
+                      <a:pt x="633046" y="70339"/>
+                    </a:cubicBezTo>
+                    <a:cubicBezTo>
+                      <a:pt x="650034" y="82474"/>
+                      <a:pt x="656361" y="134158"/>
+                      <a:pt x="659423" y="149469"/>
+                    </a:cubicBezTo>
+                    <a:cubicBezTo>
+                      <a:pt x="656492" y="172915"/>
+                      <a:pt x="656848" y="197012"/>
+                      <a:pt x="650631" y="219808"/>
+                    </a:cubicBezTo>
+                    <a:cubicBezTo>
+                      <a:pt x="647851" y="230003"/>
+                      <a:pt x="633046" y="235618"/>
+                      <a:pt x="633046" y="246185"/>
+                    </a:cubicBezTo>
+                    <a:cubicBezTo>
+                      <a:pt x="633046" y="265469"/>
+                      <a:pt x="677835" y="292965"/>
+                      <a:pt x="685800" y="298939"/>
+                    </a:cubicBezTo>
+                    <a:cubicBezTo>
+                      <a:pt x="691662" y="313593"/>
+                      <a:pt x="697843" y="328122"/>
+                      <a:pt x="703385" y="342900"/>
+                    </a:cubicBezTo>
+                    <a:cubicBezTo>
+                      <a:pt x="714407" y="372292"/>
+                      <a:pt x="722370" y="389623"/>
+                      <a:pt x="694592" y="422031"/>
+                    </a:cubicBezTo>
+                    <a:cubicBezTo>
+                      <a:pt x="686728" y="431206"/>
+                      <a:pt x="671146" y="427892"/>
+                      <a:pt x="659423" y="430823"/>
+                    </a:cubicBezTo>
+                    <a:cubicBezTo>
+                      <a:pt x="656620" y="432225"/>
+                      <a:pt x="607941" y="458638"/>
+                      <a:pt x="597877" y="457200"/>
+                    </a:cubicBezTo>
+                    <a:cubicBezTo>
+                      <a:pt x="584902" y="455347"/>
+                      <a:pt x="574755" y="444779"/>
+                      <a:pt x="562708" y="439616"/>
+                    </a:cubicBezTo>
+                    <a:cubicBezTo>
+                      <a:pt x="533551" y="427120"/>
+                      <a:pt x="536331" y="440969"/>
+                      <a:pt x="536331" y="422031"/>
+                    </a:cubicBezTo>
+                  </a:path>
+                </a:pathLst>
+              </a:custGeom>
+              <a:ln w="28575"/>
+            </p:spPr>
+            <p:style>
+              <a:lnRef idx="1">
+                <a:schemeClr val="dk1"/>
+              </a:lnRef>
+              <a:fillRef idx="0">
+                <a:schemeClr val="dk1"/>
+              </a:fillRef>
+              <a:effectRef idx="0">
+                <a:schemeClr val="dk1"/>
+              </a:effectRef>
+              <a:fontRef idx="minor">
+                <a:schemeClr val="tx1"/>
+              </a:fontRef>
+            </p:style>
+            <p:txBody>
+              <a:bodyPr rtlCol="0" anchor="ctr"/>
+              <a:lstStyle/>
+              <a:p>
+                <a:pPr algn="ctr"/>
+                <a:endParaRPr lang="en-US"/>
+              </a:p>
+            </p:txBody>
+          </p:sp>
+        </p:grpSp>
+      </p:grpSp>
+      <p:pic>
+        <p:nvPicPr>
+          <p:cNvPr id="61" name="Picture 60">
+            <a:extLst>
+              <a:ext uri="{FF2B5EF4-FFF2-40B4-BE49-F238E27FC236}">
+                <a16:creationId xmlns:a16="http://schemas.microsoft.com/office/drawing/2014/main" id="{B411028F-BCAA-4795-970B-8F3F948249BE}"/>
+              </a:ext>
+            </a:extLst>
+          </p:cNvPr>
+          <p:cNvPicPr>
+            <a:picLocks noChangeAspect="1"/>
+          </p:cNvPicPr>
+          <p:nvPr/>
+        </p:nvPicPr>
+        <p:blipFill>
+          <a:blip r:embed="rId5"/>
+          <a:stretch>
+            <a:fillRect/>
+          </a:stretch>
+        </p:blipFill>
+        <p:spPr>
+          <a:xfrm>
+            <a:off x="6352109" y="742157"/>
+            <a:ext cx="836387" cy="765806"/>
+          </a:xfrm>
+          <a:prstGeom prst="rect">
+            <a:avLst/>
+          </a:prstGeom>
+        </p:spPr>
+      </p:pic>
+      <p:grpSp>
+        <p:nvGrpSpPr>
+          <p:cNvPr id="1025" name="Group 1024">
+            <a:extLst>
+              <a:ext uri="{FF2B5EF4-FFF2-40B4-BE49-F238E27FC236}">
+                <a16:creationId xmlns:a16="http://schemas.microsoft.com/office/drawing/2014/main" id="{DCB68CFC-A675-4266-AA55-38103C9DE42B}"/>
+              </a:ext>
+            </a:extLst>
+          </p:cNvPr>
+          <p:cNvGrpSpPr/>
+          <p:nvPr/>
+        </p:nvGrpSpPr>
+        <p:grpSpPr>
+          <a:xfrm>
+            <a:off x="7229314" y="1534371"/>
+            <a:ext cx="745310" cy="652959"/>
+            <a:chOff x="2249647" y="3140207"/>
+            <a:chExt cx="2116017" cy="1853822"/>
+          </a:xfrm>
+        </p:grpSpPr>
+        <p:pic>
+          <p:nvPicPr>
+            <p:cNvPr id="63" name="Picture 62">
+              <a:extLst>
+                <a:ext uri="{FF2B5EF4-FFF2-40B4-BE49-F238E27FC236}">
+                  <a16:creationId xmlns:a16="http://schemas.microsoft.com/office/drawing/2014/main" id="{65102C77-E5FC-43F7-853A-8D73D4BD7A1D}"/>
+                </a:ext>
+              </a:extLst>
+            </p:cNvPr>
+            <p:cNvPicPr>
+              <a:picLocks noChangeAspect="1"/>
+            </p:cNvPicPr>
+            <p:nvPr/>
+          </p:nvPicPr>
+          <p:blipFill>
+            <a:blip r:embed="rId6"/>
+            <a:stretch>
+              <a:fillRect/>
+            </a:stretch>
+          </p:blipFill>
+          <p:spPr>
+            <a:xfrm>
+              <a:off x="2249647" y="3191608"/>
+              <a:ext cx="1992924" cy="1793632"/>
+            </a:xfrm>
+            <a:prstGeom prst="rect">
+              <a:avLst/>
+            </a:prstGeom>
+          </p:spPr>
+        </p:pic>
+        <p:sp>
+          <p:nvSpPr>
+            <p:cNvPr id="1024" name="Oval 1023">
+              <a:extLst>
+                <a:ext uri="{FF2B5EF4-FFF2-40B4-BE49-F238E27FC236}">
+                  <a16:creationId xmlns:a16="http://schemas.microsoft.com/office/drawing/2014/main" id="{0838C029-4B90-4CA2-81FF-7082A5A26DC9}"/>
+                </a:ext>
+              </a:extLst>
+            </p:cNvPr>
+            <p:cNvSpPr/>
+            <p:nvPr/>
+          </p:nvSpPr>
+          <p:spPr>
+            <a:xfrm>
+              <a:off x="2438399" y="3560885"/>
+              <a:ext cx="123093" cy="131885"/>
+            </a:xfrm>
+            <a:prstGeom prst="ellipse">
+              <a:avLst/>
+            </a:prstGeom>
+          </p:spPr>
+          <p:style>
+            <a:lnRef idx="2">
+              <a:schemeClr val="dk1">
+                <a:shade val="50000"/>
+              </a:schemeClr>
+            </a:lnRef>
+            <a:fillRef idx="1">
+              <a:schemeClr val="dk1"/>
+            </a:fillRef>
+            <a:effectRef idx="0">
+              <a:schemeClr val="dk1"/>
+            </a:effectRef>
+            <a:fontRef idx="minor">
+              <a:schemeClr val="lt1"/>
+            </a:fontRef>
+          </p:style>
+          <p:txBody>
+            <a:bodyPr rtlCol="0" anchor="ctr"/>
+            <a:lstStyle/>
+            <a:p>
+              <a:pPr algn="ctr"/>
+              <a:endParaRPr lang="en-US"/>
+            </a:p>
+          </p:txBody>
+        </p:sp>
+        <p:sp>
+          <p:nvSpPr>
+            <p:cNvPr id="67" name="Oval 66">
+              <a:extLst>
+                <a:ext uri="{FF2B5EF4-FFF2-40B4-BE49-F238E27FC236}">
+                  <a16:creationId xmlns:a16="http://schemas.microsoft.com/office/drawing/2014/main" id="{3DBBD6E0-F2AB-4332-BBD2-5DBEBCC56BED}"/>
+                </a:ext>
+              </a:extLst>
+            </p:cNvPr>
+            <p:cNvSpPr/>
+            <p:nvPr/>
+          </p:nvSpPr>
+          <p:spPr>
+            <a:xfrm>
+              <a:off x="2583473" y="3191608"/>
+              <a:ext cx="123093" cy="131885"/>
+            </a:xfrm>
+            <a:prstGeom prst="ellipse">
+              <a:avLst/>
+            </a:prstGeom>
+          </p:spPr>
+          <p:style>
+            <a:lnRef idx="2">
+              <a:schemeClr val="dk1">
+                <a:shade val="50000"/>
+              </a:schemeClr>
+            </a:lnRef>
+            <a:fillRef idx="1">
+              <a:schemeClr val="dk1"/>
+            </a:fillRef>
+            <a:effectRef idx="0">
+              <a:schemeClr val="dk1"/>
+            </a:effectRef>
+            <a:fontRef idx="minor">
+              <a:schemeClr val="lt1"/>
+            </a:fontRef>
+          </p:style>
+          <p:txBody>
+            <a:bodyPr rtlCol="0" anchor="ctr"/>
+            <a:lstStyle/>
+            <a:p>
+              <a:pPr algn="ctr"/>
+              <a:endParaRPr lang="en-US"/>
+            </a:p>
+          </p:txBody>
+        </p:sp>
+        <p:sp>
+          <p:nvSpPr>
+            <p:cNvPr id="68" name="Oval 67">
+              <a:extLst>
+                <a:ext uri="{FF2B5EF4-FFF2-40B4-BE49-F238E27FC236}">
+                  <a16:creationId xmlns:a16="http://schemas.microsoft.com/office/drawing/2014/main" id="{5DFEBCF7-4ABE-4DC7-8FFE-C63A548A49D5}"/>
+                </a:ext>
+              </a:extLst>
+            </p:cNvPr>
+            <p:cNvSpPr/>
+            <p:nvPr/>
+          </p:nvSpPr>
+          <p:spPr>
+            <a:xfrm>
+              <a:off x="3458621" y="3363057"/>
+              <a:ext cx="123093" cy="131885"/>
+            </a:xfrm>
+            <a:prstGeom prst="ellipse">
+              <a:avLst/>
+            </a:prstGeom>
+          </p:spPr>
+          <p:style>
+            <a:lnRef idx="2">
+              <a:schemeClr val="dk1">
+                <a:shade val="50000"/>
+              </a:schemeClr>
+            </a:lnRef>
+            <a:fillRef idx="1">
+              <a:schemeClr val="dk1"/>
+            </a:fillRef>
+            <a:effectRef idx="0">
+              <a:schemeClr val="dk1"/>
+            </a:effectRef>
+            <a:fontRef idx="minor">
+              <a:schemeClr val="lt1"/>
+            </a:fontRef>
+          </p:style>
+          <p:txBody>
+            <a:bodyPr rtlCol="0" anchor="ctr"/>
+            <a:lstStyle/>
+            <a:p>
+              <a:pPr algn="ctr"/>
+              <a:endParaRPr lang="en-US"/>
+            </a:p>
+          </p:txBody>
+        </p:sp>
+        <p:sp>
+          <p:nvSpPr>
+            <p:cNvPr id="69" name="Oval 68">
+              <a:extLst>
+                <a:ext uri="{FF2B5EF4-FFF2-40B4-BE49-F238E27FC236}">
+                  <a16:creationId xmlns:a16="http://schemas.microsoft.com/office/drawing/2014/main" id="{39308E45-D793-4F2A-A926-75C0BF6AFF62}"/>
+                </a:ext>
+              </a:extLst>
+            </p:cNvPr>
+            <p:cNvSpPr/>
+            <p:nvPr/>
+          </p:nvSpPr>
+          <p:spPr>
+            <a:xfrm>
+              <a:off x="4242571" y="3560884"/>
+              <a:ext cx="123093" cy="131885"/>
+            </a:xfrm>
+            <a:prstGeom prst="ellipse">
+              <a:avLst/>
+            </a:prstGeom>
+          </p:spPr>
+          <p:style>
+            <a:lnRef idx="2">
+              <a:schemeClr val="dk1">
+                <a:shade val="50000"/>
+              </a:schemeClr>
+            </a:lnRef>
+            <a:fillRef idx="1">
+              <a:schemeClr val="dk1"/>
+            </a:fillRef>
+            <a:effectRef idx="0">
+              <a:schemeClr val="dk1"/>
+            </a:effectRef>
+            <a:fontRef idx="minor">
+              <a:schemeClr val="lt1"/>
+            </a:fontRef>
+          </p:style>
+          <p:txBody>
+            <a:bodyPr rtlCol="0" anchor="ctr"/>
+            <a:lstStyle/>
+            <a:p>
+              <a:pPr algn="ctr"/>
+              <a:endParaRPr lang="en-US"/>
+            </a:p>
+          </p:txBody>
+        </p:sp>
+        <p:sp>
+          <p:nvSpPr>
+            <p:cNvPr id="70" name="Oval 69">
+              <a:extLst>
+                <a:ext uri="{FF2B5EF4-FFF2-40B4-BE49-F238E27FC236}">
+                  <a16:creationId xmlns:a16="http://schemas.microsoft.com/office/drawing/2014/main" id="{AF539F6A-714B-45B9-87D7-F3BAC51B8BCE}"/>
+                </a:ext>
+              </a:extLst>
+            </p:cNvPr>
+            <p:cNvSpPr/>
+            <p:nvPr/>
+          </p:nvSpPr>
+          <p:spPr>
+            <a:xfrm>
+              <a:off x="4165746" y="3930160"/>
+              <a:ext cx="123093" cy="131885"/>
+            </a:xfrm>
+            <a:prstGeom prst="ellipse">
+              <a:avLst/>
+            </a:prstGeom>
+          </p:spPr>
+          <p:style>
+            <a:lnRef idx="2">
+              <a:schemeClr val="dk1">
+                <a:shade val="50000"/>
+              </a:schemeClr>
+            </a:lnRef>
+            <a:fillRef idx="1">
+              <a:schemeClr val="dk1"/>
+            </a:fillRef>
+            <a:effectRef idx="0">
+              <a:schemeClr val="dk1"/>
+            </a:effectRef>
+            <a:fontRef idx="minor">
+              <a:schemeClr val="lt1"/>
+            </a:fontRef>
+          </p:style>
+          <p:txBody>
+            <a:bodyPr rtlCol="0" anchor="ctr"/>
+            <a:lstStyle/>
+            <a:p>
+              <a:pPr algn="ctr"/>
+              <a:endParaRPr lang="en-US"/>
+            </a:p>
+          </p:txBody>
+        </p:sp>
+        <p:sp>
+          <p:nvSpPr>
+            <p:cNvPr id="71" name="Oval 70">
+              <a:extLst>
+                <a:ext uri="{FF2B5EF4-FFF2-40B4-BE49-F238E27FC236}">
+                  <a16:creationId xmlns:a16="http://schemas.microsoft.com/office/drawing/2014/main" id="{14DC0A4C-E572-4030-B9F0-21B8F8937AE3}"/>
+                </a:ext>
+              </a:extLst>
+            </p:cNvPr>
+            <p:cNvSpPr/>
+            <p:nvPr/>
+          </p:nvSpPr>
+          <p:spPr>
+            <a:xfrm>
+              <a:off x="2365130" y="3930159"/>
+              <a:ext cx="123093" cy="131885"/>
+            </a:xfrm>
+            <a:prstGeom prst="ellipse">
+              <a:avLst/>
+            </a:prstGeom>
+          </p:spPr>
+          <p:style>
+            <a:lnRef idx="2">
+              <a:schemeClr val="dk1">
+                <a:shade val="50000"/>
+              </a:schemeClr>
+            </a:lnRef>
+            <a:fillRef idx="1">
+              <a:schemeClr val="dk1"/>
+            </a:fillRef>
+            <a:effectRef idx="0">
+              <a:schemeClr val="dk1"/>
+            </a:effectRef>
+            <a:fontRef idx="minor">
+              <a:schemeClr val="lt1"/>
+            </a:fontRef>
+          </p:style>
+          <p:txBody>
+            <a:bodyPr rtlCol="0" anchor="ctr"/>
+            <a:lstStyle/>
+            <a:p>
+              <a:pPr algn="ctr"/>
+              <a:endParaRPr lang="en-US"/>
+            </a:p>
+          </p:txBody>
+        </p:sp>
+        <p:sp>
+          <p:nvSpPr>
+            <p:cNvPr id="72" name="Oval 71">
+              <a:extLst>
+                <a:ext uri="{FF2B5EF4-FFF2-40B4-BE49-F238E27FC236}">
+                  <a16:creationId xmlns:a16="http://schemas.microsoft.com/office/drawing/2014/main" id="{D789623A-61CC-423D-B924-6F41CFDDE6DF}"/>
+                </a:ext>
+              </a:extLst>
+            </p:cNvPr>
+            <p:cNvSpPr/>
+            <p:nvPr/>
+          </p:nvSpPr>
+          <p:spPr>
+            <a:xfrm>
+              <a:off x="2311192" y="4457699"/>
+              <a:ext cx="123093" cy="131885"/>
+            </a:xfrm>
+            <a:prstGeom prst="ellipse">
+              <a:avLst/>
+            </a:prstGeom>
+          </p:spPr>
+          <p:style>
+            <a:lnRef idx="2">
+              <a:schemeClr val="dk1">
+                <a:shade val="50000"/>
+              </a:schemeClr>
+            </a:lnRef>
+            <a:fillRef idx="1">
+              <a:schemeClr val="dk1"/>
+            </a:fillRef>
+            <a:effectRef idx="0">
+              <a:schemeClr val="dk1"/>
+            </a:effectRef>
+            <a:fontRef idx="minor">
+              <a:schemeClr val="lt1"/>
+            </a:fontRef>
+          </p:style>
+          <p:txBody>
+            <a:bodyPr rtlCol="0" anchor="ctr"/>
+            <a:lstStyle/>
+            <a:p>
+              <a:pPr algn="ctr"/>
+              <a:endParaRPr lang="en-US"/>
+            </a:p>
+          </p:txBody>
+        </p:sp>
+        <p:sp>
+          <p:nvSpPr>
+            <p:cNvPr id="73" name="Oval 72">
+              <a:extLst>
+                <a:ext uri="{FF2B5EF4-FFF2-40B4-BE49-F238E27FC236}">
+                  <a16:creationId xmlns:a16="http://schemas.microsoft.com/office/drawing/2014/main" id="{0E9BBD8B-7D05-427A-8FD9-FC95935AB0E3}"/>
+                </a:ext>
+              </a:extLst>
+            </p:cNvPr>
+            <p:cNvSpPr/>
+            <p:nvPr/>
+          </p:nvSpPr>
+          <p:spPr>
+            <a:xfrm>
+              <a:off x="2706566" y="4589584"/>
+              <a:ext cx="123093" cy="131885"/>
+            </a:xfrm>
+            <a:prstGeom prst="ellipse">
+              <a:avLst/>
+            </a:prstGeom>
+          </p:spPr>
+          <p:style>
+            <a:lnRef idx="2">
+              <a:schemeClr val="dk1">
+                <a:shade val="50000"/>
+              </a:schemeClr>
+            </a:lnRef>
+            <a:fillRef idx="1">
+              <a:schemeClr val="dk1"/>
+            </a:fillRef>
+            <a:effectRef idx="0">
+              <a:schemeClr val="dk1"/>
+            </a:effectRef>
+            <a:fontRef idx="minor">
+              <a:schemeClr val="lt1"/>
+            </a:fontRef>
+          </p:style>
+          <p:txBody>
+            <a:bodyPr rtlCol="0" anchor="ctr"/>
+            <a:lstStyle/>
+            <a:p>
+              <a:pPr algn="ctr"/>
+              <a:endParaRPr lang="en-US"/>
+            </a:p>
+          </p:txBody>
+        </p:sp>
+        <p:sp>
+          <p:nvSpPr>
+            <p:cNvPr id="74" name="Oval 73">
+              <a:extLst>
+                <a:ext uri="{FF2B5EF4-FFF2-40B4-BE49-F238E27FC236}">
+                  <a16:creationId xmlns:a16="http://schemas.microsoft.com/office/drawing/2014/main" id="{E860D7D0-33EF-4C6C-AD26-6C6DCB5DDEC7}"/>
+                </a:ext>
+              </a:extLst>
+            </p:cNvPr>
+            <p:cNvSpPr/>
+            <p:nvPr/>
+          </p:nvSpPr>
+          <p:spPr>
+            <a:xfrm>
+              <a:off x="3581714" y="4862144"/>
+              <a:ext cx="123093" cy="131885"/>
+            </a:xfrm>
+            <a:prstGeom prst="ellipse">
+              <a:avLst/>
+            </a:prstGeom>
+          </p:spPr>
+          <p:style>
+            <a:lnRef idx="2">
+              <a:schemeClr val="dk1">
+                <a:shade val="50000"/>
+              </a:schemeClr>
+            </a:lnRef>
+            <a:fillRef idx="1">
+              <a:schemeClr val="dk1"/>
+            </a:fillRef>
+            <a:effectRef idx="0">
+              <a:schemeClr val="dk1"/>
+            </a:effectRef>
+            <a:fontRef idx="minor">
+              <a:schemeClr val="lt1"/>
+            </a:fontRef>
+          </p:style>
+          <p:txBody>
+            <a:bodyPr rtlCol="0" anchor="ctr"/>
+            <a:lstStyle/>
+            <a:p>
+              <a:pPr algn="ctr"/>
+              <a:endParaRPr lang="en-US"/>
+            </a:p>
+          </p:txBody>
+        </p:sp>
+        <p:sp>
+          <p:nvSpPr>
+            <p:cNvPr id="75" name="Oval 74">
+              <a:extLst>
+                <a:ext uri="{FF2B5EF4-FFF2-40B4-BE49-F238E27FC236}">
+                  <a16:creationId xmlns:a16="http://schemas.microsoft.com/office/drawing/2014/main" id="{EBC504E7-AE1F-407E-8386-082CCB02F8A7}"/>
+                </a:ext>
+              </a:extLst>
+            </p:cNvPr>
+            <p:cNvSpPr/>
+            <p:nvPr/>
+          </p:nvSpPr>
+          <p:spPr>
+            <a:xfrm>
+              <a:off x="4142612" y="4391756"/>
+              <a:ext cx="123093" cy="131885"/>
+            </a:xfrm>
+            <a:prstGeom prst="ellipse">
+              <a:avLst/>
+            </a:prstGeom>
+          </p:spPr>
+          <p:style>
+            <a:lnRef idx="2">
+              <a:schemeClr val="dk1">
+                <a:shade val="50000"/>
+              </a:schemeClr>
+            </a:lnRef>
+            <a:fillRef idx="1">
+              <a:schemeClr val="dk1"/>
+            </a:fillRef>
+            <a:effectRef idx="0">
+              <a:schemeClr val="dk1"/>
+            </a:effectRef>
+            <a:fontRef idx="minor">
+              <a:schemeClr val="lt1"/>
+            </a:fontRef>
+          </p:style>
+          <p:txBody>
+            <a:bodyPr rtlCol="0" anchor="ctr"/>
+            <a:lstStyle/>
+            <a:p>
+              <a:pPr algn="ctr"/>
+              <a:endParaRPr lang="en-US"/>
+            </a:p>
+          </p:txBody>
+        </p:sp>
+        <p:sp>
+          <p:nvSpPr>
+            <p:cNvPr id="76" name="Oval 75">
+              <a:extLst>
+                <a:ext uri="{FF2B5EF4-FFF2-40B4-BE49-F238E27FC236}">
+                  <a16:creationId xmlns:a16="http://schemas.microsoft.com/office/drawing/2014/main" id="{D2BA0396-E774-41EE-B8A9-218A13A2E89A}"/>
+                </a:ext>
+              </a:extLst>
+            </p:cNvPr>
+            <p:cNvSpPr/>
+            <p:nvPr/>
+          </p:nvSpPr>
+          <p:spPr>
+            <a:xfrm>
+              <a:off x="3040392" y="3140207"/>
+              <a:ext cx="123093" cy="131885"/>
+            </a:xfrm>
+            <a:prstGeom prst="ellipse">
+              <a:avLst/>
+            </a:prstGeom>
+          </p:spPr>
+          <p:style>
+            <a:lnRef idx="2">
+              <a:schemeClr val="dk1">
+                <a:shade val="50000"/>
+              </a:schemeClr>
+            </a:lnRef>
+            <a:fillRef idx="1">
+              <a:schemeClr val="dk1"/>
+            </a:fillRef>
+            <a:effectRef idx="0">
+              <a:schemeClr val="dk1"/>
+            </a:effectRef>
+            <a:fontRef idx="minor">
+              <a:schemeClr val="lt1"/>
+            </a:fontRef>
+          </p:style>
+          <p:txBody>
+            <a:bodyPr rtlCol="0" anchor="ctr"/>
+            <a:lstStyle/>
+            <a:p>
+              <a:pPr algn="ctr"/>
+              <a:endParaRPr lang="en-US"/>
+            </a:p>
+          </p:txBody>
+        </p:sp>
+        <p:sp>
+          <p:nvSpPr>
+            <p:cNvPr id="77" name="Oval 76">
+              <a:extLst>
+                <a:ext uri="{FF2B5EF4-FFF2-40B4-BE49-F238E27FC236}">
+                  <a16:creationId xmlns:a16="http://schemas.microsoft.com/office/drawing/2014/main" id="{42B41D1F-1334-42A7-A072-53C22EA9A69B}"/>
+                </a:ext>
+              </a:extLst>
+            </p:cNvPr>
+            <p:cNvSpPr/>
+            <p:nvPr/>
+          </p:nvSpPr>
+          <p:spPr>
+            <a:xfrm>
+              <a:off x="4053504" y="3272089"/>
+              <a:ext cx="123093" cy="131885"/>
+            </a:xfrm>
+            <a:prstGeom prst="ellipse">
+              <a:avLst/>
+            </a:prstGeom>
+          </p:spPr>
+          <p:style>
+            <a:lnRef idx="2">
+              <a:schemeClr val="dk1">
+                <a:shade val="50000"/>
+              </a:schemeClr>
+            </a:lnRef>
+            <a:fillRef idx="1">
+              <a:schemeClr val="dk1"/>
+            </a:fillRef>
+            <a:effectRef idx="0">
+              <a:schemeClr val="dk1"/>
+            </a:effectRef>
+            <a:fontRef idx="minor">
+              <a:schemeClr val="lt1"/>
+            </a:fontRef>
+          </p:style>
+          <p:txBody>
+            <a:bodyPr rtlCol="0" anchor="ctr"/>
+            <a:lstStyle/>
+            <a:p>
+              <a:pPr algn="ctr"/>
+              <a:endParaRPr lang="en-US"/>
+            </a:p>
+          </p:txBody>
+        </p:sp>
+      </p:grpSp>
+      <p:grpSp>
+        <p:nvGrpSpPr>
+          <p:cNvPr id="1027" name="Group 1026">
+            <a:extLst>
+              <a:ext uri="{FF2B5EF4-FFF2-40B4-BE49-F238E27FC236}">
+                <a16:creationId xmlns:a16="http://schemas.microsoft.com/office/drawing/2014/main" id="{DBD63A67-FEF2-4188-8D59-016204A0D34C}"/>
+              </a:ext>
+            </a:extLst>
+          </p:cNvPr>
+          <p:cNvGrpSpPr/>
+          <p:nvPr/>
+        </p:nvGrpSpPr>
+        <p:grpSpPr>
+          <a:xfrm>
+            <a:off x="8609984" y="853983"/>
+            <a:ext cx="1236523" cy="857049"/>
+            <a:chOff x="2649677" y="2639366"/>
+            <a:chExt cx="1576764" cy="778626"/>
+          </a:xfrm>
+        </p:grpSpPr>
+        <p:pic>
+          <p:nvPicPr>
+            <p:cNvPr id="1030" name="Picture 6" descr="Musket silhouette flintlock old pistol symbol Vector Image">
+              <a:extLst>
+                <a:ext uri="{FF2B5EF4-FFF2-40B4-BE49-F238E27FC236}">
+                  <a16:creationId xmlns:a16="http://schemas.microsoft.com/office/drawing/2014/main" id="{7E74D04A-8E0F-4E45-8A35-6464B0B0703A}"/>
+                </a:ext>
+              </a:extLst>
+            </p:cNvPr>
+            <p:cNvPicPr>
+              <a:picLocks noChangeAspect="1" noChangeArrowheads="1"/>
+            </p:cNvPicPr>
+            <p:nvPr/>
+          </p:nvPicPr>
+          <p:blipFill rotWithShape="1">
+            <a:blip r:embed="rId7">
+              <a:extLst>
+                <a:ext uri="{28A0092B-C50C-407E-A947-70E740481C1C}">
+                  <a14:useLocalDpi xmlns:a14="http://schemas.microsoft.com/office/drawing/2010/main" val="0"/>
+                </a:ext>
+              </a:extLst>
+            </a:blip>
+            <a:srcRect l="8963" t="30698" r="9130" b="37600"/>
+            <a:stretch/>
+          </p:blipFill>
+          <p:spPr bwMode="auto">
+            <a:xfrm rot="19739162">
+              <a:off x="2649677" y="2639366"/>
+              <a:ext cx="1289455" cy="389313"/>
+            </a:xfrm>
+            <a:prstGeom prst="rect">
+              <a:avLst/>
+            </a:prstGeom>
+            <a:noFill/>
+            <a:extLst>
+              <a:ext uri="{909E8E84-426E-40DD-AFC4-6F175D3DCCD1}">
+                <a14:hiddenFill xmlns:a14="http://schemas.microsoft.com/office/drawing/2010/main">
+                  <a:solidFill>
+                    <a:srgbClr val="FFFFFF"/>
+                  </a:solidFill>
+                </a14:hiddenFill>
+              </a:ext>
+            </a:extLst>
+          </p:spPr>
+        </p:pic>
+        <p:pic>
+          <p:nvPicPr>
+            <p:cNvPr id="94" name="Picture 6" descr="Musket silhouette flintlock old pistol symbol Vector Image">
+              <a:extLst>
+                <a:ext uri="{FF2B5EF4-FFF2-40B4-BE49-F238E27FC236}">
+                  <a16:creationId xmlns:a16="http://schemas.microsoft.com/office/drawing/2014/main" id="{E0B4D742-21DB-4195-A626-7CDA3BAE31B4}"/>
+                </a:ext>
+              </a:extLst>
+            </p:cNvPr>
+            <p:cNvPicPr>
+              <a:picLocks noChangeAspect="1" noChangeArrowheads="1"/>
+            </p:cNvPicPr>
+            <p:nvPr/>
+          </p:nvPicPr>
+          <p:blipFill rotWithShape="1">
+            <a:blip r:embed="rId7">
+              <a:extLst>
+                <a:ext uri="{28A0092B-C50C-407E-A947-70E740481C1C}">
+                  <a14:useLocalDpi xmlns:a14="http://schemas.microsoft.com/office/drawing/2010/main" val="0"/>
+                </a:ext>
+              </a:extLst>
+            </a:blip>
+            <a:srcRect l="8963" t="30698" r="9130" b="37600"/>
+            <a:stretch/>
+          </p:blipFill>
+          <p:spPr bwMode="auto">
+            <a:xfrm rot="19739162">
+              <a:off x="2936986" y="3028679"/>
+              <a:ext cx="1289455" cy="389313"/>
+            </a:xfrm>
+            <a:prstGeom prst="rect">
+              <a:avLst/>
+            </a:prstGeom>
+            <a:noFill/>
+            <a:extLst>
+              <a:ext uri="{909E8E84-426E-40DD-AFC4-6F175D3DCCD1}">
+                <a14:hiddenFill xmlns:a14="http://schemas.microsoft.com/office/drawing/2010/main">
+                  <a:solidFill>
+                    <a:srgbClr val="FFFFFF"/>
+                  </a:solidFill>
+                </a14:hiddenFill>
+              </a:ext>
+            </a:extLst>
+          </p:spPr>
+        </p:pic>
+      </p:grpSp>
+      <p:grpSp>
+        <p:nvGrpSpPr>
+          <p:cNvPr id="1033" name="Group 1032">
+            <a:extLst>
+              <a:ext uri="{FF2B5EF4-FFF2-40B4-BE49-F238E27FC236}">
+                <a16:creationId xmlns:a16="http://schemas.microsoft.com/office/drawing/2014/main" id="{FE5702C1-C548-4F0F-AEA6-40DDFFD8338D}"/>
+              </a:ext>
+            </a:extLst>
+          </p:cNvPr>
+          <p:cNvGrpSpPr/>
+          <p:nvPr/>
+        </p:nvGrpSpPr>
+        <p:grpSpPr>
+          <a:xfrm rot="1828857">
+            <a:off x="10379319" y="1041248"/>
+            <a:ext cx="1034673" cy="853601"/>
+            <a:chOff x="2196207" y="2863637"/>
+            <a:chExt cx="2757986" cy="2275327"/>
+          </a:xfrm>
+        </p:grpSpPr>
+        <p:pic>
+          <p:nvPicPr>
+            <p:cNvPr id="1032" name="Picture 8" descr="Line icon for gatling 3237222 Vector Art at Vecteezy">
+              <a:extLst>
+                <a:ext uri="{FF2B5EF4-FFF2-40B4-BE49-F238E27FC236}">
+                  <a16:creationId xmlns:a16="http://schemas.microsoft.com/office/drawing/2014/main" id="{3F170FCF-6164-4FFD-9353-698401285F88}"/>
+                </a:ext>
+              </a:extLst>
+            </p:cNvPr>
+            <p:cNvPicPr>
+              <a:picLocks noChangeAspect="1" noChangeArrowheads="1"/>
+            </p:cNvPicPr>
+            <p:nvPr/>
+          </p:nvPicPr>
+          <p:blipFill>
+            <a:blip r:embed="rId8">
+              <a:extLst>
+                <a:ext uri="{28A0092B-C50C-407E-A947-70E740481C1C}">
+                  <a14:useLocalDpi xmlns:a14="http://schemas.microsoft.com/office/drawing/2010/main" val="0"/>
+                </a:ext>
+              </a:extLst>
+            </a:blip>
+            <a:srcRect/>
+            <a:stretch>
+              <a:fillRect/>
+            </a:stretch>
+          </p:blipFill>
+          <p:spPr bwMode="auto">
+            <a:xfrm>
+              <a:off x="2196207" y="2925471"/>
+              <a:ext cx="2623399" cy="2213493"/>
+            </a:xfrm>
+            <a:prstGeom prst="rect">
+              <a:avLst/>
+            </a:prstGeom>
+            <a:noFill/>
+            <a:extLst>
+              <a:ext uri="{909E8E84-426E-40DD-AFC4-6F175D3DCCD1}">
+                <a14:hiddenFill xmlns:a14="http://schemas.microsoft.com/office/drawing/2010/main">
+                  <a:solidFill>
+                    <a:srgbClr val="FFFFFF"/>
+                  </a:solidFill>
+                </a14:hiddenFill>
+              </a:ext>
+            </a:extLst>
+          </p:spPr>
+        </p:pic>
+        <p:sp>
+          <p:nvSpPr>
+            <p:cNvPr id="1029" name="Rectangle 1028">
+              <a:extLst>
+                <a:ext uri="{FF2B5EF4-FFF2-40B4-BE49-F238E27FC236}">
+                  <a16:creationId xmlns:a16="http://schemas.microsoft.com/office/drawing/2014/main" id="{86D6CE6D-DB5B-462E-8B4A-D161A3C832C4}"/>
+                </a:ext>
+              </a:extLst>
+            </p:cNvPr>
+            <p:cNvSpPr/>
+            <p:nvPr/>
+          </p:nvSpPr>
+          <p:spPr>
+            <a:xfrm rot="19527126">
+              <a:off x="3163796" y="2863637"/>
+              <a:ext cx="1019561" cy="501162"/>
+            </a:xfrm>
+            <a:prstGeom prst="rect">
+              <a:avLst/>
+            </a:prstGeom>
+            <a:ln>
+              <a:noFill/>
+            </a:ln>
+          </p:spPr>
+          <p:style>
+            <a:lnRef idx="2">
+              <a:schemeClr val="dk1"/>
+            </a:lnRef>
+            <a:fillRef idx="1">
+              <a:schemeClr val="lt1"/>
+            </a:fillRef>
+            <a:effectRef idx="0">
+              <a:schemeClr val="dk1"/>
+            </a:effectRef>
+            <a:fontRef idx="minor">
+              <a:schemeClr val="dk1"/>
+            </a:fontRef>
+          </p:style>
+          <p:txBody>
+            <a:bodyPr rtlCol="0" anchor="ctr"/>
+            <a:lstStyle/>
+            <a:p>
+              <a:pPr algn="ctr"/>
+              <a:endParaRPr lang="en-US"/>
+            </a:p>
+          </p:txBody>
+        </p:sp>
+        <p:sp>
+          <p:nvSpPr>
+            <p:cNvPr id="1031" name="Rectangle 1030">
+              <a:extLst>
+                <a:ext uri="{FF2B5EF4-FFF2-40B4-BE49-F238E27FC236}">
+                  <a16:creationId xmlns:a16="http://schemas.microsoft.com/office/drawing/2014/main" id="{2D922C79-8CC3-4FE5-A4D7-AB84196D9370}"/>
+                </a:ext>
+              </a:extLst>
+            </p:cNvPr>
+            <p:cNvSpPr/>
+            <p:nvPr/>
+          </p:nvSpPr>
+          <p:spPr>
+            <a:xfrm rot="19081648">
+              <a:off x="4013700" y="3428531"/>
+              <a:ext cx="157110" cy="413238"/>
+            </a:xfrm>
+            <a:prstGeom prst="rect">
+              <a:avLst/>
+            </a:prstGeom>
+          </p:spPr>
+          <p:style>
+            <a:lnRef idx="2">
+              <a:schemeClr val="dk1">
+                <a:shade val="50000"/>
+              </a:schemeClr>
+            </a:lnRef>
+            <a:fillRef idx="1">
+              <a:schemeClr val="dk1"/>
+            </a:fillRef>
+            <a:effectRef idx="0">
+              <a:schemeClr val="dk1"/>
+            </a:effectRef>
+            <a:fontRef idx="minor">
+              <a:schemeClr val="lt1"/>
+            </a:fontRef>
+          </p:style>
+          <p:txBody>
+            <a:bodyPr rtlCol="0" anchor="ctr"/>
+            <a:lstStyle/>
+            <a:p>
+              <a:pPr algn="ctr"/>
+              <a:endParaRPr lang="en-US"/>
+            </a:p>
+          </p:txBody>
+        </p:sp>
+        <p:sp>
+          <p:nvSpPr>
+            <p:cNvPr id="100" name="Rectangle 99">
+              <a:extLst>
+                <a:ext uri="{FF2B5EF4-FFF2-40B4-BE49-F238E27FC236}">
+                  <a16:creationId xmlns:a16="http://schemas.microsoft.com/office/drawing/2014/main" id="{81EB805D-A2D5-48C8-A1B5-BC90B2348343}"/>
+                </a:ext>
+              </a:extLst>
+            </p:cNvPr>
+            <p:cNvSpPr/>
+            <p:nvPr/>
+          </p:nvSpPr>
+          <p:spPr>
+            <a:xfrm rot="13584833">
+              <a:off x="2830186" y="4013063"/>
+              <a:ext cx="137209" cy="604380"/>
+            </a:xfrm>
+            <a:prstGeom prst="rect">
+              <a:avLst/>
+            </a:prstGeom>
+          </p:spPr>
+          <p:style>
+            <a:lnRef idx="2">
+              <a:schemeClr val="dk1">
+                <a:shade val="50000"/>
+              </a:schemeClr>
+            </a:lnRef>
+            <a:fillRef idx="1">
+              <a:schemeClr val="dk1"/>
+            </a:fillRef>
+            <a:effectRef idx="0">
+              <a:schemeClr val="dk1"/>
+            </a:effectRef>
+            <a:fontRef idx="minor">
+              <a:schemeClr val="lt1"/>
+            </a:fontRef>
+          </p:style>
+          <p:txBody>
+            <a:bodyPr rtlCol="0" anchor="ctr"/>
+            <a:lstStyle/>
+            <a:p>
+              <a:pPr algn="ctr"/>
+              <a:endParaRPr lang="en-US"/>
+            </a:p>
+          </p:txBody>
+        </p:sp>
+        <p:sp>
+          <p:nvSpPr>
+            <p:cNvPr id="101" name="Rectangle 100">
+              <a:extLst>
+                <a:ext uri="{FF2B5EF4-FFF2-40B4-BE49-F238E27FC236}">
+                  <a16:creationId xmlns:a16="http://schemas.microsoft.com/office/drawing/2014/main" id="{B20F5BDF-F9F3-437F-85DA-2CA8B472A953}"/>
+                </a:ext>
+              </a:extLst>
+            </p:cNvPr>
+            <p:cNvSpPr/>
+            <p:nvPr/>
+          </p:nvSpPr>
+          <p:spPr>
+            <a:xfrm rot="13584833">
+              <a:off x="3103724" y="4494607"/>
+              <a:ext cx="231175" cy="604380"/>
+            </a:xfrm>
+            <a:prstGeom prst="rect">
+              <a:avLst/>
+            </a:prstGeom>
+          </p:spPr>
+          <p:style>
+            <a:lnRef idx="2">
+              <a:schemeClr val="dk1">
+                <a:shade val="50000"/>
+              </a:schemeClr>
+            </a:lnRef>
+            <a:fillRef idx="1">
+              <a:schemeClr val="dk1"/>
+            </a:fillRef>
+            <a:effectRef idx="0">
+              <a:schemeClr val="dk1"/>
+            </a:effectRef>
+            <a:fontRef idx="minor">
+              <a:schemeClr val="lt1"/>
+            </a:fontRef>
+          </p:style>
+          <p:txBody>
+            <a:bodyPr rtlCol="0" anchor="ctr"/>
+            <a:lstStyle/>
+            <a:p>
+              <a:pPr algn="ctr"/>
+              <a:endParaRPr lang="en-US"/>
+            </a:p>
+          </p:txBody>
+        </p:sp>
+        <p:sp>
+          <p:nvSpPr>
+            <p:cNvPr id="102" name="Rectangle 101">
+              <a:extLst>
+                <a:ext uri="{FF2B5EF4-FFF2-40B4-BE49-F238E27FC236}">
+                  <a16:creationId xmlns:a16="http://schemas.microsoft.com/office/drawing/2014/main" id="{6EFD5629-ED2B-401A-9584-E6B0043FB66F}"/>
+                </a:ext>
+              </a:extLst>
+            </p:cNvPr>
+            <p:cNvSpPr/>
+            <p:nvPr/>
+          </p:nvSpPr>
+          <p:spPr>
+            <a:xfrm rot="19044101">
+              <a:off x="3850222" y="3905329"/>
+              <a:ext cx="1103971" cy="501162"/>
+            </a:xfrm>
+            <a:prstGeom prst="rect">
+              <a:avLst/>
+            </a:prstGeom>
+            <a:ln>
+              <a:noFill/>
+            </a:ln>
+          </p:spPr>
+          <p:style>
+            <a:lnRef idx="2">
+              <a:schemeClr val="dk1"/>
+            </a:lnRef>
+            <a:fillRef idx="1">
+              <a:schemeClr val="lt1"/>
+            </a:fillRef>
+            <a:effectRef idx="0">
+              <a:schemeClr val="dk1"/>
+            </a:effectRef>
+            <a:fontRef idx="minor">
+              <a:schemeClr val="dk1"/>
+            </a:fontRef>
+          </p:style>
+          <p:txBody>
+            <a:bodyPr rtlCol="0" anchor="ctr"/>
+            <a:lstStyle/>
+            <a:p>
+              <a:pPr algn="ctr"/>
+              <a:endParaRPr lang="en-US"/>
+            </a:p>
+          </p:txBody>
+        </p:sp>
+      </p:grpSp>
+      <p:grpSp>
+        <p:nvGrpSpPr>
+          <p:cNvPr id="1037" name="Group 1036">
+            <a:extLst>
+              <a:ext uri="{FF2B5EF4-FFF2-40B4-BE49-F238E27FC236}">
+                <a16:creationId xmlns:a16="http://schemas.microsoft.com/office/drawing/2014/main" id="{97FF2C67-581B-473F-A8E2-E6C3D7E7D1FA}"/>
+              </a:ext>
+            </a:extLst>
+          </p:cNvPr>
+          <p:cNvGrpSpPr/>
+          <p:nvPr/>
+        </p:nvGrpSpPr>
+        <p:grpSpPr>
+          <a:xfrm rot="20273403">
+            <a:off x="7942742" y="2850710"/>
+            <a:ext cx="1045962" cy="619186"/>
+            <a:chOff x="2784071" y="2614136"/>
+            <a:chExt cx="1814967" cy="1074420"/>
+          </a:xfrm>
+        </p:grpSpPr>
+        <p:pic>
+          <p:nvPicPr>
+            <p:cNvPr id="1034" name="Picture 10" descr="✓ flamethrower free vector eps, cdr, ai, svg vector illustration graphic art">
+              <a:extLst>
+                <a:ext uri="{FF2B5EF4-FFF2-40B4-BE49-F238E27FC236}">
+                  <a16:creationId xmlns:a16="http://schemas.microsoft.com/office/drawing/2014/main" id="{27E18833-44D1-4FDB-BE79-096987128008}"/>
+                </a:ext>
+              </a:extLst>
+            </p:cNvPr>
+            <p:cNvPicPr>
+              <a:picLocks noChangeAspect="1" noChangeArrowheads="1"/>
+            </p:cNvPicPr>
+            <p:nvPr/>
+          </p:nvPicPr>
+          <p:blipFill rotWithShape="1">
+            <a:blip r:embed="rId9">
+              <a:extLst>
+                <a:ext uri="{28A0092B-C50C-407E-A947-70E740481C1C}">
+                  <a14:useLocalDpi xmlns:a14="http://schemas.microsoft.com/office/drawing/2010/main" val="0"/>
+                </a:ext>
+              </a:extLst>
+            </a:blip>
+            <a:srcRect l="29258" b="25887"/>
+            <a:stretch/>
+          </p:blipFill>
+          <p:spPr bwMode="auto">
+            <a:xfrm>
+              <a:off x="3868733" y="2888016"/>
+              <a:ext cx="730305" cy="373344"/>
+            </a:xfrm>
+            <a:prstGeom prst="rect">
+              <a:avLst/>
+            </a:prstGeom>
+            <a:noFill/>
+            <a:extLst>
+              <a:ext uri="{909E8E84-426E-40DD-AFC4-6F175D3DCCD1}">
+                <a14:hiddenFill xmlns:a14="http://schemas.microsoft.com/office/drawing/2010/main">
+                  <a:solidFill>
+                    <a:srgbClr val="FFFFFF"/>
+                  </a:solidFill>
+                </a14:hiddenFill>
+              </a:ext>
+            </a:extLst>
+          </p:spPr>
+        </p:pic>
+        <p:sp>
+          <p:nvSpPr>
+            <p:cNvPr id="1035" name="Flowchart: Terminator 1034">
+              <a:extLst>
+                <a:ext uri="{FF2B5EF4-FFF2-40B4-BE49-F238E27FC236}">
+                  <a16:creationId xmlns:a16="http://schemas.microsoft.com/office/drawing/2014/main" id="{EF5430FB-CB4E-4F06-84DB-968D8892D026}"/>
+                </a:ext>
+              </a:extLst>
+            </p:cNvPr>
+            <p:cNvSpPr/>
+            <p:nvPr/>
+          </p:nvSpPr>
+          <p:spPr>
+            <a:xfrm rot="5400000">
+              <a:off x="2507294" y="2890913"/>
+              <a:ext cx="1074420" cy="520865"/>
+            </a:xfrm>
+            <a:prstGeom prst="flowChartTerminator">
+              <a:avLst/>
+            </a:prstGeom>
+          </p:spPr>
+          <p:style>
+            <a:lnRef idx="2">
+              <a:schemeClr val="dk1">
+                <a:shade val="50000"/>
+              </a:schemeClr>
+            </a:lnRef>
+            <a:fillRef idx="1">
+              <a:schemeClr val="dk1"/>
+            </a:fillRef>
+            <a:effectRef idx="0">
+              <a:schemeClr val="dk1"/>
+            </a:effectRef>
+            <a:fontRef idx="minor">
+              <a:schemeClr val="lt1"/>
+            </a:fontRef>
+          </p:style>
+          <p:txBody>
+            <a:bodyPr rtlCol="0" anchor="ctr"/>
+            <a:lstStyle/>
+            <a:p>
+              <a:pPr algn="ctr"/>
+              <a:endParaRPr lang="en-US"/>
+            </a:p>
+          </p:txBody>
+        </p:sp>
+        <p:sp>
+          <p:nvSpPr>
+            <p:cNvPr id="1036" name="Freeform: Shape 1035">
+              <a:extLst>
+                <a:ext uri="{FF2B5EF4-FFF2-40B4-BE49-F238E27FC236}">
+                  <a16:creationId xmlns:a16="http://schemas.microsoft.com/office/drawing/2014/main" id="{1CE79052-1EF3-40D6-960B-6714D0D62074}"/>
+                </a:ext>
+              </a:extLst>
+            </p:cNvPr>
+            <p:cNvSpPr/>
+            <p:nvPr/>
+          </p:nvSpPr>
+          <p:spPr>
+            <a:xfrm>
+              <a:off x="3154994" y="3074688"/>
+              <a:ext cx="662626" cy="396240"/>
+            </a:xfrm>
+            <a:custGeom>
+              <a:avLst/>
+              <a:gdLst>
+                <a:gd name="connsiteX0" fmla="*/ 0 w 853440"/>
+                <a:gd name="connsiteY0" fmla="*/ 83820 h 396240"/>
+                <a:gd name="connsiteX1" fmla="*/ 38100 w 853440"/>
+                <a:gd name="connsiteY1" fmla="*/ 76200 h 396240"/>
+                <a:gd name="connsiteX2" fmla="*/ 68580 w 853440"/>
+                <a:gd name="connsiteY2" fmla="*/ 68580 h 396240"/>
+                <a:gd name="connsiteX3" fmla="*/ 167640 w 853440"/>
+                <a:gd name="connsiteY3" fmla="*/ 76200 h 396240"/>
+                <a:gd name="connsiteX4" fmla="*/ 190500 w 853440"/>
+                <a:gd name="connsiteY4" fmla="*/ 99060 h 396240"/>
+                <a:gd name="connsiteX5" fmla="*/ 205740 w 853440"/>
+                <a:gd name="connsiteY5" fmla="*/ 121920 h 396240"/>
+                <a:gd name="connsiteX6" fmla="*/ 243840 w 853440"/>
+                <a:gd name="connsiteY6" fmla="*/ 175260 h 396240"/>
+                <a:gd name="connsiteX7" fmla="*/ 251460 w 853440"/>
+                <a:gd name="connsiteY7" fmla="*/ 213360 h 396240"/>
+                <a:gd name="connsiteX8" fmla="*/ 259080 w 853440"/>
+                <a:gd name="connsiteY8" fmla="*/ 236220 h 396240"/>
+                <a:gd name="connsiteX9" fmla="*/ 274320 w 853440"/>
+                <a:gd name="connsiteY9" fmla="*/ 320040 h 396240"/>
+                <a:gd name="connsiteX10" fmla="*/ 304800 w 853440"/>
+                <a:gd name="connsiteY10" fmla="*/ 365760 h 396240"/>
+                <a:gd name="connsiteX11" fmla="*/ 358140 w 853440"/>
+                <a:gd name="connsiteY11" fmla="*/ 396240 h 396240"/>
+                <a:gd name="connsiteX12" fmla="*/ 449580 w 853440"/>
+                <a:gd name="connsiteY12" fmla="*/ 381000 h 396240"/>
+                <a:gd name="connsiteX13" fmla="*/ 464820 w 853440"/>
+                <a:gd name="connsiteY13" fmla="*/ 342900 h 396240"/>
+                <a:gd name="connsiteX14" fmla="*/ 495300 w 853440"/>
+                <a:gd name="connsiteY14" fmla="*/ 304800 h 396240"/>
+                <a:gd name="connsiteX15" fmla="*/ 502920 w 853440"/>
+                <a:gd name="connsiteY15" fmla="*/ 274320 h 396240"/>
+                <a:gd name="connsiteX16" fmla="*/ 510540 w 853440"/>
+                <a:gd name="connsiteY16" fmla="*/ 251460 h 396240"/>
+                <a:gd name="connsiteX17" fmla="*/ 518160 w 853440"/>
+                <a:gd name="connsiteY17" fmla="*/ 213360 h 396240"/>
+                <a:gd name="connsiteX18" fmla="*/ 525780 w 853440"/>
+                <a:gd name="connsiteY18" fmla="*/ 182880 h 396240"/>
+                <a:gd name="connsiteX19" fmla="*/ 541020 w 853440"/>
+                <a:gd name="connsiteY19" fmla="*/ 91440 h 396240"/>
+                <a:gd name="connsiteX20" fmla="*/ 563880 w 853440"/>
+                <a:gd name="connsiteY20" fmla="*/ 38100 h 396240"/>
+                <a:gd name="connsiteX21" fmla="*/ 579120 w 853440"/>
+                <a:gd name="connsiteY21" fmla="*/ 15240 h 396240"/>
+                <a:gd name="connsiteX22" fmla="*/ 609600 w 853440"/>
+                <a:gd name="connsiteY22" fmla="*/ 7620 h 396240"/>
+                <a:gd name="connsiteX23" fmla="*/ 716280 w 853440"/>
+                <a:gd name="connsiteY23" fmla="*/ 0 h 396240"/>
+                <a:gd name="connsiteX24" fmla="*/ 853440 w 853440"/>
+                <a:gd name="connsiteY24" fmla="*/ 7620 h 396240"/>
+              </a:gdLst>
+              <a:ahLst/>
+              <a:cxnLst>
+                <a:cxn ang="0">
+                  <a:pos x="connsiteX0" y="connsiteY0"/>
+                </a:cxn>
+                <a:cxn ang="0">
+                  <a:pos x="connsiteX1" y="connsiteY1"/>
+                </a:cxn>
+                <a:cxn ang="0">
+                  <a:pos x="connsiteX2" y="connsiteY2"/>
+                </a:cxn>
+                <a:cxn ang="0">
+                  <a:pos x="connsiteX3" y="connsiteY3"/>
+                </a:cxn>
+                <a:cxn ang="0">
+                  <a:pos x="connsiteX4" y="connsiteY4"/>
+                </a:cxn>
+                <a:cxn ang="0">
+                  <a:pos x="connsiteX5" y="connsiteY5"/>
+                </a:cxn>
+                <a:cxn ang="0">
+                  <a:pos x="connsiteX6" y="connsiteY6"/>
+                </a:cxn>
+                <a:cxn ang="0">
+                  <a:pos x="connsiteX7" y="connsiteY7"/>
+                </a:cxn>
+                <a:cxn ang="0">
+                  <a:pos x="connsiteX8" y="connsiteY8"/>
+                </a:cxn>
+                <a:cxn ang="0">
+                  <a:pos x="connsiteX9" y="connsiteY9"/>
+                </a:cxn>
+                <a:cxn ang="0">
+                  <a:pos x="connsiteX10" y="connsiteY10"/>
+                </a:cxn>
+                <a:cxn ang="0">
+                  <a:pos x="connsiteX11" y="connsiteY11"/>
+                </a:cxn>
+                <a:cxn ang="0">
+                  <a:pos x="connsiteX12" y="connsiteY12"/>
+                </a:cxn>
+                <a:cxn ang="0">
+                  <a:pos x="connsiteX13" y="connsiteY13"/>
+                </a:cxn>
+                <a:cxn ang="0">
+                  <a:pos x="connsiteX14" y="connsiteY14"/>
+                </a:cxn>
+                <a:cxn ang="0">
+                  <a:pos x="connsiteX15" y="connsiteY15"/>
+                </a:cxn>
+                <a:cxn ang="0">
+                  <a:pos x="connsiteX16" y="connsiteY16"/>
+                </a:cxn>
+                <a:cxn ang="0">
+                  <a:pos x="connsiteX17" y="connsiteY17"/>
+                </a:cxn>
+                <a:cxn ang="0">
+                  <a:pos x="connsiteX18" y="connsiteY18"/>
+                </a:cxn>
+                <a:cxn ang="0">
+                  <a:pos x="connsiteX19" y="connsiteY19"/>
+                </a:cxn>
+                <a:cxn ang="0">
+                  <a:pos x="connsiteX20" y="connsiteY20"/>
+                </a:cxn>
+                <a:cxn ang="0">
+                  <a:pos x="connsiteX21" y="connsiteY21"/>
+                </a:cxn>
+                <a:cxn ang="0">
+                  <a:pos x="connsiteX22" y="connsiteY22"/>
+                </a:cxn>
+                <a:cxn ang="0">
+                  <a:pos x="connsiteX23" y="connsiteY23"/>
+                </a:cxn>
+                <a:cxn ang="0">
+                  <a:pos x="connsiteX24" y="connsiteY24"/>
+                </a:cxn>
+              </a:cxnLst>
+              <a:rect l="l" t="t" r="r" b="b"/>
+              <a:pathLst>
+                <a:path w="853440" h="396240">
+                  <a:moveTo>
+                    <a:pt x="0" y="83820"/>
+                  </a:moveTo>
+                  <a:cubicBezTo>
+                    <a:pt x="12700" y="81280"/>
+                    <a:pt x="25457" y="79010"/>
+                    <a:pt x="38100" y="76200"/>
+                  </a:cubicBezTo>
+                  <a:cubicBezTo>
+                    <a:pt x="48323" y="73928"/>
+                    <a:pt x="58107" y="68580"/>
+                    <a:pt x="68580" y="68580"/>
+                  </a:cubicBezTo>
+                  <a:cubicBezTo>
+                    <a:pt x="101698" y="68580"/>
+                    <a:pt x="134620" y="73660"/>
+                    <a:pt x="167640" y="76200"/>
+                  </a:cubicBezTo>
+                  <a:cubicBezTo>
+                    <a:pt x="175260" y="83820"/>
+                    <a:pt x="183601" y="90781"/>
+                    <a:pt x="190500" y="99060"/>
+                  </a:cubicBezTo>
+                  <a:cubicBezTo>
+                    <a:pt x="196363" y="106095"/>
+                    <a:pt x="200417" y="114468"/>
+                    <a:pt x="205740" y="121920"/>
+                  </a:cubicBezTo>
+                  <a:cubicBezTo>
+                    <a:pt x="252998" y="188081"/>
+                    <a:pt x="207924" y="121386"/>
+                    <a:pt x="243840" y="175260"/>
+                  </a:cubicBezTo>
+                  <a:cubicBezTo>
+                    <a:pt x="246380" y="187960"/>
+                    <a:pt x="248319" y="200795"/>
+                    <a:pt x="251460" y="213360"/>
+                  </a:cubicBezTo>
+                  <a:cubicBezTo>
+                    <a:pt x="253408" y="221152"/>
+                    <a:pt x="257505" y="228344"/>
+                    <a:pt x="259080" y="236220"/>
+                  </a:cubicBezTo>
+                  <a:cubicBezTo>
+                    <a:pt x="260556" y="243600"/>
+                    <a:pt x="266790" y="304980"/>
+                    <a:pt x="274320" y="320040"/>
+                  </a:cubicBezTo>
+                  <a:cubicBezTo>
+                    <a:pt x="282511" y="336423"/>
+                    <a:pt x="289560" y="355600"/>
+                    <a:pt x="304800" y="365760"/>
+                  </a:cubicBezTo>
+                  <a:cubicBezTo>
+                    <a:pt x="337111" y="387301"/>
+                    <a:pt x="319469" y="376904"/>
+                    <a:pt x="358140" y="396240"/>
+                  </a:cubicBezTo>
+                  <a:cubicBezTo>
+                    <a:pt x="388620" y="391160"/>
+                    <a:pt x="421942" y="394819"/>
+                    <a:pt x="449580" y="381000"/>
+                  </a:cubicBezTo>
+                  <a:cubicBezTo>
+                    <a:pt x="461814" y="374883"/>
+                    <a:pt x="457783" y="354629"/>
+                    <a:pt x="464820" y="342900"/>
+                  </a:cubicBezTo>
+                  <a:cubicBezTo>
+                    <a:pt x="473188" y="328954"/>
+                    <a:pt x="485140" y="317500"/>
+                    <a:pt x="495300" y="304800"/>
+                  </a:cubicBezTo>
+                  <a:cubicBezTo>
+                    <a:pt x="497840" y="294640"/>
+                    <a:pt x="500043" y="284390"/>
+                    <a:pt x="502920" y="274320"/>
+                  </a:cubicBezTo>
+                  <a:cubicBezTo>
+                    <a:pt x="505127" y="266597"/>
+                    <a:pt x="508592" y="259252"/>
+                    <a:pt x="510540" y="251460"/>
+                  </a:cubicBezTo>
+                  <a:cubicBezTo>
+                    <a:pt x="513681" y="238895"/>
+                    <a:pt x="515350" y="226003"/>
+                    <a:pt x="518160" y="213360"/>
+                  </a:cubicBezTo>
+                  <a:cubicBezTo>
+                    <a:pt x="520432" y="203137"/>
+                    <a:pt x="524058" y="193210"/>
+                    <a:pt x="525780" y="182880"/>
+                  </a:cubicBezTo>
+                  <a:cubicBezTo>
+                    <a:pt x="536912" y="116089"/>
+                    <a:pt x="527302" y="139454"/>
+                    <a:pt x="541020" y="91440"/>
+                  </a:cubicBezTo>
+                  <a:cubicBezTo>
+                    <a:pt x="547126" y="70068"/>
+                    <a:pt x="552269" y="58420"/>
+                    <a:pt x="563880" y="38100"/>
+                  </a:cubicBezTo>
+                  <a:cubicBezTo>
+                    <a:pt x="568424" y="30149"/>
+                    <a:pt x="571500" y="20320"/>
+                    <a:pt x="579120" y="15240"/>
+                  </a:cubicBezTo>
+                  <a:cubicBezTo>
+                    <a:pt x="587834" y="9431"/>
+                    <a:pt x="599191" y="8777"/>
+                    <a:pt x="609600" y="7620"/>
+                  </a:cubicBezTo>
+                  <a:cubicBezTo>
+                    <a:pt x="645033" y="3683"/>
+                    <a:pt x="680720" y="2540"/>
+                    <a:pt x="716280" y="0"/>
+                  </a:cubicBezTo>
+                  <a:cubicBezTo>
+                    <a:pt x="843270" y="7937"/>
+                    <a:pt x="797481" y="7620"/>
+                    <a:pt x="853440" y="7620"/>
+                  </a:cubicBezTo>
+                </a:path>
+              </a:pathLst>
+            </a:custGeom>
+            <a:ln w="76200"/>
+          </p:spPr>
+          <p:style>
+            <a:lnRef idx="1">
+              <a:schemeClr val="dk1"/>
+            </a:lnRef>
+            <a:fillRef idx="0">
+              <a:schemeClr val="dk1"/>
+            </a:fillRef>
+            <a:effectRef idx="0">
+              <a:schemeClr val="dk1"/>
+            </a:effectRef>
+            <a:fontRef idx="minor">
+              <a:schemeClr val="tx1"/>
+            </a:fontRef>
+          </p:style>
+          <p:txBody>
+            <a:bodyPr rtlCol="0" anchor="ctr"/>
+            <a:lstStyle/>
+            <a:p>
+              <a:pPr algn="ctr"/>
+              <a:endParaRPr lang="en-US"/>
+            </a:p>
+          </p:txBody>
+        </p:sp>
+      </p:grpSp>
+      <p:pic>
+        <p:nvPicPr>
+          <p:cNvPr id="1040" name="Picture 1039">
+            <a:extLst>
+              <a:ext uri="{FF2B5EF4-FFF2-40B4-BE49-F238E27FC236}">
+                <a16:creationId xmlns:a16="http://schemas.microsoft.com/office/drawing/2014/main" id="{DEBBAFDC-15B6-427F-AA46-5ABF724C65EC}"/>
+              </a:ext>
+            </a:extLst>
+          </p:cNvPr>
+          <p:cNvPicPr>
+            <a:picLocks noChangeAspect="1"/>
+          </p:cNvPicPr>
+          <p:nvPr/>
+        </p:nvPicPr>
+        <p:blipFill>
+          <a:blip r:embed="rId10"/>
+          <a:stretch>
+            <a:fillRect/>
+          </a:stretch>
+        </p:blipFill>
+        <p:spPr>
+          <a:xfrm>
+            <a:off x="1085776" y="1835836"/>
+            <a:ext cx="830947" cy="754930"/>
+          </a:xfrm>
+          <a:prstGeom prst="rect">
+            <a:avLst/>
+          </a:prstGeom>
+        </p:spPr>
+      </p:pic>
+      <p:pic>
+        <p:nvPicPr>
+          <p:cNvPr id="1043" name="Picture 1042">
+            <a:extLst>
+              <a:ext uri="{FF2B5EF4-FFF2-40B4-BE49-F238E27FC236}">
+                <a16:creationId xmlns:a16="http://schemas.microsoft.com/office/drawing/2014/main" id="{C43027D3-FFFD-41C3-A056-E79FC61045BC}"/>
+              </a:ext>
+            </a:extLst>
+          </p:cNvPr>
+          <p:cNvPicPr>
+            <a:picLocks noChangeAspect="1"/>
+          </p:cNvPicPr>
+          <p:nvPr/>
+        </p:nvPicPr>
+        <p:blipFill>
+          <a:blip r:embed="rId11"/>
+          <a:stretch>
+            <a:fillRect/>
+          </a:stretch>
+        </p:blipFill>
+        <p:spPr>
+          <a:xfrm>
+            <a:off x="3264837" y="1510125"/>
+            <a:ext cx="795704" cy="1002323"/>
+          </a:xfrm>
+          <a:prstGeom prst="rect">
+            <a:avLst/>
+          </a:prstGeom>
+        </p:spPr>
+      </p:pic>
+      <p:grpSp>
+        <p:nvGrpSpPr>
+          <p:cNvPr id="1044" name="Group 1043">
+            <a:extLst>
+              <a:ext uri="{FF2B5EF4-FFF2-40B4-BE49-F238E27FC236}">
+                <a16:creationId xmlns:a16="http://schemas.microsoft.com/office/drawing/2014/main" id="{E2439325-9DE1-43F7-B69C-5C9821DBE387}"/>
+              </a:ext>
+            </a:extLst>
+          </p:cNvPr>
+          <p:cNvGrpSpPr/>
+          <p:nvPr/>
+        </p:nvGrpSpPr>
+        <p:grpSpPr>
+          <a:xfrm>
+            <a:off x="5005196" y="1868355"/>
+            <a:ext cx="1441455" cy="1005088"/>
+            <a:chOff x="2272059" y="3781225"/>
+            <a:chExt cx="1441455" cy="1005088"/>
+          </a:xfrm>
+        </p:grpSpPr>
+        <p:pic>
+          <p:nvPicPr>
+            <p:cNvPr id="1041" name="Picture 14" descr="Cannon Gun Stock Illustrations – 10,392 Cannon Gun Stock Illustrations,  Vectors &amp;amp; Clipart - Dreamstime">
+              <a:extLst>
+                <a:ext uri="{FF2B5EF4-FFF2-40B4-BE49-F238E27FC236}">
+                  <a16:creationId xmlns:a16="http://schemas.microsoft.com/office/drawing/2014/main" id="{76906319-A7A5-4A19-B95A-96B27FE61897}"/>
+                </a:ext>
+              </a:extLst>
+            </p:cNvPr>
+            <p:cNvPicPr>
+              <a:picLocks noChangeAspect="1" noChangeArrowheads="1"/>
+            </p:cNvPicPr>
+            <p:nvPr/>
+          </p:nvPicPr>
+          <p:blipFill>
+            <a:blip r:embed="rId12">
+              <a:extLst>
+                <a:ext uri="{28A0092B-C50C-407E-A947-70E740481C1C}">
+                  <a14:useLocalDpi xmlns:a14="http://schemas.microsoft.com/office/drawing/2010/main" val="0"/>
+                </a:ext>
+              </a:extLst>
+            </a:blip>
+            <a:srcRect/>
+            <a:stretch>
+              <a:fillRect/>
+            </a:stretch>
+          </p:blipFill>
+          <p:spPr bwMode="auto">
+            <a:xfrm>
+              <a:off x="2655277" y="4123592"/>
+              <a:ext cx="1058237" cy="662721"/>
+            </a:xfrm>
+            <a:prstGeom prst="rect">
+              <a:avLst/>
+            </a:prstGeom>
+            <a:noFill/>
+            <a:extLst>
+              <a:ext uri="{909E8E84-426E-40DD-AFC4-6F175D3DCCD1}">
+                <a14:hiddenFill xmlns:a14="http://schemas.microsoft.com/office/drawing/2010/main">
+                  <a:solidFill>
+                    <a:srgbClr val="FFFFFF"/>
+                  </a:solidFill>
+                </a14:hiddenFill>
+              </a:ext>
+            </a:extLst>
+          </p:spPr>
+        </p:pic>
+        <p:pic>
+          <p:nvPicPr>
+            <p:cNvPr id="114" name="Picture 113">
+              <a:extLst>
+                <a:ext uri="{FF2B5EF4-FFF2-40B4-BE49-F238E27FC236}">
+                  <a16:creationId xmlns:a16="http://schemas.microsoft.com/office/drawing/2014/main" id="{8E1BBA0A-5137-4C7E-B39A-FCE560B94311}"/>
+                </a:ext>
+              </a:extLst>
+            </p:cNvPr>
+            <p:cNvPicPr>
+              <a:picLocks noChangeAspect="1"/>
+            </p:cNvPicPr>
+            <p:nvPr/>
+          </p:nvPicPr>
+          <p:blipFill>
+            <a:blip r:embed="rId11"/>
+            <a:stretch>
+              <a:fillRect/>
+            </a:stretch>
+          </p:blipFill>
+          <p:spPr>
+            <a:xfrm>
+              <a:off x="2272059" y="3781225"/>
+              <a:ext cx="432328" cy="544589"/>
+            </a:xfrm>
+            <a:prstGeom prst="rect">
+              <a:avLst/>
+            </a:prstGeom>
+          </p:spPr>
+        </p:pic>
+      </p:grpSp>
     </p:spTree>
     <p:extLst>
       <p:ext uri="{BB962C8B-B14F-4D97-AF65-F5344CB8AC3E}">
@@ -29982,7 +38059,7 @@
 </p:sld>
 </file>
 
-<file path=ppt/slides/slide5.xml><?xml version="1.0" encoding="utf-8"?>
+<file path=ppt/slides/slide6.xml><?xml version="1.0" encoding="utf-8"?>
 <p:sld xmlns:a="http://schemas.openxmlformats.org/drawingml/2006/main" xmlns:r="http://schemas.openxmlformats.org/officeDocument/2006/relationships" xmlns:p="http://schemas.openxmlformats.org/presentationml/2006/main">
   <p:cSld>
     <p:spTree>

--- a/drawings.pptx
+++ b/drawings.pptx
@@ -5,15 +5,16 @@
     <p:sldMasterId id="2147483648" r:id="rId1"/>
   </p:sldMasterIdLst>
   <p:notesMasterIdLst>
-    <p:notesMasterId r:id="rId8"/>
+    <p:notesMasterId r:id="rId9"/>
   </p:notesMasterIdLst>
   <p:sldIdLst>
     <p:sldId id="256" r:id="rId2"/>
     <p:sldId id="258" r:id="rId3"/>
     <p:sldId id="259" r:id="rId4"/>
     <p:sldId id="261" r:id="rId5"/>
-    <p:sldId id="260" r:id="rId6"/>
-    <p:sldId id="257" r:id="rId7"/>
+    <p:sldId id="262" r:id="rId6"/>
+    <p:sldId id="260" r:id="rId7"/>
+    <p:sldId id="257" r:id="rId8"/>
   </p:sldIdLst>
   <p:sldSz cx="12192000" cy="6858000"/>
   <p:notesSz cx="6858000" cy="9144000"/>
@@ -202,7 +203,7 @@
           <a:p>
             <a:fld id="{7700C406-2328-4788-AE79-437B6607AD22}" type="datetimeFigureOut">
               <a:rPr lang="en-US" smtClean="0"/>
-              <a:t>1/17/2022</a:t>
+              <a:t>1/19/2022</a:t>
             </a:fld>
             <a:endParaRPr lang="en-US"/>
           </a:p>
@@ -700,7 +701,7 @@
           <a:p>
             <a:fld id="{9EC8CD53-0620-48F2-A3BB-2B10BDA60E52}" type="datetimeFigureOut">
               <a:rPr lang="en-US" smtClean="0"/>
-              <a:t>1/17/2022</a:t>
+              <a:t>1/19/2022</a:t>
             </a:fld>
             <a:endParaRPr lang="en-US"/>
           </a:p>
@@ -898,7 +899,7 @@
           <a:p>
             <a:fld id="{9EC8CD53-0620-48F2-A3BB-2B10BDA60E52}" type="datetimeFigureOut">
               <a:rPr lang="en-US" smtClean="0"/>
-              <a:t>1/17/2022</a:t>
+              <a:t>1/19/2022</a:t>
             </a:fld>
             <a:endParaRPr lang="en-US"/>
           </a:p>
@@ -1106,7 +1107,7 @@
           <a:p>
             <a:fld id="{9EC8CD53-0620-48F2-A3BB-2B10BDA60E52}" type="datetimeFigureOut">
               <a:rPr lang="en-US" smtClean="0"/>
-              <a:t>1/17/2022</a:t>
+              <a:t>1/19/2022</a:t>
             </a:fld>
             <a:endParaRPr lang="en-US"/>
           </a:p>
@@ -1304,7 +1305,7 @@
           <a:p>
             <a:fld id="{9EC8CD53-0620-48F2-A3BB-2B10BDA60E52}" type="datetimeFigureOut">
               <a:rPr lang="en-US" smtClean="0"/>
-              <a:t>1/17/2022</a:t>
+              <a:t>1/19/2022</a:t>
             </a:fld>
             <a:endParaRPr lang="en-US"/>
           </a:p>
@@ -1579,7 +1580,7 @@
           <a:p>
             <a:fld id="{9EC8CD53-0620-48F2-A3BB-2B10BDA60E52}" type="datetimeFigureOut">
               <a:rPr lang="en-US" smtClean="0"/>
-              <a:t>1/17/2022</a:t>
+              <a:t>1/19/2022</a:t>
             </a:fld>
             <a:endParaRPr lang="en-US"/>
           </a:p>
@@ -1844,7 +1845,7 @@
           <a:p>
             <a:fld id="{9EC8CD53-0620-48F2-A3BB-2B10BDA60E52}" type="datetimeFigureOut">
               <a:rPr lang="en-US" smtClean="0"/>
-              <a:t>1/17/2022</a:t>
+              <a:t>1/19/2022</a:t>
             </a:fld>
             <a:endParaRPr lang="en-US"/>
           </a:p>
@@ -2256,7 +2257,7 @@
           <a:p>
             <a:fld id="{9EC8CD53-0620-48F2-A3BB-2B10BDA60E52}" type="datetimeFigureOut">
               <a:rPr lang="en-US" smtClean="0"/>
-              <a:t>1/17/2022</a:t>
+              <a:t>1/19/2022</a:t>
             </a:fld>
             <a:endParaRPr lang="en-US"/>
           </a:p>
@@ -2397,7 +2398,7 @@
           <a:p>
             <a:fld id="{9EC8CD53-0620-48F2-A3BB-2B10BDA60E52}" type="datetimeFigureOut">
               <a:rPr lang="en-US" smtClean="0"/>
-              <a:t>1/17/2022</a:t>
+              <a:t>1/19/2022</a:t>
             </a:fld>
             <a:endParaRPr lang="en-US"/>
           </a:p>
@@ -2510,7 +2511,7 @@
           <a:p>
             <a:fld id="{9EC8CD53-0620-48F2-A3BB-2B10BDA60E52}" type="datetimeFigureOut">
               <a:rPr lang="en-US" smtClean="0"/>
-              <a:t>1/17/2022</a:t>
+              <a:t>1/19/2022</a:t>
             </a:fld>
             <a:endParaRPr lang="en-US"/>
           </a:p>
@@ -2821,7 +2822,7 @@
           <a:p>
             <a:fld id="{9EC8CD53-0620-48F2-A3BB-2B10BDA60E52}" type="datetimeFigureOut">
               <a:rPr lang="en-US" smtClean="0"/>
-              <a:t>1/17/2022</a:t>
+              <a:t>1/19/2022</a:t>
             </a:fld>
             <a:endParaRPr lang="en-US"/>
           </a:p>
@@ -3109,7 +3110,7 @@
           <a:p>
             <a:fld id="{9EC8CD53-0620-48F2-A3BB-2B10BDA60E52}" type="datetimeFigureOut">
               <a:rPr lang="en-US" smtClean="0"/>
-              <a:t>1/17/2022</a:t>
+              <a:t>1/19/2022</a:t>
             </a:fld>
             <a:endParaRPr lang="en-US"/>
           </a:p>
@@ -3350,7 +3351,7 @@
           <a:p>
             <a:fld id="{9EC8CD53-0620-48F2-A3BB-2B10BDA60E52}" type="datetimeFigureOut">
               <a:rPr lang="en-US" smtClean="0"/>
-              <a:t>1/17/2022</a:t>
+              <a:t>1/19/2022</a:t>
             </a:fld>
             <a:endParaRPr lang="en-US"/>
           </a:p>
@@ -30207,6 +30208,2825 @@
       </p:grpSpPr>
       <p:grpSp>
         <p:nvGrpSpPr>
+          <p:cNvPr id="78" name="Group 77">
+            <a:extLst>
+              <a:ext uri="{FF2B5EF4-FFF2-40B4-BE49-F238E27FC236}">
+                <a16:creationId xmlns:a16="http://schemas.microsoft.com/office/drawing/2014/main" id="{69FC3F41-AA97-418F-BDAA-AA826DA0002C}"/>
+              </a:ext>
+            </a:extLst>
+          </p:cNvPr>
+          <p:cNvGrpSpPr/>
+          <p:nvPr/>
+        </p:nvGrpSpPr>
+        <p:grpSpPr>
+          <a:xfrm>
+            <a:off x="4821190" y="3208453"/>
+            <a:ext cx="631076" cy="1000141"/>
+            <a:chOff x="6506167" y="3616847"/>
+            <a:chExt cx="1337615" cy="2119878"/>
+          </a:xfrm>
+        </p:grpSpPr>
+        <p:pic>
+          <p:nvPicPr>
+            <p:cNvPr id="79" name="Picture 2" descr="Church Organ Stock Illustrations – 171 Church Organ Stock Illustrations,  Vectors &amp;amp; Clipart - Dreamstime">
+              <a:extLst>
+                <a:ext uri="{FF2B5EF4-FFF2-40B4-BE49-F238E27FC236}">
+                  <a16:creationId xmlns:a16="http://schemas.microsoft.com/office/drawing/2014/main" id="{9FBA4C2E-1EF0-4187-8248-32928B88FCBC}"/>
+                </a:ext>
+              </a:extLst>
+            </p:cNvPr>
+            <p:cNvPicPr>
+              <a:picLocks noChangeAspect="1" noChangeArrowheads="1"/>
+            </p:cNvPicPr>
+            <p:nvPr/>
+          </p:nvPicPr>
+          <p:blipFill rotWithShape="1">
+            <a:blip r:embed="rId2">
+              <a:extLst>
+                <a:ext uri="{28A0092B-C50C-407E-A947-70E740481C1C}">
+                  <a14:useLocalDpi xmlns:a14="http://schemas.microsoft.com/office/drawing/2010/main" val="0"/>
+                </a:ext>
+              </a:extLst>
+            </a:blip>
+            <a:srcRect b="31900"/>
+            <a:stretch/>
+          </p:blipFill>
+          <p:spPr bwMode="auto">
+            <a:xfrm>
+              <a:off x="6609949" y="3616847"/>
+              <a:ext cx="1130052" cy="1558610"/>
+            </a:xfrm>
+            <a:prstGeom prst="rect">
+              <a:avLst/>
+            </a:prstGeom>
+            <a:noFill/>
+            <a:extLst>
+              <a:ext uri="{909E8E84-426E-40DD-AFC4-6F175D3DCCD1}">
+                <a14:hiddenFill xmlns:a14="http://schemas.microsoft.com/office/drawing/2010/main">
+                  <a:solidFill>
+                    <a:srgbClr val="FFFFFF"/>
+                  </a:solidFill>
+                </a14:hiddenFill>
+              </a:ext>
+            </a:extLst>
+          </p:spPr>
+        </p:pic>
+        <p:sp>
+          <p:nvSpPr>
+            <p:cNvPr id="80" name="Rectangle 79">
+              <a:extLst>
+                <a:ext uri="{FF2B5EF4-FFF2-40B4-BE49-F238E27FC236}">
+                  <a16:creationId xmlns:a16="http://schemas.microsoft.com/office/drawing/2014/main" id="{8DCDEF0B-6A43-4F35-A8B0-EC9BA8C0D2E1}"/>
+                </a:ext>
+              </a:extLst>
+            </p:cNvPr>
+            <p:cNvSpPr/>
+            <p:nvPr/>
+          </p:nvSpPr>
+          <p:spPr>
+            <a:xfrm>
+              <a:off x="6506167" y="5050089"/>
+              <a:ext cx="1337615" cy="686636"/>
+            </a:xfrm>
+            <a:prstGeom prst="rect">
+              <a:avLst/>
+            </a:prstGeom>
+          </p:spPr>
+          <p:style>
+            <a:lnRef idx="2">
+              <a:schemeClr val="dk1">
+                <a:shade val="50000"/>
+              </a:schemeClr>
+            </a:lnRef>
+            <a:fillRef idx="1">
+              <a:schemeClr val="dk1"/>
+            </a:fillRef>
+            <a:effectRef idx="0">
+              <a:schemeClr val="dk1"/>
+            </a:effectRef>
+            <a:fontRef idx="minor">
+              <a:schemeClr val="lt1"/>
+            </a:fontRef>
+          </p:style>
+          <p:txBody>
+            <a:bodyPr rtlCol="0" anchor="ctr"/>
+            <a:lstStyle/>
+            <a:p>
+              <a:pPr algn="ctr"/>
+              <a:endParaRPr lang="en-US"/>
+            </a:p>
+          </p:txBody>
+        </p:sp>
+        <p:sp>
+          <p:nvSpPr>
+            <p:cNvPr id="81" name="Rectangle 80">
+              <a:extLst>
+                <a:ext uri="{FF2B5EF4-FFF2-40B4-BE49-F238E27FC236}">
+                  <a16:creationId xmlns:a16="http://schemas.microsoft.com/office/drawing/2014/main" id="{EE3E0716-C0D1-49F4-B816-8211C746DA53}"/>
+                </a:ext>
+              </a:extLst>
+            </p:cNvPr>
+            <p:cNvSpPr/>
+            <p:nvPr/>
+          </p:nvSpPr>
+          <p:spPr>
+            <a:xfrm>
+              <a:off x="6656512" y="5175457"/>
+              <a:ext cx="298938" cy="177046"/>
+            </a:xfrm>
+            <a:prstGeom prst="rect">
+              <a:avLst/>
+            </a:prstGeom>
+          </p:spPr>
+          <p:style>
+            <a:lnRef idx="2">
+              <a:schemeClr val="dk1"/>
+            </a:lnRef>
+            <a:fillRef idx="1">
+              <a:schemeClr val="lt1"/>
+            </a:fillRef>
+            <a:effectRef idx="0">
+              <a:schemeClr val="dk1"/>
+            </a:effectRef>
+            <a:fontRef idx="minor">
+              <a:schemeClr val="dk1"/>
+            </a:fontRef>
+          </p:style>
+          <p:txBody>
+            <a:bodyPr rtlCol="0" anchor="ctr"/>
+            <a:lstStyle/>
+            <a:p>
+              <a:pPr algn="ctr"/>
+              <a:endParaRPr lang="en-US"/>
+            </a:p>
+          </p:txBody>
+        </p:sp>
+        <p:sp>
+          <p:nvSpPr>
+            <p:cNvPr id="82" name="Rectangle 81">
+              <a:extLst>
+                <a:ext uri="{FF2B5EF4-FFF2-40B4-BE49-F238E27FC236}">
+                  <a16:creationId xmlns:a16="http://schemas.microsoft.com/office/drawing/2014/main" id="{D1CA96A0-C713-4F63-A449-9DD4C7971C6C}"/>
+                </a:ext>
+              </a:extLst>
+            </p:cNvPr>
+            <p:cNvSpPr/>
+            <p:nvPr/>
+          </p:nvSpPr>
+          <p:spPr>
+            <a:xfrm>
+              <a:off x="7395917" y="5179353"/>
+              <a:ext cx="298938" cy="177046"/>
+            </a:xfrm>
+            <a:prstGeom prst="rect">
+              <a:avLst/>
+            </a:prstGeom>
+          </p:spPr>
+          <p:style>
+            <a:lnRef idx="2">
+              <a:schemeClr val="dk1"/>
+            </a:lnRef>
+            <a:fillRef idx="1">
+              <a:schemeClr val="lt1"/>
+            </a:fillRef>
+            <a:effectRef idx="0">
+              <a:schemeClr val="dk1"/>
+            </a:effectRef>
+            <a:fontRef idx="minor">
+              <a:schemeClr val="dk1"/>
+            </a:fontRef>
+          </p:style>
+          <p:txBody>
+            <a:bodyPr rtlCol="0" anchor="ctr"/>
+            <a:lstStyle/>
+            <a:p>
+              <a:pPr algn="ctr"/>
+              <a:endParaRPr lang="en-US"/>
+            </a:p>
+          </p:txBody>
+        </p:sp>
+        <p:sp>
+          <p:nvSpPr>
+            <p:cNvPr id="83" name="Rectangle 82">
+              <a:extLst>
+                <a:ext uri="{FF2B5EF4-FFF2-40B4-BE49-F238E27FC236}">
+                  <a16:creationId xmlns:a16="http://schemas.microsoft.com/office/drawing/2014/main" id="{0DF1E89F-5E22-4DF1-BEFE-165F6AC623D5}"/>
+                </a:ext>
+              </a:extLst>
+            </p:cNvPr>
+            <p:cNvSpPr/>
+            <p:nvPr/>
+          </p:nvSpPr>
+          <p:spPr>
+            <a:xfrm>
+              <a:off x="7023933" y="5259625"/>
+              <a:ext cx="298938" cy="177046"/>
+            </a:xfrm>
+            <a:prstGeom prst="rect">
+              <a:avLst/>
+            </a:prstGeom>
+          </p:spPr>
+          <p:style>
+            <a:lnRef idx="2">
+              <a:schemeClr val="dk1"/>
+            </a:lnRef>
+            <a:fillRef idx="1">
+              <a:schemeClr val="lt1"/>
+            </a:fillRef>
+            <a:effectRef idx="0">
+              <a:schemeClr val="dk1"/>
+            </a:effectRef>
+            <a:fontRef idx="minor">
+              <a:schemeClr val="dk1"/>
+            </a:fontRef>
+          </p:style>
+          <p:txBody>
+            <a:bodyPr rtlCol="0" anchor="ctr"/>
+            <a:lstStyle/>
+            <a:p>
+              <a:pPr algn="ctr"/>
+              <a:endParaRPr lang="en-US"/>
+            </a:p>
+          </p:txBody>
+        </p:sp>
+        <p:sp>
+          <p:nvSpPr>
+            <p:cNvPr id="84" name="Rectangle 83">
+              <a:extLst>
+                <a:ext uri="{FF2B5EF4-FFF2-40B4-BE49-F238E27FC236}">
+                  <a16:creationId xmlns:a16="http://schemas.microsoft.com/office/drawing/2014/main" id="{B6C5AD18-E33E-4B18-A147-23424B726AFC}"/>
+                </a:ext>
+              </a:extLst>
+            </p:cNvPr>
+            <p:cNvSpPr/>
+            <p:nvPr/>
+          </p:nvSpPr>
+          <p:spPr>
+            <a:xfrm>
+              <a:off x="6655167" y="5428420"/>
+              <a:ext cx="298938" cy="177046"/>
+            </a:xfrm>
+            <a:prstGeom prst="rect">
+              <a:avLst/>
+            </a:prstGeom>
+          </p:spPr>
+          <p:style>
+            <a:lnRef idx="2">
+              <a:schemeClr val="dk1"/>
+            </a:lnRef>
+            <a:fillRef idx="1">
+              <a:schemeClr val="lt1"/>
+            </a:fillRef>
+            <a:effectRef idx="0">
+              <a:schemeClr val="dk1"/>
+            </a:effectRef>
+            <a:fontRef idx="minor">
+              <a:schemeClr val="dk1"/>
+            </a:fontRef>
+          </p:style>
+          <p:txBody>
+            <a:bodyPr rtlCol="0" anchor="ctr"/>
+            <a:lstStyle/>
+            <a:p>
+              <a:pPr algn="ctr"/>
+              <a:endParaRPr lang="en-US"/>
+            </a:p>
+          </p:txBody>
+        </p:sp>
+        <p:sp>
+          <p:nvSpPr>
+            <p:cNvPr id="85" name="Rectangle 84">
+              <a:extLst>
+                <a:ext uri="{FF2B5EF4-FFF2-40B4-BE49-F238E27FC236}">
+                  <a16:creationId xmlns:a16="http://schemas.microsoft.com/office/drawing/2014/main" id="{192B0B89-2F77-4457-B90D-3C9131EA32BA}"/>
+                </a:ext>
+              </a:extLst>
+            </p:cNvPr>
+            <p:cNvSpPr/>
+            <p:nvPr/>
+          </p:nvSpPr>
+          <p:spPr>
+            <a:xfrm>
+              <a:off x="7394572" y="5432316"/>
+              <a:ext cx="298938" cy="177046"/>
+            </a:xfrm>
+            <a:prstGeom prst="rect">
+              <a:avLst/>
+            </a:prstGeom>
+          </p:spPr>
+          <p:style>
+            <a:lnRef idx="2">
+              <a:schemeClr val="dk1"/>
+            </a:lnRef>
+            <a:fillRef idx="1">
+              <a:schemeClr val="lt1"/>
+            </a:fillRef>
+            <a:effectRef idx="0">
+              <a:schemeClr val="dk1"/>
+            </a:effectRef>
+            <a:fontRef idx="minor">
+              <a:schemeClr val="dk1"/>
+            </a:fontRef>
+          </p:style>
+          <p:txBody>
+            <a:bodyPr rtlCol="0" anchor="ctr"/>
+            <a:lstStyle/>
+            <a:p>
+              <a:pPr algn="ctr"/>
+              <a:endParaRPr lang="en-US"/>
+            </a:p>
+          </p:txBody>
+        </p:sp>
+      </p:grpSp>
+      <p:pic>
+        <p:nvPicPr>
+          <p:cNvPr id="48" name="Picture 47">
+            <a:extLst>
+              <a:ext uri="{FF2B5EF4-FFF2-40B4-BE49-F238E27FC236}">
+                <a16:creationId xmlns:a16="http://schemas.microsoft.com/office/drawing/2014/main" id="{92F4FE4E-B446-4973-BA82-BB7E3B2447E2}"/>
+              </a:ext>
+            </a:extLst>
+          </p:cNvPr>
+          <p:cNvPicPr>
+            <a:picLocks noChangeAspect="1"/>
+          </p:cNvPicPr>
+          <p:nvPr/>
+        </p:nvPicPr>
+        <p:blipFill>
+          <a:blip r:embed="rId3"/>
+          <a:stretch>
+            <a:fillRect/>
+          </a:stretch>
+        </p:blipFill>
+        <p:spPr>
+          <a:xfrm>
+            <a:off x="6620769" y="1472636"/>
+            <a:ext cx="929088" cy="735826"/>
+          </a:xfrm>
+          <a:prstGeom prst="rect">
+            <a:avLst/>
+          </a:prstGeom>
+        </p:spPr>
+      </p:pic>
+      <p:pic>
+        <p:nvPicPr>
+          <p:cNvPr id="47" name="Picture 46">
+            <a:extLst>
+              <a:ext uri="{FF2B5EF4-FFF2-40B4-BE49-F238E27FC236}">
+                <a16:creationId xmlns:a16="http://schemas.microsoft.com/office/drawing/2014/main" id="{C998F44E-BE29-49F0-8D1A-2C332E9CEA14}"/>
+              </a:ext>
+            </a:extLst>
+          </p:cNvPr>
+          <p:cNvPicPr>
+            <a:picLocks noChangeAspect="1"/>
+          </p:cNvPicPr>
+          <p:nvPr/>
+        </p:nvPicPr>
+        <p:blipFill>
+          <a:blip r:embed="rId4"/>
+          <a:stretch>
+            <a:fillRect/>
+          </a:stretch>
+        </p:blipFill>
+        <p:spPr>
+          <a:xfrm>
+            <a:off x="4711493" y="1444303"/>
+            <a:ext cx="792492" cy="792492"/>
+          </a:xfrm>
+          <a:prstGeom prst="rect">
+            <a:avLst/>
+          </a:prstGeom>
+        </p:spPr>
+      </p:pic>
+      <p:sp>
+        <p:nvSpPr>
+          <p:cNvPr id="4" name="TextBox 3">
+            <a:extLst>
+              <a:ext uri="{FF2B5EF4-FFF2-40B4-BE49-F238E27FC236}">
+                <a16:creationId xmlns:a16="http://schemas.microsoft.com/office/drawing/2014/main" id="{F143B388-170E-4DCD-8907-346E080C9E19}"/>
+              </a:ext>
+            </a:extLst>
+          </p:cNvPr>
+          <p:cNvSpPr txBox="1"/>
+          <p:nvPr/>
+        </p:nvSpPr>
+        <p:spPr>
+          <a:xfrm>
+            <a:off x="188462" y="114301"/>
+            <a:ext cx="1250342" cy="369332"/>
+          </a:xfrm>
+          <a:prstGeom prst="rect">
+            <a:avLst/>
+          </a:prstGeom>
+          <a:noFill/>
+        </p:spPr>
+        <p:txBody>
+          <a:bodyPr wrap="none" rtlCol="0">
+            <a:spAutoFit/>
+          </a:bodyPr>
+          <a:lstStyle/>
+          <a:p>
+            <a:r>
+              <a:rPr lang="en-US" altLang="zh-CN" dirty="0" err="1"/>
+              <a:t>Snowhaupt</a:t>
+            </a:r>
+            <a:endParaRPr lang="en-US" dirty="0"/>
+          </a:p>
+        </p:txBody>
+      </p:sp>
+      <p:grpSp>
+        <p:nvGrpSpPr>
+          <p:cNvPr id="9" name="Group 8">
+            <a:extLst>
+              <a:ext uri="{FF2B5EF4-FFF2-40B4-BE49-F238E27FC236}">
+                <a16:creationId xmlns:a16="http://schemas.microsoft.com/office/drawing/2014/main" id="{52E2F6DC-BAB1-4318-9359-E713FEB28636}"/>
+              </a:ext>
+            </a:extLst>
+          </p:cNvPr>
+          <p:cNvGrpSpPr/>
+          <p:nvPr/>
+        </p:nvGrpSpPr>
+        <p:grpSpPr>
+          <a:xfrm>
+            <a:off x="475862" y="905612"/>
+            <a:ext cx="1530220" cy="1504560"/>
+            <a:chOff x="475862" y="905612"/>
+            <a:chExt cx="1530220" cy="1504560"/>
+          </a:xfrm>
+        </p:grpSpPr>
+        <p:sp>
+          <p:nvSpPr>
+            <p:cNvPr id="6" name="Rectangle 5">
+              <a:extLst>
+                <a:ext uri="{FF2B5EF4-FFF2-40B4-BE49-F238E27FC236}">
+                  <a16:creationId xmlns:a16="http://schemas.microsoft.com/office/drawing/2014/main" id="{29A06361-F844-4531-A029-5CDF5D2E6E19}"/>
+                </a:ext>
+              </a:extLst>
+            </p:cNvPr>
+            <p:cNvSpPr/>
+            <p:nvPr/>
+          </p:nvSpPr>
+          <p:spPr>
+            <a:xfrm>
+              <a:off x="475862" y="905612"/>
+              <a:ext cx="1530220" cy="1504560"/>
+            </a:xfrm>
+            <a:prstGeom prst="rect">
+              <a:avLst/>
+            </a:prstGeom>
+            <a:noFill/>
+            <a:ln w="76200">
+              <a:solidFill>
+                <a:schemeClr val="tx1"/>
+              </a:solidFill>
+            </a:ln>
+          </p:spPr>
+          <p:style>
+            <a:lnRef idx="2">
+              <a:schemeClr val="accent1">
+                <a:shade val="50000"/>
+              </a:schemeClr>
+            </a:lnRef>
+            <a:fillRef idx="1">
+              <a:schemeClr val="accent1"/>
+            </a:fillRef>
+            <a:effectRef idx="0">
+              <a:schemeClr val="accent1"/>
+            </a:effectRef>
+            <a:fontRef idx="minor">
+              <a:schemeClr val="lt1"/>
+            </a:fontRef>
+          </p:style>
+          <p:txBody>
+            <a:bodyPr rtlCol="0" anchor="ctr"/>
+            <a:lstStyle/>
+            <a:p>
+              <a:pPr algn="ctr"/>
+              <a:endParaRPr lang="en-US"/>
+            </a:p>
+          </p:txBody>
+        </p:sp>
+        <p:sp>
+          <p:nvSpPr>
+            <p:cNvPr id="8" name="Pentagon 7">
+              <a:extLst>
+                <a:ext uri="{FF2B5EF4-FFF2-40B4-BE49-F238E27FC236}">
+                  <a16:creationId xmlns:a16="http://schemas.microsoft.com/office/drawing/2014/main" id="{C0D5D7A2-F33C-4641-87A9-8D58981011AB}"/>
+                </a:ext>
+              </a:extLst>
+            </p:cNvPr>
+            <p:cNvSpPr/>
+            <p:nvPr/>
+          </p:nvSpPr>
+          <p:spPr>
+            <a:xfrm>
+              <a:off x="652966" y="1147534"/>
+              <a:ext cx="1176012" cy="1214139"/>
+            </a:xfrm>
+            <a:prstGeom prst="pentagon">
+              <a:avLst/>
+            </a:prstGeom>
+            <a:noFill/>
+            <a:ln w="38100" cap="flat" cmpd="sng" algn="ctr">
+              <a:solidFill>
+                <a:schemeClr val="dk1"/>
+              </a:solidFill>
+              <a:prstDash val="solid"/>
+              <a:round/>
+              <a:headEnd type="none" w="med" len="med"/>
+              <a:tailEnd type="none" w="med" len="med"/>
+            </a:ln>
+          </p:spPr>
+          <p:style>
+            <a:lnRef idx="0">
+              <a:scrgbClr r="0" g="0" b="0"/>
+            </a:lnRef>
+            <a:fillRef idx="0">
+              <a:scrgbClr r="0" g="0" b="0"/>
+            </a:fillRef>
+            <a:effectRef idx="0">
+              <a:scrgbClr r="0" g="0" b="0"/>
+            </a:effectRef>
+            <a:fontRef idx="minor">
+              <a:schemeClr val="dk1"/>
+            </a:fontRef>
+          </p:style>
+          <p:txBody>
+            <a:bodyPr rtlCol="0" anchor="ctr"/>
+            <a:lstStyle/>
+            <a:p>
+              <a:pPr algn="ctr"/>
+              <a:endParaRPr lang="en-US"/>
+            </a:p>
+          </p:txBody>
+        </p:sp>
+      </p:grpSp>
+      <p:grpSp>
+        <p:nvGrpSpPr>
+          <p:cNvPr id="46" name="Group 45">
+            <a:extLst>
+              <a:ext uri="{FF2B5EF4-FFF2-40B4-BE49-F238E27FC236}">
+                <a16:creationId xmlns:a16="http://schemas.microsoft.com/office/drawing/2014/main" id="{BF89BAEA-F14D-4B31-AE25-ACBB968CF635}"/>
+              </a:ext>
+            </a:extLst>
+          </p:cNvPr>
+          <p:cNvGrpSpPr/>
+          <p:nvPr/>
+        </p:nvGrpSpPr>
+        <p:grpSpPr>
+          <a:xfrm>
+            <a:off x="2421892" y="905612"/>
+            <a:ext cx="1530220" cy="1504560"/>
+            <a:chOff x="2421892" y="905612"/>
+            <a:chExt cx="1530220" cy="1504560"/>
+          </a:xfrm>
+        </p:grpSpPr>
+        <p:grpSp>
+          <p:nvGrpSpPr>
+            <p:cNvPr id="43" name="Group 42">
+              <a:extLst>
+                <a:ext uri="{FF2B5EF4-FFF2-40B4-BE49-F238E27FC236}">
+                  <a16:creationId xmlns:a16="http://schemas.microsoft.com/office/drawing/2014/main" id="{89F36989-D2E7-40E0-BA14-E1FC3FD8E4BA}"/>
+                </a:ext>
+              </a:extLst>
+            </p:cNvPr>
+            <p:cNvGrpSpPr/>
+            <p:nvPr/>
+          </p:nvGrpSpPr>
+          <p:grpSpPr>
+            <a:xfrm>
+              <a:off x="2722796" y="1460546"/>
+              <a:ext cx="833381" cy="741411"/>
+              <a:chOff x="2301046" y="3300655"/>
+              <a:chExt cx="1038505" cy="923898"/>
+            </a:xfrm>
+          </p:grpSpPr>
+          <p:pic>
+            <p:nvPicPr>
+              <p:cNvPr id="44" name="Picture 4" descr="Viking battle-axe icon in black style isolated Vector Image">
+                <a:extLst>
+                  <a:ext uri="{FF2B5EF4-FFF2-40B4-BE49-F238E27FC236}">
+                    <a16:creationId xmlns:a16="http://schemas.microsoft.com/office/drawing/2014/main" id="{E808513A-492C-46C7-B458-EF4E81D01ABE}"/>
+                  </a:ext>
+                </a:extLst>
+              </p:cNvPr>
+              <p:cNvPicPr>
+                <a:picLocks noChangeAspect="1" noChangeArrowheads="1"/>
+              </p:cNvPicPr>
+              <p:nvPr/>
+            </p:nvPicPr>
+            <p:blipFill rotWithShape="1">
+              <a:blip r:embed="rId5">
+                <a:extLst>
+                  <a:ext uri="{28A0092B-C50C-407E-A947-70E740481C1C}">
+                    <a14:useLocalDpi xmlns:a14="http://schemas.microsoft.com/office/drawing/2010/main" val="0"/>
+                  </a:ext>
+                </a:extLst>
+              </a:blip>
+              <a:srcRect l="7924" t="6907" r="6208" b="14113"/>
+              <a:stretch/>
+            </p:blipFill>
+            <p:spPr bwMode="auto">
+              <a:xfrm rot="19350834">
+                <a:off x="2301046" y="3300655"/>
+                <a:ext cx="813015" cy="807618"/>
+              </a:xfrm>
+              <a:prstGeom prst="rect">
+                <a:avLst/>
+              </a:prstGeom>
+              <a:noFill/>
+              <a:extLst>
+                <a:ext uri="{909E8E84-426E-40DD-AFC4-6F175D3DCCD1}">
+                  <a14:hiddenFill xmlns:a14="http://schemas.microsoft.com/office/drawing/2010/main">
+                    <a:solidFill>
+                      <a:srgbClr val="FFFFFF"/>
+                    </a:solidFill>
+                  </a14:hiddenFill>
+                </a:ext>
+              </a:extLst>
+            </p:spPr>
+          </p:pic>
+          <p:pic>
+            <p:nvPicPr>
+              <p:cNvPr id="45" name="Picture 44">
+                <a:extLst>
+                  <a:ext uri="{FF2B5EF4-FFF2-40B4-BE49-F238E27FC236}">
+                    <a16:creationId xmlns:a16="http://schemas.microsoft.com/office/drawing/2014/main" id="{251C32EF-8095-48BF-A0AD-D9BE0A774D32}"/>
+                  </a:ext>
+                </a:extLst>
+              </p:cNvPr>
+              <p:cNvPicPr>
+                <a:picLocks noChangeAspect="1"/>
+              </p:cNvPicPr>
+              <p:nvPr/>
+            </p:nvPicPr>
+            <p:blipFill>
+              <a:blip r:embed="rId6"/>
+              <a:stretch>
+                <a:fillRect/>
+              </a:stretch>
+            </p:blipFill>
+            <p:spPr>
+              <a:xfrm>
+                <a:off x="2898416" y="3640462"/>
+                <a:ext cx="441135" cy="584091"/>
+              </a:xfrm>
+              <a:prstGeom prst="rect">
+                <a:avLst/>
+              </a:prstGeom>
+            </p:spPr>
+          </p:pic>
+        </p:grpSp>
+        <p:grpSp>
+          <p:nvGrpSpPr>
+            <p:cNvPr id="10" name="Group 9">
+              <a:extLst>
+                <a:ext uri="{FF2B5EF4-FFF2-40B4-BE49-F238E27FC236}">
+                  <a16:creationId xmlns:a16="http://schemas.microsoft.com/office/drawing/2014/main" id="{D68FFDF7-CB95-4D71-B59B-881601FFE577}"/>
+                </a:ext>
+              </a:extLst>
+            </p:cNvPr>
+            <p:cNvGrpSpPr/>
+            <p:nvPr/>
+          </p:nvGrpSpPr>
+          <p:grpSpPr>
+            <a:xfrm>
+              <a:off x="2421892" y="905612"/>
+              <a:ext cx="1530220" cy="1504560"/>
+              <a:chOff x="475862" y="905612"/>
+              <a:chExt cx="1530220" cy="1504560"/>
+            </a:xfrm>
+          </p:grpSpPr>
+          <p:sp>
+            <p:nvSpPr>
+              <p:cNvPr id="11" name="Rectangle 10">
+                <a:extLst>
+                  <a:ext uri="{FF2B5EF4-FFF2-40B4-BE49-F238E27FC236}">
+                    <a16:creationId xmlns:a16="http://schemas.microsoft.com/office/drawing/2014/main" id="{6879CE78-BD41-4475-AEAD-774F202F3A35}"/>
+                  </a:ext>
+                </a:extLst>
+              </p:cNvPr>
+              <p:cNvSpPr/>
+              <p:nvPr/>
+            </p:nvSpPr>
+            <p:spPr>
+              <a:xfrm>
+                <a:off x="475862" y="905612"/>
+                <a:ext cx="1530220" cy="1504560"/>
+              </a:xfrm>
+              <a:prstGeom prst="rect">
+                <a:avLst/>
+              </a:prstGeom>
+              <a:noFill/>
+              <a:ln w="76200">
+                <a:solidFill>
+                  <a:schemeClr val="tx1"/>
+                </a:solidFill>
+              </a:ln>
+            </p:spPr>
+            <p:style>
+              <a:lnRef idx="2">
+                <a:schemeClr val="accent1">
+                  <a:shade val="50000"/>
+                </a:schemeClr>
+              </a:lnRef>
+              <a:fillRef idx="1">
+                <a:schemeClr val="accent1"/>
+              </a:fillRef>
+              <a:effectRef idx="0">
+                <a:schemeClr val="accent1"/>
+              </a:effectRef>
+              <a:fontRef idx="minor">
+                <a:schemeClr val="lt1"/>
+              </a:fontRef>
+            </p:style>
+            <p:txBody>
+              <a:bodyPr rtlCol="0" anchor="ctr"/>
+              <a:lstStyle/>
+              <a:p>
+                <a:pPr algn="ctr"/>
+                <a:endParaRPr lang="en-US"/>
+              </a:p>
+            </p:txBody>
+          </p:sp>
+          <p:sp>
+            <p:nvSpPr>
+              <p:cNvPr id="12" name="Pentagon 11">
+                <a:extLst>
+                  <a:ext uri="{FF2B5EF4-FFF2-40B4-BE49-F238E27FC236}">
+                    <a16:creationId xmlns:a16="http://schemas.microsoft.com/office/drawing/2014/main" id="{EC163F4F-A7E8-4E40-9E0E-BC555C5C0469}"/>
+                  </a:ext>
+                </a:extLst>
+              </p:cNvPr>
+              <p:cNvSpPr/>
+              <p:nvPr/>
+            </p:nvSpPr>
+            <p:spPr>
+              <a:xfrm>
+                <a:off x="652966" y="1147534"/>
+                <a:ext cx="1176012" cy="1214139"/>
+              </a:xfrm>
+              <a:prstGeom prst="pentagon">
+                <a:avLst/>
+              </a:prstGeom>
+              <a:noFill/>
+              <a:ln w="38100" cap="flat" cmpd="sng" algn="ctr">
+                <a:solidFill>
+                  <a:schemeClr val="dk1"/>
+                </a:solidFill>
+                <a:prstDash val="solid"/>
+                <a:round/>
+                <a:headEnd type="none" w="med" len="med"/>
+                <a:tailEnd type="none" w="med" len="med"/>
+              </a:ln>
+            </p:spPr>
+            <p:style>
+              <a:lnRef idx="0">
+                <a:scrgbClr r="0" g="0" b="0"/>
+              </a:lnRef>
+              <a:fillRef idx="0">
+                <a:scrgbClr r="0" g="0" b="0"/>
+              </a:fillRef>
+              <a:effectRef idx="0">
+                <a:scrgbClr r="0" g="0" b="0"/>
+              </a:effectRef>
+              <a:fontRef idx="minor">
+                <a:schemeClr val="dk1"/>
+              </a:fontRef>
+            </p:style>
+            <p:txBody>
+              <a:bodyPr rtlCol="0" anchor="ctr"/>
+              <a:lstStyle/>
+              <a:p>
+                <a:pPr algn="ctr"/>
+                <a:endParaRPr lang="en-US"/>
+              </a:p>
+            </p:txBody>
+          </p:sp>
+        </p:grpSp>
+      </p:grpSp>
+      <p:grpSp>
+        <p:nvGrpSpPr>
+          <p:cNvPr id="13" name="Group 12">
+            <a:extLst>
+              <a:ext uri="{FF2B5EF4-FFF2-40B4-BE49-F238E27FC236}">
+                <a16:creationId xmlns:a16="http://schemas.microsoft.com/office/drawing/2014/main" id="{FEA0D26E-A5B4-4B1E-AE22-168F74976C5F}"/>
+              </a:ext>
+            </a:extLst>
+          </p:cNvPr>
+          <p:cNvGrpSpPr/>
+          <p:nvPr/>
+        </p:nvGrpSpPr>
+        <p:grpSpPr>
+          <a:xfrm>
+            <a:off x="4367922" y="905612"/>
+            <a:ext cx="1530220" cy="1504560"/>
+            <a:chOff x="475862" y="905612"/>
+            <a:chExt cx="1530220" cy="1504560"/>
+          </a:xfrm>
+        </p:grpSpPr>
+        <p:sp>
+          <p:nvSpPr>
+            <p:cNvPr id="14" name="Rectangle 13">
+              <a:extLst>
+                <a:ext uri="{FF2B5EF4-FFF2-40B4-BE49-F238E27FC236}">
+                  <a16:creationId xmlns:a16="http://schemas.microsoft.com/office/drawing/2014/main" id="{CCE8712C-06D9-44CE-B21B-D46DCD0955E9}"/>
+                </a:ext>
+              </a:extLst>
+            </p:cNvPr>
+            <p:cNvSpPr/>
+            <p:nvPr/>
+          </p:nvSpPr>
+          <p:spPr>
+            <a:xfrm>
+              <a:off x="475862" y="905612"/>
+              <a:ext cx="1530220" cy="1504560"/>
+            </a:xfrm>
+            <a:prstGeom prst="rect">
+              <a:avLst/>
+            </a:prstGeom>
+            <a:noFill/>
+            <a:ln w="76200">
+              <a:solidFill>
+                <a:schemeClr val="tx1"/>
+              </a:solidFill>
+            </a:ln>
+          </p:spPr>
+          <p:style>
+            <a:lnRef idx="2">
+              <a:schemeClr val="accent1">
+                <a:shade val="50000"/>
+              </a:schemeClr>
+            </a:lnRef>
+            <a:fillRef idx="1">
+              <a:schemeClr val="accent1"/>
+            </a:fillRef>
+            <a:effectRef idx="0">
+              <a:schemeClr val="accent1"/>
+            </a:effectRef>
+            <a:fontRef idx="minor">
+              <a:schemeClr val="lt1"/>
+            </a:fontRef>
+          </p:style>
+          <p:txBody>
+            <a:bodyPr rtlCol="0" anchor="ctr"/>
+            <a:lstStyle/>
+            <a:p>
+              <a:pPr algn="ctr"/>
+              <a:endParaRPr lang="en-US"/>
+            </a:p>
+          </p:txBody>
+        </p:sp>
+        <p:sp>
+          <p:nvSpPr>
+            <p:cNvPr id="15" name="Pentagon 14">
+              <a:extLst>
+                <a:ext uri="{FF2B5EF4-FFF2-40B4-BE49-F238E27FC236}">
+                  <a16:creationId xmlns:a16="http://schemas.microsoft.com/office/drawing/2014/main" id="{A48227F4-0774-4863-9D15-906F3A80178F}"/>
+                </a:ext>
+              </a:extLst>
+            </p:cNvPr>
+            <p:cNvSpPr/>
+            <p:nvPr/>
+          </p:nvSpPr>
+          <p:spPr>
+            <a:xfrm>
+              <a:off x="652966" y="1147534"/>
+              <a:ext cx="1176012" cy="1214139"/>
+            </a:xfrm>
+            <a:prstGeom prst="pentagon">
+              <a:avLst/>
+            </a:prstGeom>
+            <a:noFill/>
+            <a:ln w="38100" cap="flat" cmpd="sng" algn="ctr">
+              <a:solidFill>
+                <a:schemeClr val="dk1"/>
+              </a:solidFill>
+              <a:prstDash val="solid"/>
+              <a:round/>
+              <a:headEnd type="none" w="med" len="med"/>
+              <a:tailEnd type="none" w="med" len="med"/>
+            </a:ln>
+          </p:spPr>
+          <p:style>
+            <a:lnRef idx="0">
+              <a:scrgbClr r="0" g="0" b="0"/>
+            </a:lnRef>
+            <a:fillRef idx="0">
+              <a:scrgbClr r="0" g="0" b="0"/>
+            </a:fillRef>
+            <a:effectRef idx="0">
+              <a:scrgbClr r="0" g="0" b="0"/>
+            </a:effectRef>
+            <a:fontRef idx="minor">
+              <a:schemeClr val="dk1"/>
+            </a:fontRef>
+          </p:style>
+          <p:txBody>
+            <a:bodyPr rtlCol="0" anchor="ctr"/>
+            <a:lstStyle/>
+            <a:p>
+              <a:pPr algn="ctr"/>
+              <a:endParaRPr lang="en-US"/>
+            </a:p>
+          </p:txBody>
+        </p:sp>
+      </p:grpSp>
+      <p:grpSp>
+        <p:nvGrpSpPr>
+          <p:cNvPr id="16" name="Group 15">
+            <a:extLst>
+              <a:ext uri="{FF2B5EF4-FFF2-40B4-BE49-F238E27FC236}">
+                <a16:creationId xmlns:a16="http://schemas.microsoft.com/office/drawing/2014/main" id="{82AC5827-55FF-4943-9A19-450DADA1282A}"/>
+              </a:ext>
+            </a:extLst>
+          </p:cNvPr>
+          <p:cNvGrpSpPr/>
+          <p:nvPr/>
+        </p:nvGrpSpPr>
+        <p:grpSpPr>
+          <a:xfrm>
+            <a:off x="6313952" y="905612"/>
+            <a:ext cx="1530220" cy="1504560"/>
+            <a:chOff x="475862" y="905612"/>
+            <a:chExt cx="1530220" cy="1504560"/>
+          </a:xfrm>
+        </p:grpSpPr>
+        <p:sp>
+          <p:nvSpPr>
+            <p:cNvPr id="17" name="Rectangle 16">
+              <a:extLst>
+                <a:ext uri="{FF2B5EF4-FFF2-40B4-BE49-F238E27FC236}">
+                  <a16:creationId xmlns:a16="http://schemas.microsoft.com/office/drawing/2014/main" id="{56ED9052-56F2-4F38-88AD-A3E9F6AE04B1}"/>
+                </a:ext>
+              </a:extLst>
+            </p:cNvPr>
+            <p:cNvSpPr/>
+            <p:nvPr/>
+          </p:nvSpPr>
+          <p:spPr>
+            <a:xfrm>
+              <a:off x="475862" y="905612"/>
+              <a:ext cx="1530220" cy="1504560"/>
+            </a:xfrm>
+            <a:prstGeom prst="rect">
+              <a:avLst/>
+            </a:prstGeom>
+            <a:noFill/>
+            <a:ln w="76200">
+              <a:solidFill>
+                <a:schemeClr val="tx1"/>
+              </a:solidFill>
+            </a:ln>
+          </p:spPr>
+          <p:style>
+            <a:lnRef idx="2">
+              <a:schemeClr val="accent1">
+                <a:shade val="50000"/>
+              </a:schemeClr>
+            </a:lnRef>
+            <a:fillRef idx="1">
+              <a:schemeClr val="accent1"/>
+            </a:fillRef>
+            <a:effectRef idx="0">
+              <a:schemeClr val="accent1"/>
+            </a:effectRef>
+            <a:fontRef idx="minor">
+              <a:schemeClr val="lt1"/>
+            </a:fontRef>
+          </p:style>
+          <p:txBody>
+            <a:bodyPr rtlCol="0" anchor="ctr"/>
+            <a:lstStyle/>
+            <a:p>
+              <a:pPr algn="ctr"/>
+              <a:endParaRPr lang="en-US"/>
+            </a:p>
+          </p:txBody>
+        </p:sp>
+        <p:sp>
+          <p:nvSpPr>
+            <p:cNvPr id="18" name="Pentagon 17">
+              <a:extLst>
+                <a:ext uri="{FF2B5EF4-FFF2-40B4-BE49-F238E27FC236}">
+                  <a16:creationId xmlns:a16="http://schemas.microsoft.com/office/drawing/2014/main" id="{3D2709C9-AA2F-4B1B-99D6-038175530A87}"/>
+                </a:ext>
+              </a:extLst>
+            </p:cNvPr>
+            <p:cNvSpPr/>
+            <p:nvPr/>
+          </p:nvSpPr>
+          <p:spPr>
+            <a:xfrm>
+              <a:off x="652966" y="1147534"/>
+              <a:ext cx="1176012" cy="1214139"/>
+            </a:xfrm>
+            <a:prstGeom prst="pentagon">
+              <a:avLst/>
+            </a:prstGeom>
+            <a:noFill/>
+            <a:ln w="38100" cap="flat" cmpd="sng" algn="ctr">
+              <a:solidFill>
+                <a:schemeClr val="dk1"/>
+              </a:solidFill>
+              <a:prstDash val="solid"/>
+              <a:round/>
+              <a:headEnd type="none" w="med" len="med"/>
+              <a:tailEnd type="none" w="med" len="med"/>
+            </a:ln>
+          </p:spPr>
+          <p:style>
+            <a:lnRef idx="0">
+              <a:scrgbClr r="0" g="0" b="0"/>
+            </a:lnRef>
+            <a:fillRef idx="0">
+              <a:scrgbClr r="0" g="0" b="0"/>
+            </a:fillRef>
+            <a:effectRef idx="0">
+              <a:scrgbClr r="0" g="0" b="0"/>
+            </a:effectRef>
+            <a:fontRef idx="minor">
+              <a:schemeClr val="dk1"/>
+            </a:fontRef>
+          </p:style>
+          <p:txBody>
+            <a:bodyPr rtlCol="0" anchor="ctr"/>
+            <a:lstStyle/>
+            <a:p>
+              <a:pPr algn="ctr"/>
+              <a:endParaRPr lang="en-US"/>
+            </a:p>
+          </p:txBody>
+        </p:sp>
+      </p:grpSp>
+      <p:grpSp>
+        <p:nvGrpSpPr>
+          <p:cNvPr id="67" name="Group 66">
+            <a:extLst>
+              <a:ext uri="{FF2B5EF4-FFF2-40B4-BE49-F238E27FC236}">
+                <a16:creationId xmlns:a16="http://schemas.microsoft.com/office/drawing/2014/main" id="{FF28A8A4-F572-4876-98F9-19C2617E1BF2}"/>
+              </a:ext>
+            </a:extLst>
+          </p:cNvPr>
+          <p:cNvGrpSpPr/>
+          <p:nvPr/>
+        </p:nvGrpSpPr>
+        <p:grpSpPr>
+          <a:xfrm>
+            <a:off x="8239890" y="910146"/>
+            <a:ext cx="1530220" cy="1504560"/>
+            <a:chOff x="8239890" y="910146"/>
+            <a:chExt cx="1530220" cy="1504560"/>
+          </a:xfrm>
+        </p:grpSpPr>
+        <p:grpSp>
+          <p:nvGrpSpPr>
+            <p:cNvPr id="49" name="Group 48">
+              <a:extLst>
+                <a:ext uri="{FF2B5EF4-FFF2-40B4-BE49-F238E27FC236}">
+                  <a16:creationId xmlns:a16="http://schemas.microsoft.com/office/drawing/2014/main" id="{E8FF0549-4B23-4BA3-840B-428D82E9BA17}"/>
+                </a:ext>
+              </a:extLst>
+            </p:cNvPr>
+            <p:cNvGrpSpPr/>
+            <p:nvPr/>
+          </p:nvGrpSpPr>
+          <p:grpSpPr>
+            <a:xfrm>
+              <a:off x="8551983" y="1463843"/>
+              <a:ext cx="888768" cy="674059"/>
+              <a:chOff x="4638485" y="4014555"/>
+              <a:chExt cx="1121232" cy="841513"/>
+            </a:xfrm>
+          </p:grpSpPr>
+          <p:pic>
+            <p:nvPicPr>
+              <p:cNvPr id="50" name="Picture 49">
+                <a:extLst>
+                  <a:ext uri="{FF2B5EF4-FFF2-40B4-BE49-F238E27FC236}">
+                    <a16:creationId xmlns:a16="http://schemas.microsoft.com/office/drawing/2014/main" id="{1AB43153-B241-4AC5-B009-FAC2BE5F98D7}"/>
+                  </a:ext>
+                </a:extLst>
+              </p:cNvPr>
+              <p:cNvPicPr>
+                <a:picLocks noChangeAspect="1"/>
+              </p:cNvPicPr>
+              <p:nvPr/>
+            </p:nvPicPr>
+            <p:blipFill>
+              <a:blip r:embed="rId7"/>
+              <a:stretch>
+                <a:fillRect/>
+              </a:stretch>
+            </p:blipFill>
+            <p:spPr>
+              <a:xfrm>
+                <a:off x="4638485" y="4085074"/>
+                <a:ext cx="559512" cy="731096"/>
+              </a:xfrm>
+              <a:prstGeom prst="rect">
+                <a:avLst/>
+              </a:prstGeom>
+            </p:spPr>
+          </p:pic>
+          <p:pic>
+            <p:nvPicPr>
+              <p:cNvPr id="51" name="Picture 50">
+                <a:extLst>
+                  <a:ext uri="{FF2B5EF4-FFF2-40B4-BE49-F238E27FC236}">
+                    <a16:creationId xmlns:a16="http://schemas.microsoft.com/office/drawing/2014/main" id="{0003B303-8203-49DD-A581-2BA3248E0C85}"/>
+                  </a:ext>
+                </a:extLst>
+              </p:cNvPr>
+              <p:cNvPicPr>
+                <a:picLocks noChangeAspect="1"/>
+              </p:cNvPicPr>
+              <p:nvPr/>
+            </p:nvPicPr>
+            <p:blipFill>
+              <a:blip r:embed="rId8"/>
+              <a:stretch>
+                <a:fillRect/>
+              </a:stretch>
+            </p:blipFill>
+            <p:spPr>
+              <a:xfrm>
+                <a:off x="5249786" y="4014555"/>
+                <a:ext cx="509931" cy="841513"/>
+              </a:xfrm>
+              <a:prstGeom prst="rect">
+                <a:avLst/>
+              </a:prstGeom>
+            </p:spPr>
+          </p:pic>
+        </p:grpSp>
+        <p:grpSp>
+          <p:nvGrpSpPr>
+            <p:cNvPr id="19" name="Group 18">
+              <a:extLst>
+                <a:ext uri="{FF2B5EF4-FFF2-40B4-BE49-F238E27FC236}">
+                  <a16:creationId xmlns:a16="http://schemas.microsoft.com/office/drawing/2014/main" id="{E9654EE4-4776-46D0-86AF-F988202ECAFD}"/>
+                </a:ext>
+              </a:extLst>
+            </p:cNvPr>
+            <p:cNvGrpSpPr/>
+            <p:nvPr/>
+          </p:nvGrpSpPr>
+          <p:grpSpPr>
+            <a:xfrm>
+              <a:off x="8239890" y="910146"/>
+              <a:ext cx="1530220" cy="1504560"/>
+              <a:chOff x="475862" y="905612"/>
+              <a:chExt cx="1530220" cy="1504560"/>
+            </a:xfrm>
+          </p:grpSpPr>
+          <p:sp>
+            <p:nvSpPr>
+              <p:cNvPr id="20" name="Rectangle 19">
+                <a:extLst>
+                  <a:ext uri="{FF2B5EF4-FFF2-40B4-BE49-F238E27FC236}">
+                    <a16:creationId xmlns:a16="http://schemas.microsoft.com/office/drawing/2014/main" id="{5C7E4900-5AD9-412A-8968-7B6023F6B81B}"/>
+                  </a:ext>
+                </a:extLst>
+              </p:cNvPr>
+              <p:cNvSpPr/>
+              <p:nvPr/>
+            </p:nvSpPr>
+            <p:spPr>
+              <a:xfrm>
+                <a:off x="475862" y="905612"/>
+                <a:ext cx="1530220" cy="1504560"/>
+              </a:xfrm>
+              <a:prstGeom prst="rect">
+                <a:avLst/>
+              </a:prstGeom>
+              <a:noFill/>
+              <a:ln w="76200">
+                <a:solidFill>
+                  <a:schemeClr val="tx1"/>
+                </a:solidFill>
+              </a:ln>
+            </p:spPr>
+            <p:style>
+              <a:lnRef idx="2">
+                <a:schemeClr val="accent1">
+                  <a:shade val="50000"/>
+                </a:schemeClr>
+              </a:lnRef>
+              <a:fillRef idx="1">
+                <a:schemeClr val="accent1"/>
+              </a:fillRef>
+              <a:effectRef idx="0">
+                <a:schemeClr val="accent1"/>
+              </a:effectRef>
+              <a:fontRef idx="minor">
+                <a:schemeClr val="lt1"/>
+              </a:fontRef>
+            </p:style>
+            <p:txBody>
+              <a:bodyPr rtlCol="0" anchor="ctr"/>
+              <a:lstStyle/>
+              <a:p>
+                <a:pPr algn="ctr"/>
+                <a:endParaRPr lang="en-US"/>
+              </a:p>
+            </p:txBody>
+          </p:sp>
+          <p:sp>
+            <p:nvSpPr>
+              <p:cNvPr id="21" name="Pentagon 20">
+                <a:extLst>
+                  <a:ext uri="{FF2B5EF4-FFF2-40B4-BE49-F238E27FC236}">
+                    <a16:creationId xmlns:a16="http://schemas.microsoft.com/office/drawing/2014/main" id="{9B70B3D4-FAD8-4F39-B795-7778726E55C7}"/>
+                  </a:ext>
+                </a:extLst>
+              </p:cNvPr>
+              <p:cNvSpPr/>
+              <p:nvPr/>
+            </p:nvSpPr>
+            <p:spPr>
+              <a:xfrm>
+                <a:off x="652966" y="1147534"/>
+                <a:ext cx="1176012" cy="1214139"/>
+              </a:xfrm>
+              <a:prstGeom prst="pentagon">
+                <a:avLst/>
+              </a:prstGeom>
+              <a:noFill/>
+              <a:ln w="38100" cap="flat" cmpd="sng" algn="ctr">
+                <a:solidFill>
+                  <a:schemeClr val="dk1"/>
+                </a:solidFill>
+                <a:prstDash val="solid"/>
+                <a:round/>
+                <a:headEnd type="none" w="med" len="med"/>
+                <a:tailEnd type="none" w="med" len="med"/>
+              </a:ln>
+            </p:spPr>
+            <p:style>
+              <a:lnRef idx="0">
+                <a:scrgbClr r="0" g="0" b="0"/>
+              </a:lnRef>
+              <a:fillRef idx="0">
+                <a:scrgbClr r="0" g="0" b="0"/>
+              </a:fillRef>
+              <a:effectRef idx="0">
+                <a:scrgbClr r="0" g="0" b="0"/>
+              </a:effectRef>
+              <a:fontRef idx="minor">
+                <a:schemeClr val="dk1"/>
+              </a:fontRef>
+            </p:style>
+            <p:txBody>
+              <a:bodyPr rtlCol="0" anchor="ctr"/>
+              <a:lstStyle/>
+              <a:p>
+                <a:pPr algn="ctr"/>
+                <a:endParaRPr lang="en-US"/>
+              </a:p>
+            </p:txBody>
+          </p:sp>
+        </p:grpSp>
+      </p:grpSp>
+      <p:grpSp>
+        <p:nvGrpSpPr>
+          <p:cNvPr id="68" name="Group 67">
+            <a:extLst>
+              <a:ext uri="{FF2B5EF4-FFF2-40B4-BE49-F238E27FC236}">
+                <a16:creationId xmlns:a16="http://schemas.microsoft.com/office/drawing/2014/main" id="{DE57F8EB-D06F-41B5-851B-2C805E315E5D}"/>
+              </a:ext>
+            </a:extLst>
+          </p:cNvPr>
+          <p:cNvGrpSpPr/>
+          <p:nvPr/>
+        </p:nvGrpSpPr>
+        <p:grpSpPr>
+          <a:xfrm>
+            <a:off x="10185920" y="910146"/>
+            <a:ext cx="1530220" cy="1504560"/>
+            <a:chOff x="10185920" y="910146"/>
+            <a:chExt cx="1530220" cy="1504560"/>
+          </a:xfrm>
+        </p:grpSpPr>
+        <p:pic>
+          <p:nvPicPr>
+            <p:cNvPr id="53" name="Picture 4" descr="Musket Silhouette. Flintlock Old Pistol Symbol. Rustic Vintage Gun Vector  Silhouette Illustration Isolated On White Background. Royalty Free  Cliparts, Vectors, And Stock Illustration. Image 147714752.">
+              <a:extLst>
+                <a:ext uri="{FF2B5EF4-FFF2-40B4-BE49-F238E27FC236}">
+                  <a16:creationId xmlns:a16="http://schemas.microsoft.com/office/drawing/2014/main" id="{1BA44F7B-B2B6-469C-8B6C-2EBC1360BC77}"/>
+                </a:ext>
+              </a:extLst>
+            </p:cNvPr>
+            <p:cNvPicPr>
+              <a:picLocks noChangeAspect="1" noChangeArrowheads="1"/>
+            </p:cNvPicPr>
+            <p:nvPr/>
+          </p:nvPicPr>
+          <p:blipFill rotWithShape="1">
+            <a:blip r:embed="rId9">
+              <a:extLst>
+                <a:ext uri="{28A0092B-C50C-407E-A947-70E740481C1C}">
+                  <a14:useLocalDpi xmlns:a14="http://schemas.microsoft.com/office/drawing/2010/main" val="0"/>
+                </a:ext>
+              </a:extLst>
+            </a:blip>
+            <a:srcRect l="8772" t="16514" r="8246" b="7006"/>
+            <a:stretch/>
+          </p:blipFill>
+          <p:spPr bwMode="auto">
+            <a:xfrm rot="19272607">
+              <a:off x="10465900" y="1666684"/>
+              <a:ext cx="935091" cy="280414"/>
+            </a:xfrm>
+            <a:prstGeom prst="rect">
+              <a:avLst/>
+            </a:prstGeom>
+            <a:noFill/>
+            <a:extLst>
+              <a:ext uri="{909E8E84-426E-40DD-AFC4-6F175D3DCCD1}">
+                <a14:hiddenFill xmlns:a14="http://schemas.microsoft.com/office/drawing/2010/main">
+                  <a:solidFill>
+                    <a:srgbClr val="FFFFFF"/>
+                  </a:solidFill>
+                </a14:hiddenFill>
+              </a:ext>
+            </a:extLst>
+          </p:spPr>
+        </p:pic>
+        <p:pic>
+          <p:nvPicPr>
+            <p:cNvPr id="54" name="Picture 4" descr="Viking battle-axe icon in black style isolated Vector Image">
+              <a:extLst>
+                <a:ext uri="{FF2B5EF4-FFF2-40B4-BE49-F238E27FC236}">
+                  <a16:creationId xmlns:a16="http://schemas.microsoft.com/office/drawing/2014/main" id="{BBBCE127-0337-413B-87E1-72C51543DE90}"/>
+                </a:ext>
+              </a:extLst>
+            </p:cNvPr>
+            <p:cNvPicPr>
+              <a:picLocks noChangeAspect="1" noChangeArrowheads="1"/>
+            </p:cNvPicPr>
+            <p:nvPr/>
+          </p:nvPicPr>
+          <p:blipFill rotWithShape="1">
+            <a:blip r:embed="rId5">
+              <a:extLst>
+                <a:ext uri="{28A0092B-C50C-407E-A947-70E740481C1C}">
+                  <a14:useLocalDpi xmlns:a14="http://schemas.microsoft.com/office/drawing/2010/main" val="0"/>
+                </a:ext>
+              </a:extLst>
+            </a:blip>
+            <a:srcRect l="7924" t="6907" r="6208" b="14113"/>
+            <a:stretch/>
+          </p:blipFill>
+          <p:spPr bwMode="auto">
+            <a:xfrm rot="20763354">
+              <a:off x="10951609" y="1807335"/>
+              <a:ext cx="463671" cy="447545"/>
+            </a:xfrm>
+            <a:prstGeom prst="rect">
+              <a:avLst/>
+            </a:prstGeom>
+            <a:noFill/>
+            <a:extLst>
+              <a:ext uri="{909E8E84-426E-40DD-AFC4-6F175D3DCCD1}">
+                <a14:hiddenFill xmlns:a14="http://schemas.microsoft.com/office/drawing/2010/main">
+                  <a:solidFill>
+                    <a:srgbClr val="FFFFFF"/>
+                  </a:solidFill>
+                </a14:hiddenFill>
+              </a:ext>
+            </a:extLst>
+          </p:spPr>
+        </p:pic>
+        <p:grpSp>
+          <p:nvGrpSpPr>
+            <p:cNvPr id="22" name="Group 21">
+              <a:extLst>
+                <a:ext uri="{FF2B5EF4-FFF2-40B4-BE49-F238E27FC236}">
+                  <a16:creationId xmlns:a16="http://schemas.microsoft.com/office/drawing/2014/main" id="{8AA8CF2F-F18F-4785-B8F6-FFCF048EA6C9}"/>
+                </a:ext>
+              </a:extLst>
+            </p:cNvPr>
+            <p:cNvGrpSpPr/>
+            <p:nvPr/>
+          </p:nvGrpSpPr>
+          <p:grpSpPr>
+            <a:xfrm>
+              <a:off x="10185920" y="910146"/>
+              <a:ext cx="1530220" cy="1504560"/>
+              <a:chOff x="475862" y="905612"/>
+              <a:chExt cx="1530220" cy="1504560"/>
+            </a:xfrm>
+          </p:grpSpPr>
+          <p:sp>
+            <p:nvSpPr>
+              <p:cNvPr id="23" name="Rectangle 22">
+                <a:extLst>
+                  <a:ext uri="{FF2B5EF4-FFF2-40B4-BE49-F238E27FC236}">
+                    <a16:creationId xmlns:a16="http://schemas.microsoft.com/office/drawing/2014/main" id="{E824F948-4E6B-465A-9B67-7A8820EB0D36}"/>
+                  </a:ext>
+                </a:extLst>
+              </p:cNvPr>
+              <p:cNvSpPr/>
+              <p:nvPr/>
+            </p:nvSpPr>
+            <p:spPr>
+              <a:xfrm>
+                <a:off x="475862" y="905612"/>
+                <a:ext cx="1530220" cy="1504560"/>
+              </a:xfrm>
+              <a:prstGeom prst="rect">
+                <a:avLst/>
+              </a:prstGeom>
+              <a:noFill/>
+              <a:ln w="76200">
+                <a:solidFill>
+                  <a:schemeClr val="tx1"/>
+                </a:solidFill>
+              </a:ln>
+            </p:spPr>
+            <p:style>
+              <a:lnRef idx="2">
+                <a:schemeClr val="accent1">
+                  <a:shade val="50000"/>
+                </a:schemeClr>
+              </a:lnRef>
+              <a:fillRef idx="1">
+                <a:schemeClr val="accent1"/>
+              </a:fillRef>
+              <a:effectRef idx="0">
+                <a:schemeClr val="accent1"/>
+              </a:effectRef>
+              <a:fontRef idx="minor">
+                <a:schemeClr val="lt1"/>
+              </a:fontRef>
+            </p:style>
+            <p:txBody>
+              <a:bodyPr rtlCol="0" anchor="ctr"/>
+              <a:lstStyle/>
+              <a:p>
+                <a:pPr algn="ctr"/>
+                <a:endParaRPr lang="en-US"/>
+              </a:p>
+            </p:txBody>
+          </p:sp>
+          <p:sp>
+            <p:nvSpPr>
+              <p:cNvPr id="24" name="Pentagon 23">
+                <a:extLst>
+                  <a:ext uri="{FF2B5EF4-FFF2-40B4-BE49-F238E27FC236}">
+                    <a16:creationId xmlns:a16="http://schemas.microsoft.com/office/drawing/2014/main" id="{85DCAB48-8448-4557-9509-BA35531798DC}"/>
+                  </a:ext>
+                </a:extLst>
+              </p:cNvPr>
+              <p:cNvSpPr/>
+              <p:nvPr/>
+            </p:nvSpPr>
+            <p:spPr>
+              <a:xfrm>
+                <a:off x="652966" y="1147534"/>
+                <a:ext cx="1176012" cy="1214139"/>
+              </a:xfrm>
+              <a:prstGeom prst="pentagon">
+                <a:avLst/>
+              </a:prstGeom>
+              <a:noFill/>
+              <a:ln w="38100" cap="flat" cmpd="sng" algn="ctr">
+                <a:solidFill>
+                  <a:schemeClr val="dk1"/>
+                </a:solidFill>
+                <a:prstDash val="solid"/>
+                <a:round/>
+                <a:headEnd type="none" w="med" len="med"/>
+                <a:tailEnd type="none" w="med" len="med"/>
+              </a:ln>
+            </p:spPr>
+            <p:style>
+              <a:lnRef idx="0">
+                <a:scrgbClr r="0" g="0" b="0"/>
+              </a:lnRef>
+              <a:fillRef idx="0">
+                <a:scrgbClr r="0" g="0" b="0"/>
+              </a:fillRef>
+              <a:effectRef idx="0">
+                <a:scrgbClr r="0" g="0" b="0"/>
+              </a:effectRef>
+              <a:fontRef idx="minor">
+                <a:schemeClr val="dk1"/>
+              </a:fontRef>
+            </p:style>
+            <p:txBody>
+              <a:bodyPr rtlCol="0" anchor="ctr"/>
+              <a:lstStyle/>
+              <a:p>
+                <a:pPr algn="ctr"/>
+                <a:endParaRPr lang="en-US"/>
+              </a:p>
+            </p:txBody>
+          </p:sp>
+        </p:grpSp>
+      </p:grpSp>
+      <p:grpSp>
+        <p:nvGrpSpPr>
+          <p:cNvPr id="69" name="Group 68">
+            <a:extLst>
+              <a:ext uri="{FF2B5EF4-FFF2-40B4-BE49-F238E27FC236}">
+                <a16:creationId xmlns:a16="http://schemas.microsoft.com/office/drawing/2014/main" id="{98FDB0B8-B7F9-4360-9608-2849E2FAAE46}"/>
+              </a:ext>
+            </a:extLst>
+          </p:cNvPr>
+          <p:cNvGrpSpPr/>
+          <p:nvPr/>
+        </p:nvGrpSpPr>
+        <p:grpSpPr>
+          <a:xfrm>
+            <a:off x="475862" y="2832151"/>
+            <a:ext cx="1530220" cy="1504560"/>
+            <a:chOff x="475862" y="2832151"/>
+            <a:chExt cx="1530220" cy="1504560"/>
+          </a:xfrm>
+        </p:grpSpPr>
+        <p:pic>
+          <p:nvPicPr>
+            <p:cNvPr id="56" name="Picture 4" descr="Viking battle-axe icon in black style isolated Vector Image">
+              <a:extLst>
+                <a:ext uri="{FF2B5EF4-FFF2-40B4-BE49-F238E27FC236}">
+                  <a16:creationId xmlns:a16="http://schemas.microsoft.com/office/drawing/2014/main" id="{D4902002-B81E-47AD-85E8-AF3F833B2E98}"/>
+                </a:ext>
+              </a:extLst>
+            </p:cNvPr>
+            <p:cNvPicPr>
+              <a:picLocks noChangeAspect="1" noChangeArrowheads="1"/>
+            </p:cNvPicPr>
+            <p:nvPr/>
+          </p:nvPicPr>
+          <p:blipFill rotWithShape="1">
+            <a:blip r:embed="rId5">
+              <a:extLst>
+                <a:ext uri="{28A0092B-C50C-407E-A947-70E740481C1C}">
+                  <a14:useLocalDpi xmlns:a14="http://schemas.microsoft.com/office/drawing/2010/main" val="0"/>
+                </a:ext>
+              </a:extLst>
+            </a:blip>
+            <a:srcRect l="7924" t="6907" r="6208" b="14113"/>
+            <a:stretch/>
+          </p:blipFill>
+          <p:spPr bwMode="auto">
+            <a:xfrm rot="20150930">
+              <a:off x="797012" y="3360325"/>
+              <a:ext cx="565039" cy="561288"/>
+            </a:xfrm>
+            <a:prstGeom prst="rect">
+              <a:avLst/>
+            </a:prstGeom>
+            <a:noFill/>
+            <a:extLst>
+              <a:ext uri="{909E8E84-426E-40DD-AFC4-6F175D3DCCD1}">
+                <a14:hiddenFill xmlns:a14="http://schemas.microsoft.com/office/drawing/2010/main">
+                  <a:solidFill>
+                    <a:srgbClr val="FFFFFF"/>
+                  </a:solidFill>
+                </a14:hiddenFill>
+              </a:ext>
+            </a:extLst>
+          </p:spPr>
+        </p:pic>
+        <p:grpSp>
+          <p:nvGrpSpPr>
+            <p:cNvPr id="58" name="Group 57">
+              <a:extLst>
+                <a:ext uri="{FF2B5EF4-FFF2-40B4-BE49-F238E27FC236}">
+                  <a16:creationId xmlns:a16="http://schemas.microsoft.com/office/drawing/2014/main" id="{7745208D-4E62-4798-BCF2-5728BF0BB6F7}"/>
+                </a:ext>
+              </a:extLst>
+            </p:cNvPr>
+            <p:cNvGrpSpPr/>
+            <p:nvPr/>
+          </p:nvGrpSpPr>
+          <p:grpSpPr>
+            <a:xfrm>
+              <a:off x="1011860" y="3584431"/>
+              <a:ext cx="614257" cy="624273"/>
+              <a:chOff x="6250804" y="4469864"/>
+              <a:chExt cx="1767666" cy="1796490"/>
+            </a:xfrm>
+          </p:grpSpPr>
+          <p:grpSp>
+            <p:nvGrpSpPr>
+              <p:cNvPr id="59" name="Group 58">
+                <a:extLst>
+                  <a:ext uri="{FF2B5EF4-FFF2-40B4-BE49-F238E27FC236}">
+                    <a16:creationId xmlns:a16="http://schemas.microsoft.com/office/drawing/2014/main" id="{A288F1FB-04EA-4F7A-92F5-07B08FA6A332}"/>
+                  </a:ext>
+                </a:extLst>
+              </p:cNvPr>
+              <p:cNvGrpSpPr/>
+              <p:nvPr/>
+            </p:nvGrpSpPr>
+            <p:grpSpPr>
+              <a:xfrm rot="2105593">
+                <a:off x="6898111" y="4469864"/>
+                <a:ext cx="543720" cy="1475268"/>
+                <a:chOff x="6998677" y="4501662"/>
+                <a:chExt cx="543720" cy="1125415"/>
+              </a:xfrm>
+            </p:grpSpPr>
+            <p:sp>
+              <p:nvSpPr>
+                <p:cNvPr id="63" name="Rectangle 62">
+                  <a:extLst>
+                    <a:ext uri="{FF2B5EF4-FFF2-40B4-BE49-F238E27FC236}">
+                      <a16:creationId xmlns:a16="http://schemas.microsoft.com/office/drawing/2014/main" id="{297CBFF5-F811-4695-86A5-AAA6D4791DBD}"/>
+                    </a:ext>
+                  </a:extLst>
+                </p:cNvPr>
+                <p:cNvSpPr/>
+                <p:nvPr/>
+              </p:nvSpPr>
+              <p:spPr>
+                <a:xfrm>
+                  <a:off x="7104184" y="4712677"/>
+                  <a:ext cx="338215" cy="914400"/>
+                </a:xfrm>
+                <a:prstGeom prst="rect">
+                  <a:avLst/>
+                </a:prstGeom>
+              </p:spPr>
+              <p:style>
+                <a:lnRef idx="2">
+                  <a:schemeClr val="dk1">
+                    <a:shade val="50000"/>
+                  </a:schemeClr>
+                </a:lnRef>
+                <a:fillRef idx="1">
+                  <a:schemeClr val="dk1"/>
+                </a:fillRef>
+                <a:effectRef idx="0">
+                  <a:schemeClr val="dk1"/>
+                </a:effectRef>
+                <a:fontRef idx="minor">
+                  <a:schemeClr val="lt1"/>
+                </a:fontRef>
+              </p:style>
+              <p:txBody>
+                <a:bodyPr rtlCol="0" anchor="ctr"/>
+                <a:lstStyle/>
+                <a:p>
+                  <a:pPr algn="ctr"/>
+                  <a:endParaRPr lang="en-US"/>
+                </a:p>
+              </p:txBody>
+            </p:sp>
+            <p:sp>
+              <p:nvSpPr>
+                <p:cNvPr id="64" name="Rectangle 63">
+                  <a:extLst>
+                    <a:ext uri="{FF2B5EF4-FFF2-40B4-BE49-F238E27FC236}">
+                      <a16:creationId xmlns:a16="http://schemas.microsoft.com/office/drawing/2014/main" id="{B960E650-0F7A-4FF6-91F5-3FBCB0621B67}"/>
+                    </a:ext>
+                  </a:extLst>
+                </p:cNvPr>
+                <p:cNvSpPr/>
+                <p:nvPr/>
+              </p:nvSpPr>
+              <p:spPr>
+                <a:xfrm>
+                  <a:off x="6998677" y="4501662"/>
+                  <a:ext cx="543720" cy="211015"/>
+                </a:xfrm>
+                <a:prstGeom prst="rect">
+                  <a:avLst/>
+                </a:prstGeom>
+              </p:spPr>
+              <p:style>
+                <a:lnRef idx="2">
+                  <a:schemeClr val="dk1">
+                    <a:shade val="50000"/>
+                  </a:schemeClr>
+                </a:lnRef>
+                <a:fillRef idx="1">
+                  <a:schemeClr val="dk1"/>
+                </a:fillRef>
+                <a:effectRef idx="0">
+                  <a:schemeClr val="dk1"/>
+                </a:effectRef>
+                <a:fontRef idx="minor">
+                  <a:schemeClr val="lt1"/>
+                </a:fontRef>
+              </p:style>
+              <p:txBody>
+                <a:bodyPr rtlCol="0" anchor="ctr"/>
+                <a:lstStyle/>
+                <a:p>
+                  <a:pPr algn="ctr"/>
+                  <a:endParaRPr lang="en-US"/>
+                </a:p>
+              </p:txBody>
+            </p:sp>
+          </p:grpSp>
+          <p:sp>
+            <p:nvSpPr>
+              <p:cNvPr id="60" name="Rectangle 59">
+                <a:extLst>
+                  <a:ext uri="{FF2B5EF4-FFF2-40B4-BE49-F238E27FC236}">
+                    <a16:creationId xmlns:a16="http://schemas.microsoft.com/office/drawing/2014/main" id="{8D7D8C83-622B-45C4-80C5-9F4B3F9EF05D}"/>
+                  </a:ext>
+                </a:extLst>
+              </p:cNvPr>
+              <p:cNvSpPr/>
+              <p:nvPr/>
+            </p:nvSpPr>
+            <p:spPr>
+              <a:xfrm rot="19962306">
+                <a:off x="7413128" y="5064532"/>
+                <a:ext cx="127375" cy="905608"/>
+              </a:xfrm>
+              <a:prstGeom prst="rect">
+                <a:avLst/>
+              </a:prstGeom>
+            </p:spPr>
+            <p:style>
+              <a:lnRef idx="2">
+                <a:schemeClr val="dk1">
+                  <a:shade val="50000"/>
+                </a:schemeClr>
+              </a:lnRef>
+              <a:fillRef idx="1">
+                <a:schemeClr val="dk1"/>
+              </a:fillRef>
+              <a:effectRef idx="0">
+                <a:schemeClr val="dk1"/>
+              </a:effectRef>
+              <a:fontRef idx="minor">
+                <a:schemeClr val="lt1"/>
+              </a:fontRef>
+            </p:style>
+            <p:txBody>
+              <a:bodyPr rtlCol="0" anchor="ctr"/>
+              <a:lstStyle/>
+              <a:p>
+                <a:pPr algn="ctr"/>
+                <a:endParaRPr lang="en-US"/>
+              </a:p>
+            </p:txBody>
+          </p:sp>
+          <p:sp>
+            <p:nvSpPr>
+              <p:cNvPr id="61" name="Rectangle 60">
+                <a:extLst>
+                  <a:ext uri="{FF2B5EF4-FFF2-40B4-BE49-F238E27FC236}">
+                    <a16:creationId xmlns:a16="http://schemas.microsoft.com/office/drawing/2014/main" id="{210BA83D-46E6-4533-8350-4603C51D116C}"/>
+                  </a:ext>
+                </a:extLst>
+              </p:cNvPr>
+              <p:cNvSpPr/>
+              <p:nvPr/>
+            </p:nvSpPr>
+            <p:spPr>
+              <a:xfrm rot="16200000">
+                <a:off x="6775177" y="5310385"/>
+                <a:ext cx="127375" cy="905608"/>
+              </a:xfrm>
+              <a:prstGeom prst="rect">
+                <a:avLst/>
+              </a:prstGeom>
+            </p:spPr>
+            <p:style>
+              <a:lnRef idx="2">
+                <a:schemeClr val="dk1">
+                  <a:shade val="50000"/>
+                </a:schemeClr>
+              </a:lnRef>
+              <a:fillRef idx="1">
+                <a:schemeClr val="dk1"/>
+              </a:fillRef>
+              <a:effectRef idx="0">
+                <a:schemeClr val="dk1"/>
+              </a:effectRef>
+              <a:fontRef idx="minor">
+                <a:schemeClr val="lt1"/>
+              </a:fontRef>
+            </p:style>
+            <p:txBody>
+              <a:bodyPr rtlCol="0" anchor="ctr"/>
+              <a:lstStyle/>
+              <a:p>
+                <a:pPr algn="ctr"/>
+                <a:endParaRPr lang="en-US"/>
+              </a:p>
+            </p:txBody>
+          </p:sp>
+          <p:sp>
+            <p:nvSpPr>
+              <p:cNvPr id="62" name="Rectangle 61">
+                <a:extLst>
+                  <a:ext uri="{FF2B5EF4-FFF2-40B4-BE49-F238E27FC236}">
+                    <a16:creationId xmlns:a16="http://schemas.microsoft.com/office/drawing/2014/main" id="{FE9C9E51-2659-443F-8F5A-4AE4A6B31E87}"/>
+                  </a:ext>
+                </a:extLst>
+              </p:cNvPr>
+              <p:cNvSpPr/>
+              <p:nvPr/>
+            </p:nvSpPr>
+            <p:spPr>
+              <a:xfrm>
+                <a:off x="6250804" y="5829836"/>
+                <a:ext cx="1767666" cy="436518"/>
+              </a:xfrm>
+              <a:prstGeom prst="rect">
+                <a:avLst/>
+              </a:prstGeom>
+              <a:ln>
+                <a:noFill/>
+              </a:ln>
+            </p:spPr>
+            <p:style>
+              <a:lnRef idx="2">
+                <a:schemeClr val="dk1"/>
+              </a:lnRef>
+              <a:fillRef idx="1">
+                <a:schemeClr val="lt1"/>
+              </a:fillRef>
+              <a:effectRef idx="0">
+                <a:schemeClr val="dk1"/>
+              </a:effectRef>
+              <a:fontRef idx="minor">
+                <a:schemeClr val="dk1"/>
+              </a:fontRef>
+            </p:style>
+            <p:txBody>
+              <a:bodyPr rtlCol="0" anchor="ctr"/>
+              <a:lstStyle/>
+              <a:p>
+                <a:pPr algn="ctr"/>
+                <a:endParaRPr lang="en-US"/>
+              </a:p>
+            </p:txBody>
+          </p:sp>
+        </p:grpSp>
+        <p:grpSp>
+          <p:nvGrpSpPr>
+            <p:cNvPr id="25" name="Group 24">
+              <a:extLst>
+                <a:ext uri="{FF2B5EF4-FFF2-40B4-BE49-F238E27FC236}">
+                  <a16:creationId xmlns:a16="http://schemas.microsoft.com/office/drawing/2014/main" id="{DF3AFF85-4AA0-4C47-9B49-842EF71CD2C6}"/>
+                </a:ext>
+              </a:extLst>
+            </p:cNvPr>
+            <p:cNvGrpSpPr/>
+            <p:nvPr/>
+          </p:nvGrpSpPr>
+          <p:grpSpPr>
+            <a:xfrm>
+              <a:off x="475862" y="2832151"/>
+              <a:ext cx="1530220" cy="1504560"/>
+              <a:chOff x="475862" y="905612"/>
+              <a:chExt cx="1530220" cy="1504560"/>
+            </a:xfrm>
+          </p:grpSpPr>
+          <p:sp>
+            <p:nvSpPr>
+              <p:cNvPr id="26" name="Rectangle 25">
+                <a:extLst>
+                  <a:ext uri="{FF2B5EF4-FFF2-40B4-BE49-F238E27FC236}">
+                    <a16:creationId xmlns:a16="http://schemas.microsoft.com/office/drawing/2014/main" id="{288AE8DA-3F0C-485C-BE9E-F959C0E1FE65}"/>
+                  </a:ext>
+                </a:extLst>
+              </p:cNvPr>
+              <p:cNvSpPr/>
+              <p:nvPr/>
+            </p:nvSpPr>
+            <p:spPr>
+              <a:xfrm>
+                <a:off x="475862" y="905612"/>
+                <a:ext cx="1530220" cy="1504560"/>
+              </a:xfrm>
+              <a:prstGeom prst="rect">
+                <a:avLst/>
+              </a:prstGeom>
+              <a:noFill/>
+              <a:ln w="76200">
+                <a:solidFill>
+                  <a:schemeClr val="tx1"/>
+                </a:solidFill>
+              </a:ln>
+            </p:spPr>
+            <p:style>
+              <a:lnRef idx="2">
+                <a:schemeClr val="accent1">
+                  <a:shade val="50000"/>
+                </a:schemeClr>
+              </a:lnRef>
+              <a:fillRef idx="1">
+                <a:schemeClr val="accent1"/>
+              </a:fillRef>
+              <a:effectRef idx="0">
+                <a:schemeClr val="accent1"/>
+              </a:effectRef>
+              <a:fontRef idx="minor">
+                <a:schemeClr val="lt1"/>
+              </a:fontRef>
+            </p:style>
+            <p:txBody>
+              <a:bodyPr rtlCol="0" anchor="ctr"/>
+              <a:lstStyle/>
+              <a:p>
+                <a:pPr algn="ctr"/>
+                <a:endParaRPr lang="en-US"/>
+              </a:p>
+            </p:txBody>
+          </p:sp>
+          <p:sp>
+            <p:nvSpPr>
+              <p:cNvPr id="27" name="Pentagon 26">
+                <a:extLst>
+                  <a:ext uri="{FF2B5EF4-FFF2-40B4-BE49-F238E27FC236}">
+                    <a16:creationId xmlns:a16="http://schemas.microsoft.com/office/drawing/2014/main" id="{FFB4234F-9A75-4285-8AED-79B17469D7AE}"/>
+                  </a:ext>
+                </a:extLst>
+              </p:cNvPr>
+              <p:cNvSpPr/>
+              <p:nvPr/>
+            </p:nvSpPr>
+            <p:spPr>
+              <a:xfrm>
+                <a:off x="652966" y="1147534"/>
+                <a:ext cx="1176012" cy="1214139"/>
+              </a:xfrm>
+              <a:prstGeom prst="pentagon">
+                <a:avLst/>
+              </a:prstGeom>
+              <a:noFill/>
+              <a:ln w="38100" cap="flat" cmpd="sng" algn="ctr">
+                <a:solidFill>
+                  <a:schemeClr val="dk1"/>
+                </a:solidFill>
+                <a:prstDash val="solid"/>
+                <a:round/>
+                <a:headEnd type="none" w="med" len="med"/>
+                <a:tailEnd type="none" w="med" len="med"/>
+              </a:ln>
+            </p:spPr>
+            <p:style>
+              <a:lnRef idx="0">
+                <a:scrgbClr r="0" g="0" b="0"/>
+              </a:lnRef>
+              <a:fillRef idx="0">
+                <a:scrgbClr r="0" g="0" b="0"/>
+              </a:fillRef>
+              <a:effectRef idx="0">
+                <a:scrgbClr r="0" g="0" b="0"/>
+              </a:effectRef>
+              <a:fontRef idx="minor">
+                <a:schemeClr val="dk1"/>
+              </a:fontRef>
+            </p:style>
+            <p:txBody>
+              <a:bodyPr rtlCol="0" anchor="ctr"/>
+              <a:lstStyle/>
+              <a:p>
+                <a:pPr algn="ctr"/>
+                <a:endParaRPr lang="en-US"/>
+              </a:p>
+            </p:txBody>
+          </p:sp>
+        </p:grpSp>
+      </p:grpSp>
+      <p:grpSp>
+        <p:nvGrpSpPr>
+          <p:cNvPr id="75" name="Group 74">
+            <a:extLst>
+              <a:ext uri="{FF2B5EF4-FFF2-40B4-BE49-F238E27FC236}">
+                <a16:creationId xmlns:a16="http://schemas.microsoft.com/office/drawing/2014/main" id="{4C6690B5-B0D9-4142-87DF-943D7789BD69}"/>
+              </a:ext>
+            </a:extLst>
+          </p:cNvPr>
+          <p:cNvGrpSpPr/>
+          <p:nvPr/>
+        </p:nvGrpSpPr>
+        <p:grpSpPr>
+          <a:xfrm>
+            <a:off x="2421892" y="2832151"/>
+            <a:ext cx="1530220" cy="1504560"/>
+            <a:chOff x="2421892" y="2832151"/>
+            <a:chExt cx="1530220" cy="1504560"/>
+          </a:xfrm>
+        </p:grpSpPr>
+        <p:grpSp>
+          <p:nvGrpSpPr>
+            <p:cNvPr id="72" name="Group 71">
+              <a:extLst>
+                <a:ext uri="{FF2B5EF4-FFF2-40B4-BE49-F238E27FC236}">
+                  <a16:creationId xmlns:a16="http://schemas.microsoft.com/office/drawing/2014/main" id="{907CC71D-A640-4D5E-9B99-2A6C381CCE93}"/>
+                </a:ext>
+              </a:extLst>
+            </p:cNvPr>
+            <p:cNvGrpSpPr/>
+            <p:nvPr/>
+          </p:nvGrpSpPr>
+          <p:grpSpPr>
+            <a:xfrm>
+              <a:off x="2674256" y="3373574"/>
+              <a:ext cx="910939" cy="780827"/>
+              <a:chOff x="2735036" y="4735612"/>
+              <a:chExt cx="1238046" cy="1061212"/>
+            </a:xfrm>
+          </p:grpSpPr>
+          <p:pic>
+            <p:nvPicPr>
+              <p:cNvPr id="73" name="Picture 4" descr="Viking battle-axe icon in black style isolated Vector Image">
+                <a:extLst>
+                  <a:ext uri="{FF2B5EF4-FFF2-40B4-BE49-F238E27FC236}">
+                    <a16:creationId xmlns:a16="http://schemas.microsoft.com/office/drawing/2014/main" id="{1E4DA803-7205-41B8-A696-9FF2E17E8FF1}"/>
+                  </a:ext>
+                </a:extLst>
+              </p:cNvPr>
+              <p:cNvPicPr>
+                <a:picLocks noChangeAspect="1" noChangeArrowheads="1"/>
+              </p:cNvPicPr>
+              <p:nvPr/>
+            </p:nvPicPr>
+            <p:blipFill rotWithShape="1">
+              <a:blip r:embed="rId5">
+                <a:extLst>
+                  <a:ext uri="{28A0092B-C50C-407E-A947-70E740481C1C}">
+                    <a14:useLocalDpi xmlns:a14="http://schemas.microsoft.com/office/drawing/2010/main" val="0"/>
+                  </a:ext>
+                </a:extLst>
+              </a:blip>
+              <a:srcRect l="7924" t="6907" r="6208" b="14113"/>
+              <a:stretch/>
+            </p:blipFill>
+            <p:spPr bwMode="auto">
+              <a:xfrm rot="19350834">
+                <a:off x="2735036" y="4735612"/>
+                <a:ext cx="813015" cy="807618"/>
+              </a:xfrm>
+              <a:prstGeom prst="rect">
+                <a:avLst/>
+              </a:prstGeom>
+              <a:noFill/>
+              <a:extLst>
+                <a:ext uri="{909E8E84-426E-40DD-AFC4-6F175D3DCCD1}">
+                  <a14:hiddenFill xmlns:a14="http://schemas.microsoft.com/office/drawing/2010/main">
+                    <a:solidFill>
+                      <a:srgbClr val="FFFFFF"/>
+                    </a:solidFill>
+                  </a14:hiddenFill>
+                </a:ext>
+              </a:extLst>
+            </p:spPr>
+          </p:pic>
+          <p:pic>
+            <p:nvPicPr>
+              <p:cNvPr id="74" name="Picture 73">
+                <a:extLst>
+                  <a:ext uri="{FF2B5EF4-FFF2-40B4-BE49-F238E27FC236}">
+                    <a16:creationId xmlns:a16="http://schemas.microsoft.com/office/drawing/2014/main" id="{E0224AE3-D5C7-45FB-953E-08F813268724}"/>
+                  </a:ext>
+                </a:extLst>
+              </p:cNvPr>
+              <p:cNvPicPr>
+                <a:picLocks noChangeAspect="1"/>
+              </p:cNvPicPr>
+              <p:nvPr/>
+            </p:nvPicPr>
+            <p:blipFill>
+              <a:blip r:embed="rId10"/>
+              <a:stretch>
+                <a:fillRect/>
+              </a:stretch>
+            </p:blipFill>
+            <p:spPr>
+              <a:xfrm>
+                <a:off x="3193333" y="5076519"/>
+                <a:ext cx="779749" cy="720305"/>
+              </a:xfrm>
+              <a:prstGeom prst="rect">
+                <a:avLst/>
+              </a:prstGeom>
+            </p:spPr>
+          </p:pic>
+        </p:grpSp>
+        <p:grpSp>
+          <p:nvGrpSpPr>
+            <p:cNvPr id="28" name="Group 27">
+              <a:extLst>
+                <a:ext uri="{FF2B5EF4-FFF2-40B4-BE49-F238E27FC236}">
+                  <a16:creationId xmlns:a16="http://schemas.microsoft.com/office/drawing/2014/main" id="{61AB998E-9966-4480-84D7-9BD694015EA2}"/>
+                </a:ext>
+              </a:extLst>
+            </p:cNvPr>
+            <p:cNvGrpSpPr/>
+            <p:nvPr/>
+          </p:nvGrpSpPr>
+          <p:grpSpPr>
+            <a:xfrm>
+              <a:off x="2421892" y="2832151"/>
+              <a:ext cx="1530220" cy="1504560"/>
+              <a:chOff x="475862" y="905612"/>
+              <a:chExt cx="1530220" cy="1504560"/>
+            </a:xfrm>
+          </p:grpSpPr>
+          <p:sp>
+            <p:nvSpPr>
+              <p:cNvPr id="29" name="Rectangle 28">
+                <a:extLst>
+                  <a:ext uri="{FF2B5EF4-FFF2-40B4-BE49-F238E27FC236}">
+                    <a16:creationId xmlns:a16="http://schemas.microsoft.com/office/drawing/2014/main" id="{55D973CE-95F8-4001-A5CF-290A18A68D2F}"/>
+                  </a:ext>
+                </a:extLst>
+              </p:cNvPr>
+              <p:cNvSpPr/>
+              <p:nvPr/>
+            </p:nvSpPr>
+            <p:spPr>
+              <a:xfrm>
+                <a:off x="475862" y="905612"/>
+                <a:ext cx="1530220" cy="1504560"/>
+              </a:xfrm>
+              <a:prstGeom prst="rect">
+                <a:avLst/>
+              </a:prstGeom>
+              <a:noFill/>
+              <a:ln w="76200">
+                <a:solidFill>
+                  <a:schemeClr val="tx1"/>
+                </a:solidFill>
+              </a:ln>
+            </p:spPr>
+            <p:style>
+              <a:lnRef idx="2">
+                <a:schemeClr val="accent1">
+                  <a:shade val="50000"/>
+                </a:schemeClr>
+              </a:lnRef>
+              <a:fillRef idx="1">
+                <a:schemeClr val="accent1"/>
+              </a:fillRef>
+              <a:effectRef idx="0">
+                <a:schemeClr val="accent1"/>
+              </a:effectRef>
+              <a:fontRef idx="minor">
+                <a:schemeClr val="lt1"/>
+              </a:fontRef>
+            </p:style>
+            <p:txBody>
+              <a:bodyPr rtlCol="0" anchor="ctr"/>
+              <a:lstStyle/>
+              <a:p>
+                <a:pPr algn="ctr"/>
+                <a:endParaRPr lang="en-US"/>
+              </a:p>
+            </p:txBody>
+          </p:sp>
+          <p:sp>
+            <p:nvSpPr>
+              <p:cNvPr id="30" name="Pentagon 29">
+                <a:extLst>
+                  <a:ext uri="{FF2B5EF4-FFF2-40B4-BE49-F238E27FC236}">
+                    <a16:creationId xmlns:a16="http://schemas.microsoft.com/office/drawing/2014/main" id="{3DB44F4A-C56B-4639-AD43-275180B2BF58}"/>
+                  </a:ext>
+                </a:extLst>
+              </p:cNvPr>
+              <p:cNvSpPr/>
+              <p:nvPr/>
+            </p:nvSpPr>
+            <p:spPr>
+              <a:xfrm>
+                <a:off x="652966" y="1147534"/>
+                <a:ext cx="1176012" cy="1214139"/>
+              </a:xfrm>
+              <a:prstGeom prst="pentagon">
+                <a:avLst/>
+              </a:prstGeom>
+              <a:noFill/>
+              <a:ln w="38100" cap="flat" cmpd="sng" algn="ctr">
+                <a:solidFill>
+                  <a:schemeClr val="dk1"/>
+                </a:solidFill>
+                <a:prstDash val="solid"/>
+                <a:round/>
+                <a:headEnd type="none" w="med" len="med"/>
+                <a:tailEnd type="none" w="med" len="med"/>
+              </a:ln>
+            </p:spPr>
+            <p:style>
+              <a:lnRef idx="0">
+                <a:scrgbClr r="0" g="0" b="0"/>
+              </a:lnRef>
+              <a:fillRef idx="0">
+                <a:scrgbClr r="0" g="0" b="0"/>
+              </a:fillRef>
+              <a:effectRef idx="0">
+                <a:scrgbClr r="0" g="0" b="0"/>
+              </a:effectRef>
+              <a:fontRef idx="minor">
+                <a:schemeClr val="dk1"/>
+              </a:fontRef>
+            </p:style>
+            <p:txBody>
+              <a:bodyPr rtlCol="0" anchor="ctr"/>
+              <a:lstStyle/>
+              <a:p>
+                <a:pPr algn="ctr"/>
+                <a:endParaRPr lang="en-US"/>
+              </a:p>
+            </p:txBody>
+          </p:sp>
+        </p:grpSp>
+      </p:grpSp>
+      <p:grpSp>
+        <p:nvGrpSpPr>
+          <p:cNvPr id="31" name="Group 30">
+            <a:extLst>
+              <a:ext uri="{FF2B5EF4-FFF2-40B4-BE49-F238E27FC236}">
+                <a16:creationId xmlns:a16="http://schemas.microsoft.com/office/drawing/2014/main" id="{7344DD83-34DC-4B18-882F-3ECC80CFB21C}"/>
+              </a:ext>
+            </a:extLst>
+          </p:cNvPr>
+          <p:cNvGrpSpPr/>
+          <p:nvPr/>
+        </p:nvGrpSpPr>
+        <p:grpSpPr>
+          <a:xfrm>
+            <a:off x="4367922" y="2832151"/>
+            <a:ext cx="1530220" cy="1504560"/>
+            <a:chOff x="475862" y="905612"/>
+            <a:chExt cx="1530220" cy="1504560"/>
+          </a:xfrm>
+        </p:grpSpPr>
+        <p:sp>
+          <p:nvSpPr>
+            <p:cNvPr id="32" name="Rectangle 31">
+              <a:extLst>
+                <a:ext uri="{FF2B5EF4-FFF2-40B4-BE49-F238E27FC236}">
+                  <a16:creationId xmlns:a16="http://schemas.microsoft.com/office/drawing/2014/main" id="{D78D3EB7-0AD6-4508-BAD5-4C354D3E1262}"/>
+                </a:ext>
+              </a:extLst>
+            </p:cNvPr>
+            <p:cNvSpPr/>
+            <p:nvPr/>
+          </p:nvSpPr>
+          <p:spPr>
+            <a:xfrm>
+              <a:off x="475862" y="905612"/>
+              <a:ext cx="1530220" cy="1504560"/>
+            </a:xfrm>
+            <a:prstGeom prst="rect">
+              <a:avLst/>
+            </a:prstGeom>
+            <a:noFill/>
+            <a:ln w="76200">
+              <a:solidFill>
+                <a:schemeClr val="tx1"/>
+              </a:solidFill>
+            </a:ln>
+          </p:spPr>
+          <p:style>
+            <a:lnRef idx="2">
+              <a:schemeClr val="accent1">
+                <a:shade val="50000"/>
+              </a:schemeClr>
+            </a:lnRef>
+            <a:fillRef idx="1">
+              <a:schemeClr val="accent1"/>
+            </a:fillRef>
+            <a:effectRef idx="0">
+              <a:schemeClr val="accent1"/>
+            </a:effectRef>
+            <a:fontRef idx="minor">
+              <a:schemeClr val="lt1"/>
+            </a:fontRef>
+          </p:style>
+          <p:txBody>
+            <a:bodyPr rtlCol="0" anchor="ctr"/>
+            <a:lstStyle/>
+            <a:p>
+              <a:pPr algn="ctr"/>
+              <a:endParaRPr lang="en-US"/>
+            </a:p>
+          </p:txBody>
+        </p:sp>
+        <p:sp>
+          <p:nvSpPr>
+            <p:cNvPr id="33" name="Pentagon 32">
+              <a:extLst>
+                <a:ext uri="{FF2B5EF4-FFF2-40B4-BE49-F238E27FC236}">
+                  <a16:creationId xmlns:a16="http://schemas.microsoft.com/office/drawing/2014/main" id="{963EE18A-CBCB-40E6-8F54-04841635B128}"/>
+                </a:ext>
+              </a:extLst>
+            </p:cNvPr>
+            <p:cNvSpPr/>
+            <p:nvPr/>
+          </p:nvSpPr>
+          <p:spPr>
+            <a:xfrm>
+              <a:off x="652966" y="1147534"/>
+              <a:ext cx="1176012" cy="1214139"/>
+            </a:xfrm>
+            <a:prstGeom prst="pentagon">
+              <a:avLst/>
+            </a:prstGeom>
+            <a:noFill/>
+            <a:ln w="38100" cap="flat" cmpd="sng" algn="ctr">
+              <a:solidFill>
+                <a:schemeClr val="dk1"/>
+              </a:solidFill>
+              <a:prstDash val="solid"/>
+              <a:round/>
+              <a:headEnd type="none" w="med" len="med"/>
+              <a:tailEnd type="none" w="med" len="med"/>
+            </a:ln>
+          </p:spPr>
+          <p:style>
+            <a:lnRef idx="0">
+              <a:scrgbClr r="0" g="0" b="0"/>
+            </a:lnRef>
+            <a:fillRef idx="0">
+              <a:scrgbClr r="0" g="0" b="0"/>
+            </a:fillRef>
+            <a:effectRef idx="0">
+              <a:scrgbClr r="0" g="0" b="0"/>
+            </a:effectRef>
+            <a:fontRef idx="minor">
+              <a:schemeClr val="dk1"/>
+            </a:fontRef>
+          </p:style>
+          <p:txBody>
+            <a:bodyPr rtlCol="0" anchor="ctr"/>
+            <a:lstStyle/>
+            <a:p>
+              <a:pPr algn="ctr"/>
+              <a:endParaRPr lang="en-US"/>
+            </a:p>
+          </p:txBody>
+        </p:sp>
+      </p:grpSp>
+      <p:grpSp>
+        <p:nvGrpSpPr>
+          <p:cNvPr id="77" name="Group 76">
+            <a:extLst>
+              <a:ext uri="{FF2B5EF4-FFF2-40B4-BE49-F238E27FC236}">
+                <a16:creationId xmlns:a16="http://schemas.microsoft.com/office/drawing/2014/main" id="{F43B4C95-ECCC-4743-A020-06BDEC8BF789}"/>
+              </a:ext>
+            </a:extLst>
+          </p:cNvPr>
+          <p:cNvGrpSpPr/>
+          <p:nvPr/>
+        </p:nvGrpSpPr>
+        <p:grpSpPr>
+          <a:xfrm>
+            <a:off x="6313952" y="2832151"/>
+            <a:ext cx="1530220" cy="1504560"/>
+            <a:chOff x="6313952" y="2832151"/>
+            <a:chExt cx="1530220" cy="1504560"/>
+          </a:xfrm>
+        </p:grpSpPr>
+        <p:pic>
+          <p:nvPicPr>
+            <p:cNvPr id="76" name="Picture 75">
+              <a:extLst>
+                <a:ext uri="{FF2B5EF4-FFF2-40B4-BE49-F238E27FC236}">
+                  <a16:creationId xmlns:a16="http://schemas.microsoft.com/office/drawing/2014/main" id="{49FFCC9C-BB72-43EE-AB62-136D92D8F92C}"/>
+                </a:ext>
+              </a:extLst>
+            </p:cNvPr>
+            <p:cNvPicPr>
+              <a:picLocks noChangeAspect="1"/>
+            </p:cNvPicPr>
+            <p:nvPr/>
+          </p:nvPicPr>
+          <p:blipFill>
+            <a:blip r:embed="rId11"/>
+            <a:stretch>
+              <a:fillRect/>
+            </a:stretch>
+          </p:blipFill>
+          <p:spPr>
+            <a:xfrm>
+              <a:off x="6699735" y="3514458"/>
+              <a:ext cx="850122" cy="583943"/>
+            </a:xfrm>
+            <a:prstGeom prst="rect">
+              <a:avLst/>
+            </a:prstGeom>
+          </p:spPr>
+        </p:pic>
+        <p:grpSp>
+          <p:nvGrpSpPr>
+            <p:cNvPr id="34" name="Group 33">
+              <a:extLst>
+                <a:ext uri="{FF2B5EF4-FFF2-40B4-BE49-F238E27FC236}">
+                  <a16:creationId xmlns:a16="http://schemas.microsoft.com/office/drawing/2014/main" id="{821CC57C-ED81-4678-B7C0-662656904793}"/>
+                </a:ext>
+              </a:extLst>
+            </p:cNvPr>
+            <p:cNvGrpSpPr/>
+            <p:nvPr/>
+          </p:nvGrpSpPr>
+          <p:grpSpPr>
+            <a:xfrm>
+              <a:off x="6313952" y="2832151"/>
+              <a:ext cx="1530220" cy="1504560"/>
+              <a:chOff x="475862" y="905612"/>
+              <a:chExt cx="1530220" cy="1504560"/>
+            </a:xfrm>
+          </p:grpSpPr>
+          <p:sp>
+            <p:nvSpPr>
+              <p:cNvPr id="35" name="Rectangle 34">
+                <a:extLst>
+                  <a:ext uri="{FF2B5EF4-FFF2-40B4-BE49-F238E27FC236}">
+                    <a16:creationId xmlns:a16="http://schemas.microsoft.com/office/drawing/2014/main" id="{72038533-F4AF-4D2B-BD9D-10D0F88E4221}"/>
+                  </a:ext>
+                </a:extLst>
+              </p:cNvPr>
+              <p:cNvSpPr/>
+              <p:nvPr/>
+            </p:nvSpPr>
+            <p:spPr>
+              <a:xfrm>
+                <a:off x="475862" y="905612"/>
+                <a:ext cx="1530220" cy="1504560"/>
+              </a:xfrm>
+              <a:prstGeom prst="rect">
+                <a:avLst/>
+              </a:prstGeom>
+              <a:noFill/>
+              <a:ln w="76200">
+                <a:solidFill>
+                  <a:schemeClr val="tx1"/>
+                </a:solidFill>
+              </a:ln>
+            </p:spPr>
+            <p:style>
+              <a:lnRef idx="2">
+                <a:schemeClr val="accent1">
+                  <a:shade val="50000"/>
+                </a:schemeClr>
+              </a:lnRef>
+              <a:fillRef idx="1">
+                <a:schemeClr val="accent1"/>
+              </a:fillRef>
+              <a:effectRef idx="0">
+                <a:schemeClr val="accent1"/>
+              </a:effectRef>
+              <a:fontRef idx="minor">
+                <a:schemeClr val="lt1"/>
+              </a:fontRef>
+            </p:style>
+            <p:txBody>
+              <a:bodyPr rtlCol="0" anchor="ctr"/>
+              <a:lstStyle/>
+              <a:p>
+                <a:pPr algn="ctr"/>
+                <a:endParaRPr lang="en-US"/>
+              </a:p>
+            </p:txBody>
+          </p:sp>
+          <p:sp>
+            <p:nvSpPr>
+              <p:cNvPr id="36" name="Pentagon 35">
+                <a:extLst>
+                  <a:ext uri="{FF2B5EF4-FFF2-40B4-BE49-F238E27FC236}">
+                    <a16:creationId xmlns:a16="http://schemas.microsoft.com/office/drawing/2014/main" id="{B91A572F-0996-403D-AB9E-BF78A0A269BC}"/>
+                  </a:ext>
+                </a:extLst>
+              </p:cNvPr>
+              <p:cNvSpPr/>
+              <p:nvPr/>
+            </p:nvSpPr>
+            <p:spPr>
+              <a:xfrm>
+                <a:off x="652966" y="1147534"/>
+                <a:ext cx="1176012" cy="1214139"/>
+              </a:xfrm>
+              <a:prstGeom prst="pentagon">
+                <a:avLst/>
+              </a:prstGeom>
+              <a:noFill/>
+              <a:ln w="38100" cap="flat" cmpd="sng" algn="ctr">
+                <a:solidFill>
+                  <a:schemeClr val="dk1"/>
+                </a:solidFill>
+                <a:prstDash val="solid"/>
+                <a:round/>
+                <a:headEnd type="none" w="med" len="med"/>
+                <a:tailEnd type="none" w="med" len="med"/>
+              </a:ln>
+            </p:spPr>
+            <p:style>
+              <a:lnRef idx="0">
+                <a:scrgbClr r="0" g="0" b="0"/>
+              </a:lnRef>
+              <a:fillRef idx="0">
+                <a:scrgbClr r="0" g="0" b="0"/>
+              </a:fillRef>
+              <a:effectRef idx="0">
+                <a:scrgbClr r="0" g="0" b="0"/>
+              </a:effectRef>
+              <a:fontRef idx="minor">
+                <a:schemeClr val="dk1"/>
+              </a:fontRef>
+            </p:style>
+            <p:txBody>
+              <a:bodyPr rtlCol="0" anchor="ctr"/>
+              <a:lstStyle/>
+              <a:p>
+                <a:pPr algn="ctr"/>
+                <a:endParaRPr lang="en-US"/>
+              </a:p>
+            </p:txBody>
+          </p:sp>
+        </p:grpSp>
+      </p:grpSp>
+      <p:grpSp>
+        <p:nvGrpSpPr>
+          <p:cNvPr id="37" name="Group 36">
+            <a:extLst>
+              <a:ext uri="{FF2B5EF4-FFF2-40B4-BE49-F238E27FC236}">
+                <a16:creationId xmlns:a16="http://schemas.microsoft.com/office/drawing/2014/main" id="{62C8765A-BD00-4ADA-846E-0A9AB274900A}"/>
+              </a:ext>
+            </a:extLst>
+          </p:cNvPr>
+          <p:cNvGrpSpPr/>
+          <p:nvPr/>
+        </p:nvGrpSpPr>
+        <p:grpSpPr>
+          <a:xfrm>
+            <a:off x="8239890" y="2836685"/>
+            <a:ext cx="1530220" cy="1504560"/>
+            <a:chOff x="475862" y="905612"/>
+            <a:chExt cx="1530220" cy="1504560"/>
+          </a:xfrm>
+        </p:grpSpPr>
+        <p:sp>
+          <p:nvSpPr>
+            <p:cNvPr id="38" name="Rectangle 37">
+              <a:extLst>
+                <a:ext uri="{FF2B5EF4-FFF2-40B4-BE49-F238E27FC236}">
+                  <a16:creationId xmlns:a16="http://schemas.microsoft.com/office/drawing/2014/main" id="{1A2D98A5-D198-4FE4-8305-3B2435D18A9C}"/>
+                </a:ext>
+              </a:extLst>
+            </p:cNvPr>
+            <p:cNvSpPr/>
+            <p:nvPr/>
+          </p:nvSpPr>
+          <p:spPr>
+            <a:xfrm>
+              <a:off x="475862" y="905612"/>
+              <a:ext cx="1530220" cy="1504560"/>
+            </a:xfrm>
+            <a:prstGeom prst="rect">
+              <a:avLst/>
+            </a:prstGeom>
+            <a:noFill/>
+            <a:ln w="76200">
+              <a:solidFill>
+                <a:schemeClr val="tx1"/>
+              </a:solidFill>
+            </a:ln>
+          </p:spPr>
+          <p:style>
+            <a:lnRef idx="2">
+              <a:schemeClr val="accent1">
+                <a:shade val="50000"/>
+              </a:schemeClr>
+            </a:lnRef>
+            <a:fillRef idx="1">
+              <a:schemeClr val="accent1"/>
+            </a:fillRef>
+            <a:effectRef idx="0">
+              <a:schemeClr val="accent1"/>
+            </a:effectRef>
+            <a:fontRef idx="minor">
+              <a:schemeClr val="lt1"/>
+            </a:fontRef>
+          </p:style>
+          <p:txBody>
+            <a:bodyPr rtlCol="0" anchor="ctr"/>
+            <a:lstStyle/>
+            <a:p>
+              <a:pPr algn="ctr"/>
+              <a:endParaRPr lang="en-US"/>
+            </a:p>
+          </p:txBody>
+        </p:sp>
+        <p:sp>
+          <p:nvSpPr>
+            <p:cNvPr id="39" name="Pentagon 38">
+              <a:extLst>
+                <a:ext uri="{FF2B5EF4-FFF2-40B4-BE49-F238E27FC236}">
+                  <a16:creationId xmlns:a16="http://schemas.microsoft.com/office/drawing/2014/main" id="{DD9C3BFB-6B79-4CD3-A009-2CA50FBD5104}"/>
+                </a:ext>
+              </a:extLst>
+            </p:cNvPr>
+            <p:cNvSpPr/>
+            <p:nvPr/>
+          </p:nvSpPr>
+          <p:spPr>
+            <a:xfrm>
+              <a:off x="652966" y="1147534"/>
+              <a:ext cx="1176012" cy="1214139"/>
+            </a:xfrm>
+            <a:prstGeom prst="pentagon">
+              <a:avLst/>
+            </a:prstGeom>
+            <a:noFill/>
+            <a:ln w="38100" cap="flat" cmpd="sng" algn="ctr">
+              <a:solidFill>
+                <a:schemeClr val="dk1"/>
+              </a:solidFill>
+              <a:prstDash val="solid"/>
+              <a:round/>
+              <a:headEnd type="none" w="med" len="med"/>
+              <a:tailEnd type="none" w="med" len="med"/>
+            </a:ln>
+          </p:spPr>
+          <p:style>
+            <a:lnRef idx="0">
+              <a:scrgbClr r="0" g="0" b="0"/>
+            </a:lnRef>
+            <a:fillRef idx="0">
+              <a:scrgbClr r="0" g="0" b="0"/>
+            </a:fillRef>
+            <a:effectRef idx="0">
+              <a:scrgbClr r="0" g="0" b="0"/>
+            </a:effectRef>
+            <a:fontRef idx="minor">
+              <a:schemeClr val="dk1"/>
+            </a:fontRef>
+          </p:style>
+          <p:txBody>
+            <a:bodyPr rtlCol="0" anchor="ctr"/>
+            <a:lstStyle/>
+            <a:p>
+              <a:pPr algn="ctr"/>
+              <a:endParaRPr lang="en-US"/>
+            </a:p>
+          </p:txBody>
+        </p:sp>
+      </p:grpSp>
+      <p:grpSp>
+        <p:nvGrpSpPr>
+          <p:cNvPr id="40" name="Group 39">
+            <a:extLst>
+              <a:ext uri="{FF2B5EF4-FFF2-40B4-BE49-F238E27FC236}">
+                <a16:creationId xmlns:a16="http://schemas.microsoft.com/office/drawing/2014/main" id="{1E9FEBFF-3050-4341-A771-78B7C1C46623}"/>
+              </a:ext>
+            </a:extLst>
+          </p:cNvPr>
+          <p:cNvGrpSpPr/>
+          <p:nvPr/>
+        </p:nvGrpSpPr>
+        <p:grpSpPr>
+          <a:xfrm>
+            <a:off x="10185920" y="2836685"/>
+            <a:ext cx="1530220" cy="1504560"/>
+            <a:chOff x="475862" y="905612"/>
+            <a:chExt cx="1530220" cy="1504560"/>
+          </a:xfrm>
+        </p:grpSpPr>
+        <p:sp>
+          <p:nvSpPr>
+            <p:cNvPr id="41" name="Rectangle 40">
+              <a:extLst>
+                <a:ext uri="{FF2B5EF4-FFF2-40B4-BE49-F238E27FC236}">
+                  <a16:creationId xmlns:a16="http://schemas.microsoft.com/office/drawing/2014/main" id="{D49F976D-C902-4A1B-A017-A07E2E35B9E4}"/>
+                </a:ext>
+              </a:extLst>
+            </p:cNvPr>
+            <p:cNvSpPr/>
+            <p:nvPr/>
+          </p:nvSpPr>
+          <p:spPr>
+            <a:xfrm>
+              <a:off x="475862" y="905612"/>
+              <a:ext cx="1530220" cy="1504560"/>
+            </a:xfrm>
+            <a:prstGeom prst="rect">
+              <a:avLst/>
+            </a:prstGeom>
+            <a:noFill/>
+            <a:ln w="76200">
+              <a:solidFill>
+                <a:schemeClr val="tx1"/>
+              </a:solidFill>
+            </a:ln>
+          </p:spPr>
+          <p:style>
+            <a:lnRef idx="2">
+              <a:schemeClr val="accent1">
+                <a:shade val="50000"/>
+              </a:schemeClr>
+            </a:lnRef>
+            <a:fillRef idx="1">
+              <a:schemeClr val="accent1"/>
+            </a:fillRef>
+            <a:effectRef idx="0">
+              <a:schemeClr val="accent1"/>
+            </a:effectRef>
+            <a:fontRef idx="minor">
+              <a:schemeClr val="lt1"/>
+            </a:fontRef>
+          </p:style>
+          <p:txBody>
+            <a:bodyPr rtlCol="0" anchor="ctr"/>
+            <a:lstStyle/>
+            <a:p>
+              <a:pPr algn="ctr"/>
+              <a:endParaRPr lang="en-US"/>
+            </a:p>
+          </p:txBody>
+        </p:sp>
+        <p:sp>
+          <p:nvSpPr>
+            <p:cNvPr id="42" name="Pentagon 41">
+              <a:extLst>
+                <a:ext uri="{FF2B5EF4-FFF2-40B4-BE49-F238E27FC236}">
+                  <a16:creationId xmlns:a16="http://schemas.microsoft.com/office/drawing/2014/main" id="{BE63CD70-170A-4CC6-AC2F-7596CA86ACE5}"/>
+                </a:ext>
+              </a:extLst>
+            </p:cNvPr>
+            <p:cNvSpPr/>
+            <p:nvPr/>
+          </p:nvSpPr>
+          <p:spPr>
+            <a:xfrm>
+              <a:off x="652966" y="1147534"/>
+              <a:ext cx="1176012" cy="1214139"/>
+            </a:xfrm>
+            <a:prstGeom prst="pentagon">
+              <a:avLst/>
+            </a:prstGeom>
+            <a:noFill/>
+            <a:ln w="38100" cap="flat" cmpd="sng" algn="ctr">
+              <a:solidFill>
+                <a:schemeClr val="dk1"/>
+              </a:solidFill>
+              <a:prstDash val="solid"/>
+              <a:round/>
+              <a:headEnd type="none" w="med" len="med"/>
+              <a:tailEnd type="none" w="med" len="med"/>
+            </a:ln>
+          </p:spPr>
+          <p:style>
+            <a:lnRef idx="0">
+              <a:scrgbClr r="0" g="0" b="0"/>
+            </a:lnRef>
+            <a:fillRef idx="0">
+              <a:scrgbClr r="0" g="0" b="0"/>
+            </a:fillRef>
+            <a:effectRef idx="0">
+              <a:scrgbClr r="0" g="0" b="0"/>
+            </a:effectRef>
+            <a:fontRef idx="minor">
+              <a:schemeClr val="dk1"/>
+            </a:fontRef>
+          </p:style>
+          <p:txBody>
+            <a:bodyPr rtlCol="0" anchor="ctr"/>
+            <a:lstStyle/>
+            <a:p>
+              <a:pPr algn="ctr"/>
+              <a:endParaRPr lang="en-US"/>
+            </a:p>
+          </p:txBody>
+        </p:sp>
+      </p:grpSp>
+    </p:spTree>
+    <p:extLst>
+      <p:ext uri="{BB962C8B-B14F-4D97-AF65-F5344CB8AC3E}">
+        <p14:creationId xmlns:p14="http://schemas.microsoft.com/office/powerpoint/2010/main" val="1789630723"/>
+      </p:ext>
+    </p:extLst>
+  </p:cSld>
+  <p:clrMapOvr>
+    <a:masterClrMapping/>
+  </p:clrMapOvr>
+</p:sld>
+</file>
+
+<file path=ppt/slides/slide6.xml><?xml version="1.0" encoding="utf-8"?>
+<p:sld xmlns:a="http://schemas.openxmlformats.org/drawingml/2006/main" xmlns:r="http://schemas.openxmlformats.org/officeDocument/2006/relationships" xmlns:p="http://schemas.openxmlformats.org/presentationml/2006/main">
+  <p:cSld>
+    <p:spTree>
+      <p:nvGrpSpPr>
+        <p:cNvPr id="1" name=""/>
+        <p:cNvGrpSpPr/>
+        <p:nvPr/>
+      </p:nvGrpSpPr>
+      <p:grpSpPr>
+        <a:xfrm>
+          <a:off x="0" y="0"/>
+          <a:ext cx="0" cy="0"/>
+          <a:chOff x="0" y="0"/>
+          <a:chExt cx="0" cy="0"/>
+        </a:xfrm>
+      </p:grpSpPr>
+      <p:grpSp>
+        <p:nvGrpSpPr>
           <p:cNvPr id="41" name="Group 40">
             <a:extLst>
               <a:ext uri="{FF2B5EF4-FFF2-40B4-BE49-F238E27FC236}">
@@ -37940,8 +40760,8 @@
         </p:blipFill>
         <p:spPr>
           <a:xfrm>
-            <a:off x="3264837" y="1510125"/>
-            <a:ext cx="795704" cy="1002323"/>
+            <a:off x="3264837" y="1669241"/>
+            <a:ext cx="669388" cy="843207"/>
           </a:xfrm>
           <a:prstGeom prst="rect">
             <a:avLst/>
@@ -37962,8 +40782,8 @@
         </p:nvGrpSpPr>
         <p:grpSpPr>
           <a:xfrm>
-            <a:off x="5005196" y="1868355"/>
-            <a:ext cx="1441455" cy="1005088"/>
+            <a:off x="5860090" y="1810795"/>
+            <a:ext cx="911793" cy="662027"/>
             <a:chOff x="2272059" y="3781225"/>
             <a:chExt cx="1441455" cy="1005088"/>
           </a:xfrm>
@@ -38046,6 +40866,968 @@
           </p:spPr>
         </p:pic>
       </p:grpSp>
+      <p:pic>
+        <p:nvPicPr>
+          <p:cNvPr id="89" name="Picture 88">
+            <a:extLst>
+              <a:ext uri="{FF2B5EF4-FFF2-40B4-BE49-F238E27FC236}">
+                <a16:creationId xmlns:a16="http://schemas.microsoft.com/office/drawing/2014/main" id="{15BFCBF9-9503-4151-8E3A-6B7DC35F791C}"/>
+              </a:ext>
+            </a:extLst>
+          </p:cNvPr>
+          <p:cNvPicPr>
+            <a:picLocks noChangeAspect="1"/>
+          </p:cNvPicPr>
+          <p:nvPr/>
+        </p:nvPicPr>
+        <p:blipFill>
+          <a:blip r:embed="rId4"/>
+          <a:stretch>
+            <a:fillRect/>
+          </a:stretch>
+        </p:blipFill>
+        <p:spPr>
+          <a:xfrm>
+            <a:off x="2467928" y="1706376"/>
+            <a:ext cx="441135" cy="584091"/>
+          </a:xfrm>
+          <a:prstGeom prst="rect">
+            <a:avLst/>
+          </a:prstGeom>
+        </p:spPr>
+      </p:pic>
+      <p:pic>
+        <p:nvPicPr>
+          <p:cNvPr id="16" name="Picture 15">
+            <a:extLst>
+              <a:ext uri="{FF2B5EF4-FFF2-40B4-BE49-F238E27FC236}">
+                <a16:creationId xmlns:a16="http://schemas.microsoft.com/office/drawing/2014/main" id="{89F810F3-7EF4-411A-A041-629CA07B7A7B}"/>
+              </a:ext>
+            </a:extLst>
+          </p:cNvPr>
+          <p:cNvPicPr>
+            <a:picLocks noChangeAspect="1"/>
+          </p:cNvPicPr>
+          <p:nvPr/>
+        </p:nvPicPr>
+        <p:blipFill>
+          <a:blip r:embed="rId13"/>
+          <a:stretch>
+            <a:fillRect/>
+          </a:stretch>
+        </p:blipFill>
+        <p:spPr>
+          <a:xfrm>
+            <a:off x="4517384" y="1909757"/>
+            <a:ext cx="863170" cy="863170"/>
+          </a:xfrm>
+          <a:prstGeom prst="rect">
+            <a:avLst/>
+          </a:prstGeom>
+        </p:spPr>
+      </p:pic>
+      <p:pic>
+        <p:nvPicPr>
+          <p:cNvPr id="42" name="Picture 41">
+            <a:extLst>
+              <a:ext uri="{FF2B5EF4-FFF2-40B4-BE49-F238E27FC236}">
+                <a16:creationId xmlns:a16="http://schemas.microsoft.com/office/drawing/2014/main" id="{2C46256F-2433-4EC4-86A2-44142BBBF6EF}"/>
+              </a:ext>
+            </a:extLst>
+          </p:cNvPr>
+          <p:cNvPicPr>
+            <a:picLocks noChangeAspect="1"/>
+          </p:cNvPicPr>
+          <p:nvPr/>
+        </p:nvPicPr>
+        <p:blipFill>
+          <a:blip r:embed="rId14"/>
+          <a:stretch>
+            <a:fillRect/>
+          </a:stretch>
+        </p:blipFill>
+        <p:spPr>
+          <a:xfrm>
+            <a:off x="3989153" y="2693174"/>
+            <a:ext cx="929088" cy="735826"/>
+          </a:xfrm>
+          <a:prstGeom prst="rect">
+            <a:avLst/>
+          </a:prstGeom>
+        </p:spPr>
+      </p:pic>
+      <p:pic>
+        <p:nvPicPr>
+          <p:cNvPr id="45" name="Picture 44">
+            <a:extLst>
+              <a:ext uri="{FF2B5EF4-FFF2-40B4-BE49-F238E27FC236}">
+                <a16:creationId xmlns:a16="http://schemas.microsoft.com/office/drawing/2014/main" id="{2F74E799-8408-4893-942A-C8FB333C972B}"/>
+              </a:ext>
+            </a:extLst>
+          </p:cNvPr>
+          <p:cNvPicPr>
+            <a:picLocks noChangeAspect="1"/>
+          </p:cNvPicPr>
+          <p:nvPr/>
+        </p:nvPicPr>
+        <p:blipFill>
+          <a:blip r:embed="rId15"/>
+          <a:stretch>
+            <a:fillRect/>
+          </a:stretch>
+        </p:blipFill>
+        <p:spPr>
+          <a:xfrm>
+            <a:off x="5726576" y="2726481"/>
+            <a:ext cx="559512" cy="731096"/>
+          </a:xfrm>
+          <a:prstGeom prst="rect">
+            <a:avLst/>
+          </a:prstGeom>
+        </p:spPr>
+      </p:pic>
+      <p:pic>
+        <p:nvPicPr>
+          <p:cNvPr id="62" name="Picture 61">
+            <a:extLst>
+              <a:ext uri="{FF2B5EF4-FFF2-40B4-BE49-F238E27FC236}">
+                <a16:creationId xmlns:a16="http://schemas.microsoft.com/office/drawing/2014/main" id="{12866120-206C-451B-9842-C2B63F50E94F}"/>
+              </a:ext>
+            </a:extLst>
+          </p:cNvPr>
+          <p:cNvPicPr>
+            <a:picLocks noChangeAspect="1"/>
+          </p:cNvPicPr>
+          <p:nvPr/>
+        </p:nvPicPr>
+        <p:blipFill>
+          <a:blip r:embed="rId16"/>
+          <a:stretch>
+            <a:fillRect/>
+          </a:stretch>
+        </p:blipFill>
+        <p:spPr>
+          <a:xfrm>
+            <a:off x="6879672" y="2402106"/>
+            <a:ext cx="509931" cy="841513"/>
+          </a:xfrm>
+          <a:prstGeom prst="rect">
+            <a:avLst/>
+          </a:prstGeom>
+        </p:spPr>
+      </p:pic>
+      <p:grpSp>
+        <p:nvGrpSpPr>
+          <p:cNvPr id="64" name="Group 63">
+            <a:extLst>
+              <a:ext uri="{FF2B5EF4-FFF2-40B4-BE49-F238E27FC236}">
+                <a16:creationId xmlns:a16="http://schemas.microsoft.com/office/drawing/2014/main" id="{AA5B24D4-3683-46EE-8157-29271F3E469A}"/>
+              </a:ext>
+            </a:extLst>
+          </p:cNvPr>
+          <p:cNvGrpSpPr/>
+          <p:nvPr/>
+        </p:nvGrpSpPr>
+        <p:grpSpPr>
+          <a:xfrm>
+            <a:off x="4638485" y="4014555"/>
+            <a:ext cx="1121232" cy="841513"/>
+            <a:chOff x="4638485" y="4014555"/>
+            <a:chExt cx="1121232" cy="841513"/>
+          </a:xfrm>
+        </p:grpSpPr>
+        <p:pic>
+          <p:nvPicPr>
+            <p:cNvPr id="99" name="Picture 98">
+              <a:extLst>
+                <a:ext uri="{FF2B5EF4-FFF2-40B4-BE49-F238E27FC236}">
+                  <a16:creationId xmlns:a16="http://schemas.microsoft.com/office/drawing/2014/main" id="{4A4D797D-DB7F-46A8-91AF-C6D85B136822}"/>
+                </a:ext>
+              </a:extLst>
+            </p:cNvPr>
+            <p:cNvPicPr>
+              <a:picLocks noChangeAspect="1"/>
+            </p:cNvPicPr>
+            <p:nvPr/>
+          </p:nvPicPr>
+          <p:blipFill>
+            <a:blip r:embed="rId15"/>
+            <a:stretch>
+              <a:fillRect/>
+            </a:stretch>
+          </p:blipFill>
+          <p:spPr>
+            <a:xfrm>
+              <a:off x="4638485" y="4085074"/>
+              <a:ext cx="559512" cy="731096"/>
+            </a:xfrm>
+            <a:prstGeom prst="rect">
+              <a:avLst/>
+            </a:prstGeom>
+          </p:spPr>
+        </p:pic>
+        <p:pic>
+          <p:nvPicPr>
+            <p:cNvPr id="103" name="Picture 102">
+              <a:extLst>
+                <a:ext uri="{FF2B5EF4-FFF2-40B4-BE49-F238E27FC236}">
+                  <a16:creationId xmlns:a16="http://schemas.microsoft.com/office/drawing/2014/main" id="{A3F0D457-1120-4BF2-8CD4-91FF2A6F8A63}"/>
+                </a:ext>
+              </a:extLst>
+            </p:cNvPr>
+            <p:cNvPicPr>
+              <a:picLocks noChangeAspect="1"/>
+            </p:cNvPicPr>
+            <p:nvPr/>
+          </p:nvPicPr>
+          <p:blipFill>
+            <a:blip r:embed="rId16"/>
+            <a:stretch>
+              <a:fillRect/>
+            </a:stretch>
+          </p:blipFill>
+          <p:spPr>
+            <a:xfrm>
+              <a:off x="5249786" y="4014555"/>
+              <a:ext cx="509931" cy="841513"/>
+            </a:xfrm>
+            <a:prstGeom prst="rect">
+              <a:avLst/>
+            </a:prstGeom>
+          </p:spPr>
+        </p:pic>
+      </p:grpSp>
+      <p:grpSp>
+        <p:nvGrpSpPr>
+          <p:cNvPr id="81" name="Group 80">
+            <a:extLst>
+              <a:ext uri="{FF2B5EF4-FFF2-40B4-BE49-F238E27FC236}">
+                <a16:creationId xmlns:a16="http://schemas.microsoft.com/office/drawing/2014/main" id="{BB416787-47F8-4477-8D00-234F903E0137}"/>
+              </a:ext>
+            </a:extLst>
+          </p:cNvPr>
+          <p:cNvGrpSpPr/>
+          <p:nvPr/>
+        </p:nvGrpSpPr>
+        <p:grpSpPr>
+          <a:xfrm>
+            <a:off x="9168924" y="3267684"/>
+            <a:ext cx="883833" cy="898245"/>
+            <a:chOff x="6250804" y="4469864"/>
+            <a:chExt cx="1767666" cy="1796490"/>
+          </a:xfrm>
+        </p:grpSpPr>
+        <p:grpSp>
+          <p:nvGrpSpPr>
+            <p:cNvPr id="78" name="Group 77">
+              <a:extLst>
+                <a:ext uri="{FF2B5EF4-FFF2-40B4-BE49-F238E27FC236}">
+                  <a16:creationId xmlns:a16="http://schemas.microsoft.com/office/drawing/2014/main" id="{8601E962-EBF6-4EAD-A65C-3436852D8F5B}"/>
+                </a:ext>
+              </a:extLst>
+            </p:cNvPr>
+            <p:cNvGrpSpPr/>
+            <p:nvPr/>
+          </p:nvGrpSpPr>
+          <p:grpSpPr>
+            <a:xfrm rot="2105593">
+              <a:off x="6898111" y="4469864"/>
+              <a:ext cx="543720" cy="1475268"/>
+              <a:chOff x="6998677" y="4501662"/>
+              <a:chExt cx="543720" cy="1125415"/>
+            </a:xfrm>
+          </p:grpSpPr>
+          <p:sp>
+            <p:nvSpPr>
+              <p:cNvPr id="65" name="Rectangle 64">
+                <a:extLst>
+                  <a:ext uri="{FF2B5EF4-FFF2-40B4-BE49-F238E27FC236}">
+                    <a16:creationId xmlns:a16="http://schemas.microsoft.com/office/drawing/2014/main" id="{FCDD5344-FD02-46B5-90B0-5AFDF1CACA7C}"/>
+                  </a:ext>
+                </a:extLst>
+              </p:cNvPr>
+              <p:cNvSpPr/>
+              <p:nvPr/>
+            </p:nvSpPr>
+            <p:spPr>
+              <a:xfrm>
+                <a:off x="7104184" y="4712677"/>
+                <a:ext cx="338215" cy="914400"/>
+              </a:xfrm>
+              <a:prstGeom prst="rect">
+                <a:avLst/>
+              </a:prstGeom>
+            </p:spPr>
+            <p:style>
+              <a:lnRef idx="2">
+                <a:schemeClr val="dk1">
+                  <a:shade val="50000"/>
+                </a:schemeClr>
+              </a:lnRef>
+              <a:fillRef idx="1">
+                <a:schemeClr val="dk1"/>
+              </a:fillRef>
+              <a:effectRef idx="0">
+                <a:schemeClr val="dk1"/>
+              </a:effectRef>
+              <a:fontRef idx="minor">
+                <a:schemeClr val="lt1"/>
+              </a:fontRef>
+            </p:style>
+            <p:txBody>
+              <a:bodyPr rtlCol="0" anchor="ctr"/>
+              <a:lstStyle/>
+              <a:p>
+                <a:pPr algn="ctr"/>
+                <a:endParaRPr lang="en-US"/>
+              </a:p>
+            </p:txBody>
+          </p:sp>
+          <p:sp>
+            <p:nvSpPr>
+              <p:cNvPr id="66" name="Rectangle 65">
+                <a:extLst>
+                  <a:ext uri="{FF2B5EF4-FFF2-40B4-BE49-F238E27FC236}">
+                    <a16:creationId xmlns:a16="http://schemas.microsoft.com/office/drawing/2014/main" id="{669758D6-3E94-4A9E-BE2C-0F5D53BE58A6}"/>
+                  </a:ext>
+                </a:extLst>
+              </p:cNvPr>
+              <p:cNvSpPr/>
+              <p:nvPr/>
+            </p:nvSpPr>
+            <p:spPr>
+              <a:xfrm>
+                <a:off x="6998677" y="4501662"/>
+                <a:ext cx="543720" cy="211015"/>
+              </a:xfrm>
+              <a:prstGeom prst="rect">
+                <a:avLst/>
+              </a:prstGeom>
+            </p:spPr>
+            <p:style>
+              <a:lnRef idx="2">
+                <a:schemeClr val="dk1">
+                  <a:shade val="50000"/>
+                </a:schemeClr>
+              </a:lnRef>
+              <a:fillRef idx="1">
+                <a:schemeClr val="dk1"/>
+              </a:fillRef>
+              <a:effectRef idx="0">
+                <a:schemeClr val="dk1"/>
+              </a:effectRef>
+              <a:fontRef idx="minor">
+                <a:schemeClr val="lt1"/>
+              </a:fontRef>
+            </p:style>
+            <p:txBody>
+              <a:bodyPr rtlCol="0" anchor="ctr"/>
+              <a:lstStyle/>
+              <a:p>
+                <a:pPr algn="ctr"/>
+                <a:endParaRPr lang="en-US"/>
+              </a:p>
+            </p:txBody>
+          </p:sp>
+        </p:grpSp>
+        <p:sp>
+          <p:nvSpPr>
+            <p:cNvPr id="79" name="Rectangle 78">
+              <a:extLst>
+                <a:ext uri="{FF2B5EF4-FFF2-40B4-BE49-F238E27FC236}">
+                  <a16:creationId xmlns:a16="http://schemas.microsoft.com/office/drawing/2014/main" id="{7A9142C9-1414-46FC-812D-6287719A67C8}"/>
+                </a:ext>
+              </a:extLst>
+            </p:cNvPr>
+            <p:cNvSpPr/>
+            <p:nvPr/>
+          </p:nvSpPr>
+          <p:spPr>
+            <a:xfrm rot="19962306">
+              <a:off x="7413128" y="5064532"/>
+              <a:ext cx="127375" cy="905608"/>
+            </a:xfrm>
+            <a:prstGeom prst="rect">
+              <a:avLst/>
+            </a:prstGeom>
+          </p:spPr>
+          <p:style>
+            <a:lnRef idx="2">
+              <a:schemeClr val="dk1">
+                <a:shade val="50000"/>
+              </a:schemeClr>
+            </a:lnRef>
+            <a:fillRef idx="1">
+              <a:schemeClr val="dk1"/>
+            </a:fillRef>
+            <a:effectRef idx="0">
+              <a:schemeClr val="dk1"/>
+            </a:effectRef>
+            <a:fontRef idx="minor">
+              <a:schemeClr val="lt1"/>
+            </a:fontRef>
+          </p:style>
+          <p:txBody>
+            <a:bodyPr rtlCol="0" anchor="ctr"/>
+            <a:lstStyle/>
+            <a:p>
+              <a:pPr algn="ctr"/>
+              <a:endParaRPr lang="en-US"/>
+            </a:p>
+          </p:txBody>
+        </p:sp>
+        <p:sp>
+          <p:nvSpPr>
+            <p:cNvPr id="106" name="Rectangle 105">
+              <a:extLst>
+                <a:ext uri="{FF2B5EF4-FFF2-40B4-BE49-F238E27FC236}">
+                  <a16:creationId xmlns:a16="http://schemas.microsoft.com/office/drawing/2014/main" id="{163D20FF-5F8A-4B4E-A677-7975F5A7C841}"/>
+                </a:ext>
+              </a:extLst>
+            </p:cNvPr>
+            <p:cNvSpPr/>
+            <p:nvPr/>
+          </p:nvSpPr>
+          <p:spPr>
+            <a:xfrm rot="16200000">
+              <a:off x="6775177" y="5310385"/>
+              <a:ext cx="127375" cy="905608"/>
+            </a:xfrm>
+            <a:prstGeom prst="rect">
+              <a:avLst/>
+            </a:prstGeom>
+          </p:spPr>
+          <p:style>
+            <a:lnRef idx="2">
+              <a:schemeClr val="dk1">
+                <a:shade val="50000"/>
+              </a:schemeClr>
+            </a:lnRef>
+            <a:fillRef idx="1">
+              <a:schemeClr val="dk1"/>
+            </a:fillRef>
+            <a:effectRef idx="0">
+              <a:schemeClr val="dk1"/>
+            </a:effectRef>
+            <a:fontRef idx="minor">
+              <a:schemeClr val="lt1"/>
+            </a:fontRef>
+          </p:style>
+          <p:txBody>
+            <a:bodyPr rtlCol="0" anchor="ctr"/>
+            <a:lstStyle/>
+            <a:p>
+              <a:pPr algn="ctr"/>
+              <a:endParaRPr lang="en-US"/>
+            </a:p>
+          </p:txBody>
+        </p:sp>
+        <p:sp>
+          <p:nvSpPr>
+            <p:cNvPr id="80" name="Rectangle 79">
+              <a:extLst>
+                <a:ext uri="{FF2B5EF4-FFF2-40B4-BE49-F238E27FC236}">
+                  <a16:creationId xmlns:a16="http://schemas.microsoft.com/office/drawing/2014/main" id="{7A0A1A9C-5776-4F10-B313-6EFC1DBA8596}"/>
+                </a:ext>
+              </a:extLst>
+            </p:cNvPr>
+            <p:cNvSpPr/>
+            <p:nvPr/>
+          </p:nvSpPr>
+          <p:spPr>
+            <a:xfrm>
+              <a:off x="6250804" y="5829836"/>
+              <a:ext cx="1767666" cy="436518"/>
+            </a:xfrm>
+            <a:prstGeom prst="rect">
+              <a:avLst/>
+            </a:prstGeom>
+            <a:ln>
+              <a:noFill/>
+            </a:ln>
+          </p:spPr>
+          <p:style>
+            <a:lnRef idx="2">
+              <a:schemeClr val="dk1"/>
+            </a:lnRef>
+            <a:fillRef idx="1">
+              <a:schemeClr val="lt1"/>
+            </a:fillRef>
+            <a:effectRef idx="0">
+              <a:schemeClr val="dk1"/>
+            </a:effectRef>
+            <a:fontRef idx="minor">
+              <a:schemeClr val="dk1"/>
+            </a:fontRef>
+          </p:style>
+          <p:txBody>
+            <a:bodyPr rtlCol="0" anchor="ctr"/>
+            <a:lstStyle/>
+            <a:p>
+              <a:pPr algn="ctr"/>
+              <a:endParaRPr lang="en-US"/>
+            </a:p>
+          </p:txBody>
+        </p:sp>
+      </p:grpSp>
+      <p:grpSp>
+        <p:nvGrpSpPr>
+          <p:cNvPr id="82" name="Group 81">
+            <a:extLst>
+              <a:ext uri="{FF2B5EF4-FFF2-40B4-BE49-F238E27FC236}">
+                <a16:creationId xmlns:a16="http://schemas.microsoft.com/office/drawing/2014/main" id="{28DAA40E-F3DB-44C3-AE44-0671F2365891}"/>
+              </a:ext>
+            </a:extLst>
+          </p:cNvPr>
+          <p:cNvGrpSpPr/>
+          <p:nvPr/>
+        </p:nvGrpSpPr>
+        <p:grpSpPr>
+          <a:xfrm>
+            <a:off x="2735036" y="4735612"/>
+            <a:ext cx="1238046" cy="1061212"/>
+            <a:chOff x="2735036" y="4735612"/>
+            <a:chExt cx="1238046" cy="1061212"/>
+          </a:xfrm>
+        </p:grpSpPr>
+        <p:pic>
+          <p:nvPicPr>
+            <p:cNvPr id="88" name="Picture 4" descr="Viking battle-axe icon in black style isolated Vector Image">
+              <a:extLst>
+                <a:ext uri="{FF2B5EF4-FFF2-40B4-BE49-F238E27FC236}">
+                  <a16:creationId xmlns:a16="http://schemas.microsoft.com/office/drawing/2014/main" id="{4340AFBE-997F-4D1A-B218-BF6B1E46C9EB}"/>
+                </a:ext>
+              </a:extLst>
+            </p:cNvPr>
+            <p:cNvPicPr>
+              <a:picLocks noChangeAspect="1" noChangeArrowheads="1"/>
+            </p:cNvPicPr>
+            <p:nvPr/>
+          </p:nvPicPr>
+          <p:blipFill rotWithShape="1">
+            <a:blip r:embed="rId17">
+              <a:extLst>
+                <a:ext uri="{28A0092B-C50C-407E-A947-70E740481C1C}">
+                  <a14:useLocalDpi xmlns:a14="http://schemas.microsoft.com/office/drawing/2010/main" val="0"/>
+                </a:ext>
+              </a:extLst>
+            </a:blip>
+            <a:srcRect l="7924" t="6907" r="6208" b="14113"/>
+            <a:stretch/>
+          </p:blipFill>
+          <p:spPr bwMode="auto">
+            <a:xfrm rot="19350834">
+              <a:off x="2735036" y="4735612"/>
+              <a:ext cx="813015" cy="807618"/>
+            </a:xfrm>
+            <a:prstGeom prst="rect">
+              <a:avLst/>
+            </a:prstGeom>
+            <a:noFill/>
+            <a:extLst>
+              <a:ext uri="{909E8E84-426E-40DD-AFC4-6F175D3DCCD1}">
+                <a14:hiddenFill xmlns:a14="http://schemas.microsoft.com/office/drawing/2010/main">
+                  <a:solidFill>
+                    <a:srgbClr val="FFFFFF"/>
+                  </a:solidFill>
+                </a14:hiddenFill>
+              </a:ext>
+            </a:extLst>
+          </p:spPr>
+        </p:pic>
+        <p:pic>
+          <p:nvPicPr>
+            <p:cNvPr id="109" name="Picture 108">
+              <a:extLst>
+                <a:ext uri="{FF2B5EF4-FFF2-40B4-BE49-F238E27FC236}">
+                  <a16:creationId xmlns:a16="http://schemas.microsoft.com/office/drawing/2014/main" id="{35B89269-E76B-4788-BCEA-39A2FBC57FA4}"/>
+                </a:ext>
+              </a:extLst>
+            </p:cNvPr>
+            <p:cNvPicPr>
+              <a:picLocks noChangeAspect="1"/>
+            </p:cNvPicPr>
+            <p:nvPr/>
+          </p:nvPicPr>
+          <p:blipFill>
+            <a:blip r:embed="rId18"/>
+            <a:stretch>
+              <a:fillRect/>
+            </a:stretch>
+          </p:blipFill>
+          <p:spPr>
+            <a:xfrm>
+              <a:off x="3193333" y="5076519"/>
+              <a:ext cx="779749" cy="720305"/>
+            </a:xfrm>
+            <a:prstGeom prst="rect">
+              <a:avLst/>
+            </a:prstGeom>
+          </p:spPr>
+        </p:pic>
+      </p:grpSp>
+      <p:pic>
+        <p:nvPicPr>
+          <p:cNvPr id="84" name="Picture 83">
+            <a:extLst>
+              <a:ext uri="{FF2B5EF4-FFF2-40B4-BE49-F238E27FC236}">
+                <a16:creationId xmlns:a16="http://schemas.microsoft.com/office/drawing/2014/main" id="{B54FB809-8AE5-42CF-AD67-EB109588B565}"/>
+              </a:ext>
+            </a:extLst>
+          </p:cNvPr>
+          <p:cNvPicPr>
+            <a:picLocks noChangeAspect="1"/>
+          </p:cNvPicPr>
+          <p:nvPr/>
+        </p:nvPicPr>
+        <p:blipFill>
+          <a:blip r:embed="rId19"/>
+          <a:stretch>
+            <a:fillRect/>
+          </a:stretch>
+        </p:blipFill>
+        <p:spPr>
+          <a:xfrm>
+            <a:off x="1644603" y="3810428"/>
+            <a:ext cx="1054636" cy="724422"/>
+          </a:xfrm>
+          <a:prstGeom prst="rect">
+            <a:avLst/>
+          </a:prstGeom>
+        </p:spPr>
+      </p:pic>
+      <p:grpSp>
+        <p:nvGrpSpPr>
+          <p:cNvPr id="90" name="Group 89">
+            <a:extLst>
+              <a:ext uri="{FF2B5EF4-FFF2-40B4-BE49-F238E27FC236}">
+                <a16:creationId xmlns:a16="http://schemas.microsoft.com/office/drawing/2014/main" id="{11FD3B2B-9CEC-4A0A-BFCE-CB04ED4456EB}"/>
+              </a:ext>
+            </a:extLst>
+          </p:cNvPr>
+          <p:cNvGrpSpPr/>
+          <p:nvPr/>
+        </p:nvGrpSpPr>
+        <p:grpSpPr>
+          <a:xfrm>
+            <a:off x="6632110" y="3352116"/>
+            <a:ext cx="631076" cy="1000141"/>
+            <a:chOff x="6506167" y="3616847"/>
+            <a:chExt cx="1337615" cy="2119878"/>
+          </a:xfrm>
+        </p:grpSpPr>
+        <p:pic>
+          <p:nvPicPr>
+            <p:cNvPr id="85" name="Picture 2" descr="Church Organ Stock Illustrations – 171 Church Organ Stock Illustrations,  Vectors &amp;amp; Clipart - Dreamstime">
+              <a:extLst>
+                <a:ext uri="{FF2B5EF4-FFF2-40B4-BE49-F238E27FC236}">
+                  <a16:creationId xmlns:a16="http://schemas.microsoft.com/office/drawing/2014/main" id="{9815DB9A-74A7-45D4-9921-CC28D36ECD97}"/>
+                </a:ext>
+              </a:extLst>
+            </p:cNvPr>
+            <p:cNvPicPr>
+              <a:picLocks noChangeAspect="1" noChangeArrowheads="1"/>
+            </p:cNvPicPr>
+            <p:nvPr/>
+          </p:nvPicPr>
+          <p:blipFill rotWithShape="1">
+            <a:blip r:embed="rId20">
+              <a:extLst>
+                <a:ext uri="{28A0092B-C50C-407E-A947-70E740481C1C}">
+                  <a14:useLocalDpi xmlns:a14="http://schemas.microsoft.com/office/drawing/2010/main" val="0"/>
+                </a:ext>
+              </a:extLst>
+            </a:blip>
+            <a:srcRect b="31900"/>
+            <a:stretch/>
+          </p:blipFill>
+          <p:spPr bwMode="auto">
+            <a:xfrm>
+              <a:off x="6609949" y="3616847"/>
+              <a:ext cx="1130052" cy="1558610"/>
+            </a:xfrm>
+            <a:prstGeom prst="rect">
+              <a:avLst/>
+            </a:prstGeom>
+            <a:noFill/>
+            <a:extLst>
+              <a:ext uri="{909E8E84-426E-40DD-AFC4-6F175D3DCCD1}">
+                <a14:hiddenFill xmlns:a14="http://schemas.microsoft.com/office/drawing/2010/main">
+                  <a:solidFill>
+                    <a:srgbClr val="FFFFFF"/>
+                  </a:solidFill>
+                </a14:hiddenFill>
+              </a:ext>
+            </a:extLst>
+          </p:spPr>
+        </p:pic>
+        <p:sp>
+          <p:nvSpPr>
+            <p:cNvPr id="86" name="Rectangle 85">
+              <a:extLst>
+                <a:ext uri="{FF2B5EF4-FFF2-40B4-BE49-F238E27FC236}">
+                  <a16:creationId xmlns:a16="http://schemas.microsoft.com/office/drawing/2014/main" id="{A80F1EF3-5BC3-4A25-9C7A-21AC4B24D3F8}"/>
+                </a:ext>
+              </a:extLst>
+            </p:cNvPr>
+            <p:cNvSpPr/>
+            <p:nvPr/>
+          </p:nvSpPr>
+          <p:spPr>
+            <a:xfrm>
+              <a:off x="6506167" y="5050089"/>
+              <a:ext cx="1337615" cy="686636"/>
+            </a:xfrm>
+            <a:prstGeom prst="rect">
+              <a:avLst/>
+            </a:prstGeom>
+          </p:spPr>
+          <p:style>
+            <a:lnRef idx="2">
+              <a:schemeClr val="dk1">
+                <a:shade val="50000"/>
+              </a:schemeClr>
+            </a:lnRef>
+            <a:fillRef idx="1">
+              <a:schemeClr val="dk1"/>
+            </a:fillRef>
+            <a:effectRef idx="0">
+              <a:schemeClr val="dk1"/>
+            </a:effectRef>
+            <a:fontRef idx="minor">
+              <a:schemeClr val="lt1"/>
+            </a:fontRef>
+          </p:style>
+          <p:txBody>
+            <a:bodyPr rtlCol="0" anchor="ctr"/>
+            <a:lstStyle/>
+            <a:p>
+              <a:pPr algn="ctr"/>
+              <a:endParaRPr lang="en-US"/>
+            </a:p>
+          </p:txBody>
+        </p:sp>
+        <p:sp>
+          <p:nvSpPr>
+            <p:cNvPr id="87" name="Rectangle 86">
+              <a:extLst>
+                <a:ext uri="{FF2B5EF4-FFF2-40B4-BE49-F238E27FC236}">
+                  <a16:creationId xmlns:a16="http://schemas.microsoft.com/office/drawing/2014/main" id="{B44FC2BD-A270-46E8-B1B7-928C1F6D5BAB}"/>
+                </a:ext>
+              </a:extLst>
+            </p:cNvPr>
+            <p:cNvSpPr/>
+            <p:nvPr/>
+          </p:nvSpPr>
+          <p:spPr>
+            <a:xfrm>
+              <a:off x="6656512" y="5175457"/>
+              <a:ext cx="298938" cy="177046"/>
+            </a:xfrm>
+            <a:prstGeom prst="rect">
+              <a:avLst/>
+            </a:prstGeom>
+          </p:spPr>
+          <p:style>
+            <a:lnRef idx="2">
+              <a:schemeClr val="dk1"/>
+            </a:lnRef>
+            <a:fillRef idx="1">
+              <a:schemeClr val="lt1"/>
+            </a:fillRef>
+            <a:effectRef idx="0">
+              <a:schemeClr val="dk1"/>
+            </a:effectRef>
+            <a:fontRef idx="minor">
+              <a:schemeClr val="dk1"/>
+            </a:fontRef>
+          </p:style>
+          <p:txBody>
+            <a:bodyPr rtlCol="0" anchor="ctr"/>
+            <a:lstStyle/>
+            <a:p>
+              <a:pPr algn="ctr"/>
+              <a:endParaRPr lang="en-US"/>
+            </a:p>
+          </p:txBody>
+        </p:sp>
+        <p:sp>
+          <p:nvSpPr>
+            <p:cNvPr id="116" name="Rectangle 115">
+              <a:extLst>
+                <a:ext uri="{FF2B5EF4-FFF2-40B4-BE49-F238E27FC236}">
+                  <a16:creationId xmlns:a16="http://schemas.microsoft.com/office/drawing/2014/main" id="{B447E97F-4F01-49A9-B297-9477CD38C086}"/>
+                </a:ext>
+              </a:extLst>
+            </p:cNvPr>
+            <p:cNvSpPr/>
+            <p:nvPr/>
+          </p:nvSpPr>
+          <p:spPr>
+            <a:xfrm>
+              <a:off x="7395917" y="5179353"/>
+              <a:ext cx="298938" cy="177046"/>
+            </a:xfrm>
+            <a:prstGeom prst="rect">
+              <a:avLst/>
+            </a:prstGeom>
+          </p:spPr>
+          <p:style>
+            <a:lnRef idx="2">
+              <a:schemeClr val="dk1"/>
+            </a:lnRef>
+            <a:fillRef idx="1">
+              <a:schemeClr val="lt1"/>
+            </a:fillRef>
+            <a:effectRef idx="0">
+              <a:schemeClr val="dk1"/>
+            </a:effectRef>
+            <a:fontRef idx="minor">
+              <a:schemeClr val="dk1"/>
+            </a:fontRef>
+          </p:style>
+          <p:txBody>
+            <a:bodyPr rtlCol="0" anchor="ctr"/>
+            <a:lstStyle/>
+            <a:p>
+              <a:pPr algn="ctr"/>
+              <a:endParaRPr lang="en-US"/>
+            </a:p>
+          </p:txBody>
+        </p:sp>
+        <p:sp>
+          <p:nvSpPr>
+            <p:cNvPr id="117" name="Rectangle 116">
+              <a:extLst>
+                <a:ext uri="{FF2B5EF4-FFF2-40B4-BE49-F238E27FC236}">
+                  <a16:creationId xmlns:a16="http://schemas.microsoft.com/office/drawing/2014/main" id="{25B17512-078B-4AF8-B477-A67A64A1239B}"/>
+                </a:ext>
+              </a:extLst>
+            </p:cNvPr>
+            <p:cNvSpPr/>
+            <p:nvPr/>
+          </p:nvSpPr>
+          <p:spPr>
+            <a:xfrm>
+              <a:off x="7023933" y="5259625"/>
+              <a:ext cx="298938" cy="177046"/>
+            </a:xfrm>
+            <a:prstGeom prst="rect">
+              <a:avLst/>
+            </a:prstGeom>
+          </p:spPr>
+          <p:style>
+            <a:lnRef idx="2">
+              <a:schemeClr val="dk1"/>
+            </a:lnRef>
+            <a:fillRef idx="1">
+              <a:schemeClr val="lt1"/>
+            </a:fillRef>
+            <a:effectRef idx="0">
+              <a:schemeClr val="dk1"/>
+            </a:effectRef>
+            <a:fontRef idx="minor">
+              <a:schemeClr val="dk1"/>
+            </a:fontRef>
+          </p:style>
+          <p:txBody>
+            <a:bodyPr rtlCol="0" anchor="ctr"/>
+            <a:lstStyle/>
+            <a:p>
+              <a:pPr algn="ctr"/>
+              <a:endParaRPr lang="en-US"/>
+            </a:p>
+          </p:txBody>
+        </p:sp>
+        <p:sp>
+          <p:nvSpPr>
+            <p:cNvPr id="118" name="Rectangle 117">
+              <a:extLst>
+                <a:ext uri="{FF2B5EF4-FFF2-40B4-BE49-F238E27FC236}">
+                  <a16:creationId xmlns:a16="http://schemas.microsoft.com/office/drawing/2014/main" id="{9E83F13C-F0AD-42AA-8F72-F840D17A8CCB}"/>
+                </a:ext>
+              </a:extLst>
+            </p:cNvPr>
+            <p:cNvSpPr/>
+            <p:nvPr/>
+          </p:nvSpPr>
+          <p:spPr>
+            <a:xfrm>
+              <a:off x="6655167" y="5428420"/>
+              <a:ext cx="298938" cy="177046"/>
+            </a:xfrm>
+            <a:prstGeom prst="rect">
+              <a:avLst/>
+            </a:prstGeom>
+          </p:spPr>
+          <p:style>
+            <a:lnRef idx="2">
+              <a:schemeClr val="dk1"/>
+            </a:lnRef>
+            <a:fillRef idx="1">
+              <a:schemeClr val="lt1"/>
+            </a:fillRef>
+            <a:effectRef idx="0">
+              <a:schemeClr val="dk1"/>
+            </a:effectRef>
+            <a:fontRef idx="minor">
+              <a:schemeClr val="dk1"/>
+            </a:fontRef>
+          </p:style>
+          <p:txBody>
+            <a:bodyPr rtlCol="0" anchor="ctr"/>
+            <a:lstStyle/>
+            <a:p>
+              <a:pPr algn="ctr"/>
+              <a:endParaRPr lang="en-US"/>
+            </a:p>
+          </p:txBody>
+        </p:sp>
+        <p:sp>
+          <p:nvSpPr>
+            <p:cNvPr id="119" name="Rectangle 118">
+              <a:extLst>
+                <a:ext uri="{FF2B5EF4-FFF2-40B4-BE49-F238E27FC236}">
+                  <a16:creationId xmlns:a16="http://schemas.microsoft.com/office/drawing/2014/main" id="{EE634280-6560-47C7-9107-3D468B8D6E7A}"/>
+                </a:ext>
+              </a:extLst>
+            </p:cNvPr>
+            <p:cNvSpPr/>
+            <p:nvPr/>
+          </p:nvSpPr>
+          <p:spPr>
+            <a:xfrm>
+              <a:off x="7394572" y="5432316"/>
+              <a:ext cx="298938" cy="177046"/>
+            </a:xfrm>
+            <a:prstGeom prst="rect">
+              <a:avLst/>
+            </a:prstGeom>
+          </p:spPr>
+          <p:style>
+            <a:lnRef idx="2">
+              <a:schemeClr val="dk1"/>
+            </a:lnRef>
+            <a:fillRef idx="1">
+              <a:schemeClr val="lt1"/>
+            </a:fillRef>
+            <a:effectRef idx="0">
+              <a:schemeClr val="dk1"/>
+            </a:effectRef>
+            <a:fontRef idx="minor">
+              <a:schemeClr val="dk1"/>
+            </a:fontRef>
+          </p:style>
+          <p:txBody>
+            <a:bodyPr rtlCol="0" anchor="ctr"/>
+            <a:lstStyle/>
+            <a:p>
+              <a:pPr algn="ctr"/>
+              <a:endParaRPr lang="en-US"/>
+            </a:p>
+          </p:txBody>
+        </p:sp>
+      </p:grpSp>
     </p:spTree>
     <p:extLst>
       <p:ext uri="{BB962C8B-B14F-4D97-AF65-F5344CB8AC3E}">
@@ -38059,7 +41841,7 @@
 </p:sld>
 </file>
 
-<file path=ppt/slides/slide6.xml><?xml version="1.0" encoding="utf-8"?>
+<file path=ppt/slides/slide7.xml><?xml version="1.0" encoding="utf-8"?>
 <p:sld xmlns:a="http://schemas.openxmlformats.org/drawingml/2006/main" xmlns:r="http://schemas.openxmlformats.org/officeDocument/2006/relationships" xmlns:p="http://schemas.openxmlformats.org/presentationml/2006/main">
   <p:cSld>
     <p:spTree>
@@ -38174,6 +41956,96 @@
       </p:grpSp>
       <p:pic>
         <p:nvPicPr>
+          <p:cNvPr id="8" name="Picture 4" descr="Musket Silhouette. Flintlock Old Pistol Symbol. Rustic Vintage Gun Vector  Silhouette Illustration Isolated On White Background. Royalty Free  Cliparts, Vectors, And Stock Illustration. Image 147714752.">
+            <a:extLst>
+              <a:ext uri="{FF2B5EF4-FFF2-40B4-BE49-F238E27FC236}">
+                <a16:creationId xmlns:a16="http://schemas.microsoft.com/office/drawing/2014/main" id="{77CC34B6-2AF4-4776-99F7-95C203B8F816}"/>
+              </a:ext>
+            </a:extLst>
+          </p:cNvPr>
+          <p:cNvPicPr>
+            <a:picLocks noChangeAspect="1" noChangeArrowheads="1"/>
+          </p:cNvPicPr>
+          <p:nvPr/>
+        </p:nvPicPr>
+        <p:blipFill rotWithShape="1">
+          <a:blip r:embed="rId4">
+            <a:extLst>
+              <a:ext uri="{28A0092B-C50C-407E-A947-70E740481C1C}">
+                <a14:useLocalDpi xmlns:a14="http://schemas.microsoft.com/office/drawing/2010/main" val="0"/>
+              </a:ext>
+            </a:extLst>
+          </a:blip>
+          <a:srcRect l="8772" t="16514" r="8246" b="7006"/>
+          <a:stretch/>
+        </p:blipFill>
+        <p:spPr bwMode="auto">
+          <a:xfrm rot="17201017">
+            <a:off x="2588770" y="4321537"/>
+            <a:ext cx="1126540" cy="328254"/>
+          </a:xfrm>
+          <a:prstGeom prst="rect">
+            <a:avLst/>
+          </a:prstGeom>
+          <a:noFill/>
+          <a:extLst>
+            <a:ext uri="{909E8E84-426E-40DD-AFC4-6F175D3DCCD1}">
+              <a14:hiddenFill xmlns:a14="http://schemas.microsoft.com/office/drawing/2010/main">
+                <a:solidFill>
+                  <a:srgbClr val="FFFFFF"/>
+                </a:solidFill>
+              </a14:hiddenFill>
+            </a:ext>
+          </a:extLst>
+        </p:spPr>
+      </p:pic>
+      <p:pic>
+        <p:nvPicPr>
+          <p:cNvPr id="2052" name="Picture 4" descr="Viking battle-axe icon in black style isolated Vector Image">
+            <a:extLst>
+              <a:ext uri="{FF2B5EF4-FFF2-40B4-BE49-F238E27FC236}">
+                <a16:creationId xmlns:a16="http://schemas.microsoft.com/office/drawing/2014/main" id="{9861CD71-1949-4D6F-97BA-59745F196141}"/>
+              </a:ext>
+            </a:extLst>
+          </p:cNvPr>
+          <p:cNvPicPr>
+            <a:picLocks noChangeAspect="1" noChangeArrowheads="1"/>
+          </p:cNvPicPr>
+          <p:nvPr/>
+        </p:nvPicPr>
+        <p:blipFill rotWithShape="1">
+          <a:blip r:embed="rId5">
+            <a:extLst>
+              <a:ext uri="{28A0092B-C50C-407E-A947-70E740481C1C}">
+                <a14:useLocalDpi xmlns:a14="http://schemas.microsoft.com/office/drawing/2010/main" val="0"/>
+              </a:ext>
+            </a:extLst>
+          </a:blip>
+          <a:srcRect l="7924" t="6907" r="6208" b="14113"/>
+          <a:stretch/>
+        </p:blipFill>
+        <p:spPr bwMode="auto">
+          <a:xfrm rot="20150930">
+            <a:off x="4065925" y="5095802"/>
+            <a:ext cx="813015" cy="807618"/>
+          </a:xfrm>
+          <a:prstGeom prst="rect">
+            <a:avLst/>
+          </a:prstGeom>
+          <a:noFill/>
+          <a:extLst>
+            <a:ext uri="{909E8E84-426E-40DD-AFC4-6F175D3DCCD1}">
+              <a14:hiddenFill xmlns:a14="http://schemas.microsoft.com/office/drawing/2010/main">
+                <a:solidFill>
+                  <a:srgbClr val="FFFFFF"/>
+                </a:solidFill>
+              </a14:hiddenFill>
+            </a:ext>
+          </a:extLst>
+        </p:spPr>
+      </p:pic>
+      <p:pic>
+        <p:nvPicPr>
           <p:cNvPr id="5" name="Picture 4">
             <a:extLst>
               <a:ext uri="{FF2B5EF4-FFF2-40B4-BE49-F238E27FC236}">
@@ -38187,14 +42059,14 @@
           <p:nvPr/>
         </p:nvPicPr>
         <p:blipFill>
-          <a:blip r:embed="rId4"/>
+          <a:blip r:embed="rId6"/>
           <a:stretch>
             <a:fillRect/>
           </a:stretch>
         </p:blipFill>
         <p:spPr>
           <a:xfrm>
-            <a:off x="1686111" y="1677192"/>
+            <a:off x="4507808" y="5506126"/>
             <a:ext cx="441135" cy="584091"/>
           </a:xfrm>
           <a:prstGeom prst="rect">
@@ -38247,7 +42119,7 @@
           <p:nvPr/>
         </p:nvPicPr>
         <p:blipFill rotWithShape="1">
-          <a:blip r:embed="rId5">
+          <a:blip r:embed="rId7">
             <a:extLst>
               <a:ext uri="{28A0092B-C50C-407E-A947-70E740481C1C}">
                 <a14:useLocalDpi xmlns:a14="http://schemas.microsoft.com/office/drawing/2010/main" val="0"/>
@@ -38261,51 +42133,6 @@
           <a:xfrm>
             <a:off x="4095538" y="770668"/>
             <a:ext cx="687593" cy="679979"/>
-          </a:xfrm>
-          <a:prstGeom prst="rect">
-            <a:avLst/>
-          </a:prstGeom>
-          <a:noFill/>
-          <a:extLst>
-            <a:ext uri="{909E8E84-426E-40DD-AFC4-6F175D3DCCD1}">
-              <a14:hiddenFill xmlns:a14="http://schemas.microsoft.com/office/drawing/2010/main">
-                <a:solidFill>
-                  <a:srgbClr val="FFFFFF"/>
-                </a:solidFill>
-              </a14:hiddenFill>
-            </a:ext>
-          </a:extLst>
-        </p:spPr>
-      </p:pic>
-      <p:pic>
-        <p:nvPicPr>
-          <p:cNvPr id="8" name="Picture 4" descr="Musket Silhouette. Flintlock Old Pistol Symbol. Rustic Vintage Gun Vector  Silhouette Illustration Isolated On White Background. Royalty Free  Cliparts, Vectors, And Stock Illustration. Image 147714752.">
-            <a:extLst>
-              <a:ext uri="{FF2B5EF4-FFF2-40B4-BE49-F238E27FC236}">
-                <a16:creationId xmlns:a16="http://schemas.microsoft.com/office/drawing/2014/main" id="{77CC34B6-2AF4-4776-99F7-95C203B8F816}"/>
-              </a:ext>
-            </a:extLst>
-          </p:cNvPr>
-          <p:cNvPicPr>
-            <a:picLocks noChangeAspect="1" noChangeArrowheads="1"/>
-          </p:cNvPicPr>
-          <p:nvPr/>
-        </p:nvPicPr>
-        <p:blipFill rotWithShape="1">
-          <a:blip r:embed="rId6">
-            <a:extLst>
-              <a:ext uri="{28A0092B-C50C-407E-A947-70E740481C1C}">
-                <a14:useLocalDpi xmlns:a14="http://schemas.microsoft.com/office/drawing/2010/main" val="0"/>
-              </a:ext>
-            </a:extLst>
-          </a:blip>
-          <a:srcRect l="8772" t="16514" r="8246" b="7006"/>
-          <a:stretch/>
-        </p:blipFill>
-        <p:spPr bwMode="auto">
-          <a:xfrm rot="18989022">
-            <a:off x="4834016" y="1258813"/>
-            <a:ext cx="1126540" cy="328254"/>
           </a:xfrm>
           <a:prstGeom prst="rect">
             <a:avLst/>
@@ -38452,7 +42279,7 @@
           <p:nvPr/>
         </p:nvPicPr>
         <p:blipFill>
-          <a:blip r:embed="rId7"/>
+          <a:blip r:embed="rId8"/>
           <a:stretch>
             <a:fillRect/>
           </a:stretch>
@@ -38482,7 +42309,7 @@
           <p:nvPr/>
         </p:nvPicPr>
         <p:blipFill>
-          <a:blip r:embed="rId8"/>
+          <a:blip r:embed="rId9"/>
           <a:stretch>
             <a:fillRect/>
           </a:stretch>
@@ -38512,7 +42339,7 @@
           <p:nvPr/>
         </p:nvPicPr>
         <p:blipFill>
-          <a:blip r:embed="rId9"/>
+          <a:blip r:embed="rId10"/>
           <a:stretch>
             <a:fillRect/>
           </a:stretch>
@@ -38542,7 +42369,7 @@
           <p:nvPr/>
         </p:nvPicPr>
         <p:blipFill>
-          <a:blip r:embed="rId10">
+          <a:blip r:embed="rId11">
             <a:extLst>
               <a:ext uri="{28A0092B-C50C-407E-A947-70E740481C1C}">
                 <a14:useLocalDpi xmlns:a14="http://schemas.microsoft.com/office/drawing/2010/main" val="0"/>
@@ -38558,51 +42385,6 @@
           <a:xfrm>
             <a:off x="5148373" y="2096175"/>
             <a:ext cx="813014" cy="813014"/>
-          </a:xfrm>
-          <a:prstGeom prst="rect">
-            <a:avLst/>
-          </a:prstGeom>
-          <a:noFill/>
-          <a:extLst>
-            <a:ext uri="{909E8E84-426E-40DD-AFC4-6F175D3DCCD1}">
-              <a14:hiddenFill xmlns:a14="http://schemas.microsoft.com/office/drawing/2010/main">
-                <a:solidFill>
-                  <a:srgbClr val="FFFFFF"/>
-                </a:solidFill>
-              </a14:hiddenFill>
-            </a:ext>
-          </a:extLst>
-        </p:spPr>
-      </p:pic>
-      <p:pic>
-        <p:nvPicPr>
-          <p:cNvPr id="2052" name="Picture 4" descr="Viking battle-axe icon in black style isolated Vector Image">
-            <a:extLst>
-              <a:ext uri="{FF2B5EF4-FFF2-40B4-BE49-F238E27FC236}">
-                <a16:creationId xmlns:a16="http://schemas.microsoft.com/office/drawing/2014/main" id="{9861CD71-1949-4D6F-97BA-59745F196141}"/>
-              </a:ext>
-            </a:extLst>
-          </p:cNvPr>
-          <p:cNvPicPr>
-            <a:picLocks noChangeAspect="1" noChangeArrowheads="1"/>
-          </p:cNvPicPr>
-          <p:nvPr/>
-        </p:nvPicPr>
-        <p:blipFill rotWithShape="1">
-          <a:blip r:embed="rId11">
-            <a:extLst>
-              <a:ext uri="{28A0092B-C50C-407E-A947-70E740481C1C}">
-                <a14:useLocalDpi xmlns:a14="http://schemas.microsoft.com/office/drawing/2010/main" val="0"/>
-              </a:ext>
-            </a:extLst>
-          </a:blip>
-          <a:srcRect l="7924" t="6907" r="6208" b="14113"/>
-          <a:stretch/>
-        </p:blipFill>
-        <p:spPr bwMode="auto">
-          <a:xfrm>
-            <a:off x="7346165" y="1969238"/>
-            <a:ext cx="813015" cy="807618"/>
           </a:xfrm>
           <a:prstGeom prst="rect">
             <a:avLst/>
@@ -39659,7 +43441,7 @@
             <p:nvPr/>
           </p:nvPicPr>
           <p:blipFill rotWithShape="1">
-            <a:blip r:embed="rId11">
+            <a:blip r:embed="rId5">
               <a:extLst>
                 <a:ext uri="{28A0092B-C50C-407E-A947-70E740481C1C}">
                   <a14:useLocalDpi xmlns:a14="http://schemas.microsoft.com/office/drawing/2010/main" val="0"/>
@@ -39704,7 +43486,7 @@
             <p:nvPr/>
           </p:nvPicPr>
           <p:blipFill>
-            <a:blip r:embed="rId7"/>
+            <a:blip r:embed="rId8"/>
             <a:stretch>
               <a:fillRect/>
             </a:stretch>
@@ -40014,7 +43796,7 @@
             <p:nvPr/>
           </p:nvPicPr>
           <p:blipFill>
-            <a:blip r:embed="rId4"/>
+            <a:blip r:embed="rId6"/>
             <a:stretch>
               <a:fillRect/>
             </a:stretch>
@@ -44546,7 +48328,7 @@
             <p:nvPr/>
           </p:nvPicPr>
           <p:blipFill>
-            <a:blip r:embed="rId4"/>
+            <a:blip r:embed="rId6"/>
             <a:stretch>
               <a:fillRect/>
             </a:stretch>
@@ -44666,7 +48448,7 @@
         </p:nvGrpSpPr>
         <p:grpSpPr>
           <a:xfrm>
-            <a:off x="3474757" y="4786744"/>
+            <a:off x="4904599" y="4129771"/>
             <a:ext cx="894181" cy="911246"/>
             <a:chOff x="6129412" y="1341195"/>
             <a:chExt cx="894181" cy="911246"/>
@@ -45486,6 +49268,279 @@
           </a:prstGeom>
         </p:spPr>
       </p:pic>
+      <p:grpSp>
+        <p:nvGrpSpPr>
+          <p:cNvPr id="112" name="Group 111">
+            <a:extLst>
+              <a:ext uri="{FF2B5EF4-FFF2-40B4-BE49-F238E27FC236}">
+                <a16:creationId xmlns:a16="http://schemas.microsoft.com/office/drawing/2014/main" id="{89F3D6C7-AE21-47F0-85D2-D5F8F649652B}"/>
+              </a:ext>
+            </a:extLst>
+          </p:cNvPr>
+          <p:cNvGrpSpPr/>
+          <p:nvPr/>
+        </p:nvGrpSpPr>
+        <p:grpSpPr>
+          <a:xfrm>
+            <a:off x="4618755" y="5547145"/>
+            <a:ext cx="883833" cy="898245"/>
+            <a:chOff x="6250804" y="4469864"/>
+            <a:chExt cx="1767666" cy="1796490"/>
+          </a:xfrm>
+        </p:grpSpPr>
+        <p:grpSp>
+          <p:nvGrpSpPr>
+            <p:cNvPr id="113" name="Group 112">
+              <a:extLst>
+                <a:ext uri="{FF2B5EF4-FFF2-40B4-BE49-F238E27FC236}">
+                  <a16:creationId xmlns:a16="http://schemas.microsoft.com/office/drawing/2014/main" id="{C122C5E1-1988-471D-99ED-DC786E638677}"/>
+                </a:ext>
+              </a:extLst>
+            </p:cNvPr>
+            <p:cNvGrpSpPr/>
+            <p:nvPr/>
+          </p:nvGrpSpPr>
+          <p:grpSpPr>
+            <a:xfrm rot="2105593">
+              <a:off x="6898111" y="4469864"/>
+              <a:ext cx="543720" cy="1475268"/>
+              <a:chOff x="6998677" y="4501662"/>
+              <a:chExt cx="543720" cy="1125415"/>
+            </a:xfrm>
+          </p:grpSpPr>
+          <p:sp>
+            <p:nvSpPr>
+              <p:cNvPr id="117" name="Rectangle 116">
+                <a:extLst>
+                  <a:ext uri="{FF2B5EF4-FFF2-40B4-BE49-F238E27FC236}">
+                    <a16:creationId xmlns:a16="http://schemas.microsoft.com/office/drawing/2014/main" id="{731371DD-21AE-47B4-A97F-3BAA4D913513}"/>
+                  </a:ext>
+                </a:extLst>
+              </p:cNvPr>
+              <p:cNvSpPr/>
+              <p:nvPr/>
+            </p:nvSpPr>
+            <p:spPr>
+              <a:xfrm>
+                <a:off x="7104184" y="4712677"/>
+                <a:ext cx="338215" cy="914400"/>
+              </a:xfrm>
+              <a:prstGeom prst="rect">
+                <a:avLst/>
+              </a:prstGeom>
+            </p:spPr>
+            <p:style>
+              <a:lnRef idx="2">
+                <a:schemeClr val="dk1">
+                  <a:shade val="50000"/>
+                </a:schemeClr>
+              </a:lnRef>
+              <a:fillRef idx="1">
+                <a:schemeClr val="dk1"/>
+              </a:fillRef>
+              <a:effectRef idx="0">
+                <a:schemeClr val="dk1"/>
+              </a:effectRef>
+              <a:fontRef idx="minor">
+                <a:schemeClr val="lt1"/>
+              </a:fontRef>
+            </p:style>
+            <p:txBody>
+              <a:bodyPr rtlCol="0" anchor="ctr"/>
+              <a:lstStyle/>
+              <a:p>
+                <a:pPr algn="ctr"/>
+                <a:endParaRPr lang="en-US"/>
+              </a:p>
+            </p:txBody>
+          </p:sp>
+          <p:sp>
+            <p:nvSpPr>
+              <p:cNvPr id="118" name="Rectangle 117">
+                <a:extLst>
+                  <a:ext uri="{FF2B5EF4-FFF2-40B4-BE49-F238E27FC236}">
+                    <a16:creationId xmlns:a16="http://schemas.microsoft.com/office/drawing/2014/main" id="{BC31596D-0889-471E-9E14-522294B13A16}"/>
+                  </a:ext>
+                </a:extLst>
+              </p:cNvPr>
+              <p:cNvSpPr/>
+              <p:nvPr/>
+            </p:nvSpPr>
+            <p:spPr>
+              <a:xfrm>
+                <a:off x="6998677" y="4501662"/>
+                <a:ext cx="543720" cy="211015"/>
+              </a:xfrm>
+              <a:prstGeom prst="rect">
+                <a:avLst/>
+              </a:prstGeom>
+            </p:spPr>
+            <p:style>
+              <a:lnRef idx="2">
+                <a:schemeClr val="dk1">
+                  <a:shade val="50000"/>
+                </a:schemeClr>
+              </a:lnRef>
+              <a:fillRef idx="1">
+                <a:schemeClr val="dk1"/>
+              </a:fillRef>
+              <a:effectRef idx="0">
+                <a:schemeClr val="dk1"/>
+              </a:effectRef>
+              <a:fontRef idx="minor">
+                <a:schemeClr val="lt1"/>
+              </a:fontRef>
+            </p:style>
+            <p:txBody>
+              <a:bodyPr rtlCol="0" anchor="ctr"/>
+              <a:lstStyle/>
+              <a:p>
+                <a:pPr algn="ctr"/>
+                <a:endParaRPr lang="en-US"/>
+              </a:p>
+            </p:txBody>
+          </p:sp>
+        </p:grpSp>
+        <p:sp>
+          <p:nvSpPr>
+            <p:cNvPr id="114" name="Rectangle 113">
+              <a:extLst>
+                <a:ext uri="{FF2B5EF4-FFF2-40B4-BE49-F238E27FC236}">
+                  <a16:creationId xmlns:a16="http://schemas.microsoft.com/office/drawing/2014/main" id="{52D47E64-0AD6-47C1-BE9D-21F72F02550B}"/>
+                </a:ext>
+              </a:extLst>
+            </p:cNvPr>
+            <p:cNvSpPr/>
+            <p:nvPr/>
+          </p:nvSpPr>
+          <p:spPr>
+            <a:xfrm rot="19962306">
+              <a:off x="7413128" y="5064532"/>
+              <a:ext cx="127375" cy="905608"/>
+            </a:xfrm>
+            <a:prstGeom prst="rect">
+              <a:avLst/>
+            </a:prstGeom>
+          </p:spPr>
+          <p:style>
+            <a:lnRef idx="2">
+              <a:schemeClr val="dk1">
+                <a:shade val="50000"/>
+              </a:schemeClr>
+            </a:lnRef>
+            <a:fillRef idx="1">
+              <a:schemeClr val="dk1"/>
+            </a:fillRef>
+            <a:effectRef idx="0">
+              <a:schemeClr val="dk1"/>
+            </a:effectRef>
+            <a:fontRef idx="minor">
+              <a:schemeClr val="lt1"/>
+            </a:fontRef>
+          </p:style>
+          <p:txBody>
+            <a:bodyPr rtlCol="0" anchor="ctr"/>
+            <a:lstStyle/>
+            <a:p>
+              <a:pPr algn="ctr"/>
+              <a:endParaRPr lang="en-US"/>
+            </a:p>
+          </p:txBody>
+        </p:sp>
+        <p:sp>
+          <p:nvSpPr>
+            <p:cNvPr id="115" name="Rectangle 114">
+              <a:extLst>
+                <a:ext uri="{FF2B5EF4-FFF2-40B4-BE49-F238E27FC236}">
+                  <a16:creationId xmlns:a16="http://schemas.microsoft.com/office/drawing/2014/main" id="{13626667-C57A-421F-BB0A-DBCE02A0C1DE}"/>
+                </a:ext>
+              </a:extLst>
+            </p:cNvPr>
+            <p:cNvSpPr/>
+            <p:nvPr/>
+          </p:nvSpPr>
+          <p:spPr>
+            <a:xfrm rot="16200000">
+              <a:off x="6775177" y="5310385"/>
+              <a:ext cx="127375" cy="905608"/>
+            </a:xfrm>
+            <a:prstGeom prst="rect">
+              <a:avLst/>
+            </a:prstGeom>
+          </p:spPr>
+          <p:style>
+            <a:lnRef idx="2">
+              <a:schemeClr val="dk1">
+                <a:shade val="50000"/>
+              </a:schemeClr>
+            </a:lnRef>
+            <a:fillRef idx="1">
+              <a:schemeClr val="dk1"/>
+            </a:fillRef>
+            <a:effectRef idx="0">
+              <a:schemeClr val="dk1"/>
+            </a:effectRef>
+            <a:fontRef idx="minor">
+              <a:schemeClr val="lt1"/>
+            </a:fontRef>
+          </p:style>
+          <p:txBody>
+            <a:bodyPr rtlCol="0" anchor="ctr"/>
+            <a:lstStyle/>
+            <a:p>
+              <a:pPr algn="ctr"/>
+              <a:endParaRPr lang="en-US"/>
+            </a:p>
+          </p:txBody>
+        </p:sp>
+        <p:sp>
+          <p:nvSpPr>
+            <p:cNvPr id="116" name="Rectangle 115">
+              <a:extLst>
+                <a:ext uri="{FF2B5EF4-FFF2-40B4-BE49-F238E27FC236}">
+                  <a16:creationId xmlns:a16="http://schemas.microsoft.com/office/drawing/2014/main" id="{E22C41DA-767A-4D99-B63E-22EC7554A538}"/>
+                </a:ext>
+              </a:extLst>
+            </p:cNvPr>
+            <p:cNvSpPr/>
+            <p:nvPr/>
+          </p:nvSpPr>
+          <p:spPr>
+            <a:xfrm>
+              <a:off x="6250804" y="5829836"/>
+              <a:ext cx="1767666" cy="436518"/>
+            </a:xfrm>
+            <a:prstGeom prst="rect">
+              <a:avLst/>
+            </a:prstGeom>
+            <a:ln>
+              <a:noFill/>
+            </a:ln>
+          </p:spPr>
+          <p:style>
+            <a:lnRef idx="2">
+              <a:schemeClr val="dk1"/>
+            </a:lnRef>
+            <a:fillRef idx="1">
+              <a:schemeClr val="lt1"/>
+            </a:fillRef>
+            <a:effectRef idx="0">
+              <a:schemeClr val="dk1"/>
+            </a:effectRef>
+            <a:fontRef idx="minor">
+              <a:schemeClr val="dk1"/>
+            </a:fontRef>
+          </p:style>
+          <p:txBody>
+            <a:bodyPr rtlCol="0" anchor="ctr"/>
+            <a:lstStyle/>
+            <a:p>
+              <a:pPr algn="ctr"/>
+              <a:endParaRPr lang="en-US"/>
+            </a:p>
+          </p:txBody>
+        </p:sp>
+      </p:grpSp>
     </p:spTree>
     <p:extLst>
       <p:ext uri="{BB962C8B-B14F-4D97-AF65-F5344CB8AC3E}">
